--- a/02-PROFESORADO/03-PRESENTACIONES/POR-SESION/h1/S214-readme-y-evidencia-de-ejecucion-presentacion.pptx
+++ b/02-PROFESORADO/03-PRESENTACIONES/POR-SESION/h1/S214-readme-y-evidencia-de-ejecucion-presentacion.pptx
@@ -11,6 +11,8 @@
     <p:sldId id="259" r:id="rId10"/>
     <p:sldId id="260" r:id="rId11"/>
     <p:sldId id="261" r:id="rId12"/>
+    <p:sldId id="262" r:id="rId13"/>
+    <p:sldId id="263" r:id="rId14"/>
   </p:sldIdLst>
   <p:sldSz cx="12191695" cy="6858000" type="screen4x3"/>
   <p:notesSz cx="6858000" cy="9144000"/>
@@ -3145,7 +3147,7 @@
         <p:spPr>
           <a:xfrm>
             <a:off x="0" y="0"/>
-            <a:ext cx="228600" cy="6858000"/>
+            <a:ext cx="256032" cy="6858000"/>
           </a:xfrm>
           <a:prstGeom prst="rect">
             <a:avLst/>
@@ -3187,8 +3189,8 @@
         </p:nvSpPr>
         <p:spPr>
           <a:xfrm>
-            <a:off x="640080" y="566928"/>
-            <a:ext cx="1828800" cy="566928"/>
+            <a:off x="658368" y="566928"/>
+            <a:ext cx="1874519" cy="566928"/>
           </a:xfrm>
           <a:prstGeom prst="roundRect">
             <a:avLst/>
@@ -3197,7 +3199,9 @@
             <a:srgbClr val="2F5BA8"/>
           </a:solidFill>
           <a:ln>
-            <a:noFill/>
+            <a:solidFill>
+              <a:srgbClr val="2F5BA8"/>
+            </a:solidFill>
           </a:ln>
         </p:spPr>
         <p:style>
@@ -3230,8 +3234,8 @@
         </p:nvSpPr>
         <p:spPr>
           <a:xfrm>
-            <a:off x="713232" y="676656"/>
-            <a:ext cx="1682496" cy="256032"/>
+            <a:off x="731520" y="685800"/>
+            <a:ext cx="1719072" cy="228600"/>
           </a:xfrm>
           <a:prstGeom prst="rect">
             <a:avLst/>
@@ -3239,7 +3243,7 @@
           <a:noFill/>
         </p:spPr>
         <p:txBody>
-          <a:bodyPr wrap="square" lIns="36576" rIns="36576" tIns="27432" bIns="27432">
+          <a:bodyPr wrap="square" lIns="45720" rIns="45720" tIns="36576" bIns="36576" anchor="t">
             <a:spAutoFit/>
           </a:bodyPr>
           <a:lstStyle/>
@@ -3266,8 +3270,8 @@
         </p:nvSpPr>
         <p:spPr>
           <a:xfrm>
-            <a:off x="658368" y="1536192"/>
-            <a:ext cx="10789920" cy="1645920"/>
+            <a:off x="685800" y="1481328"/>
+            <a:ext cx="10789920" cy="1691640"/>
           </a:xfrm>
           <a:prstGeom prst="rect">
             <a:avLst/>
@@ -3275,7 +3279,7 @@
           <a:noFill/>
         </p:spPr>
         <p:txBody>
-          <a:bodyPr wrap="square" lIns="36576" rIns="36576" tIns="27432" bIns="27432">
+          <a:bodyPr wrap="square" lIns="45720" rIns="45720" tIns="36576" bIns="36576" anchor="t">
             <a:spAutoFit/>
           </a:bodyPr>
           <a:lstStyle/>
@@ -3302,8 +3306,8 @@
         </p:nvSpPr>
         <p:spPr>
           <a:xfrm>
-            <a:off x="685800" y="3822191"/>
-            <a:ext cx="6766560" cy="384048"/>
+            <a:off x="713232" y="3703320"/>
+            <a:ext cx="10424160" cy="411480"/>
           </a:xfrm>
           <a:prstGeom prst="rect">
             <a:avLst/>
@@ -3311,7 +3315,7 @@
           <a:noFill/>
         </p:spPr>
         <p:txBody>
-          <a:bodyPr wrap="square" lIns="36576" rIns="36576" tIns="27432" bIns="27432">
+          <a:bodyPr wrap="square" lIns="45720" rIns="45720" tIns="36576" bIns="36576" anchor="t">
             <a:spAutoFit/>
           </a:bodyPr>
           <a:lstStyle/>
@@ -3325,7 +3329,7 @@
               </a:defRPr>
             </a:pPr>
             <a:r>
-              <a:t>H1  ·  45 minutos</a:t>
+              <a:t>H1 · 45 minutos</a:t>
             </a:r>
           </a:p>
         </p:txBody>
@@ -3338,8 +3342,8 @@
         </p:nvSpPr>
         <p:spPr>
           <a:xfrm>
-            <a:off x="685800" y="5074920"/>
-            <a:ext cx="10241280" cy="640080"/>
+            <a:off x="713232" y="4315968"/>
+            <a:ext cx="10241280" cy="502920"/>
           </a:xfrm>
           <a:prstGeom prst="rect">
             <a:avLst/>
@@ -3347,13 +3351,13 @@
           <a:noFill/>
         </p:spPr>
         <p:txBody>
-          <a:bodyPr wrap="square" lIns="36576" rIns="36576" tIns="27432" bIns="27432">
+          <a:bodyPr wrap="square" lIns="45720" rIns="45720" tIns="36576" bIns="36576" anchor="t">
             <a:spAutoFit/>
           </a:bodyPr>
           <a:lstStyle/>
           <a:p>
             <a:pPr algn="l">
-              <a:defRPr sz="2400" b="0">
+              <a:defRPr sz="1900" b="0">
                 <a:solidFill>
                   <a:srgbClr val="FFFFFF"/>
                 </a:solidFill>
@@ -3361,7 +3365,7 @@
               </a:defRPr>
             </a:pPr>
             <a:r>
-              <a:t>Hoy construiremos una evidencia que puedas comprobar y explicar.</a:t>
+              <a:t>Fase HEXA: Comunicar — evaluar y reflexionar</a:t>
             </a:r>
           </a:p>
         </p:txBody>
@@ -3374,7 +3378,7 @@
         </p:nvSpPr>
         <p:spPr>
           <a:xfrm>
-            <a:off x="685800" y="6272784"/>
+            <a:off x="713232" y="6272784"/>
             <a:ext cx="10607040" cy="201168"/>
           </a:xfrm>
           <a:prstGeom prst="rect">
@@ -3383,7 +3387,7 @@
           <a:noFill/>
         </p:spPr>
         <p:txBody>
-          <a:bodyPr wrap="square" lIns="36576" rIns="36576" tIns="27432" bIns="27432">
+          <a:bodyPr wrap="square" lIns="45720" rIns="45720" tIns="36576" bIns="36576" anchor="t">
             <a:spAutoFit/>
           </a:bodyPr>
           <a:lstStyle/>
@@ -3514,8 +3518,8 @@
         </p:nvSpPr>
         <p:spPr>
           <a:xfrm>
-            <a:off x="502920" y="310896"/>
-            <a:ext cx="5029200" cy="256032"/>
+            <a:off x="502920" y="274320"/>
+            <a:ext cx="5486400" cy="256032"/>
           </a:xfrm>
           <a:prstGeom prst="rect">
             <a:avLst/>
@@ -3523,7 +3527,7 @@
           <a:noFill/>
         </p:spPr>
         <p:txBody>
-          <a:bodyPr wrap="square" lIns="36576" rIns="36576" tIns="27432" bIns="27432">
+          <a:bodyPr wrap="square" lIns="45720" rIns="45720" tIns="36576" bIns="36576" anchor="t">
             <a:spAutoFit/>
           </a:bodyPr>
           <a:lstStyle/>
@@ -3550,7 +3554,7 @@
         </p:nvSpPr>
         <p:spPr>
           <a:xfrm>
-            <a:off x="502920" y="621792"/>
+            <a:off x="502920" y="603504"/>
             <a:ext cx="11064240" cy="530352"/>
           </a:xfrm>
           <a:prstGeom prst="rect">
@@ -3559,7 +3563,7 @@
           <a:noFill/>
         </p:spPr>
         <p:txBody>
-          <a:bodyPr wrap="square" lIns="36576" rIns="36576" tIns="27432" bIns="27432">
+          <a:bodyPr wrap="square" lIns="45720" rIns="45720" tIns="36576" bIns="36576" anchor="t">
             <a:spAutoFit/>
           </a:bodyPr>
           <a:lstStyle/>
@@ -3573,7 +3577,7 @@
               </a:defRPr>
             </a:pPr>
             <a:r>
-              <a:t>Qué vamos a conseguir</a:t>
+              <a:t>Qué debe conseguirse</a:t>
             </a:r>
           </a:p>
         </p:txBody>
@@ -3638,7 +3642,7 @@
           <a:noFill/>
         </p:spPr>
         <p:txBody>
-          <a:bodyPr wrap="square" lIns="36576" rIns="36576" tIns="27432" bIns="27432">
+          <a:bodyPr wrap="square" lIns="45720" rIns="45720" tIns="36576" bIns="36576" anchor="t">
             <a:spAutoFit/>
           </a:bodyPr>
           <a:lstStyle/>
@@ -3665,8 +3669,8 @@
         </p:nvSpPr>
         <p:spPr>
           <a:xfrm>
-            <a:off x="594360" y="1417320"/>
-            <a:ext cx="5349240" cy="4343400"/>
+            <a:off x="594360" y="1389888"/>
+            <a:ext cx="5184648" cy="4297680"/>
           </a:xfrm>
           <a:prstGeom prst="roundRect">
             <a:avLst/>
@@ -3676,7 +3680,7 @@
           </a:solidFill>
           <a:ln>
             <a:solidFill>
-              <a:srgbClr val="EBEEF2"/>
+              <a:srgbClr val="E5E9EF"/>
             </a:solidFill>
           </a:ln>
         </p:spPr>
@@ -3711,7 +3715,7 @@
         <p:spPr>
           <a:xfrm>
             <a:off x="822960" y="1618488"/>
-            <a:ext cx="438912" cy="411480"/>
+            <a:ext cx="4727448" cy="3840480"/>
           </a:xfrm>
           <a:prstGeom prst="rect">
             <a:avLst/>
@@ -3719,107 +3723,35 @@
           <a:noFill/>
         </p:spPr>
         <p:txBody>
-          <a:bodyPr wrap="square" lIns="36576" rIns="36576" tIns="27432" bIns="27432">
+          <a:bodyPr wrap="square" lIns="45720" rIns="45720" tIns="36576" bIns="36576" anchor="t">
             <a:spAutoFit/>
           </a:bodyPr>
           <a:lstStyle/>
           <a:p>
-            <a:pPr algn="ctr">
-              <a:defRPr sz="2400" b="1">
-                <a:solidFill>
-                  <a:srgbClr val="2F5BA8"/>
+            <a:pPr algn="l">
+              <a:defRPr sz="2100" b="1">
+                <a:solidFill>
+                  <a:srgbClr val="1C2330"/>
                 </a:solidFill>
                 <a:latin typeface="Aptos"/>
               </a:defRPr>
             </a:pPr>
             <a:r>
-              <a:t>01</a:t>
-            </a:r>
-          </a:p>
-        </p:txBody>
-      </p:sp>
-      <p:sp>
-        <p:nvSpPr>
-          <p:cNvPr id="10" name="TextBox 9"/>
-          <p:cNvSpPr txBox="1"/>
-          <p:nvPr/>
-        </p:nvSpPr>
-        <p:spPr>
-          <a:xfrm>
-            <a:off x="1344168" y="1645920"/>
-            <a:ext cx="4389120" cy="365760"/>
-          </a:xfrm>
-          <a:prstGeom prst="rect">
-            <a:avLst/>
-          </a:prstGeom>
-          <a:noFill/>
-        </p:spPr>
-        <p:txBody>
-          <a:bodyPr wrap="square" lIns="36576" rIns="36576" tIns="27432" bIns="27432">
-            <a:spAutoFit/>
-          </a:bodyPr>
-          <a:lstStyle/>
-          <a:p>
-            <a:pPr algn="l">
-              <a:defRPr sz="1700" b="1">
-                <a:solidFill>
-                  <a:srgbClr val="2F5BA8"/>
-                </a:solidFill>
-                <a:latin typeface="Aptos"/>
-              </a:defRPr>
-            </a:pPr>
-            <a:r>
-              <a:t>Hoy vas a…</a:t>
-            </a:r>
-          </a:p>
-        </p:txBody>
-      </p:sp>
-      <p:sp>
-        <p:nvSpPr>
-          <p:cNvPr id="11" name="TextBox 10"/>
-          <p:cNvSpPr txBox="1"/>
-          <p:nvPr/>
-        </p:nvSpPr>
-        <p:spPr>
-          <a:xfrm>
-            <a:off x="868680" y="2286000"/>
-            <a:ext cx="4800600" cy="3246120"/>
-          </a:xfrm>
-          <a:prstGeom prst="rect">
-            <a:avLst/>
-          </a:prstGeom>
-          <a:noFill/>
-        </p:spPr>
-        <p:txBody>
-          <a:bodyPr wrap="square" lIns="36576" rIns="36576" tIns="27432" bIns="27432">
-            <a:spAutoFit/>
-          </a:bodyPr>
-          <a:lstStyle/>
-          <a:p>
-            <a:pPr algn="l">
-              <a:defRPr sz="2200" b="0">
-                <a:solidFill>
-                  <a:srgbClr val="1C2330"/>
-                </a:solidFill>
-                <a:latin typeface="Aptos"/>
-              </a:defRPr>
-            </a:pPr>
-            <a:r>
-              <a:t>Documentar cómo ejecutar H1.</a:t>
-            </a:r>
-          </a:p>
-        </p:txBody>
-      </p:sp>
-      <p:sp>
-        <p:nvSpPr>
-          <p:cNvPr id="12" name="Rounded Rectangle 11"/>
+              <a:t>Objetivo: Documentar cómo ejecutar H1.</a:t>
+            </a:r>
+          </a:p>
+        </p:txBody>
+      </p:sp>
+      <p:sp>
+        <p:nvSpPr>
+          <p:cNvPr id="10" name="Rounded Rectangle 9"/>
           <p:cNvSpPr/>
           <p:nvPr/>
         </p:nvSpPr>
         <p:spPr>
           <a:xfrm>
-            <a:off x="6236208" y="1417320"/>
-            <a:ext cx="5349240" cy="4343400"/>
+            <a:off x="6035040" y="1389888"/>
+            <a:ext cx="5184648" cy="4297680"/>
           </a:xfrm>
           <a:prstGeom prst="roundRect">
             <a:avLst/>
@@ -3829,7 +3761,7 @@
           </a:solidFill>
           <a:ln>
             <a:solidFill>
-              <a:srgbClr val="EBEEF2"/>
+              <a:srgbClr val="E5E9EF"/>
             </a:solidFill>
           </a:ln>
         </p:spPr>
@@ -3857,14 +3789,14 @@
       </p:sp>
       <p:sp>
         <p:nvSpPr>
-          <p:cNvPr id="13" name="TextBox 12"/>
+          <p:cNvPr id="11" name="TextBox 10"/>
           <p:cNvSpPr txBox="1"/>
           <p:nvPr/>
         </p:nvSpPr>
         <p:spPr>
           <a:xfrm>
-            <a:off x="6464808" y="1618488"/>
-            <a:ext cx="438912" cy="411480"/>
+            <a:off x="6263640" y="1618488"/>
+            <a:ext cx="4727448" cy="3840480"/>
           </a:xfrm>
           <a:prstGeom prst="rect">
             <a:avLst/>
@@ -3872,93 +3804,21 @@
           <a:noFill/>
         </p:spPr>
         <p:txBody>
-          <a:bodyPr wrap="square" lIns="36576" rIns="36576" tIns="27432" bIns="27432">
+          <a:bodyPr wrap="square" lIns="45720" rIns="45720" tIns="36576" bIns="36576" anchor="t">
             <a:spAutoFit/>
           </a:bodyPr>
           <a:lstStyle/>
           <a:p>
-            <a:pPr algn="ctr">
-              <a:defRPr sz="2400" b="1">
-                <a:solidFill>
-                  <a:srgbClr val="2F5BA8"/>
+            <a:pPr algn="l">
+              <a:defRPr sz="2100" b="1">
+                <a:solidFill>
+                  <a:srgbClr val="1C2330"/>
                 </a:solidFill>
                 <a:latin typeface="Aptos"/>
               </a:defRPr>
             </a:pPr>
             <a:r>
-              <a:t>02</a:t>
-            </a:r>
-          </a:p>
-        </p:txBody>
-      </p:sp>
-      <p:sp>
-        <p:nvSpPr>
-          <p:cNvPr id="14" name="TextBox 13"/>
-          <p:cNvSpPr txBox="1"/>
-          <p:nvPr/>
-        </p:nvSpPr>
-        <p:spPr>
-          <a:xfrm>
-            <a:off x="6986016" y="1645920"/>
-            <a:ext cx="4389120" cy="365760"/>
-          </a:xfrm>
-          <a:prstGeom prst="rect">
-            <a:avLst/>
-          </a:prstGeom>
-          <a:noFill/>
-        </p:spPr>
-        <p:txBody>
-          <a:bodyPr wrap="square" lIns="36576" rIns="36576" tIns="27432" bIns="27432">
-            <a:spAutoFit/>
-          </a:bodyPr>
-          <a:lstStyle/>
-          <a:p>
-            <a:pPr algn="l">
-              <a:defRPr sz="1700" b="1">
-                <a:solidFill>
-                  <a:srgbClr val="2F5BA8"/>
-                </a:solidFill>
-                <a:latin typeface="Aptos"/>
-              </a:defRPr>
-            </a:pPr>
-            <a:r>
-              <a:t>Debe quedar…</a:t>
-            </a:r>
-          </a:p>
-        </p:txBody>
-      </p:sp>
-      <p:sp>
-        <p:nvSpPr>
-          <p:cNvPr id="15" name="TextBox 14"/>
-          <p:cNvSpPr txBox="1"/>
-          <p:nvPr/>
-        </p:nvSpPr>
-        <p:spPr>
-          <a:xfrm>
-            <a:off x="6510528" y="2286000"/>
-            <a:ext cx="4800600" cy="3246120"/>
-          </a:xfrm>
-          <a:prstGeom prst="rect">
-            <a:avLst/>
-          </a:prstGeom>
-          <a:noFill/>
-        </p:spPr>
-        <p:txBody>
-          <a:bodyPr wrap="square" lIns="36576" rIns="36576" tIns="27432" bIns="27432">
-            <a:spAutoFit/>
-          </a:bodyPr>
-          <a:lstStyle/>
-          <a:p>
-            <a:pPr algn="l">
-              <a:defRPr sz="2200" b="0">
-                <a:solidFill>
-                  <a:srgbClr val="1C2330"/>
-                </a:solidFill>
-                <a:latin typeface="Aptos"/>
-              </a:defRPr>
-            </a:pPr>
-            <a:r>
-              <a:t>README H1 y documento/captura de ejecución.</a:t>
+              <a:t>Evidencia: README H1 y documento/captura de ejecución.</a:t>
             </a:r>
           </a:p>
         </p:txBody>
@@ -4075,8 +3935,8 @@
         </p:nvSpPr>
         <p:spPr>
           <a:xfrm>
-            <a:off x="502920" y="310896"/>
-            <a:ext cx="5029200" cy="256032"/>
+            <a:off x="502920" y="274320"/>
+            <a:ext cx="5486400" cy="256032"/>
           </a:xfrm>
           <a:prstGeom prst="rect">
             <a:avLst/>
@@ -4084,7 +3944,7 @@
           <a:noFill/>
         </p:spPr>
         <p:txBody>
-          <a:bodyPr wrap="square" lIns="36576" rIns="36576" tIns="27432" bIns="27432">
+          <a:bodyPr wrap="square" lIns="45720" rIns="45720" tIns="36576" bIns="36576" anchor="t">
             <a:spAutoFit/>
           </a:bodyPr>
           <a:lstStyle/>
@@ -4098,7 +3958,7 @@
               </a:defRPr>
             </a:pPr>
             <a:r>
-              <a:t>PASO A PASO</a:t>
+              <a:t>RITMO DE LA SESIÓN</a:t>
             </a:r>
           </a:p>
         </p:txBody>
@@ -4111,7 +3971,7 @@
         </p:nvSpPr>
         <p:spPr>
           <a:xfrm>
-            <a:off x="502920" y="621792"/>
+            <a:off x="502920" y="603504"/>
             <a:ext cx="11064240" cy="530352"/>
           </a:xfrm>
           <a:prstGeom prst="rect">
@@ -4120,7 +3980,7 @@
           <a:noFill/>
         </p:spPr>
         <p:txBody>
-          <a:bodyPr wrap="square" lIns="36576" rIns="36576" tIns="27432" bIns="27432">
+          <a:bodyPr wrap="square" lIns="45720" rIns="45720" tIns="36576" bIns="36576" anchor="t">
             <a:spAutoFit/>
           </a:bodyPr>
           <a:lstStyle/>
@@ -4134,7 +3994,7 @@
               </a:defRPr>
             </a:pPr>
             <a:r>
-              <a:t>Ruta de trabajo</a:t>
+              <a:t>Secuencia de aula</a:t>
             </a:r>
           </a:p>
         </p:txBody>
@@ -4199,7 +4059,7 @@
           <a:noFill/>
         </p:spPr>
         <p:txBody>
-          <a:bodyPr wrap="square" lIns="36576" rIns="36576" tIns="27432" bIns="27432">
+          <a:bodyPr wrap="square" lIns="45720" rIns="45720" tIns="36576" bIns="36576" anchor="t">
             <a:spAutoFit/>
           </a:bodyPr>
           <a:lstStyle/>
@@ -4226,8 +4086,8 @@
         </p:nvSpPr>
         <p:spPr>
           <a:xfrm>
-            <a:off x="685800" y="1325880"/>
-            <a:ext cx="502920" cy="502920"/>
+            <a:off x="658368" y="1280160"/>
+            <a:ext cx="475488" cy="475488"/>
           </a:xfrm>
           <a:prstGeom prst="ellipse">
             <a:avLst/>
@@ -4269,8 +4129,8 @@
         </p:nvSpPr>
         <p:spPr>
           <a:xfrm>
-            <a:off x="685800" y="1435607"/>
-            <a:ext cx="502920" cy="201168"/>
+            <a:off x="658368" y="1380744"/>
+            <a:ext cx="475488" cy="201168"/>
           </a:xfrm>
           <a:prstGeom prst="rect">
             <a:avLst/>
@@ -4278,13 +4138,13 @@
           <a:noFill/>
         </p:spPr>
         <p:txBody>
-          <a:bodyPr wrap="square" lIns="36576" rIns="36576" tIns="27432" bIns="27432">
+          <a:bodyPr wrap="square" lIns="45720" rIns="45720" tIns="36576" bIns="36576" anchor="t">
             <a:spAutoFit/>
           </a:bodyPr>
           <a:lstStyle/>
           <a:p>
             <a:pPr algn="ctr">
-              <a:defRPr sz="1400" b="1">
+              <a:defRPr sz="1300" b="1">
                 <a:solidFill>
                   <a:srgbClr val="FFFFFF"/>
                 </a:solidFill>
@@ -4305,8 +4165,8 @@
         </p:nvSpPr>
         <p:spPr>
           <a:xfrm>
-            <a:off x="1417320" y="1344168"/>
-            <a:ext cx="9875520" cy="548640"/>
+            <a:off x="1389888" y="1261872"/>
+            <a:ext cx="10058400" cy="772668"/>
           </a:xfrm>
           <a:prstGeom prst="rect">
             <a:avLst/>
@@ -4314,13 +4174,13 @@
           <a:noFill/>
         </p:spPr>
         <p:txBody>
-          <a:bodyPr wrap="square" lIns="36576" rIns="36576" tIns="27432" bIns="27432">
+          <a:bodyPr wrap="square" lIns="45720" rIns="45720" tIns="36576" bIns="36576" anchor="t">
             <a:spAutoFit/>
           </a:bodyPr>
           <a:lstStyle/>
           <a:p>
             <a:pPr algn="l">
-              <a:defRPr sz="2000" b="0">
+              <a:defRPr sz="1600" b="0">
                 <a:solidFill>
                   <a:srgbClr val="1C2330"/>
                 </a:solidFill>
@@ -4328,7 +4188,7 @@
               </a:defRPr>
             </a:pPr>
             <a:r>
-              <a:t>Lee el objetivo y escribe con tus palabras qué debe quedar terminado.</a:t>
+              <a:t>0–5 min — Presentar objetivo, producto y evidencia de hoy.</a:t>
             </a:r>
           </a:p>
         </p:txBody>
@@ -4341,8 +4201,8 @@
         </p:nvSpPr>
         <p:spPr>
           <a:xfrm>
-            <a:off x="685800" y="2258568"/>
-            <a:ext cx="502920" cy="502920"/>
+            <a:off x="658368" y="2125979"/>
+            <a:ext cx="475488" cy="475488"/>
           </a:xfrm>
           <a:prstGeom prst="ellipse">
             <a:avLst/>
@@ -4384,8 +4244,8 @@
         </p:nvSpPr>
         <p:spPr>
           <a:xfrm>
-            <a:off x="685800" y="2368296"/>
-            <a:ext cx="502920" cy="201168"/>
+            <a:off x="658368" y="2226563"/>
+            <a:ext cx="475488" cy="201168"/>
           </a:xfrm>
           <a:prstGeom prst="rect">
             <a:avLst/>
@@ -4393,13 +4253,13 @@
           <a:noFill/>
         </p:spPr>
         <p:txBody>
-          <a:bodyPr wrap="square" lIns="36576" rIns="36576" tIns="27432" bIns="27432">
+          <a:bodyPr wrap="square" lIns="45720" rIns="45720" tIns="36576" bIns="36576" anchor="t">
             <a:spAutoFit/>
           </a:bodyPr>
           <a:lstStyle/>
           <a:p>
             <a:pPr algn="ctr">
-              <a:defRPr sz="1400" b="1">
+              <a:defRPr sz="1300" b="1">
                 <a:solidFill>
                   <a:srgbClr val="FFFFFF"/>
                 </a:solidFill>
@@ -4420,8 +4280,8 @@
         </p:nvSpPr>
         <p:spPr>
           <a:xfrm>
-            <a:off x="1417320" y="2276856"/>
-            <a:ext cx="9875520" cy="548640"/>
+            <a:off x="1389888" y="2107691"/>
+            <a:ext cx="10058400" cy="772668"/>
           </a:xfrm>
           <a:prstGeom prst="rect">
             <a:avLst/>
@@ -4429,13 +4289,13 @@
           <a:noFill/>
         </p:spPr>
         <p:txBody>
-          <a:bodyPr wrap="square" lIns="36576" rIns="36576" tIns="27432" bIns="27432">
+          <a:bodyPr wrap="square" lIns="45720" rIns="45720" tIns="36576" bIns="36576" anchor="t">
             <a:spAutoFit/>
           </a:bodyPr>
           <a:lstStyle/>
           <a:p>
             <a:pPr algn="l">
-              <a:defRPr sz="2000" b="0">
+              <a:defRPr sz="1600" b="0">
                 <a:solidFill>
                   <a:srgbClr val="1C2330"/>
                 </a:solidFill>
@@ -4443,7 +4303,7 @@
               </a:defRPr>
             </a:pPr>
             <a:r>
-              <a:t>Atiende al ejemplo breve y anota una predicción, duda o decisión.</a:t>
+              <a:t>5–13 min — Explicación breve: Un README permite que otra persona entienda y ejecute el proyecto.</a:t>
             </a:r>
           </a:p>
         </p:txBody>
@@ -4456,8 +4316,8 @@
         </p:nvSpPr>
         <p:spPr>
           <a:xfrm>
-            <a:off x="685800" y="3191256"/>
-            <a:ext cx="502920" cy="502920"/>
+            <a:off x="658368" y="2971799"/>
+            <a:ext cx="475488" cy="475488"/>
           </a:xfrm>
           <a:prstGeom prst="ellipse">
             <a:avLst/>
@@ -4499,8 +4359,8 @@
         </p:nvSpPr>
         <p:spPr>
           <a:xfrm>
-            <a:off x="685800" y="3300984"/>
-            <a:ext cx="502920" cy="201168"/>
+            <a:off x="658368" y="3072383"/>
+            <a:ext cx="475488" cy="201168"/>
           </a:xfrm>
           <a:prstGeom prst="rect">
             <a:avLst/>
@@ -4508,13 +4368,13 @@
           <a:noFill/>
         </p:spPr>
         <p:txBody>
-          <a:bodyPr wrap="square" lIns="36576" rIns="36576" tIns="27432" bIns="27432">
+          <a:bodyPr wrap="square" lIns="45720" rIns="45720" tIns="36576" bIns="36576" anchor="t">
             <a:spAutoFit/>
           </a:bodyPr>
           <a:lstStyle/>
           <a:p>
             <a:pPr algn="ctr">
-              <a:defRPr sz="1400" b="1">
+              <a:defRPr sz="1300" b="1">
                 <a:solidFill>
                   <a:srgbClr val="FFFFFF"/>
                 </a:solidFill>
@@ -4535,8 +4395,8 @@
         </p:nvSpPr>
         <p:spPr>
           <a:xfrm>
-            <a:off x="1417320" y="3209544"/>
-            <a:ext cx="9875520" cy="548640"/>
+            <a:off x="1389888" y="2953511"/>
+            <a:ext cx="10058400" cy="772668"/>
           </a:xfrm>
           <a:prstGeom prst="rect">
             <a:avLst/>
@@ -4544,13 +4404,13 @@
           <a:noFill/>
         </p:spPr>
         <p:txBody>
-          <a:bodyPr wrap="square" lIns="36576" rIns="36576" tIns="27432" bIns="27432">
+          <a:bodyPr wrap="square" lIns="45720" rIns="45720" tIns="36576" bIns="36576" anchor="t">
             <a:spAutoFit/>
           </a:bodyPr>
           <a:lstStyle/>
           <a:p>
             <a:pPr algn="l">
-              <a:defRPr sz="2000" b="0">
+              <a:defRPr sz="1600" b="0">
                 <a:solidFill>
                   <a:srgbClr val="1C2330"/>
                 </a:solidFill>
@@ -4558,7 +4418,7 @@
               </a:defRPr>
             </a:pPr>
             <a:r>
-              <a:t>Realiza esta tarea: Crear README y evidencia de ejecución.</a:t>
+              <a:t>13–18 min — Demostración o ejemplo: Modelo mínimo: qué hace, cómo ejecutar, ejemplo de salida, limitaciones.</a:t>
             </a:r>
           </a:p>
         </p:txBody>
@@ -4571,8 +4431,8 @@
         </p:nvSpPr>
         <p:spPr>
           <a:xfrm>
-            <a:off x="685800" y="4123944"/>
-            <a:ext cx="502920" cy="502920"/>
+            <a:off x="658368" y="3817620"/>
+            <a:ext cx="475488" cy="475488"/>
           </a:xfrm>
           <a:prstGeom prst="ellipse">
             <a:avLst/>
@@ -4614,8 +4474,8 @@
         </p:nvSpPr>
         <p:spPr>
           <a:xfrm>
-            <a:off x="685800" y="4233672"/>
-            <a:ext cx="502920" cy="201168"/>
+            <a:off x="658368" y="3918204"/>
+            <a:ext cx="475488" cy="201168"/>
           </a:xfrm>
           <a:prstGeom prst="rect">
             <a:avLst/>
@@ -4623,13 +4483,13 @@
           <a:noFill/>
         </p:spPr>
         <p:txBody>
-          <a:bodyPr wrap="square" lIns="36576" rIns="36576" tIns="27432" bIns="27432">
+          <a:bodyPr wrap="square" lIns="45720" rIns="45720" tIns="36576" bIns="36576" anchor="t">
             <a:spAutoFit/>
           </a:bodyPr>
           <a:lstStyle/>
           <a:p>
             <a:pPr algn="ctr">
-              <a:defRPr sz="1400" b="1">
+              <a:defRPr sz="1300" b="1">
                 <a:solidFill>
                   <a:srgbClr val="FFFFFF"/>
                 </a:solidFill>
@@ -4650,8 +4510,8 @@
         </p:nvSpPr>
         <p:spPr>
           <a:xfrm>
-            <a:off x="1417320" y="4142231"/>
-            <a:ext cx="9875520" cy="548640"/>
+            <a:off x="1389888" y="3799332"/>
+            <a:ext cx="10058400" cy="772668"/>
           </a:xfrm>
           <a:prstGeom prst="rect">
             <a:avLst/>
@@ -4659,13 +4519,13 @@
           <a:noFill/>
         </p:spPr>
         <p:txBody>
-          <a:bodyPr wrap="square" lIns="36576" rIns="36576" tIns="27432" bIns="27432">
+          <a:bodyPr wrap="square" lIns="45720" rIns="45720" tIns="36576" bIns="36576" anchor="t">
             <a:spAutoFit/>
           </a:bodyPr>
           <a:lstStyle/>
           <a:p>
             <a:pPr algn="l">
-              <a:defRPr sz="2000" b="0">
+              <a:defRPr sz="1600" b="0">
                 <a:solidFill>
                   <a:srgbClr val="1C2330"/>
                 </a:solidFill>
@@ -4673,7 +4533,7 @@
               </a:defRPr>
             </a:pPr>
             <a:r>
-              <a:t>Comprueba el resultado con una prueba observable; no basta con decir “funciona”.</a:t>
+              <a:t>18–35 min — Trabajo del alumnado: Crear README.md y evidencia de ejecución.</a:t>
             </a:r>
           </a:p>
         </p:txBody>
@@ -4686,8 +4546,8 @@
         </p:nvSpPr>
         <p:spPr>
           <a:xfrm>
-            <a:off x="685800" y="5056631"/>
-            <a:ext cx="502920" cy="502920"/>
+            <a:off x="658368" y="4663440"/>
+            <a:ext cx="475488" cy="475488"/>
           </a:xfrm>
           <a:prstGeom prst="ellipse">
             <a:avLst/>
@@ -4729,8 +4589,8 @@
         </p:nvSpPr>
         <p:spPr>
           <a:xfrm>
-            <a:off x="685800" y="5166359"/>
-            <a:ext cx="502920" cy="201168"/>
+            <a:off x="658368" y="4764024"/>
+            <a:ext cx="475488" cy="201168"/>
           </a:xfrm>
           <a:prstGeom prst="rect">
             <a:avLst/>
@@ -4738,13 +4598,13 @@
           <a:noFill/>
         </p:spPr>
         <p:txBody>
-          <a:bodyPr wrap="square" lIns="36576" rIns="36576" tIns="27432" bIns="27432">
+          <a:bodyPr wrap="square" lIns="45720" rIns="45720" tIns="36576" bIns="36576" anchor="t">
             <a:spAutoFit/>
           </a:bodyPr>
           <a:lstStyle/>
           <a:p>
             <a:pPr algn="ctr">
-              <a:defRPr sz="1400" b="1">
+              <a:defRPr sz="1300" b="1">
                 <a:solidFill>
                   <a:srgbClr val="FFFFFF"/>
                 </a:solidFill>
@@ -4765,8 +4625,8 @@
         </p:nvSpPr>
         <p:spPr>
           <a:xfrm>
-            <a:off x="1417320" y="5074919"/>
-            <a:ext cx="9875520" cy="548640"/>
+            <a:off x="1389888" y="4645152"/>
+            <a:ext cx="10058400" cy="772668"/>
           </a:xfrm>
           <a:prstGeom prst="rect">
             <a:avLst/>
@@ -4774,13 +4634,13 @@
           <a:noFill/>
         </p:spPr>
         <p:txBody>
-          <a:bodyPr wrap="square" lIns="36576" rIns="36576" tIns="27432" bIns="27432">
+          <a:bodyPr wrap="square" lIns="45720" rIns="45720" tIns="36576" bIns="36576" anchor="t">
             <a:spAutoFit/>
           </a:bodyPr>
           <a:lstStyle/>
           <a:p>
             <a:pPr algn="l">
-              <a:defRPr sz="2000" b="0">
+              <a:defRPr sz="1600" b="0">
                 <a:solidFill>
                   <a:srgbClr val="1C2330"/>
                 </a:solidFill>
@@ -4788,7 +4648,122 @@
               </a:defRPr>
             </a:pPr>
             <a:r>
-              <a:t>Guarda o entrega la evidencia indicada y prepárate para explicarla.</a:t>
+              <a:t>35–40 min — Comprobar la evidencia con una explicación o prueba breve.</a:t>
+            </a:r>
+          </a:p>
+        </p:txBody>
+      </p:sp>
+      <p:sp>
+        <p:nvSpPr>
+          <p:cNvPr id="23" name="Oval 22"/>
+          <p:cNvSpPr/>
+          <p:nvPr/>
+        </p:nvSpPr>
+        <p:spPr>
+          <a:xfrm>
+            <a:off x="658368" y="5509259"/>
+            <a:ext cx="475488" cy="475488"/>
+          </a:xfrm>
+          <a:prstGeom prst="ellipse">
+            <a:avLst/>
+          </a:prstGeom>
+          <a:solidFill>
+            <a:srgbClr val="2F5BA8"/>
+          </a:solidFill>
+          <a:ln>
+            <a:noFill/>
+          </a:ln>
+        </p:spPr>
+        <p:style>
+          <a:lnRef idx="1">
+            <a:schemeClr val="accent1"/>
+          </a:lnRef>
+          <a:fillRef idx="3">
+            <a:schemeClr val="accent1"/>
+          </a:fillRef>
+          <a:effectRef idx="2">
+            <a:schemeClr val="accent1"/>
+          </a:effectRef>
+          <a:fontRef idx="minor">
+            <a:schemeClr val="lt1"/>
+          </a:fontRef>
+        </p:style>
+        <p:txBody>
+          <a:bodyPr rtlCol="0" anchor="ctr"/>
+          <a:lstStyle/>
+          <a:p>
+            <a:pPr algn="ctr"/>
+          </a:p>
+        </p:txBody>
+      </p:sp>
+      <p:sp>
+        <p:nvSpPr>
+          <p:cNvPr id="24" name="TextBox 23"/>
+          <p:cNvSpPr txBox="1"/>
+          <p:nvPr/>
+        </p:nvSpPr>
+        <p:spPr>
+          <a:xfrm>
+            <a:off x="658368" y="5609844"/>
+            <a:ext cx="475488" cy="201168"/>
+          </a:xfrm>
+          <a:prstGeom prst="rect">
+            <a:avLst/>
+          </a:prstGeom>
+          <a:noFill/>
+        </p:spPr>
+        <p:txBody>
+          <a:bodyPr wrap="square" lIns="45720" rIns="45720" tIns="36576" bIns="36576" anchor="t">
+            <a:spAutoFit/>
+          </a:bodyPr>
+          <a:lstStyle/>
+          <a:p>
+            <a:pPr algn="ctr">
+              <a:defRPr sz="1300" b="1">
+                <a:solidFill>
+                  <a:srgbClr val="FFFFFF"/>
+                </a:solidFill>
+                <a:latin typeface="Aptos"/>
+              </a:defRPr>
+            </a:pPr>
+            <a:r>
+              <a:t>6</a:t>
+            </a:r>
+          </a:p>
+        </p:txBody>
+      </p:sp>
+      <p:sp>
+        <p:nvSpPr>
+          <p:cNvPr id="25" name="TextBox 24"/>
+          <p:cNvSpPr txBox="1"/>
+          <p:nvPr/>
+        </p:nvSpPr>
+        <p:spPr>
+          <a:xfrm>
+            <a:off x="1389888" y="5490972"/>
+            <a:ext cx="10058400" cy="772668"/>
+          </a:xfrm>
+          <a:prstGeom prst="rect">
+            <a:avLst/>
+          </a:prstGeom>
+          <a:noFill/>
+        </p:spPr>
+        <p:txBody>
+          <a:bodyPr wrap="square" lIns="45720" rIns="45720" tIns="36576" bIns="36576" anchor="t">
+            <a:spAutoFit/>
+          </a:bodyPr>
+          <a:lstStyle/>
+          <a:p>
+            <a:pPr algn="l">
+              <a:defRPr sz="1600" b="0">
+                <a:solidFill>
+                  <a:srgbClr val="1C2330"/>
+                </a:solidFill>
+                <a:latin typeface="Aptos"/>
+              </a:defRPr>
+            </a:pPr>
+            <a:r>
+              <a:t>40–45 min — Cierre: Intercambio: otro equipo intenta entender el README.</a:t>
             </a:r>
           </a:p>
         </p:txBody>
@@ -4905,8 +4880,8 @@
         </p:nvSpPr>
         <p:spPr>
           <a:xfrm>
-            <a:off x="502920" y="310896"/>
-            <a:ext cx="5029200" cy="256032"/>
+            <a:off x="502920" y="274320"/>
+            <a:ext cx="5486400" cy="256032"/>
           </a:xfrm>
           <a:prstGeom prst="rect">
             <a:avLst/>
@@ -4914,7 +4889,7 @@
           <a:noFill/>
         </p:spPr>
         <p:txBody>
-          <a:bodyPr wrap="square" lIns="36576" rIns="36576" tIns="27432" bIns="27432">
+          <a:bodyPr wrap="square" lIns="45720" rIns="45720" tIns="36576" bIns="36576" anchor="t">
             <a:spAutoFit/>
           </a:bodyPr>
           <a:lstStyle/>
@@ -4928,7 +4903,7 @@
               </a:defRPr>
             </a:pPr>
             <a:r>
-              <a:t>COMPRENDER Y APLICAR</a:t>
+              <a:t>COMPRENDER Y TRANSFERIR</a:t>
             </a:r>
           </a:p>
         </p:txBody>
@@ -4941,7 +4916,7 @@
         </p:nvSpPr>
         <p:spPr>
           <a:xfrm>
-            <a:off x="502920" y="621792"/>
+            <a:off x="502920" y="603504"/>
             <a:ext cx="11064240" cy="530352"/>
           </a:xfrm>
           <a:prstGeom prst="rect">
@@ -4950,7 +4925,7 @@
           <a:noFill/>
         </p:spPr>
         <p:txBody>
-          <a:bodyPr wrap="square" lIns="36576" rIns="36576" tIns="27432" bIns="27432">
+          <a:bodyPr wrap="square" lIns="45720" rIns="45720" tIns="36576" bIns="36576" anchor="t">
             <a:spAutoFit/>
           </a:bodyPr>
           <a:lstStyle/>
@@ -4964,7 +4939,7 @@
               </a:defRPr>
             </a:pPr>
             <a:r>
-              <a:t>Claves para avanzar</a:t>
+              <a:t>Idea clave y puesta en práctica</a:t>
             </a:r>
           </a:p>
         </p:txBody>
@@ -5029,7 +5004,7 @@
           <a:noFill/>
         </p:spPr>
         <p:txBody>
-          <a:bodyPr wrap="square" lIns="36576" rIns="36576" tIns="27432" bIns="27432">
+          <a:bodyPr wrap="square" lIns="45720" rIns="45720" tIns="36576" bIns="36576" anchor="t">
             <a:spAutoFit/>
           </a:bodyPr>
           <a:lstStyle/>
@@ -5056,8 +5031,8 @@
         </p:nvSpPr>
         <p:spPr>
           <a:xfrm>
-            <a:off x="594360" y="1325880"/>
-            <a:ext cx="5257800" cy="4526280"/>
+            <a:off x="621792" y="1325880"/>
+            <a:ext cx="5285232" cy="4736592"/>
           </a:xfrm>
           <a:prstGeom prst="roundRect">
             <a:avLst/>
@@ -5067,7 +5042,7 @@
           </a:solidFill>
           <a:ln>
             <a:solidFill>
-              <a:srgbClr val="EBEEF2"/>
+              <a:srgbClr val="E5E9EF"/>
             </a:solidFill>
           </a:ln>
         </p:spPr>
@@ -5095,25 +5070,98 @@
       </p:sp>
       <p:sp>
         <p:nvSpPr>
-          <p:cNvPr id="9" name="Rounded Rectangle 8"/>
+          <p:cNvPr id="9" name="TextBox 8"/>
+          <p:cNvSpPr txBox="1"/>
+          <p:nvPr/>
+        </p:nvSpPr>
+        <p:spPr>
+          <a:xfrm>
+            <a:off x="932688" y="1627632"/>
+            <a:ext cx="2011680" cy="329184"/>
+          </a:xfrm>
+          <a:prstGeom prst="rect">
+            <a:avLst/>
+          </a:prstGeom>
+          <a:noFill/>
+        </p:spPr>
+        <p:txBody>
+          <a:bodyPr wrap="square" lIns="45720" rIns="45720" tIns="36576" bIns="36576" anchor="t">
+            <a:spAutoFit/>
+          </a:bodyPr>
+          <a:lstStyle/>
+          <a:p>
+            <a:pPr algn="l">
+              <a:defRPr sz="1300" b="1">
+                <a:solidFill>
+                  <a:srgbClr val="2F5BA8"/>
+                </a:solidFill>
+                <a:latin typeface="Aptos"/>
+              </a:defRPr>
+            </a:pPr>
+            <a:r>
+              <a:t>IDEA CLAVE</a:t>
+            </a:r>
+          </a:p>
+        </p:txBody>
+      </p:sp>
+      <p:sp>
+        <p:nvSpPr>
+          <p:cNvPr id="10" name="TextBox 9"/>
+          <p:cNvSpPr txBox="1"/>
+          <p:nvPr/>
+        </p:nvSpPr>
+        <p:spPr>
+          <a:xfrm>
+            <a:off x="932688" y="2176272"/>
+            <a:ext cx="4617720" cy="3429000"/>
+          </a:xfrm>
+          <a:prstGeom prst="rect">
+            <a:avLst/>
+          </a:prstGeom>
+          <a:noFill/>
+        </p:spPr>
+        <p:txBody>
+          <a:bodyPr wrap="square" lIns="73152" rIns="45720" tIns="36576">
+            <a:spAutoFit/>
+          </a:bodyPr>
+          <a:lstStyle/>
+          <a:p>
+            <a:pPr>
+              <a:spcAft>
+                <a:spcPts val="900"/>
+              </a:spcAft>
+              <a:defRPr sz="2300">
+                <a:solidFill>
+                  <a:srgbClr val="1C2330"/>
+                </a:solidFill>
+                <a:latin typeface="Aptos"/>
+              </a:defRPr>
+            </a:pPr>
+            <a:r>
+              <a:t>•  README mínimo: qué hace, cómo se ejecuta, ejemplo de salida y limitaciones.</a:t>
+            </a:r>
+          </a:p>
+        </p:txBody>
+      </p:sp>
+      <p:sp>
+        <p:nvSpPr>
+          <p:cNvPr id="11" name="Rounded Rectangle 10"/>
           <p:cNvSpPr/>
           <p:nvPr/>
         </p:nvSpPr>
         <p:spPr>
           <a:xfrm>
             <a:off x="6172200" y="1325880"/>
-            <a:ext cx="5413248" cy="4526280"/>
+            <a:ext cx="5394960" cy="4736592"/>
           </a:xfrm>
           <a:prstGeom prst="roundRect">
             <a:avLst/>
           </a:prstGeom>
           <a:solidFill>
-            <a:srgbClr val="FFFFFF"/>
+            <a:srgbClr val="121824"/>
           </a:solidFill>
           <a:ln>
-            <a:solidFill>
-              <a:srgbClr val="EBEEF2"/>
-            </a:solidFill>
+            <a:noFill/>
           </a:ln>
         </p:spPr>
         <p:style>
@@ -5140,14 +5188,14 @@
       </p:sp>
       <p:sp>
         <p:nvSpPr>
-          <p:cNvPr id="10" name="TextBox 9"/>
+          <p:cNvPr id="12" name="TextBox 11"/>
           <p:cNvSpPr txBox="1"/>
           <p:nvPr/>
         </p:nvSpPr>
         <p:spPr>
           <a:xfrm>
-            <a:off x="868680" y="1600200"/>
-            <a:ext cx="4663440" cy="365760"/>
+            <a:off x="6492240" y="1627632"/>
+            <a:ext cx="2194560" cy="329184"/>
           </a:xfrm>
           <a:prstGeom prst="rect">
             <a:avLst/>
@@ -5155,13 +5203,13 @@
           <a:noFill/>
         </p:spPr>
         <p:txBody>
-          <a:bodyPr wrap="square" lIns="36576" rIns="36576" tIns="27432" bIns="27432">
+          <a:bodyPr wrap="square" lIns="45720" rIns="45720" tIns="36576" bIns="36576" anchor="t">
             <a:spAutoFit/>
           </a:bodyPr>
           <a:lstStyle/>
           <a:p>
             <a:pPr algn="l">
-              <a:defRPr sz="1600" b="1">
+              <a:defRPr sz="1300" b="1">
                 <a:solidFill>
                   <a:srgbClr val="2F5BA8"/>
                 </a:solidFill>
@@ -5169,21 +5217,21 @@
               </a:defRPr>
             </a:pPr>
             <a:r>
-              <a:t>IDEAS CLAVE</a:t>
-            </a:r>
-          </a:p>
-        </p:txBody>
-      </p:sp>
-      <p:sp>
-        <p:nvSpPr>
-          <p:cNvPr id="11" name="TextBox 10"/>
+              <a:t>EN PRÁCTICA</a:t>
+            </a:r>
+          </a:p>
+        </p:txBody>
+      </p:sp>
+      <p:sp>
+        <p:nvSpPr>
+          <p:cNvPr id="13" name="TextBox 12"/>
           <p:cNvSpPr txBox="1"/>
           <p:nvPr/>
         </p:nvSpPr>
         <p:spPr>
           <a:xfrm>
-            <a:off x="868680" y="2121408"/>
-            <a:ext cx="4572000" cy="3337560"/>
+            <a:off x="6492240" y="2176272"/>
+            <a:ext cx="4617720" cy="3429000"/>
           </a:xfrm>
           <a:prstGeom prst="rect">
             <a:avLst/>
@@ -5198,118 +5246,11 @@
           <a:p>
             <a:pPr>
               <a:spcAft>
-                <a:spcPts val="1000"/>
+                <a:spcPts val="900"/>
               </a:spcAft>
-              <a:defRPr sz="1800">
-                <a:solidFill>
-                  <a:srgbClr val="1C2330"/>
-                </a:solidFill>
-                <a:latin typeface="Aptos"/>
-              </a:defRPr>
-            </a:pPr>
-            <a:r>
-              <a:t>•  README mínimo: qué hace, cómo se ejecuta, ejemplo de salida y limitaciones.</a:t>
-            </a:r>
-          </a:p>
-          <a:p>
-            <a:pPr>
-              <a:spcAft>
-                <a:spcPts val="1000"/>
-              </a:spcAft>
-              <a:defRPr sz="1800">
-                <a:solidFill>
-                  <a:srgbClr val="1C2330"/>
-                </a:solidFill>
-                <a:latin typeface="Aptos"/>
-              </a:defRPr>
-            </a:pPr>
-            <a:r>
-              <a:t>•  Guion breve sugerido:</a:t>
-            </a:r>
-          </a:p>
-          <a:p>
-            <a:pPr>
-              <a:spcAft>
-                <a:spcPts val="1000"/>
-              </a:spcAft>
-              <a:defRPr sz="1800">
-                <a:solidFill>
-                  <a:srgbClr val="1C2330"/>
-                </a:solidFill>
-                <a:latin typeface="Aptos"/>
-              </a:defRPr>
-            </a:pPr>
-            <a:r>
-              <a:t>•  &gt; Hoy necesitamos comprender y practicar lo justo para producir una evidencia verificable. Primero observaremos un ejemplo, después trabajaréis y al final cada pers…</a:t>
-            </a:r>
-          </a:p>
-        </p:txBody>
-      </p:sp>
-      <p:sp>
-        <p:nvSpPr>
-          <p:cNvPr id="12" name="TextBox 11"/>
-          <p:cNvSpPr txBox="1"/>
-          <p:nvPr/>
-        </p:nvSpPr>
-        <p:spPr>
-          <a:xfrm>
-            <a:off x="6446520" y="1600200"/>
-            <a:ext cx="4572000" cy="365760"/>
-          </a:xfrm>
-          <a:prstGeom prst="rect">
-            <a:avLst/>
-          </a:prstGeom>
-          <a:noFill/>
-        </p:spPr>
-        <p:txBody>
-          <a:bodyPr wrap="square" lIns="36576" rIns="36576" tIns="27432" bIns="27432">
-            <a:spAutoFit/>
-          </a:bodyPr>
-          <a:lstStyle/>
-          <a:p>
-            <a:pPr algn="l">
-              <a:defRPr sz="1600" b="1">
-                <a:solidFill>
-                  <a:srgbClr val="2F5BA8"/>
-                </a:solidFill>
-                <a:latin typeface="Aptos"/>
-              </a:defRPr>
-            </a:pPr>
-            <a:r>
-              <a:t>ACTIVIDAD CENTRAL</a:t>
-            </a:r>
-          </a:p>
-        </p:txBody>
-      </p:sp>
-      <p:sp>
-        <p:nvSpPr>
-          <p:cNvPr id="13" name="TextBox 12"/>
-          <p:cNvSpPr txBox="1"/>
-          <p:nvPr/>
-        </p:nvSpPr>
-        <p:spPr>
-          <a:xfrm>
-            <a:off x="6446520" y="2121408"/>
-            <a:ext cx="4617720" cy="3337560"/>
-          </a:xfrm>
-          <a:prstGeom prst="rect">
-            <a:avLst/>
-          </a:prstGeom>
-          <a:noFill/>
-        </p:spPr>
-        <p:txBody>
-          <a:bodyPr wrap="square" lIns="73152" rIns="45720" tIns="36576">
-            <a:spAutoFit/>
-          </a:bodyPr>
-          <a:lstStyle/>
-          <a:p>
-            <a:pPr>
-              <a:spcAft>
-                <a:spcPts val="1000"/>
-              </a:spcAft>
-              <a:defRPr sz="1800">
-                <a:solidFill>
-                  <a:srgbClr val="1C2330"/>
+              <a:defRPr sz="2300">
+                <a:solidFill>
+                  <a:srgbClr val="FFFFFF"/>
                 </a:solidFill>
                 <a:latin typeface="Aptos"/>
               </a:defRPr>
@@ -5432,8 +5373,8 @@
         </p:nvSpPr>
         <p:spPr>
           <a:xfrm>
-            <a:off x="502920" y="310896"/>
-            <a:ext cx="5029200" cy="256032"/>
+            <a:off x="502920" y="274320"/>
+            <a:ext cx="5486400" cy="256032"/>
           </a:xfrm>
           <a:prstGeom prst="rect">
             <a:avLst/>
@@ -5441,7 +5382,7 @@
           <a:noFill/>
         </p:spPr>
         <p:txBody>
-          <a:bodyPr wrap="square" lIns="36576" rIns="36576" tIns="27432" bIns="27432">
+          <a:bodyPr wrap="square" lIns="45720" rIns="45720" tIns="36576" bIns="36576" anchor="t">
             <a:spAutoFit/>
           </a:bodyPr>
           <a:lstStyle/>
@@ -5455,7 +5396,7 @@
               </a:defRPr>
             </a:pPr>
             <a:r>
-              <a:t>EVIDENCIA MÍNIMA</a:t>
+              <a:t>APLICAR Y DECIDIR</a:t>
             </a:r>
           </a:p>
         </p:txBody>
@@ -5468,7 +5409,7 @@
         </p:nvSpPr>
         <p:spPr>
           <a:xfrm>
-            <a:off x="502920" y="621792"/>
+            <a:off x="502920" y="603504"/>
             <a:ext cx="11064240" cy="530352"/>
           </a:xfrm>
           <a:prstGeom prst="rect">
@@ -5477,7 +5418,7 @@
           <a:noFill/>
         </p:spPr>
         <p:txBody>
-          <a:bodyPr wrap="square" lIns="36576" rIns="36576" tIns="27432" bIns="27432">
+          <a:bodyPr wrap="square" lIns="45720" rIns="45720" tIns="36576" bIns="36576" anchor="t">
             <a:spAutoFit/>
           </a:bodyPr>
           <a:lstStyle/>
@@ -5491,7 +5432,7 @@
               </a:defRPr>
             </a:pPr>
             <a:r>
-              <a:t>Antes de salir, comprueba</a:t>
+              <a:t>Actividad central</a:t>
             </a:r>
           </a:p>
         </p:txBody>
@@ -5556,7 +5497,7 @@
           <a:noFill/>
         </p:spPr>
         <p:txBody>
-          <a:bodyPr wrap="square" lIns="36576" rIns="36576" tIns="27432" bIns="27432">
+          <a:bodyPr wrap="square" lIns="45720" rIns="45720" tIns="36576" bIns="36576" anchor="t">
             <a:spAutoFit/>
           </a:bodyPr>
           <a:lstStyle/>
@@ -5583,8 +5524,8 @@
         </p:nvSpPr>
         <p:spPr>
           <a:xfrm>
-            <a:off x="713232" y="1371600"/>
-            <a:ext cx="420624" cy="420624"/>
+            <a:off x="658368" y="1307592"/>
+            <a:ext cx="10835640" cy="2226564"/>
           </a:xfrm>
           <a:prstGeom prst="roundRect">
             <a:avLst/>
@@ -5594,7 +5535,7 @@
           </a:solidFill>
           <a:ln>
             <a:solidFill>
-              <a:srgbClr val="2F5BA8"/>
+              <a:srgbClr val="E5E9EF"/>
             </a:solidFill>
           </a:ln>
         </p:spPr>
@@ -5628,8 +5569,8 @@
         </p:nvSpPr>
         <p:spPr>
           <a:xfrm>
-            <a:off x="1389888" y="1362456"/>
-            <a:ext cx="9784080" cy="594360"/>
+            <a:off x="850392" y="1453895"/>
+            <a:ext cx="685800" cy="384048"/>
           </a:xfrm>
           <a:prstGeom prst="rect">
             <a:avLst/>
@@ -5637,12 +5578,48 @@
           <a:noFill/>
         </p:spPr>
         <p:txBody>
-          <a:bodyPr wrap="square" lIns="36576" rIns="36576" tIns="27432" bIns="27432">
+          <a:bodyPr wrap="square" lIns="45720" rIns="45720" tIns="36576" bIns="36576" anchor="t">
             <a:spAutoFit/>
           </a:bodyPr>
           <a:lstStyle/>
           <a:p>
             <a:pPr algn="l">
+              <a:defRPr sz="1200" b="1">
+                <a:solidFill>
+                  <a:srgbClr val="2F5BA8"/>
+                </a:solidFill>
+                <a:latin typeface="Aptos"/>
+              </a:defRPr>
+            </a:pPr>
+            <a:r>
+              <a:t>PASO 1</a:t>
+            </a:r>
+          </a:p>
+        </p:txBody>
+      </p:sp>
+      <p:sp>
+        <p:nvSpPr>
+          <p:cNvPr id="10" name="TextBox 9"/>
+          <p:cNvSpPr txBox="1"/>
+          <p:nvPr/>
+        </p:nvSpPr>
+        <p:spPr>
+          <a:xfrm>
+            <a:off x="1664208" y="1417319"/>
+            <a:ext cx="9464040" cy="2007108"/>
+          </a:xfrm>
+          <a:prstGeom prst="rect">
+            <a:avLst/>
+          </a:prstGeom>
+          <a:noFill/>
+        </p:spPr>
+        <p:txBody>
+          <a:bodyPr wrap="square" lIns="45720" rIns="45720" tIns="36576" bIns="36576" anchor="t">
+            <a:spAutoFit/>
+          </a:bodyPr>
+          <a:lstStyle/>
+          <a:p>
+            <a:pPr algn="l">
               <a:defRPr sz="2000" b="0">
                 <a:solidFill>
                   <a:srgbClr val="1C2330"/>
@@ -5651,21 +5628,21 @@
               </a:defRPr>
             </a:pPr>
             <a:r>
-              <a:t>He producido o actualizado: README H1 y documento/captura de ejecución.</a:t>
-            </a:r>
-          </a:p>
-        </p:txBody>
-      </p:sp>
-      <p:sp>
-        <p:nvSpPr>
-          <p:cNvPr id="10" name="Rounded Rectangle 9"/>
+              <a:t>Crear README H1.</a:t>
+            </a:r>
+          </a:p>
+        </p:txBody>
+      </p:sp>
+      <p:sp>
+        <p:nvSpPr>
+          <p:cNvPr id="11" name="Rounded Rectangle 10"/>
           <p:cNvSpPr/>
           <p:nvPr/>
         </p:nvSpPr>
         <p:spPr>
           <a:xfrm>
-            <a:off x="713232" y="2267712"/>
-            <a:ext cx="420624" cy="420624"/>
+            <a:off x="658368" y="3776472"/>
+            <a:ext cx="10835640" cy="2226564"/>
           </a:xfrm>
           <a:prstGeom prst="roundRect">
             <a:avLst/>
@@ -5675,7 +5652,7 @@
           </a:solidFill>
           <a:ln>
             <a:solidFill>
-              <a:srgbClr val="2F5BA8"/>
+              <a:srgbClr val="E5E9EF"/>
             </a:solidFill>
           </a:ln>
         </p:spPr>
@@ -5703,14 +5680,14 @@
       </p:sp>
       <p:sp>
         <p:nvSpPr>
-          <p:cNvPr id="11" name="TextBox 10"/>
+          <p:cNvPr id="12" name="TextBox 11"/>
           <p:cNvSpPr txBox="1"/>
           <p:nvPr/>
         </p:nvSpPr>
         <p:spPr>
           <a:xfrm>
-            <a:off x="1389888" y="2258568"/>
-            <a:ext cx="9784080" cy="594360"/>
+            <a:off x="850392" y="3922776"/>
+            <a:ext cx="685800" cy="384048"/>
           </a:xfrm>
           <a:prstGeom prst="rect">
             <a:avLst/>
@@ -5718,67 +5695,22 @@
           <a:noFill/>
         </p:spPr>
         <p:txBody>
-          <a:bodyPr wrap="square" lIns="36576" rIns="36576" tIns="27432" bIns="27432">
+          <a:bodyPr wrap="square" lIns="45720" rIns="45720" tIns="36576" bIns="36576" anchor="t">
             <a:spAutoFit/>
           </a:bodyPr>
           <a:lstStyle/>
           <a:p>
             <a:pPr algn="l">
-              <a:defRPr sz="2000" b="0">
-                <a:solidFill>
-                  <a:srgbClr val="1C2330"/>
+              <a:defRPr sz="1200" b="1">
+                <a:solidFill>
+                  <a:srgbClr val="2F5BA8"/>
                 </a:solidFill>
                 <a:latin typeface="Aptos"/>
               </a:defRPr>
             </a:pPr>
             <a:r>
-              <a:t>Puedo señalar dónde está.</a:t>
-            </a:r>
-          </a:p>
-        </p:txBody>
-      </p:sp>
-      <p:sp>
-        <p:nvSpPr>
-          <p:cNvPr id="12" name="Rounded Rectangle 11"/>
-          <p:cNvSpPr/>
-          <p:nvPr/>
-        </p:nvSpPr>
-        <p:spPr>
-          <a:xfrm>
-            <a:off x="713232" y="3163824"/>
-            <a:ext cx="420624" cy="420624"/>
-          </a:xfrm>
-          <a:prstGeom prst="roundRect">
-            <a:avLst/>
-          </a:prstGeom>
-          <a:solidFill>
-            <a:srgbClr val="FFFFFF"/>
-          </a:solidFill>
-          <a:ln>
-            <a:solidFill>
-              <a:srgbClr val="2F5BA8"/>
-            </a:solidFill>
-          </a:ln>
-        </p:spPr>
-        <p:style>
-          <a:lnRef idx="1">
-            <a:schemeClr val="accent1"/>
-          </a:lnRef>
-          <a:fillRef idx="3">
-            <a:schemeClr val="accent1"/>
-          </a:fillRef>
-          <a:effectRef idx="2">
-            <a:schemeClr val="accent1"/>
-          </a:effectRef>
-          <a:fontRef idx="minor">
-            <a:schemeClr val="lt1"/>
-          </a:fontRef>
-        </p:style>
-        <p:txBody>
-          <a:bodyPr rtlCol="0" anchor="ctr"/>
-          <a:lstStyle/>
-          <a:p>
-            <a:pPr algn="ctr"/>
+              <a:t>PASO 2</a:t>
+            </a:r>
           </a:p>
         </p:txBody>
       </p:sp>
@@ -5790,8 +5722,8 @@
         </p:nvSpPr>
         <p:spPr>
           <a:xfrm>
-            <a:off x="1389888" y="3154680"/>
-            <a:ext cx="9784080" cy="594360"/>
+            <a:off x="1664208" y="3886200"/>
+            <a:ext cx="9464040" cy="2007108"/>
           </a:xfrm>
           <a:prstGeom prst="rect">
             <a:avLst/>
@@ -5799,7 +5731,7 @@
           <a:noFill/>
         </p:spPr>
         <p:txBody>
-          <a:bodyPr wrap="square" lIns="36576" rIns="36576" tIns="27432" bIns="27432">
+          <a:bodyPr wrap="square" lIns="45720" rIns="45720" tIns="36576" bIns="36576" anchor="t">
             <a:spAutoFit/>
           </a:bodyPr>
           <a:lstStyle/>
@@ -5813,205 +5745,7 @@
               </a:defRPr>
             </a:pPr>
             <a:r>
-              <a:t>Puedo explicar una decisión tomada.</a:t>
-            </a:r>
-          </a:p>
-        </p:txBody>
-      </p:sp>
-      <p:sp>
-        <p:nvSpPr>
-          <p:cNvPr id="14" name="Rounded Rectangle 13"/>
-          <p:cNvSpPr/>
-          <p:nvPr/>
-        </p:nvSpPr>
-        <p:spPr>
-          <a:xfrm>
-            <a:off x="713232" y="4059935"/>
-            <a:ext cx="420624" cy="420624"/>
-          </a:xfrm>
-          <a:prstGeom prst="roundRect">
-            <a:avLst/>
-          </a:prstGeom>
-          <a:solidFill>
-            <a:srgbClr val="FFFFFF"/>
-          </a:solidFill>
-          <a:ln>
-            <a:solidFill>
-              <a:srgbClr val="2F5BA8"/>
-            </a:solidFill>
-          </a:ln>
-        </p:spPr>
-        <p:style>
-          <a:lnRef idx="1">
-            <a:schemeClr val="accent1"/>
-          </a:lnRef>
-          <a:fillRef idx="3">
-            <a:schemeClr val="accent1"/>
-          </a:fillRef>
-          <a:effectRef idx="2">
-            <a:schemeClr val="accent1"/>
-          </a:effectRef>
-          <a:fontRef idx="minor">
-            <a:schemeClr val="lt1"/>
-          </a:fontRef>
-        </p:style>
-        <p:txBody>
-          <a:bodyPr rtlCol="0" anchor="ctr"/>
-          <a:lstStyle/>
-          <a:p>
-            <a:pPr algn="ctr"/>
-          </a:p>
-        </p:txBody>
-      </p:sp>
-      <p:sp>
-        <p:nvSpPr>
-          <p:cNvPr id="15" name="TextBox 14"/>
-          <p:cNvSpPr txBox="1"/>
-          <p:nvPr/>
-        </p:nvSpPr>
-        <p:spPr>
-          <a:xfrm>
-            <a:off x="1389888" y="4050791"/>
-            <a:ext cx="9784080" cy="594360"/>
-          </a:xfrm>
-          <a:prstGeom prst="rect">
-            <a:avLst/>
-          </a:prstGeom>
-          <a:noFill/>
-        </p:spPr>
-        <p:txBody>
-          <a:bodyPr wrap="square" lIns="36576" rIns="36576" tIns="27432" bIns="27432">
-            <a:spAutoFit/>
-          </a:bodyPr>
-          <a:lstStyle/>
-          <a:p>
-            <a:pPr algn="l">
-              <a:defRPr sz="2000" b="0">
-                <a:solidFill>
-                  <a:srgbClr val="1C2330"/>
-                </a:solidFill>
-                <a:latin typeface="Aptos"/>
-              </a:defRPr>
-            </a:pPr>
-            <a:r>
-              <a:t>Puedo mostrar una prueba o comprobación.</a:t>
-            </a:r>
-          </a:p>
-        </p:txBody>
-      </p:sp>
-      <p:sp>
-        <p:nvSpPr>
-          <p:cNvPr id="16" name="Rounded Rectangle 15"/>
-          <p:cNvSpPr/>
-          <p:nvPr/>
-        </p:nvSpPr>
-        <p:spPr>
-          <a:xfrm>
-            <a:off x="713232" y="4956048"/>
-            <a:ext cx="420624" cy="420624"/>
-          </a:xfrm>
-          <a:prstGeom prst="roundRect">
-            <a:avLst/>
-          </a:prstGeom>
-          <a:solidFill>
-            <a:srgbClr val="FFFFFF"/>
-          </a:solidFill>
-          <a:ln>
-            <a:solidFill>
-              <a:srgbClr val="2F5BA8"/>
-            </a:solidFill>
-          </a:ln>
-        </p:spPr>
-        <p:style>
-          <a:lnRef idx="1">
-            <a:schemeClr val="accent1"/>
-          </a:lnRef>
-          <a:fillRef idx="3">
-            <a:schemeClr val="accent1"/>
-          </a:fillRef>
-          <a:effectRef idx="2">
-            <a:schemeClr val="accent1"/>
-          </a:effectRef>
-          <a:fontRef idx="minor">
-            <a:schemeClr val="lt1"/>
-          </a:fontRef>
-        </p:style>
-        <p:txBody>
-          <a:bodyPr rtlCol="0" anchor="ctr"/>
-          <a:lstStyle/>
-          <a:p>
-            <a:pPr algn="ctr"/>
-          </a:p>
-        </p:txBody>
-      </p:sp>
-      <p:sp>
-        <p:nvSpPr>
-          <p:cNvPr id="17" name="TextBox 16"/>
-          <p:cNvSpPr txBox="1"/>
-          <p:nvPr/>
-        </p:nvSpPr>
-        <p:spPr>
-          <a:xfrm>
-            <a:off x="1389888" y="4946904"/>
-            <a:ext cx="9784080" cy="594360"/>
-          </a:xfrm>
-          <a:prstGeom prst="rect">
-            <a:avLst/>
-          </a:prstGeom>
-          <a:noFill/>
-        </p:spPr>
-        <p:txBody>
-          <a:bodyPr wrap="square" lIns="36576" rIns="36576" tIns="27432" bIns="27432">
-            <a:spAutoFit/>
-          </a:bodyPr>
-          <a:lstStyle/>
-          <a:p>
-            <a:pPr algn="l">
-              <a:defRPr sz="2000" b="0">
-                <a:solidFill>
-                  <a:srgbClr val="1C2330"/>
-                </a:solidFill>
-                <a:latin typeface="Aptos"/>
-              </a:defRPr>
-            </a:pPr>
-            <a:r>
-              <a:t>He registrado mi aportación individual si el trabajo era de equipo.</a:t>
-            </a:r>
-          </a:p>
-        </p:txBody>
-      </p:sp>
-      <p:sp>
-        <p:nvSpPr>
-          <p:cNvPr id="18" name="TextBox 17"/>
-          <p:cNvSpPr txBox="1"/>
-          <p:nvPr/>
-        </p:nvSpPr>
-        <p:spPr>
-          <a:xfrm>
-            <a:off x="731520" y="5925312"/>
-            <a:ext cx="10789920" cy="274320"/>
-          </a:xfrm>
-          <a:prstGeom prst="rect">
-            <a:avLst/>
-          </a:prstGeom>
-          <a:noFill/>
-        </p:spPr>
-        <p:txBody>
-          <a:bodyPr wrap="square" lIns="36576" rIns="36576" tIns="27432" bIns="27432">
-            <a:spAutoFit/>
-          </a:bodyPr>
-          <a:lstStyle/>
-          <a:p>
-            <a:pPr algn="l">
-              <a:defRPr sz="1200" b="0">
-                <a:solidFill>
-                  <a:srgbClr val="586270"/>
-                </a:solidFill>
-                <a:latin typeface="Aptos"/>
-              </a:defRPr>
-            </a:pPr>
-            <a:r>
-              <a:t>Necesitas: Un ordenador por estudiante o pareja, con JDK e IntelliJ disponibles y el proyecto del hito accesible.</a:t>
+              <a:t>Comprueba y registra la evidencia: README H1 y documento/captura de ejecución.</a:t>
             </a:r>
           </a:p>
         </p:txBody>
@@ -6128,8 +5862,8 @@
         </p:nvSpPr>
         <p:spPr>
           <a:xfrm>
-            <a:off x="502920" y="310896"/>
-            <a:ext cx="5029200" cy="256032"/>
+            <a:off x="502920" y="274320"/>
+            <a:ext cx="5486400" cy="256032"/>
           </a:xfrm>
           <a:prstGeom prst="rect">
             <a:avLst/>
@@ -6137,7 +5871,7 @@
           <a:noFill/>
         </p:spPr>
         <p:txBody>
-          <a:bodyPr wrap="square" lIns="36576" rIns="36576" tIns="27432" bIns="27432">
+          <a:bodyPr wrap="square" lIns="45720" rIns="45720" tIns="36576" bIns="36576" anchor="t">
             <a:spAutoFit/>
           </a:bodyPr>
           <a:lstStyle/>
@@ -6151,7 +5885,7 @@
               </a:defRPr>
             </a:pPr>
             <a:r>
-              <a:t>COMPRUEBA Y EXPLICA</a:t>
+              <a:t>COMPROBAR</a:t>
             </a:r>
           </a:p>
         </p:txBody>
@@ -6164,7 +5898,7 @@
         </p:nvSpPr>
         <p:spPr>
           <a:xfrm>
-            <a:off x="502920" y="621792"/>
+            <a:off x="502920" y="603504"/>
             <a:ext cx="11064240" cy="530352"/>
           </a:xfrm>
           <a:prstGeom prst="rect">
@@ -6173,7 +5907,7 @@
           <a:noFill/>
         </p:spPr>
         <p:txBody>
-          <a:bodyPr wrap="square" lIns="36576" rIns="36576" tIns="27432" bIns="27432">
+          <a:bodyPr wrap="square" lIns="45720" rIns="45720" tIns="36576" bIns="36576" anchor="t">
             <a:spAutoFit/>
           </a:bodyPr>
           <a:lstStyle/>
@@ -6187,7 +5921,7 @@
               </a:defRPr>
             </a:pPr>
             <a:r>
-              <a:t>Cierre de la sesión</a:t>
+              <a:t>Evidencia y comprobación</a:t>
             </a:r>
           </a:p>
         </p:txBody>
@@ -6252,7 +5986,7 @@
           <a:noFill/>
         </p:spPr>
         <p:txBody>
-          <a:bodyPr wrap="square" lIns="36576" rIns="36576" tIns="27432" bIns="27432">
+          <a:bodyPr wrap="square" lIns="45720" rIns="45720" tIns="36576" bIns="36576" anchor="t">
             <a:spAutoFit/>
           </a:bodyPr>
           <a:lstStyle/>
@@ -6279,10 +6013,476 @@
         </p:nvSpPr>
         <p:spPr>
           <a:xfrm>
-            <a:off x="621792" y="1298448"/>
-            <a:ext cx="10927080" cy="1965960"/>
+            <a:off x="713232" y="1298448"/>
+            <a:ext cx="420624" cy="420624"/>
           </a:xfrm>
           <a:prstGeom prst="roundRect">
+            <a:avLst/>
+          </a:prstGeom>
+          <a:solidFill>
+            <a:srgbClr val="FFFFFF"/>
+          </a:solidFill>
+          <a:ln>
+            <a:solidFill>
+              <a:srgbClr val="2F5BA8"/>
+            </a:solidFill>
+          </a:ln>
+        </p:spPr>
+        <p:style>
+          <a:lnRef idx="1">
+            <a:schemeClr val="accent1"/>
+          </a:lnRef>
+          <a:fillRef idx="3">
+            <a:schemeClr val="accent1"/>
+          </a:fillRef>
+          <a:effectRef idx="2">
+            <a:schemeClr val="accent1"/>
+          </a:effectRef>
+          <a:fontRef idx="minor">
+            <a:schemeClr val="lt1"/>
+          </a:fontRef>
+        </p:style>
+        <p:txBody>
+          <a:bodyPr rtlCol="0" anchor="ctr"/>
+          <a:lstStyle/>
+          <a:p>
+            <a:pPr algn="ctr"/>
+          </a:p>
+        </p:txBody>
+      </p:sp>
+      <p:sp>
+        <p:nvSpPr>
+          <p:cNvPr id="9" name="TextBox 8"/>
+          <p:cNvSpPr txBox="1"/>
+          <p:nvPr/>
+        </p:nvSpPr>
+        <p:spPr>
+          <a:xfrm>
+            <a:off x="1389888" y="1280160"/>
+            <a:ext cx="9829800" cy="960120"/>
+          </a:xfrm>
+          <a:prstGeom prst="rect">
+            <a:avLst/>
+          </a:prstGeom>
+          <a:noFill/>
+        </p:spPr>
+        <p:txBody>
+          <a:bodyPr wrap="square" lIns="45720" rIns="45720" tIns="36576" bIns="36576" anchor="t">
+            <a:spAutoFit/>
+          </a:bodyPr>
+          <a:lstStyle/>
+          <a:p>
+            <a:pPr algn="l">
+              <a:defRPr sz="1900" b="0">
+                <a:solidFill>
+                  <a:srgbClr val="1C2330"/>
+                </a:solidFill>
+                <a:latin typeface="Aptos"/>
+              </a:defRPr>
+            </a:pPr>
+            <a:r>
+              <a:t>He producido o actualizado: README H1 y documento/captura de ejecución.</a:t>
+            </a:r>
+          </a:p>
+        </p:txBody>
+      </p:sp>
+      <p:sp>
+        <p:nvSpPr>
+          <p:cNvPr id="10" name="Rounded Rectangle 9"/>
+          <p:cNvSpPr/>
+          <p:nvPr/>
+        </p:nvSpPr>
+        <p:spPr>
+          <a:xfrm>
+            <a:off x="713232" y="2295144"/>
+            <a:ext cx="420624" cy="420624"/>
+          </a:xfrm>
+          <a:prstGeom prst="roundRect">
+            <a:avLst/>
+          </a:prstGeom>
+          <a:solidFill>
+            <a:srgbClr val="FFFFFF"/>
+          </a:solidFill>
+          <a:ln>
+            <a:solidFill>
+              <a:srgbClr val="2F5BA8"/>
+            </a:solidFill>
+          </a:ln>
+        </p:spPr>
+        <p:style>
+          <a:lnRef idx="1">
+            <a:schemeClr val="accent1"/>
+          </a:lnRef>
+          <a:fillRef idx="3">
+            <a:schemeClr val="accent1"/>
+          </a:fillRef>
+          <a:effectRef idx="2">
+            <a:schemeClr val="accent1"/>
+          </a:effectRef>
+          <a:fontRef idx="minor">
+            <a:schemeClr val="lt1"/>
+          </a:fontRef>
+        </p:style>
+        <p:txBody>
+          <a:bodyPr rtlCol="0" anchor="ctr"/>
+          <a:lstStyle/>
+          <a:p>
+            <a:pPr algn="ctr"/>
+          </a:p>
+        </p:txBody>
+      </p:sp>
+      <p:sp>
+        <p:nvSpPr>
+          <p:cNvPr id="11" name="TextBox 10"/>
+          <p:cNvSpPr txBox="1"/>
+          <p:nvPr/>
+        </p:nvSpPr>
+        <p:spPr>
+          <a:xfrm>
+            <a:off x="1389888" y="2276856"/>
+            <a:ext cx="9829800" cy="960120"/>
+          </a:xfrm>
+          <a:prstGeom prst="rect">
+            <a:avLst/>
+          </a:prstGeom>
+          <a:noFill/>
+        </p:spPr>
+        <p:txBody>
+          <a:bodyPr wrap="square" lIns="45720" rIns="45720" tIns="36576" bIns="36576" anchor="t">
+            <a:spAutoFit/>
+          </a:bodyPr>
+          <a:lstStyle/>
+          <a:p>
+            <a:pPr algn="l">
+              <a:defRPr sz="1900" b="0">
+                <a:solidFill>
+                  <a:srgbClr val="1C2330"/>
+                </a:solidFill>
+                <a:latin typeface="Aptos"/>
+              </a:defRPr>
+            </a:pPr>
+            <a:r>
+              <a:t>Puedo señalar dónde está.</a:t>
+            </a:r>
+          </a:p>
+        </p:txBody>
+      </p:sp>
+      <p:sp>
+        <p:nvSpPr>
+          <p:cNvPr id="12" name="Rounded Rectangle 11"/>
+          <p:cNvSpPr/>
+          <p:nvPr/>
+        </p:nvSpPr>
+        <p:spPr>
+          <a:xfrm>
+            <a:off x="713232" y="3291839"/>
+            <a:ext cx="420624" cy="420624"/>
+          </a:xfrm>
+          <a:prstGeom prst="roundRect">
+            <a:avLst/>
+          </a:prstGeom>
+          <a:solidFill>
+            <a:srgbClr val="FFFFFF"/>
+          </a:solidFill>
+          <a:ln>
+            <a:solidFill>
+              <a:srgbClr val="2F5BA8"/>
+            </a:solidFill>
+          </a:ln>
+        </p:spPr>
+        <p:style>
+          <a:lnRef idx="1">
+            <a:schemeClr val="accent1"/>
+          </a:lnRef>
+          <a:fillRef idx="3">
+            <a:schemeClr val="accent1"/>
+          </a:fillRef>
+          <a:effectRef idx="2">
+            <a:schemeClr val="accent1"/>
+          </a:effectRef>
+          <a:fontRef idx="minor">
+            <a:schemeClr val="lt1"/>
+          </a:fontRef>
+        </p:style>
+        <p:txBody>
+          <a:bodyPr rtlCol="0" anchor="ctr"/>
+          <a:lstStyle/>
+          <a:p>
+            <a:pPr algn="ctr"/>
+          </a:p>
+        </p:txBody>
+      </p:sp>
+      <p:sp>
+        <p:nvSpPr>
+          <p:cNvPr id="13" name="TextBox 12"/>
+          <p:cNvSpPr txBox="1"/>
+          <p:nvPr/>
+        </p:nvSpPr>
+        <p:spPr>
+          <a:xfrm>
+            <a:off x="1389888" y="3273551"/>
+            <a:ext cx="9829800" cy="960120"/>
+          </a:xfrm>
+          <a:prstGeom prst="rect">
+            <a:avLst/>
+          </a:prstGeom>
+          <a:noFill/>
+        </p:spPr>
+        <p:txBody>
+          <a:bodyPr wrap="square" lIns="45720" rIns="45720" tIns="36576" bIns="36576" anchor="t">
+            <a:spAutoFit/>
+          </a:bodyPr>
+          <a:lstStyle/>
+          <a:p>
+            <a:pPr algn="l">
+              <a:defRPr sz="1900" b="0">
+                <a:solidFill>
+                  <a:srgbClr val="1C2330"/>
+                </a:solidFill>
+                <a:latin typeface="Aptos"/>
+              </a:defRPr>
+            </a:pPr>
+            <a:r>
+              <a:t>Puedo explicar una decisión tomada.</a:t>
+            </a:r>
+          </a:p>
+        </p:txBody>
+      </p:sp>
+      <p:sp>
+        <p:nvSpPr>
+          <p:cNvPr id="14" name="Rounded Rectangle 13"/>
+          <p:cNvSpPr/>
+          <p:nvPr/>
+        </p:nvSpPr>
+        <p:spPr>
+          <a:xfrm>
+            <a:off x="713232" y="4288536"/>
+            <a:ext cx="420624" cy="420624"/>
+          </a:xfrm>
+          <a:prstGeom prst="roundRect">
+            <a:avLst/>
+          </a:prstGeom>
+          <a:solidFill>
+            <a:srgbClr val="FFFFFF"/>
+          </a:solidFill>
+          <a:ln>
+            <a:solidFill>
+              <a:srgbClr val="2F5BA8"/>
+            </a:solidFill>
+          </a:ln>
+        </p:spPr>
+        <p:style>
+          <a:lnRef idx="1">
+            <a:schemeClr val="accent1"/>
+          </a:lnRef>
+          <a:fillRef idx="3">
+            <a:schemeClr val="accent1"/>
+          </a:fillRef>
+          <a:effectRef idx="2">
+            <a:schemeClr val="accent1"/>
+          </a:effectRef>
+          <a:fontRef idx="minor">
+            <a:schemeClr val="lt1"/>
+          </a:fontRef>
+        </p:style>
+        <p:txBody>
+          <a:bodyPr rtlCol="0" anchor="ctr"/>
+          <a:lstStyle/>
+          <a:p>
+            <a:pPr algn="ctr"/>
+          </a:p>
+        </p:txBody>
+      </p:sp>
+      <p:sp>
+        <p:nvSpPr>
+          <p:cNvPr id="15" name="TextBox 14"/>
+          <p:cNvSpPr txBox="1"/>
+          <p:nvPr/>
+        </p:nvSpPr>
+        <p:spPr>
+          <a:xfrm>
+            <a:off x="1389888" y="4270248"/>
+            <a:ext cx="9829800" cy="960120"/>
+          </a:xfrm>
+          <a:prstGeom prst="rect">
+            <a:avLst/>
+          </a:prstGeom>
+          <a:noFill/>
+        </p:spPr>
+        <p:txBody>
+          <a:bodyPr wrap="square" lIns="45720" rIns="45720" tIns="36576" bIns="36576" anchor="t">
+            <a:spAutoFit/>
+          </a:bodyPr>
+          <a:lstStyle/>
+          <a:p>
+            <a:pPr algn="l">
+              <a:defRPr sz="1900" b="0">
+                <a:solidFill>
+                  <a:srgbClr val="1C2330"/>
+                </a:solidFill>
+                <a:latin typeface="Aptos"/>
+              </a:defRPr>
+            </a:pPr>
+            <a:r>
+              <a:t>Puedo mostrar una prueba o comprobación.</a:t>
+            </a:r>
+          </a:p>
+        </p:txBody>
+      </p:sp>
+      <p:sp>
+        <p:nvSpPr>
+          <p:cNvPr id="16" name="Rounded Rectangle 15"/>
+          <p:cNvSpPr/>
+          <p:nvPr/>
+        </p:nvSpPr>
+        <p:spPr>
+          <a:xfrm>
+            <a:off x="713232" y="5285231"/>
+            <a:ext cx="420624" cy="420624"/>
+          </a:xfrm>
+          <a:prstGeom prst="roundRect">
+            <a:avLst/>
+          </a:prstGeom>
+          <a:solidFill>
+            <a:srgbClr val="FFFFFF"/>
+          </a:solidFill>
+          <a:ln>
+            <a:solidFill>
+              <a:srgbClr val="2F5BA8"/>
+            </a:solidFill>
+          </a:ln>
+        </p:spPr>
+        <p:style>
+          <a:lnRef idx="1">
+            <a:schemeClr val="accent1"/>
+          </a:lnRef>
+          <a:fillRef idx="3">
+            <a:schemeClr val="accent1"/>
+          </a:fillRef>
+          <a:effectRef idx="2">
+            <a:schemeClr val="accent1"/>
+          </a:effectRef>
+          <a:fontRef idx="minor">
+            <a:schemeClr val="lt1"/>
+          </a:fontRef>
+        </p:style>
+        <p:txBody>
+          <a:bodyPr rtlCol="0" anchor="ctr"/>
+          <a:lstStyle/>
+          <a:p>
+            <a:pPr algn="ctr"/>
+          </a:p>
+        </p:txBody>
+      </p:sp>
+      <p:sp>
+        <p:nvSpPr>
+          <p:cNvPr id="17" name="TextBox 16"/>
+          <p:cNvSpPr txBox="1"/>
+          <p:nvPr/>
+        </p:nvSpPr>
+        <p:spPr>
+          <a:xfrm>
+            <a:off x="1389888" y="5266944"/>
+            <a:ext cx="9829800" cy="960120"/>
+          </a:xfrm>
+          <a:prstGeom prst="rect">
+            <a:avLst/>
+          </a:prstGeom>
+          <a:noFill/>
+        </p:spPr>
+        <p:txBody>
+          <a:bodyPr wrap="square" lIns="45720" rIns="45720" tIns="36576" bIns="36576" anchor="t">
+            <a:spAutoFit/>
+          </a:bodyPr>
+          <a:lstStyle/>
+          <a:p>
+            <a:pPr algn="l">
+              <a:defRPr sz="1900" b="0">
+                <a:solidFill>
+                  <a:srgbClr val="1C2330"/>
+                </a:solidFill>
+                <a:latin typeface="Aptos"/>
+              </a:defRPr>
+            </a:pPr>
+            <a:r>
+              <a:t>He registrado mi aportación individual si el trabajo era de equipo.</a:t>
+            </a:r>
+          </a:p>
+        </p:txBody>
+      </p:sp>
+    </p:spTree>
+  </p:cSld>
+  <p:clrMapOvr>
+    <a:masterClrMapping/>
+  </p:clrMapOvr>
+</p:sld>
+</file>
+
+<file path=ppt/slides/slide7.xml><?xml version="1.0" encoding="utf-8"?>
+<p:sld xmlns:a="http://schemas.openxmlformats.org/drawingml/2006/main" xmlns:p="http://schemas.openxmlformats.org/presentationml/2006/main" xmlns:r="http://schemas.openxmlformats.org/officeDocument/2006/relationships">
+  <p:cSld>
+    <p:spTree>
+      <p:nvGrpSpPr>
+        <p:cNvPr id="1" name=""/>
+        <p:cNvGrpSpPr/>
+        <p:nvPr/>
+      </p:nvGrpSpPr>
+      <p:grpSpPr/>
+      <p:sp>
+        <p:nvSpPr>
+          <p:cNvPr id="2" name="Rectangle 1"/>
+          <p:cNvSpPr/>
+          <p:nvPr/>
+        </p:nvSpPr>
+        <p:spPr>
+          <a:xfrm>
+            <a:off x="0" y="0"/>
+            <a:ext cx="12191695" cy="6858000"/>
+          </a:xfrm>
+          <a:prstGeom prst="rect">
+            <a:avLst/>
+          </a:prstGeom>
+          <a:solidFill>
+            <a:srgbClr val="F9F7F2"/>
+          </a:solidFill>
+          <a:ln>
+            <a:noFill/>
+          </a:ln>
+        </p:spPr>
+        <p:style>
+          <a:lnRef idx="1">
+            <a:schemeClr val="accent1"/>
+          </a:lnRef>
+          <a:fillRef idx="3">
+            <a:schemeClr val="accent1"/>
+          </a:fillRef>
+          <a:effectRef idx="2">
+            <a:schemeClr val="accent1"/>
+          </a:effectRef>
+          <a:fontRef idx="minor">
+            <a:schemeClr val="lt1"/>
+          </a:fontRef>
+        </p:style>
+        <p:txBody>
+          <a:bodyPr rtlCol="0" anchor="ctr"/>
+          <a:lstStyle/>
+          <a:p>
+            <a:pPr algn="ctr"/>
+          </a:p>
+        </p:txBody>
+      </p:sp>
+      <p:sp>
+        <p:nvSpPr>
+          <p:cNvPr id="3" name="Rectangle 2"/>
+          <p:cNvSpPr/>
+          <p:nvPr/>
+        </p:nvSpPr>
+        <p:spPr>
+          <a:xfrm>
+            <a:off x="0" y="0"/>
+            <a:ext cx="164592" cy="6858000"/>
+          </a:xfrm>
+          <a:prstGeom prst="rect">
             <a:avLst/>
           </a:prstGeom>
           <a:solidFill>
@@ -6316,14 +6516,14 @@
       </p:sp>
       <p:sp>
         <p:nvSpPr>
-          <p:cNvPr id="9" name="TextBox 8"/>
+          <p:cNvPr id="4" name="TextBox 3"/>
           <p:cNvSpPr txBox="1"/>
           <p:nvPr/>
         </p:nvSpPr>
         <p:spPr>
           <a:xfrm>
-            <a:off x="960120" y="1618488"/>
-            <a:ext cx="10195560" cy="320040"/>
+            <a:off x="502920" y="274320"/>
+            <a:ext cx="5486400" cy="256032"/>
           </a:xfrm>
           <a:prstGeom prst="rect">
             <a:avLst/>
@@ -6331,35 +6531,35 @@
           <a:noFill/>
         </p:spPr>
         <p:txBody>
-          <a:bodyPr wrap="square" lIns="36576" rIns="36576" tIns="27432" bIns="27432">
+          <a:bodyPr wrap="square" lIns="45720" rIns="45720" tIns="36576" bIns="36576" anchor="t">
             <a:spAutoFit/>
           </a:bodyPr>
           <a:lstStyle/>
           <a:p>
             <a:pPr algn="l">
-              <a:defRPr sz="1400" b="1">
-                <a:solidFill>
-                  <a:srgbClr val="FFFFFF"/>
+              <a:defRPr sz="1000" b="1">
+                <a:solidFill>
+                  <a:srgbClr val="2F5BA8"/>
                 </a:solidFill>
                 <a:latin typeface="Aptos"/>
               </a:defRPr>
             </a:pPr>
             <a:r>
-              <a:t>PREGUNTA DE SALIDA</a:t>
-            </a:r>
-          </a:p>
-        </p:txBody>
-      </p:sp>
-      <p:sp>
-        <p:nvSpPr>
-          <p:cNvPr id="10" name="TextBox 9"/>
+              <a:t>LÍMITES QUE PROTEGEN EL APRENDIZAJE</a:t>
+            </a:r>
+          </a:p>
+        </p:txBody>
+      </p:sp>
+      <p:sp>
+        <p:nvSpPr>
+          <p:cNvPr id="5" name="TextBox 4"/>
           <p:cNvSpPr txBox="1"/>
           <p:nvPr/>
         </p:nvSpPr>
         <p:spPr>
           <a:xfrm>
-            <a:off x="960120" y="2057400"/>
-            <a:ext cx="10058400" cy="822960"/>
+            <a:off x="502920" y="603504"/>
+            <a:ext cx="11064240" cy="530352"/>
           </a:xfrm>
           <a:prstGeom prst="rect">
             <a:avLst/>
@@ -6367,35 +6567,78 @@
           <a:noFill/>
         </p:spPr>
         <p:txBody>
-          <a:bodyPr wrap="square" lIns="36576" rIns="36576" tIns="27432" bIns="27432">
+          <a:bodyPr wrap="square" lIns="45720" rIns="45720" tIns="36576" bIns="36576" anchor="t">
             <a:spAutoFit/>
           </a:bodyPr>
           <a:lstStyle/>
           <a:p>
             <a:pPr algn="l">
-              <a:defRPr sz="2700" b="1">
-                <a:solidFill>
-                  <a:srgbClr val="FFFFFF"/>
+              <a:defRPr sz="2800" b="1">
+                <a:solidFill>
+                  <a:srgbClr val="1C2330"/>
                 </a:solidFill>
                 <a:latin typeface="Aptos"/>
               </a:defRPr>
             </a:pPr>
             <a:r>
-              <a:t>Intercambio: otro equipo intenta entender el README.</a:t>
-            </a:r>
-          </a:p>
-        </p:txBody>
-      </p:sp>
-      <p:sp>
-        <p:nvSpPr>
-          <p:cNvPr id="11" name="TextBox 10"/>
+              <a:t>Seguridad y uso responsable</a:t>
+            </a:r>
+          </a:p>
+        </p:txBody>
+      </p:sp>
+      <p:sp>
+        <p:nvSpPr>
+          <p:cNvPr id="6" name="Rectangle 5"/>
+          <p:cNvSpPr/>
+          <p:nvPr/>
+        </p:nvSpPr>
+        <p:spPr>
+          <a:xfrm>
+            <a:off x="0" y="6601968"/>
+            <a:ext cx="12191695" cy="256032"/>
+          </a:xfrm>
+          <a:prstGeom prst="rect">
+            <a:avLst/>
+          </a:prstGeom>
+          <a:solidFill>
+            <a:srgbClr val="2F5BA8"/>
+          </a:solidFill>
+          <a:ln>
+            <a:noFill/>
+          </a:ln>
+        </p:spPr>
+        <p:style>
+          <a:lnRef idx="1">
+            <a:schemeClr val="accent1"/>
+          </a:lnRef>
+          <a:fillRef idx="3">
+            <a:schemeClr val="accent1"/>
+          </a:fillRef>
+          <a:effectRef idx="2">
+            <a:schemeClr val="accent1"/>
+          </a:effectRef>
+          <a:fontRef idx="minor">
+            <a:schemeClr val="lt1"/>
+          </a:fontRef>
+        </p:style>
+        <p:txBody>
+          <a:bodyPr rtlCol="0" anchor="ctr"/>
+          <a:lstStyle/>
+          <a:p>
+            <a:pPr algn="ctr"/>
+          </a:p>
+        </p:txBody>
+      </p:sp>
+      <p:sp>
+        <p:nvSpPr>
+          <p:cNvPr id="7" name="TextBox 6"/>
           <p:cNvSpPr txBox="1"/>
           <p:nvPr/>
         </p:nvSpPr>
         <p:spPr>
           <a:xfrm>
-            <a:off x="713232" y="3703320"/>
-            <a:ext cx="3749039" cy="320040"/>
+            <a:off x="411480" y="6629400"/>
+            <a:ext cx="11247120" cy="164592"/>
           </a:xfrm>
           <a:prstGeom prst="rect">
             <a:avLst/>
@@ -6403,106 +6646,35 @@
           <a:noFill/>
         </p:spPr>
         <p:txBody>
-          <a:bodyPr wrap="square" lIns="36576" rIns="36576" tIns="27432" bIns="27432">
+          <a:bodyPr wrap="square" lIns="45720" rIns="45720" tIns="36576" bIns="36576" anchor="t">
             <a:spAutoFit/>
           </a:bodyPr>
           <a:lstStyle/>
           <a:p>
             <a:pPr algn="l">
-              <a:defRPr sz="1500" b="1">
-                <a:solidFill>
-                  <a:srgbClr val="2F5BA8"/>
+              <a:defRPr sz="900" b="0">
+                <a:solidFill>
+                  <a:srgbClr val="FFFFFF"/>
                 </a:solidFill>
                 <a:latin typeface="Aptos"/>
               </a:defRPr>
             </a:pPr>
             <a:r>
-              <a:t>RECUERDA</a:t>
-            </a:r>
-          </a:p>
-        </p:txBody>
-      </p:sp>
-      <p:sp>
-        <p:nvSpPr>
-          <p:cNvPr id="12" name="TextBox 11"/>
-          <p:cNvSpPr txBox="1"/>
-          <p:nvPr/>
-        </p:nvSpPr>
-        <p:spPr>
-          <a:xfrm>
-            <a:off x="713232" y="4114800"/>
-            <a:ext cx="6583680" cy="1691640"/>
-          </a:xfrm>
-          <a:prstGeom prst="rect">
-            <a:avLst/>
-          </a:prstGeom>
-          <a:noFill/>
-        </p:spPr>
-        <p:txBody>
-          <a:bodyPr wrap="square" lIns="73152" rIns="45720" tIns="36576">
-            <a:spAutoFit/>
-          </a:bodyPr>
-          <a:lstStyle/>
-          <a:p>
-            <a:pPr>
-              <a:spcAft>
-                <a:spcPts val="1000"/>
-              </a:spcAft>
-              <a:defRPr sz="1700">
-                <a:solidFill>
-                  <a:srgbClr val="1C2330"/>
-                </a:solidFill>
-                <a:latin typeface="Aptos"/>
-              </a:defRPr>
-            </a:pPr>
-            <a:r>
-              <a:t>•  Trabaja únicamente con datos ficticios.</a:t>
-            </a:r>
-          </a:p>
-          <a:p>
-            <a:pPr>
-              <a:spcAft>
-                <a:spcPts val="1000"/>
-              </a:spcAft>
-              <a:defRPr sz="1700">
-                <a:solidFill>
-                  <a:srgbClr val="1C2330"/>
-                </a:solidFill>
-                <a:latin typeface="Aptos"/>
-              </a:defRPr>
-            </a:pPr>
-            <a:r>
-              <a:t>•  No escribas contraseñas, tokens, claves API ni datos personales.</a:t>
-            </a:r>
-          </a:p>
-          <a:p>
-            <a:pPr>
-              <a:spcAft>
-                <a:spcPts val="1000"/>
-              </a:spcAft>
-              <a:defRPr sz="1700">
-                <a:solidFill>
-                  <a:srgbClr val="1C2330"/>
-                </a:solidFill>
-                <a:latin typeface="Aptos"/>
-              </a:defRPr>
-            </a:pPr>
-            <a:r>
-              <a:t>•  Si utilizas IA en un uso permitido, registra qué pediste, qué recibiste, qué cambiaste y cómo lo comprobaste.</a:t>
-            </a:r>
-          </a:p>
-        </p:txBody>
-      </p:sp>
-      <p:sp>
-        <p:nvSpPr>
-          <p:cNvPr id="13" name="Rounded Rectangle 12"/>
+              <a:t>MiniJarvis · 1.º DAW · Sesión 214 · H1</a:t>
+            </a:r>
+          </a:p>
+        </p:txBody>
+      </p:sp>
+      <p:sp>
+        <p:nvSpPr>
+          <p:cNvPr id="8" name="Rounded Rectangle 7"/>
           <p:cNvSpPr/>
           <p:nvPr/>
         </p:nvSpPr>
         <p:spPr>
           <a:xfrm>
-            <a:off x="7726679" y="3794760"/>
-            <a:ext cx="3703320" cy="1600200"/>
+            <a:off x="621792" y="1298448"/>
+            <a:ext cx="5230368" cy="2176272"/>
           </a:xfrm>
           <a:prstGeom prst="roundRect">
             <a:avLst/>
@@ -6512,7 +6684,7 @@
           </a:solidFill>
           <a:ln>
             <a:solidFill>
-              <a:srgbClr val="EBEEF2"/>
+              <a:srgbClr val="E5E9EF"/>
             </a:solidFill>
           </a:ln>
         </p:spPr>
@@ -6540,14 +6712,57 @@
       </p:sp>
       <p:sp>
         <p:nvSpPr>
-          <p:cNvPr id="14" name="TextBox 13"/>
+          <p:cNvPr id="9" name="Rounded Rectangle 8"/>
+          <p:cNvSpPr/>
+          <p:nvPr/>
+        </p:nvSpPr>
+        <p:spPr>
+          <a:xfrm>
+            <a:off x="841248" y="1527048"/>
+            <a:ext cx="237744" cy="1719072"/>
+          </a:xfrm>
+          <a:prstGeom prst="roundRect">
+            <a:avLst/>
+          </a:prstGeom>
+          <a:solidFill>
+            <a:srgbClr val="247E5C"/>
+          </a:solidFill>
+          <a:ln>
+            <a:noFill/>
+          </a:ln>
+        </p:spPr>
+        <p:style>
+          <a:lnRef idx="1">
+            <a:schemeClr val="accent1"/>
+          </a:lnRef>
+          <a:fillRef idx="3">
+            <a:schemeClr val="accent1"/>
+          </a:fillRef>
+          <a:effectRef idx="2">
+            <a:schemeClr val="accent1"/>
+          </a:effectRef>
+          <a:fontRef idx="minor">
+            <a:schemeClr val="lt1"/>
+          </a:fontRef>
+        </p:style>
+        <p:txBody>
+          <a:bodyPr rtlCol="0" anchor="ctr"/>
+          <a:lstStyle/>
+          <a:p>
+            <a:pPr algn="ctr"/>
+          </a:p>
+        </p:txBody>
+      </p:sp>
+      <p:sp>
+        <p:nvSpPr>
+          <p:cNvPr id="10" name="TextBox 9"/>
           <p:cNvSpPr txBox="1"/>
           <p:nvPr/>
         </p:nvSpPr>
         <p:spPr>
           <a:xfrm>
-            <a:off x="8028431" y="4087368"/>
-            <a:ext cx="3063240" cy="868680"/>
+            <a:off x="1280160" y="1527048"/>
+            <a:ext cx="4224528" cy="1783080"/>
           </a:xfrm>
           <a:prstGeom prst="rect">
             <a:avLst/>
@@ -6555,13 +6770,793 @@
           <a:noFill/>
         </p:spPr>
         <p:txBody>
-          <a:bodyPr wrap="square" lIns="36576" rIns="36576" tIns="27432" bIns="27432">
+          <a:bodyPr wrap="square" lIns="45720" rIns="45720" tIns="36576" bIns="36576" anchor="t">
             <a:spAutoFit/>
           </a:bodyPr>
           <a:lstStyle/>
           <a:p>
+            <a:pPr algn="l">
+              <a:defRPr sz="1900" b="0">
+                <a:solidFill>
+                  <a:srgbClr val="1C2330"/>
+                </a:solidFill>
+                <a:latin typeface="Aptos"/>
+              </a:defRPr>
+            </a:pPr>
+            <a:r>
+              <a:t>Trabaja únicamente con datos ficticios.</a:t>
+            </a:r>
+          </a:p>
+        </p:txBody>
+      </p:sp>
+      <p:sp>
+        <p:nvSpPr>
+          <p:cNvPr id="11" name="Rounded Rectangle 10"/>
+          <p:cNvSpPr/>
+          <p:nvPr/>
+        </p:nvSpPr>
+        <p:spPr>
+          <a:xfrm>
+            <a:off x="6126479" y="1298448"/>
+            <a:ext cx="5230368" cy="2176272"/>
+          </a:xfrm>
+          <a:prstGeom prst="roundRect">
+            <a:avLst/>
+          </a:prstGeom>
+          <a:solidFill>
+            <a:srgbClr val="FFFFFF"/>
+          </a:solidFill>
+          <a:ln>
+            <a:solidFill>
+              <a:srgbClr val="E5E9EF"/>
+            </a:solidFill>
+          </a:ln>
+        </p:spPr>
+        <p:style>
+          <a:lnRef idx="1">
+            <a:schemeClr val="accent1"/>
+          </a:lnRef>
+          <a:fillRef idx="3">
+            <a:schemeClr val="accent1"/>
+          </a:fillRef>
+          <a:effectRef idx="2">
+            <a:schemeClr val="accent1"/>
+          </a:effectRef>
+          <a:fontRef idx="minor">
+            <a:schemeClr val="lt1"/>
+          </a:fontRef>
+        </p:style>
+        <p:txBody>
+          <a:bodyPr rtlCol="0" anchor="ctr"/>
+          <a:lstStyle/>
+          <a:p>
+            <a:pPr algn="ctr"/>
+          </a:p>
+        </p:txBody>
+      </p:sp>
+      <p:sp>
+        <p:nvSpPr>
+          <p:cNvPr id="12" name="Rounded Rectangle 11"/>
+          <p:cNvSpPr/>
+          <p:nvPr/>
+        </p:nvSpPr>
+        <p:spPr>
+          <a:xfrm>
+            <a:off x="6345936" y="1527048"/>
+            <a:ext cx="237744" cy="1719072"/>
+          </a:xfrm>
+          <a:prstGeom prst="roundRect">
+            <a:avLst/>
+          </a:prstGeom>
+          <a:solidFill>
+            <a:srgbClr val="C07020"/>
+          </a:solidFill>
+          <a:ln>
+            <a:noFill/>
+          </a:ln>
+        </p:spPr>
+        <p:style>
+          <a:lnRef idx="1">
+            <a:schemeClr val="accent1"/>
+          </a:lnRef>
+          <a:fillRef idx="3">
+            <a:schemeClr val="accent1"/>
+          </a:fillRef>
+          <a:effectRef idx="2">
+            <a:schemeClr val="accent1"/>
+          </a:effectRef>
+          <a:fontRef idx="minor">
+            <a:schemeClr val="lt1"/>
+          </a:fontRef>
+        </p:style>
+        <p:txBody>
+          <a:bodyPr rtlCol="0" anchor="ctr"/>
+          <a:lstStyle/>
+          <a:p>
+            <a:pPr algn="ctr"/>
+          </a:p>
+        </p:txBody>
+      </p:sp>
+      <p:sp>
+        <p:nvSpPr>
+          <p:cNvPr id="13" name="TextBox 12"/>
+          <p:cNvSpPr txBox="1"/>
+          <p:nvPr/>
+        </p:nvSpPr>
+        <p:spPr>
+          <a:xfrm>
+            <a:off x="6784847" y="1527048"/>
+            <a:ext cx="4224528" cy="1783080"/>
+          </a:xfrm>
+          <a:prstGeom prst="rect">
+            <a:avLst/>
+          </a:prstGeom>
+          <a:noFill/>
+        </p:spPr>
+        <p:txBody>
+          <a:bodyPr wrap="square" lIns="45720" rIns="45720" tIns="36576" bIns="36576" anchor="t">
+            <a:spAutoFit/>
+          </a:bodyPr>
+          <a:lstStyle/>
+          <a:p>
+            <a:pPr algn="l">
+              <a:defRPr sz="1900" b="0">
+                <a:solidFill>
+                  <a:srgbClr val="1C2330"/>
+                </a:solidFill>
+                <a:latin typeface="Aptos"/>
+              </a:defRPr>
+            </a:pPr>
+            <a:r>
+              <a:t>No escribas contraseñas, tokens, claves API ni datos personales.</a:t>
+            </a:r>
+          </a:p>
+        </p:txBody>
+      </p:sp>
+      <p:sp>
+        <p:nvSpPr>
+          <p:cNvPr id="14" name="Rounded Rectangle 13"/>
+          <p:cNvSpPr/>
+          <p:nvPr/>
+        </p:nvSpPr>
+        <p:spPr>
+          <a:xfrm>
+            <a:off x="621792" y="3675887"/>
+            <a:ext cx="5230368" cy="2176272"/>
+          </a:xfrm>
+          <a:prstGeom prst="roundRect">
+            <a:avLst/>
+          </a:prstGeom>
+          <a:solidFill>
+            <a:srgbClr val="FFFFFF"/>
+          </a:solidFill>
+          <a:ln>
+            <a:solidFill>
+              <a:srgbClr val="E5E9EF"/>
+            </a:solidFill>
+          </a:ln>
+        </p:spPr>
+        <p:style>
+          <a:lnRef idx="1">
+            <a:schemeClr val="accent1"/>
+          </a:lnRef>
+          <a:fillRef idx="3">
+            <a:schemeClr val="accent1"/>
+          </a:fillRef>
+          <a:effectRef idx="2">
+            <a:schemeClr val="accent1"/>
+          </a:effectRef>
+          <a:fontRef idx="minor">
+            <a:schemeClr val="lt1"/>
+          </a:fontRef>
+        </p:style>
+        <p:txBody>
+          <a:bodyPr rtlCol="0" anchor="ctr"/>
+          <a:lstStyle/>
+          <a:p>
+            <a:pPr algn="ctr"/>
+          </a:p>
+        </p:txBody>
+      </p:sp>
+      <p:sp>
+        <p:nvSpPr>
+          <p:cNvPr id="15" name="Rounded Rectangle 14"/>
+          <p:cNvSpPr/>
+          <p:nvPr/>
+        </p:nvSpPr>
+        <p:spPr>
+          <a:xfrm>
+            <a:off x="841248" y="3904487"/>
+            <a:ext cx="237744" cy="1719072"/>
+          </a:xfrm>
+          <a:prstGeom prst="roundRect">
+            <a:avLst/>
+          </a:prstGeom>
+          <a:solidFill>
+            <a:srgbClr val="B13A3A"/>
+          </a:solidFill>
+          <a:ln>
+            <a:noFill/>
+          </a:ln>
+        </p:spPr>
+        <p:style>
+          <a:lnRef idx="1">
+            <a:schemeClr val="accent1"/>
+          </a:lnRef>
+          <a:fillRef idx="3">
+            <a:schemeClr val="accent1"/>
+          </a:fillRef>
+          <a:effectRef idx="2">
+            <a:schemeClr val="accent1"/>
+          </a:effectRef>
+          <a:fontRef idx="minor">
+            <a:schemeClr val="lt1"/>
+          </a:fontRef>
+        </p:style>
+        <p:txBody>
+          <a:bodyPr rtlCol="0" anchor="ctr"/>
+          <a:lstStyle/>
+          <a:p>
+            <a:pPr algn="ctr"/>
+          </a:p>
+        </p:txBody>
+      </p:sp>
+      <p:sp>
+        <p:nvSpPr>
+          <p:cNvPr id="16" name="TextBox 15"/>
+          <p:cNvSpPr txBox="1"/>
+          <p:nvPr/>
+        </p:nvSpPr>
+        <p:spPr>
+          <a:xfrm>
+            <a:off x="1280160" y="3904487"/>
+            <a:ext cx="4224528" cy="1783080"/>
+          </a:xfrm>
+          <a:prstGeom prst="rect">
+            <a:avLst/>
+          </a:prstGeom>
+          <a:noFill/>
+        </p:spPr>
+        <p:txBody>
+          <a:bodyPr wrap="square" lIns="45720" rIns="45720" tIns="36576" bIns="36576" anchor="t">
+            <a:spAutoFit/>
+          </a:bodyPr>
+          <a:lstStyle/>
+          <a:p>
+            <a:pPr algn="l">
+              <a:defRPr sz="1900" b="0">
+                <a:solidFill>
+                  <a:srgbClr val="1C2330"/>
+                </a:solidFill>
+                <a:latin typeface="Aptos"/>
+              </a:defRPr>
+            </a:pPr>
+            <a:r>
+              <a:t>Si utilizas IA en un uso permitido, registra qué pediste, qué recibiste, qué cambiaste y cómo lo comprobaste.</a:t>
+            </a:r>
+          </a:p>
+        </p:txBody>
+      </p:sp>
+      <p:sp>
+        <p:nvSpPr>
+          <p:cNvPr id="17" name="Rounded Rectangle 16"/>
+          <p:cNvSpPr/>
+          <p:nvPr/>
+        </p:nvSpPr>
+        <p:spPr>
+          <a:xfrm>
+            <a:off x="6126479" y="3675887"/>
+            <a:ext cx="5230368" cy="2176272"/>
+          </a:xfrm>
+          <a:prstGeom prst="roundRect">
+            <a:avLst/>
+          </a:prstGeom>
+          <a:solidFill>
+            <a:srgbClr val="FFFFFF"/>
+          </a:solidFill>
+          <a:ln>
+            <a:solidFill>
+              <a:srgbClr val="E5E9EF"/>
+            </a:solidFill>
+          </a:ln>
+        </p:spPr>
+        <p:style>
+          <a:lnRef idx="1">
+            <a:schemeClr val="accent1"/>
+          </a:lnRef>
+          <a:fillRef idx="3">
+            <a:schemeClr val="accent1"/>
+          </a:fillRef>
+          <a:effectRef idx="2">
+            <a:schemeClr val="accent1"/>
+          </a:effectRef>
+          <a:fontRef idx="minor">
+            <a:schemeClr val="lt1"/>
+          </a:fontRef>
+        </p:style>
+        <p:txBody>
+          <a:bodyPr rtlCol="0" anchor="ctr"/>
+          <a:lstStyle/>
+          <a:p>
+            <a:pPr algn="ctr"/>
+          </a:p>
+        </p:txBody>
+      </p:sp>
+      <p:sp>
+        <p:nvSpPr>
+          <p:cNvPr id="18" name="Rounded Rectangle 17"/>
+          <p:cNvSpPr/>
+          <p:nvPr/>
+        </p:nvSpPr>
+        <p:spPr>
+          <a:xfrm>
+            <a:off x="6345936" y="3904487"/>
+            <a:ext cx="237744" cy="1719072"/>
+          </a:xfrm>
+          <a:prstGeom prst="roundRect">
+            <a:avLst/>
+          </a:prstGeom>
+          <a:solidFill>
+            <a:srgbClr val="2F5BA8"/>
+          </a:solidFill>
+          <a:ln>
+            <a:noFill/>
+          </a:ln>
+        </p:spPr>
+        <p:style>
+          <a:lnRef idx="1">
+            <a:schemeClr val="accent1"/>
+          </a:lnRef>
+          <a:fillRef idx="3">
+            <a:schemeClr val="accent1"/>
+          </a:fillRef>
+          <a:effectRef idx="2">
+            <a:schemeClr val="accent1"/>
+          </a:effectRef>
+          <a:fontRef idx="minor">
+            <a:schemeClr val="lt1"/>
+          </a:fontRef>
+        </p:style>
+        <p:txBody>
+          <a:bodyPr rtlCol="0" anchor="ctr"/>
+          <a:lstStyle/>
+          <a:p>
+            <a:pPr algn="ctr"/>
+          </a:p>
+        </p:txBody>
+      </p:sp>
+      <p:sp>
+        <p:nvSpPr>
+          <p:cNvPr id="19" name="TextBox 18"/>
+          <p:cNvSpPr txBox="1"/>
+          <p:nvPr/>
+        </p:nvSpPr>
+        <p:spPr>
+          <a:xfrm>
+            <a:off x="6784847" y="3904487"/>
+            <a:ext cx="4224528" cy="1783080"/>
+          </a:xfrm>
+          <a:prstGeom prst="rect">
+            <a:avLst/>
+          </a:prstGeom>
+          <a:noFill/>
+        </p:spPr>
+        <p:txBody>
+          <a:bodyPr wrap="square" lIns="45720" rIns="45720" tIns="36576" bIns="36576" anchor="t">
+            <a:spAutoFit/>
+          </a:bodyPr>
+          <a:lstStyle/>
+          <a:p>
+            <a:pPr algn="l">
+              <a:defRPr sz="1900" b="0">
+                <a:solidFill>
+                  <a:srgbClr val="1C2330"/>
+                </a:solidFill>
+                <a:latin typeface="Aptos"/>
+              </a:defRPr>
+            </a:pPr>
+            <a:r>
+              <a:t>Los ejemplos de Laura solo se consultan después del intento propio.</a:t>
+            </a:r>
+          </a:p>
+        </p:txBody>
+      </p:sp>
+    </p:spTree>
+  </p:cSld>
+  <p:clrMapOvr>
+    <a:masterClrMapping/>
+  </p:clrMapOvr>
+</p:sld>
+</file>
+
+<file path=ppt/slides/slide8.xml><?xml version="1.0" encoding="utf-8"?>
+<p:sld xmlns:a="http://schemas.openxmlformats.org/drawingml/2006/main" xmlns:p="http://schemas.openxmlformats.org/presentationml/2006/main" xmlns:r="http://schemas.openxmlformats.org/officeDocument/2006/relationships">
+  <p:cSld>
+    <p:spTree>
+      <p:nvGrpSpPr>
+        <p:cNvPr id="1" name=""/>
+        <p:cNvGrpSpPr/>
+        <p:nvPr/>
+      </p:nvGrpSpPr>
+      <p:grpSpPr/>
+      <p:sp>
+        <p:nvSpPr>
+          <p:cNvPr id="2" name="Rectangle 1"/>
+          <p:cNvSpPr/>
+          <p:nvPr/>
+        </p:nvSpPr>
+        <p:spPr>
+          <a:xfrm>
+            <a:off x="0" y="0"/>
+            <a:ext cx="12191695" cy="6858000"/>
+          </a:xfrm>
+          <a:prstGeom prst="rect">
+            <a:avLst/>
+          </a:prstGeom>
+          <a:solidFill>
+            <a:srgbClr val="F9F7F2"/>
+          </a:solidFill>
+          <a:ln>
+            <a:noFill/>
+          </a:ln>
+        </p:spPr>
+        <p:style>
+          <a:lnRef idx="1">
+            <a:schemeClr val="accent1"/>
+          </a:lnRef>
+          <a:fillRef idx="3">
+            <a:schemeClr val="accent1"/>
+          </a:fillRef>
+          <a:effectRef idx="2">
+            <a:schemeClr val="accent1"/>
+          </a:effectRef>
+          <a:fontRef idx="minor">
+            <a:schemeClr val="lt1"/>
+          </a:fontRef>
+        </p:style>
+        <p:txBody>
+          <a:bodyPr rtlCol="0" anchor="ctr"/>
+          <a:lstStyle/>
+          <a:p>
+            <a:pPr algn="ctr"/>
+          </a:p>
+        </p:txBody>
+      </p:sp>
+      <p:sp>
+        <p:nvSpPr>
+          <p:cNvPr id="3" name="Rectangle 2"/>
+          <p:cNvSpPr/>
+          <p:nvPr/>
+        </p:nvSpPr>
+        <p:spPr>
+          <a:xfrm>
+            <a:off x="0" y="0"/>
+            <a:ext cx="164592" cy="6858000"/>
+          </a:xfrm>
+          <a:prstGeom prst="rect">
+            <a:avLst/>
+          </a:prstGeom>
+          <a:solidFill>
+            <a:srgbClr val="2F5BA8"/>
+          </a:solidFill>
+          <a:ln>
+            <a:noFill/>
+          </a:ln>
+        </p:spPr>
+        <p:style>
+          <a:lnRef idx="1">
+            <a:schemeClr val="accent1"/>
+          </a:lnRef>
+          <a:fillRef idx="3">
+            <a:schemeClr val="accent1"/>
+          </a:fillRef>
+          <a:effectRef idx="2">
+            <a:schemeClr val="accent1"/>
+          </a:effectRef>
+          <a:fontRef idx="minor">
+            <a:schemeClr val="lt1"/>
+          </a:fontRef>
+        </p:style>
+        <p:txBody>
+          <a:bodyPr rtlCol="0" anchor="ctr"/>
+          <a:lstStyle/>
+          <a:p>
+            <a:pPr algn="ctr"/>
+          </a:p>
+        </p:txBody>
+      </p:sp>
+      <p:sp>
+        <p:nvSpPr>
+          <p:cNvPr id="4" name="TextBox 3"/>
+          <p:cNvSpPr txBox="1"/>
+          <p:nvPr/>
+        </p:nvSpPr>
+        <p:spPr>
+          <a:xfrm>
+            <a:off x="502920" y="274320"/>
+            <a:ext cx="5486400" cy="256032"/>
+          </a:xfrm>
+          <a:prstGeom prst="rect">
+            <a:avLst/>
+          </a:prstGeom>
+          <a:noFill/>
+        </p:spPr>
+        <p:txBody>
+          <a:bodyPr wrap="square" lIns="45720" rIns="45720" tIns="36576" bIns="36576" anchor="t">
+            <a:spAutoFit/>
+          </a:bodyPr>
+          <a:lstStyle/>
+          <a:p>
+            <a:pPr algn="l">
+              <a:defRPr sz="1000" b="1">
+                <a:solidFill>
+                  <a:srgbClr val="2F5BA8"/>
+                </a:solidFill>
+                <a:latin typeface="Aptos"/>
+              </a:defRPr>
+            </a:pPr>
+            <a:r>
+              <a:t>EXPLICAR Y DEFENDER</a:t>
+            </a:r>
+          </a:p>
+        </p:txBody>
+      </p:sp>
+      <p:sp>
+        <p:nvSpPr>
+          <p:cNvPr id="5" name="TextBox 4"/>
+          <p:cNvSpPr txBox="1"/>
+          <p:nvPr/>
+        </p:nvSpPr>
+        <p:spPr>
+          <a:xfrm>
+            <a:off x="502920" y="603504"/>
+            <a:ext cx="11064240" cy="530352"/>
+          </a:xfrm>
+          <a:prstGeom prst="rect">
+            <a:avLst/>
+          </a:prstGeom>
+          <a:noFill/>
+        </p:spPr>
+        <p:txBody>
+          <a:bodyPr wrap="square" lIns="45720" rIns="45720" tIns="36576" bIns="36576" anchor="t">
+            <a:spAutoFit/>
+          </a:bodyPr>
+          <a:lstStyle/>
+          <a:p>
+            <a:pPr algn="l">
+              <a:defRPr sz="2800" b="1">
+                <a:solidFill>
+                  <a:srgbClr val="1C2330"/>
+                </a:solidFill>
+                <a:latin typeface="Aptos"/>
+              </a:defRPr>
+            </a:pPr>
+            <a:r>
+              <a:t>Cierre y defensa</a:t>
+            </a:r>
+          </a:p>
+        </p:txBody>
+      </p:sp>
+      <p:sp>
+        <p:nvSpPr>
+          <p:cNvPr id="6" name="Rectangle 5"/>
+          <p:cNvSpPr/>
+          <p:nvPr/>
+        </p:nvSpPr>
+        <p:spPr>
+          <a:xfrm>
+            <a:off x="0" y="6601968"/>
+            <a:ext cx="12191695" cy="256032"/>
+          </a:xfrm>
+          <a:prstGeom prst="rect">
+            <a:avLst/>
+          </a:prstGeom>
+          <a:solidFill>
+            <a:srgbClr val="2F5BA8"/>
+          </a:solidFill>
+          <a:ln>
+            <a:noFill/>
+          </a:ln>
+        </p:spPr>
+        <p:style>
+          <a:lnRef idx="1">
+            <a:schemeClr val="accent1"/>
+          </a:lnRef>
+          <a:fillRef idx="3">
+            <a:schemeClr val="accent1"/>
+          </a:fillRef>
+          <a:effectRef idx="2">
+            <a:schemeClr val="accent1"/>
+          </a:effectRef>
+          <a:fontRef idx="minor">
+            <a:schemeClr val="lt1"/>
+          </a:fontRef>
+        </p:style>
+        <p:txBody>
+          <a:bodyPr rtlCol="0" anchor="ctr"/>
+          <a:lstStyle/>
+          <a:p>
+            <a:pPr algn="ctr"/>
+          </a:p>
+        </p:txBody>
+      </p:sp>
+      <p:sp>
+        <p:nvSpPr>
+          <p:cNvPr id="7" name="TextBox 6"/>
+          <p:cNvSpPr txBox="1"/>
+          <p:nvPr/>
+        </p:nvSpPr>
+        <p:spPr>
+          <a:xfrm>
+            <a:off x="411480" y="6629400"/>
+            <a:ext cx="11247120" cy="164592"/>
+          </a:xfrm>
+          <a:prstGeom prst="rect">
+            <a:avLst/>
+          </a:prstGeom>
+          <a:noFill/>
+        </p:spPr>
+        <p:txBody>
+          <a:bodyPr wrap="square" lIns="45720" rIns="45720" tIns="36576" bIns="36576" anchor="t">
+            <a:spAutoFit/>
+          </a:bodyPr>
+          <a:lstStyle/>
+          <a:p>
+            <a:pPr algn="l">
+              <a:defRPr sz="900" b="0">
+                <a:solidFill>
+                  <a:srgbClr val="FFFFFF"/>
+                </a:solidFill>
+                <a:latin typeface="Aptos"/>
+              </a:defRPr>
+            </a:pPr>
+            <a:r>
+              <a:t>MiniJarvis · 1.º DAW · Sesión 214 · H1</a:t>
+            </a:r>
+          </a:p>
+        </p:txBody>
+      </p:sp>
+      <p:sp>
+        <p:nvSpPr>
+          <p:cNvPr id="8" name="Rounded Rectangle 7"/>
+          <p:cNvSpPr/>
+          <p:nvPr/>
+        </p:nvSpPr>
+        <p:spPr>
+          <a:xfrm>
+            <a:off x="621792" y="1298448"/>
+            <a:ext cx="10927080" cy="1828800"/>
+          </a:xfrm>
+          <a:prstGeom prst="roundRect">
+            <a:avLst/>
+          </a:prstGeom>
+          <a:solidFill>
+            <a:srgbClr val="2F5BA8"/>
+          </a:solidFill>
+          <a:ln>
+            <a:solidFill>
+              <a:srgbClr val="2F5BA8"/>
+            </a:solidFill>
+          </a:ln>
+        </p:spPr>
+        <p:style>
+          <a:lnRef idx="1">
+            <a:schemeClr val="accent1"/>
+          </a:lnRef>
+          <a:fillRef idx="3">
+            <a:schemeClr val="accent1"/>
+          </a:fillRef>
+          <a:effectRef idx="2">
+            <a:schemeClr val="accent1"/>
+          </a:effectRef>
+          <a:fontRef idx="minor">
+            <a:schemeClr val="lt1"/>
+          </a:fontRef>
+        </p:style>
+        <p:txBody>
+          <a:bodyPr rtlCol="0" anchor="ctr"/>
+          <a:lstStyle/>
+          <a:p>
+            <a:pPr algn="ctr"/>
+          </a:p>
+        </p:txBody>
+      </p:sp>
+      <p:sp>
+        <p:nvSpPr>
+          <p:cNvPr id="9" name="TextBox 8"/>
+          <p:cNvSpPr txBox="1"/>
+          <p:nvPr/>
+        </p:nvSpPr>
+        <p:spPr>
+          <a:xfrm>
+            <a:off x="932688" y="1591056"/>
+            <a:ext cx="10241280" cy="256032"/>
+          </a:xfrm>
+          <a:prstGeom prst="rect">
+            <a:avLst/>
+          </a:prstGeom>
+          <a:noFill/>
+        </p:spPr>
+        <p:txBody>
+          <a:bodyPr wrap="square" lIns="45720" rIns="45720" tIns="36576" bIns="36576" anchor="t">
+            <a:spAutoFit/>
+          </a:bodyPr>
+          <a:lstStyle/>
+          <a:p>
+            <a:pPr algn="l">
+              <a:defRPr sz="1300" b="1">
+                <a:solidFill>
+                  <a:srgbClr val="FFFFFF"/>
+                </a:solidFill>
+                <a:latin typeface="Aptos"/>
+              </a:defRPr>
+            </a:pPr>
+            <a:r>
+              <a:t>PREGUNTA O DECISIÓN DE SALIDA</a:t>
+            </a:r>
+          </a:p>
+        </p:txBody>
+      </p:sp>
+      <p:sp>
+        <p:nvSpPr>
+          <p:cNvPr id="10" name="TextBox 9"/>
+          <p:cNvSpPr txBox="1"/>
+          <p:nvPr/>
+        </p:nvSpPr>
+        <p:spPr>
+          <a:xfrm>
+            <a:off x="932688" y="1975104"/>
+            <a:ext cx="10058400" cy="822960"/>
+          </a:xfrm>
+          <a:prstGeom prst="rect">
+            <a:avLst/>
+          </a:prstGeom>
+          <a:noFill/>
+        </p:spPr>
+        <p:txBody>
+          <a:bodyPr wrap="square" lIns="45720" rIns="45720" tIns="36576" bIns="36576" anchor="t">
+            <a:spAutoFit/>
+          </a:bodyPr>
+          <a:lstStyle/>
+          <a:p>
+            <a:pPr algn="l">
+              <a:defRPr sz="2500" b="1">
+                <a:solidFill>
+                  <a:srgbClr val="FFFFFF"/>
+                </a:solidFill>
+                <a:latin typeface="Aptos"/>
+              </a:defRPr>
+            </a:pPr>
+            <a:r>
+              <a:t>Intercambio: otro equipo intenta entender el README.</a:t>
+            </a:r>
+          </a:p>
+        </p:txBody>
+      </p:sp>
+      <p:sp>
+        <p:nvSpPr>
+          <p:cNvPr id="11" name="TextBox 10"/>
+          <p:cNvSpPr txBox="1"/>
+          <p:nvPr/>
+        </p:nvSpPr>
+        <p:spPr>
+          <a:xfrm>
+            <a:off x="749808" y="3886200"/>
+            <a:ext cx="10607040" cy="1280160"/>
+          </a:xfrm>
+          <a:prstGeom prst="rect">
+            <a:avLst/>
+          </a:prstGeom>
+          <a:noFill/>
+        </p:spPr>
+        <p:txBody>
+          <a:bodyPr wrap="square" lIns="45720" rIns="45720" tIns="36576" bIns="36576" anchor="ctr">
+            <a:spAutoFit/>
+          </a:bodyPr>
+          <a:lstStyle/>
+          <a:p>
             <a:pPr algn="ctr">
-              <a:defRPr sz="1800" b="1">
+              <a:defRPr sz="2300" b="1">
                 <a:solidFill>
                   <a:srgbClr val="247E5C"/>
                 </a:solidFill>
@@ -6569,7 +7564,7 @@
               </a:defRPr>
             </a:pPr>
             <a:r>
-              <a:t>La sesión termina cuando la evidencia existe, está comprobada y puedes defenderla.</a:t>
+              <a:t>La sesión termina cuando la evidencia existe, está comprobada y puede defenderse.</a:t>
             </a:r>
           </a:p>
         </p:txBody>

--- a/02-PROFESORADO/03-PRESENTACIONES/POR-SESION/h1/S214-readme-y-evidencia-de-ejecucion-presentacion.pptx
+++ b/02-PROFESORADO/03-PRESENTACIONES/POR-SESION/h1/S214-readme-y-evidencia-de-ejecucion-presentacion.pptx
@@ -6,13 +6,14 @@
   </p:sldMasterIdLst>
   <p:sldIdLst>
     <p:sldId id="256" r:id="rId7"/>
-    <p:sldId id="257" r:id="rId8"/>
-    <p:sldId id="258" r:id="rId9"/>
-    <p:sldId id="259" r:id="rId10"/>
-    <p:sldId id="260" r:id="rId11"/>
-    <p:sldId id="261" r:id="rId12"/>
-    <p:sldId id="262" r:id="rId13"/>
-    <p:sldId id="263" r:id="rId14"/>
+    <p:sldId id="257" r:id="rId9"/>
+    <p:sldId id="258" r:id="rId10"/>
+    <p:sldId id="259" r:id="rId11"/>
+    <p:sldId id="260" r:id="rId12"/>
+    <p:sldId id="261" r:id="rId13"/>
+    <p:sldId id="262" r:id="rId14"/>
+    <p:sldId id="263" r:id="rId15"/>
+    <p:sldId id="264" r:id="rId16"/>
   </p:sldIdLst>
   <p:sldSz cx="12191695" cy="6858000" type="screen4x3"/>
   <p:notesSz cx="6858000" cy="9144000"/>
@@ -112,6 +113,1326 @@
     </a:lvl9pPr>
   </p:defaultTextStyle>
 </p:presentation>
+</file>
+
+<file path=ppt/notesMasters/notesMaster1.xml><?xml version="1.0" encoding="utf-8"?>
+<p:notesMaster xmlns:a="http://schemas.openxmlformats.org/drawingml/2006/main" xmlns:p="http://schemas.openxmlformats.org/presentationml/2006/main" xmlns:r="http://schemas.openxmlformats.org/officeDocument/2006/relationships">
+  <p:cSld>
+    <p:bg>
+      <p:bgRef idx="1001">
+        <a:schemeClr val="bg1"/>
+      </p:bgRef>
+    </p:bg>
+    <p:spTree>
+      <p:nvGrpSpPr>
+        <p:cNvPr id="1" name=""/>
+        <p:cNvGrpSpPr/>
+        <p:nvPr/>
+      </p:nvGrpSpPr>
+      <p:grpSpPr>
+        <a:xfrm>
+          <a:off x="0" y="0"/>
+          <a:ext cx="0" cy="0"/>
+          <a:chOff x="0" y="0"/>
+          <a:chExt cx="0" cy="0"/>
+        </a:xfrm>
+      </p:grpSpPr>
+      <p:sp>
+        <p:nvSpPr>
+          <p:cNvPr id="2" name="Header Placeholder 1"/>
+          <p:cNvSpPr>
+            <a:spLocks noGrp="1"/>
+          </p:cNvSpPr>
+          <p:nvPr>
+            <p:ph type="hdr" sz="quarter"/>
+          </p:nvPr>
+        </p:nvSpPr>
+        <p:spPr>
+          <a:xfrm>
+            <a:off x="0" y="0"/>
+            <a:ext cx="2971800" cy="457200"/>
+          </a:xfrm>
+          <a:prstGeom prst="rect">
+            <a:avLst/>
+          </a:prstGeom>
+        </p:spPr>
+        <p:txBody>
+          <a:bodyPr vert="horz" lIns="91440" tIns="45720" rIns="91440" bIns="45720" rtlCol="0"/>
+          <a:lstStyle>
+            <a:lvl1pPr algn="l">
+              <a:defRPr sz="1200"/>
+            </a:lvl1pPr>
+          </a:lstStyle>
+          <a:p>
+            <a:endParaRPr lang="en-US"/>
+          </a:p>
+        </p:txBody>
+      </p:sp>
+      <p:sp>
+        <p:nvSpPr>
+          <p:cNvPr id="3" name="Date Placeholder 2"/>
+          <p:cNvSpPr>
+            <a:spLocks noGrp="1"/>
+          </p:cNvSpPr>
+          <p:nvPr>
+            <p:ph type="dt" idx="1"/>
+          </p:nvPr>
+        </p:nvSpPr>
+        <p:spPr>
+          <a:xfrm>
+            <a:off x="3884613" y="0"/>
+            <a:ext cx="2971800" cy="457200"/>
+          </a:xfrm>
+          <a:prstGeom prst="rect">
+            <a:avLst/>
+          </a:prstGeom>
+        </p:spPr>
+        <p:txBody>
+          <a:bodyPr vert="horz" lIns="91440" tIns="45720" rIns="91440" bIns="45720" rtlCol="0"/>
+          <a:lstStyle>
+            <a:lvl1pPr algn="r">
+              <a:defRPr sz="1200"/>
+            </a:lvl1pPr>
+          </a:lstStyle>
+          <a:p>
+            <a:fld id="{0F89C1C7-3DCD-1040-A9CF-14679D8B5DDD}" type="datetimeFigureOut">
+              <a:rPr lang="en-US" smtClean="0"/>
+              <a:t>10/17/16</a:t>
+            </a:fld>
+            <a:endParaRPr lang="en-US"/>
+          </a:p>
+        </p:txBody>
+      </p:sp>
+      <p:sp>
+        <p:nvSpPr>
+          <p:cNvPr id="4" name="Slide Image Placeholder 3"/>
+          <p:cNvSpPr>
+            <a:spLocks noGrp="1" noRot="1" noChangeAspect="1"/>
+          </p:cNvSpPr>
+          <p:nvPr>
+            <p:ph type="sldImg" idx="2"/>
+          </p:nvPr>
+        </p:nvSpPr>
+        <p:spPr>
+          <a:xfrm>
+            <a:off x="1143000" y="685800"/>
+            <a:ext cx="4572000" cy="3429000"/>
+          </a:xfrm>
+          <a:prstGeom prst="rect">
+            <a:avLst/>
+          </a:prstGeom>
+          <a:noFill/>
+          <a:ln w="12700">
+            <a:solidFill>
+              <a:prstClr val="black"/>
+            </a:solidFill>
+          </a:ln>
+        </p:spPr>
+        <p:txBody>
+          <a:bodyPr vert="horz" lIns="91440" tIns="45720" rIns="91440" bIns="45720" rtlCol="0" anchor="ctr"/>
+          <a:lstStyle/>
+          <a:p>
+            <a:endParaRPr lang="en-US"/>
+          </a:p>
+        </p:txBody>
+      </p:sp>
+      <p:sp>
+        <p:nvSpPr>
+          <p:cNvPr id="5" name="Notes Placeholder 4"/>
+          <p:cNvSpPr>
+            <a:spLocks noGrp="1"/>
+          </p:cNvSpPr>
+          <p:nvPr>
+            <p:ph type="body" sz="quarter" idx="3"/>
+          </p:nvPr>
+        </p:nvSpPr>
+        <p:spPr>
+          <a:xfrm>
+            <a:off x="685800" y="4343400"/>
+            <a:ext cx="5486400" cy="4114800"/>
+          </a:xfrm>
+          <a:prstGeom prst="rect">
+            <a:avLst/>
+          </a:prstGeom>
+        </p:spPr>
+        <p:txBody>
+          <a:bodyPr vert="horz" lIns="91440" tIns="45720" rIns="91440" bIns="45720" rtlCol="0"/>
+          <a:lstStyle/>
+          <a:p>
+            <a:pPr lvl="0"/>
+            <a:r>
+              <a:rPr lang="en-US" smtClean="0"/>
+              <a:t>Click to edit Master text styles</a:t>
+            </a:r>
+          </a:p>
+          <a:p>
+            <a:pPr lvl="1"/>
+            <a:r>
+              <a:rPr lang="en-US" smtClean="0"/>
+              <a:t>Second level</a:t>
+            </a:r>
+          </a:p>
+          <a:p>
+            <a:pPr lvl="2"/>
+            <a:r>
+              <a:rPr lang="en-US" smtClean="0"/>
+              <a:t>Third level</a:t>
+            </a:r>
+          </a:p>
+          <a:p>
+            <a:pPr lvl="3"/>
+            <a:r>
+              <a:rPr lang="en-US" smtClean="0"/>
+              <a:t>Fourth level</a:t>
+            </a:r>
+          </a:p>
+          <a:p>
+            <a:pPr lvl="4"/>
+            <a:r>
+              <a:rPr lang="en-US" smtClean="0"/>
+              <a:t>Fifth level</a:t>
+            </a:r>
+            <a:endParaRPr lang="en-US"/>
+          </a:p>
+        </p:txBody>
+      </p:sp>
+      <p:sp>
+        <p:nvSpPr>
+          <p:cNvPr id="6" name="Footer Placeholder 5"/>
+          <p:cNvSpPr>
+            <a:spLocks noGrp="1"/>
+          </p:cNvSpPr>
+          <p:nvPr>
+            <p:ph type="ftr" sz="quarter" idx="4"/>
+          </p:nvPr>
+        </p:nvSpPr>
+        <p:spPr>
+          <a:xfrm>
+            <a:off x="0" y="8685213"/>
+            <a:ext cx="2971800" cy="457200"/>
+          </a:xfrm>
+          <a:prstGeom prst="rect">
+            <a:avLst/>
+          </a:prstGeom>
+        </p:spPr>
+        <p:txBody>
+          <a:bodyPr vert="horz" lIns="91440" tIns="45720" rIns="91440" bIns="45720" rtlCol="0" anchor="b"/>
+          <a:lstStyle>
+            <a:lvl1pPr algn="l">
+              <a:defRPr sz="1200"/>
+            </a:lvl1pPr>
+          </a:lstStyle>
+          <a:p>
+            <a:endParaRPr lang="en-US"/>
+          </a:p>
+        </p:txBody>
+      </p:sp>
+      <p:sp>
+        <p:nvSpPr>
+          <p:cNvPr id="7" name="Slide Number Placeholder 6"/>
+          <p:cNvSpPr>
+            <a:spLocks noGrp="1"/>
+          </p:cNvSpPr>
+          <p:nvPr>
+            <p:ph type="sldNum" sz="quarter" idx="5"/>
+          </p:nvPr>
+        </p:nvSpPr>
+        <p:spPr>
+          <a:xfrm>
+            <a:off x="3884613" y="8685213"/>
+            <a:ext cx="2971800" cy="457200"/>
+          </a:xfrm>
+          <a:prstGeom prst="rect">
+            <a:avLst/>
+          </a:prstGeom>
+        </p:spPr>
+        <p:txBody>
+          <a:bodyPr vert="horz" lIns="91440" tIns="45720" rIns="91440" bIns="45720" rtlCol="0" anchor="b"/>
+          <a:lstStyle>
+            <a:lvl1pPr algn="r">
+              <a:defRPr sz="1200"/>
+            </a:lvl1pPr>
+          </a:lstStyle>
+          <a:p>
+            <a:fld id="{BB5E49A5-4136-284D-997B-48E1D791AD67}" type="slidenum">
+              <a:rPr lang="en-US" smtClean="0"/>
+              <a:t>‹#›</a:t>
+            </a:fld>
+            <a:endParaRPr lang="en-US"/>
+          </a:p>
+        </p:txBody>
+      </p:sp>
+    </p:spTree>
+    <p:extLst>
+      <p:ext uri="{BB962C8B-B14F-4D97-AF65-F5344CB8AC3E}">
+        <p14:creationId xmlns:p14="http://schemas.microsoft.com/office/powerpoint/2010/main" val="2623252185"/>
+      </p:ext>
+    </p:extLst>
+  </p:cSld>
+  <p:clrMap bg1="lt1" tx1="dk1" bg2="lt2" tx2="dk2" accent1="accent1" accent2="accent2" accent3="accent3" accent4="accent4" accent5="accent5" accent6="accent6" hlink="hlink" folHlink="folHlink"/>
+  <p:notesStyle>
+    <a:lvl1pPr marL="0" algn="l" defTabSz="457200" rtl="0" eaLnBrk="1" latinLnBrk="0" hangingPunct="1">
+      <a:defRPr sz="1200" kern="1200">
+        <a:solidFill>
+          <a:schemeClr val="tx1"/>
+        </a:solidFill>
+        <a:latin typeface="+mn-lt"/>
+        <a:ea typeface="+mn-ea"/>
+        <a:cs typeface="+mn-cs"/>
+      </a:defRPr>
+    </a:lvl1pPr>
+    <a:lvl2pPr marL="457200" algn="l" defTabSz="457200" rtl="0" eaLnBrk="1" latinLnBrk="0" hangingPunct="1">
+      <a:defRPr sz="1200" kern="1200">
+        <a:solidFill>
+          <a:schemeClr val="tx1"/>
+        </a:solidFill>
+        <a:latin typeface="+mn-lt"/>
+        <a:ea typeface="+mn-ea"/>
+        <a:cs typeface="+mn-cs"/>
+      </a:defRPr>
+    </a:lvl2pPr>
+    <a:lvl3pPr marL="914400" algn="l" defTabSz="457200" rtl="0" eaLnBrk="1" latinLnBrk="0" hangingPunct="1">
+      <a:defRPr sz="1200" kern="1200">
+        <a:solidFill>
+          <a:schemeClr val="tx1"/>
+        </a:solidFill>
+        <a:latin typeface="+mn-lt"/>
+        <a:ea typeface="+mn-ea"/>
+        <a:cs typeface="+mn-cs"/>
+      </a:defRPr>
+    </a:lvl3pPr>
+    <a:lvl4pPr marL="1371600" algn="l" defTabSz="457200" rtl="0" eaLnBrk="1" latinLnBrk="0" hangingPunct="1">
+      <a:defRPr sz="1200" kern="1200">
+        <a:solidFill>
+          <a:schemeClr val="tx1"/>
+        </a:solidFill>
+        <a:latin typeface="+mn-lt"/>
+        <a:ea typeface="+mn-ea"/>
+        <a:cs typeface="+mn-cs"/>
+      </a:defRPr>
+    </a:lvl4pPr>
+    <a:lvl5pPr marL="1828800" algn="l" defTabSz="457200" rtl="0" eaLnBrk="1" latinLnBrk="0" hangingPunct="1">
+      <a:defRPr sz="1200" kern="1200">
+        <a:solidFill>
+          <a:schemeClr val="tx1"/>
+        </a:solidFill>
+        <a:latin typeface="+mn-lt"/>
+        <a:ea typeface="+mn-ea"/>
+        <a:cs typeface="+mn-cs"/>
+      </a:defRPr>
+    </a:lvl5pPr>
+    <a:lvl6pPr marL="2286000" algn="l" defTabSz="457200" rtl="0" eaLnBrk="1" latinLnBrk="0" hangingPunct="1">
+      <a:defRPr sz="1200" kern="1200">
+        <a:solidFill>
+          <a:schemeClr val="tx1"/>
+        </a:solidFill>
+        <a:latin typeface="+mn-lt"/>
+        <a:ea typeface="+mn-ea"/>
+        <a:cs typeface="+mn-cs"/>
+      </a:defRPr>
+    </a:lvl6pPr>
+    <a:lvl7pPr marL="2743200" algn="l" defTabSz="457200" rtl="0" eaLnBrk="1" latinLnBrk="0" hangingPunct="1">
+      <a:defRPr sz="1200" kern="1200">
+        <a:solidFill>
+          <a:schemeClr val="tx1"/>
+        </a:solidFill>
+        <a:latin typeface="+mn-lt"/>
+        <a:ea typeface="+mn-ea"/>
+        <a:cs typeface="+mn-cs"/>
+      </a:defRPr>
+    </a:lvl7pPr>
+    <a:lvl8pPr marL="3200400" algn="l" defTabSz="457200" rtl="0" eaLnBrk="1" latinLnBrk="0" hangingPunct="1">
+      <a:defRPr sz="1200" kern="1200">
+        <a:solidFill>
+          <a:schemeClr val="tx1"/>
+        </a:solidFill>
+        <a:latin typeface="+mn-lt"/>
+        <a:ea typeface="+mn-ea"/>
+        <a:cs typeface="+mn-cs"/>
+      </a:defRPr>
+    </a:lvl8pPr>
+    <a:lvl9pPr marL="3657600" algn="l" defTabSz="457200" rtl="0" eaLnBrk="1" latinLnBrk="0" hangingPunct="1">
+      <a:defRPr sz="1200" kern="1200">
+        <a:solidFill>
+          <a:schemeClr val="tx1"/>
+        </a:solidFill>
+        <a:latin typeface="+mn-lt"/>
+        <a:ea typeface="+mn-ea"/>
+        <a:cs typeface="+mn-cs"/>
+      </a:defRPr>
+    </a:lvl9pPr>
+  </p:notesStyle>
+</p:notesMaster>
+</file>
+
+<file path=ppt/notesSlides/notesSlide1.xml><?xml version="1.0" encoding="utf-8"?>
+<p:notes xmlns:a="http://schemas.openxmlformats.org/drawingml/2006/main" xmlns:p="http://schemas.openxmlformats.org/presentationml/2006/main" xmlns:r="http://schemas.openxmlformats.org/officeDocument/2006/relationships">
+  <p:cSld>
+    <p:spTree>
+      <p:nvGrpSpPr>
+        <p:cNvPr id="1" name=""/>
+        <p:cNvGrpSpPr/>
+        <p:nvPr/>
+      </p:nvGrpSpPr>
+      <p:grpSpPr>
+        <a:xfrm>
+          <a:off x="0" y="0"/>
+          <a:ext cx="0" cy="0"/>
+          <a:chOff x="0" y="0"/>
+          <a:chExt cx="0" cy="0"/>
+        </a:xfrm>
+      </p:grpSpPr>
+      <p:sp>
+        <p:nvSpPr>
+          <p:cNvPr id="2" name="Slide Image Placeholder 1"/>
+          <p:cNvSpPr>
+            <a:spLocks noGrp="1"/>
+          </p:cNvSpPr>
+          <p:nvPr>
+            <p:ph type="sldImg" idx="2"/>
+          </p:nvPr>
+        </p:nvSpPr>
+        <p:spPr/>
+      </p:sp>
+      <p:sp>
+        <p:nvSpPr>
+          <p:cNvPr id="3" name="Notes Placeholder 2"/>
+          <p:cNvSpPr>
+            <a:spLocks noGrp="1"/>
+          </p:cNvSpPr>
+          <p:nvPr>
+            <p:ph type="body" idx="3" sz="quarter"/>
+          </p:nvPr>
+        </p:nvSpPr>
+        <p:spPr/>
+        <p:txBody>
+          <a:bodyPr/>
+          <a:lstStyle/>
+          <a:p>
+            <a:r>
+              <a:t>Objetivo docente: Documentar H1 y seleccionar evidencias verificables sin duplicar el diario.</a:t>
+            </a:r>
+          </a:p>
+          <a:p>
+            <a:r>
+              <a:t>Diapositiva 1 de 9: README, evidencia y Site</a:t>
+            </a:r>
+          </a:p>
+          <a:p>
+            <a:r>
+              <a:t>Fase HEXA: Comunicar — evaluar y reflexionar</a:t>
+            </a:r>
+          </a:p>
+          <a:p>
+            <a:r>
+              <a:t>Presenta el producto y anticipa la evidencia: Quede H1 listo para defensa.</a:t>
+            </a:r>
+          </a:p>
+          <a:p>
+            <a:r>
+              <a:t>Secuencia docente:</a:t>
+            </a:r>
+          </a:p>
+          <a:p>
+            <a:r>
+              <a:t>- 00:00–00:05 / D1: COMUNICAR: Plantea la prueba de usuario de la documentación.</a:t>
+            </a:r>
+          </a:p>
+          <a:p>
+            <a:r>
+              <a:t>- 00:05–00:11 / D2: PÍLDORA DOCENTE 1/3: Explica estructura mínima sin inventar secciones nuevas ajenas a las plantillas.</a:t>
+            </a:r>
+          </a:p>
+          <a:p>
+            <a:r>
+              <a:t>- 00:11–00:16 / D3: PÍLDORA DOCENTE 2/3: Explica trazabilidad y enlace profundo.</a:t>
+            </a:r>
+          </a:p>
+          <a:p>
+            <a:r>
+              <a:t>- 00:16–00:22 / D4: PÍLDORA DOCENTE 3/3: Explica funciones y privacidad. El Site no es copia del diario.</a:t>
+            </a:r>
+          </a:p>
+          <a:p>
+            <a:r>
+              <a:t>- 00:22–00:36 / D5: ACTIVIDAD: Circula por mesas y pide a una persona explicar un enlace concreto.</a:t>
+            </a:r>
+          </a:p>
+          <a:p>
+            <a:r>
+              <a:t>- 00:36–00:41 / D6: PRUEBA DE USUARIO: Organiza intercambio.</a:t>
+            </a:r>
+          </a:p>
+          <a:p>
+            <a:r>
+              <a:t>- 00:41–00:45 / D7: CIERRE: Cierra con privacidad y accesibilidad de enlaces.</a:t>
+            </a:r>
+          </a:p>
+          <a:p>
+            <a:r>
+              <a:t>Claves docentes:</a:t>
+            </a:r>
+          </a:p>
+          <a:p>
+            <a:r>
+              <a:t>- PÍLDORA DOCENTE 1/3: Explica estructura mínima sin inventar secciones nuevas ajenas a las plantillas, PÍLDORA DOCENTE 2/3: Explica trazabilidad y enlace profundo, PÍLDORA DOCENTE 3/3: Explica funciones y privacidad. El Site no es copia del diario.</a:t>
+            </a:r>
+          </a:p>
+          <a:p>
+            <a:r>
+              <a:t>Fuente docente: /mnt/compartido/Programación-26-27/Minijarvis/02-PROFESORADO/02-SESIONES/h1/S214-readme-y-evidencia-de-ejecucion-docente.md</a:t>
+            </a:r>
+          </a:p>
+        </p:txBody>
+      </p:sp>
+      <p:sp>
+        <p:nvSpPr>
+          <p:cNvPr id="4" name="Slide Number Placeholder 3"/>
+          <p:cNvSpPr>
+            <a:spLocks noGrp="1"/>
+          </p:cNvSpPr>
+          <p:nvPr>
+            <p:ph type="sldNum" idx="5" sz="quarter"/>
+          </p:nvPr>
+        </p:nvSpPr>
+        <p:spPr/>
+      </p:sp>
+    </p:spTree>
+  </p:cSld>
+  <p:clrMapOvr>
+    <a:masterClrMapping/>
+  </p:clrMapOvr>
+</p:notes>
+</file>
+
+<file path=ppt/notesSlides/notesSlide2.xml><?xml version="1.0" encoding="utf-8"?>
+<p:notes xmlns:a="http://schemas.openxmlformats.org/drawingml/2006/main" xmlns:p="http://schemas.openxmlformats.org/presentationml/2006/main" xmlns:r="http://schemas.openxmlformats.org/officeDocument/2006/relationships">
+  <p:cSld>
+    <p:spTree>
+      <p:nvGrpSpPr>
+        <p:cNvPr id="1" name=""/>
+        <p:cNvGrpSpPr/>
+        <p:nvPr/>
+      </p:nvGrpSpPr>
+      <p:grpSpPr>
+        <a:xfrm>
+          <a:off x="0" y="0"/>
+          <a:ext cx="0" cy="0"/>
+          <a:chOff x="0" y="0"/>
+          <a:chExt cx="0" cy="0"/>
+        </a:xfrm>
+      </p:grpSpPr>
+      <p:sp>
+        <p:nvSpPr>
+          <p:cNvPr id="2" name="Slide Image Placeholder 1"/>
+          <p:cNvSpPr>
+            <a:spLocks noGrp="1"/>
+          </p:cNvSpPr>
+          <p:nvPr>
+            <p:ph type="sldImg" idx="2"/>
+          </p:nvPr>
+        </p:nvSpPr>
+        <p:spPr/>
+      </p:sp>
+      <p:sp>
+        <p:nvSpPr>
+          <p:cNvPr id="3" name="Notes Placeholder 2"/>
+          <p:cNvSpPr>
+            <a:spLocks noGrp="1"/>
+          </p:cNvSpPr>
+          <p:nvPr>
+            <p:ph type="body" idx="3" sz="quarter"/>
+          </p:nvPr>
+        </p:nvSpPr>
+        <p:spPr/>
+        <p:txBody>
+          <a:bodyPr/>
+          <a:lstStyle/>
+          <a:p>
+            <a:r>
+              <a:t>Objetivo docente: Documentar H1 y seleccionar evidencias verificables sin duplicar el diario.</a:t>
+            </a:r>
+          </a:p>
+          <a:p>
+            <a:r>
+              <a:t>Diapositiva 2 de 9: Qué debe conseguirse</a:t>
+            </a:r>
+          </a:p>
+          <a:p>
+            <a:r>
+              <a:t>Fase HEXA: Comunicar — evaluar y reflexionar</a:t>
+            </a:r>
+          </a:p>
+          <a:p>
+            <a:r>
+              <a:t>- Objetivo: Documentar H1 y seleccionar evidencias verificables sin duplicar el diario.</a:t>
+            </a:r>
+          </a:p>
+          <a:p>
+            <a:r>
+              <a:t>- Al terminar: señala la evidencia, explica qué demuestra y reproduce la prueba.</a:t>
+            </a:r>
+          </a:p>
+          <a:p>
+            <a:r>
+              <a:t>Fuente docente: /mnt/compartido/Programación-26-27/Minijarvis/02-PROFESORADO/02-SESIONES/h1/S214-readme-y-evidencia-de-ejecucion-docente.md</a:t>
+            </a:r>
+          </a:p>
+        </p:txBody>
+      </p:sp>
+      <p:sp>
+        <p:nvSpPr>
+          <p:cNvPr id="4" name="Slide Number Placeholder 3"/>
+          <p:cNvSpPr>
+            <a:spLocks noGrp="1"/>
+          </p:cNvSpPr>
+          <p:nvPr>
+            <p:ph type="sldNum" idx="5" sz="quarter"/>
+          </p:nvPr>
+        </p:nvSpPr>
+        <p:spPr/>
+      </p:sp>
+    </p:spTree>
+  </p:cSld>
+  <p:clrMapOvr>
+    <a:masterClrMapping/>
+  </p:clrMapOvr>
+</p:notes>
+</file>
+
+<file path=ppt/notesSlides/notesSlide3.xml><?xml version="1.0" encoding="utf-8"?>
+<p:notes xmlns:a="http://schemas.openxmlformats.org/drawingml/2006/main" xmlns:p="http://schemas.openxmlformats.org/presentationml/2006/main" xmlns:r="http://schemas.openxmlformats.org/officeDocument/2006/relationships">
+  <p:cSld>
+    <p:spTree>
+      <p:nvGrpSpPr>
+        <p:cNvPr id="1" name=""/>
+        <p:cNvGrpSpPr/>
+        <p:nvPr/>
+      </p:nvGrpSpPr>
+      <p:grpSpPr>
+        <a:xfrm>
+          <a:off x="0" y="0"/>
+          <a:ext cx="0" cy="0"/>
+          <a:chOff x="0" y="0"/>
+          <a:chExt cx="0" cy="0"/>
+        </a:xfrm>
+      </p:grpSpPr>
+      <p:sp>
+        <p:nvSpPr>
+          <p:cNvPr id="2" name="Slide Image Placeholder 1"/>
+          <p:cNvSpPr>
+            <a:spLocks noGrp="1"/>
+          </p:cNvSpPr>
+          <p:nvPr>
+            <p:ph type="sldImg" idx="2"/>
+          </p:nvPr>
+        </p:nvSpPr>
+        <p:spPr/>
+      </p:sp>
+      <p:sp>
+        <p:nvSpPr>
+          <p:cNvPr id="3" name="Notes Placeholder 2"/>
+          <p:cNvSpPr>
+            <a:spLocks noGrp="1"/>
+          </p:cNvSpPr>
+          <p:nvPr>
+            <p:ph type="body" idx="3" sz="quarter"/>
+          </p:nvPr>
+        </p:nvSpPr>
+        <p:spPr/>
+        <p:txBody>
+          <a:bodyPr/>
+          <a:lstStyle/>
+          <a:p>
+            <a:r>
+              <a:t>Objetivo docente: Documentar H1 y seleccionar evidencias verificables sin duplicar el diario.</a:t>
+            </a:r>
+          </a:p>
+          <a:p>
+            <a:r>
+              <a:t>Diapositiva 3 de 9: Ejemplo o demostración · 1</a:t>
+            </a:r>
+          </a:p>
+          <a:p>
+            <a:r>
+              <a:t>Fase HEXA: Comunicar — evaluar y reflexionar</a:t>
+            </a:r>
+          </a:p>
+          <a:p>
+            <a:r>
+              <a:t>Modela el ejemplo sin resolver la actividad completa; pide una predicción antes de ejecutar.</a:t>
+            </a:r>
+          </a:p>
+          <a:p>
+            <a:r>
+              <a:t>- D1 · ¿Podría otra persona entender tu proyecto sin ti? — README + evidencia + enlaces claros convierten “funciona” en algo verificable.</a:t>
+            </a:r>
+          </a:p>
+          <a:p>
+            <a:r>
+              <a:t>- D2 · README mínimo de H1 — QUÉ HACE: alcance real / y limitaciones \| CÓMO EJECUTAR: pasos suficientes / para reproducir \| EJEMPLO: entrada + salida / verificables</a:t>
+            </a:r>
+          </a:p>
+          <a:p>
+            <a:r>
+              <a:t>- D3 · Una evidencia debe demostrar algo — DÉBIL: “Funciona.”</a:t>
+            </a:r>
+          </a:p>
+          <a:p>
+            <a:r>
+              <a:t>- Enlace a una carpeta general. \| VERIFICABLE: entrada usada</a:t>
+            </a:r>
+          </a:p>
+          <a:p>
+            <a:r>
+              <a:t>- salida observada</a:t>
+            </a:r>
+          </a:p>
+          <a:p>
+            <a:r>
+              <a:t>Fuente docente: /mnt/compartido/Programación-26-27/Minijarvis/02-PROFESORADO/02-SESIONES/h1/S214-readme-y-evidencia-de-ejecucion-docente.md</a:t>
+            </a:r>
+          </a:p>
+        </p:txBody>
+      </p:sp>
+      <p:sp>
+        <p:nvSpPr>
+          <p:cNvPr id="4" name="Slide Number Placeholder 3"/>
+          <p:cNvSpPr>
+            <a:spLocks noGrp="1"/>
+          </p:cNvSpPr>
+          <p:nvPr>
+            <p:ph type="sldNum" idx="5" sz="quarter"/>
+          </p:nvPr>
+        </p:nvSpPr>
+        <p:spPr/>
+      </p:sp>
+    </p:spTree>
+  </p:cSld>
+  <p:clrMapOvr>
+    <a:masterClrMapping/>
+  </p:clrMapOvr>
+</p:notes>
+</file>
+
+<file path=ppt/notesSlides/notesSlide4.xml><?xml version="1.0" encoding="utf-8"?>
+<p:notes xmlns:a="http://schemas.openxmlformats.org/drawingml/2006/main" xmlns:p="http://schemas.openxmlformats.org/presentationml/2006/main" xmlns:r="http://schemas.openxmlformats.org/officeDocument/2006/relationships">
+  <p:cSld>
+    <p:spTree>
+      <p:nvGrpSpPr>
+        <p:cNvPr id="1" name=""/>
+        <p:cNvGrpSpPr/>
+        <p:nvPr/>
+      </p:nvGrpSpPr>
+      <p:grpSpPr>
+        <a:xfrm>
+          <a:off x="0" y="0"/>
+          <a:ext cx="0" cy="0"/>
+          <a:chOff x="0" y="0"/>
+          <a:chExt cx="0" cy="0"/>
+        </a:xfrm>
+      </p:grpSpPr>
+      <p:sp>
+        <p:nvSpPr>
+          <p:cNvPr id="2" name="Slide Image Placeholder 1"/>
+          <p:cNvSpPr>
+            <a:spLocks noGrp="1"/>
+          </p:cNvSpPr>
+          <p:nvPr>
+            <p:ph type="sldImg" idx="2"/>
+          </p:nvPr>
+        </p:nvSpPr>
+        <p:spPr/>
+      </p:sp>
+      <p:sp>
+        <p:nvSpPr>
+          <p:cNvPr id="3" name="Notes Placeholder 2"/>
+          <p:cNvSpPr>
+            <a:spLocks noGrp="1"/>
+          </p:cNvSpPr>
+          <p:nvPr>
+            <p:ph type="body" idx="3" sz="quarter"/>
+          </p:nvPr>
+        </p:nvSpPr>
+        <p:spPr/>
+        <p:txBody>
+          <a:bodyPr/>
+          <a:lstStyle/>
+          <a:p>
+            <a:r>
+              <a:t>Objetivo docente: Documentar H1 y seleccionar evidencias verificables sin duplicar el diario.</a:t>
+            </a:r>
+          </a:p>
+          <a:p>
+            <a:r>
+              <a:t>Diapositiva 4 de 9: Ejemplo o demostración · 2</a:t>
+            </a:r>
+          </a:p>
+          <a:p>
+            <a:r>
+              <a:t>Fase HEXA: Comunicar — evaluar y reflexionar</a:t>
+            </a:r>
+          </a:p>
+          <a:p>
+            <a:r>
+              <a:t>Modela el ejemplo sin resolver la actividad completa; pide una predicción antes de ejecutar.</a:t>
+            </a:r>
+          </a:p>
+          <a:p>
+            <a:r>
+              <a:t>- enlace profundo</a:t>
+            </a:r>
+          </a:p>
+          <a:p>
+            <a:r>
+              <a:t>- qué demuestra</a:t>
+            </a:r>
+          </a:p>
+          <a:p>
+            <a:r>
+              <a:t>- D4 · Diario, Site personal y Site de equipo no son lo mismo DIARIO: Proceso individual: / objetivo, acción, prueba, bloqueo, siguiente paso. \| SITE PERSONAL:</a:t>
+            </a:r>
+          </a:p>
+          <a:p>
+            <a:r>
+              <a:t>- Selección razonada de evidencias + qué demuestran. \| SITE EQUIPO: Reto, decisiones, pruebas, review y retrospectiva.</a:t>
+            </a:r>
+          </a:p>
+          <a:p>
+            <a:r>
+              <a:t>Fuente docente: /mnt/compartido/Programación-26-27/Minijarvis/02-PROFESORADO/02-SESIONES/h1/S214-readme-y-evidencia-de-ejecucion-docente.md</a:t>
+            </a:r>
+          </a:p>
+        </p:txBody>
+      </p:sp>
+      <p:sp>
+        <p:nvSpPr>
+          <p:cNvPr id="4" name="Slide Number Placeholder 3"/>
+          <p:cNvSpPr>
+            <a:spLocks noGrp="1"/>
+          </p:cNvSpPr>
+          <p:nvPr>
+            <p:ph type="sldNum" idx="5" sz="quarter"/>
+          </p:nvPr>
+        </p:nvSpPr>
+        <p:spPr/>
+      </p:sp>
+    </p:spTree>
+  </p:cSld>
+  <p:clrMapOvr>
+    <a:masterClrMapping/>
+  </p:clrMapOvr>
+</p:notes>
+</file>
+
+<file path=ppt/notesSlides/notesSlide5.xml><?xml version="1.0" encoding="utf-8"?>
+<p:notes xmlns:a="http://schemas.openxmlformats.org/drawingml/2006/main" xmlns:p="http://schemas.openxmlformats.org/presentationml/2006/main" xmlns:r="http://schemas.openxmlformats.org/officeDocument/2006/relationships">
+  <p:cSld>
+    <p:spTree>
+      <p:nvGrpSpPr>
+        <p:cNvPr id="1" name=""/>
+        <p:cNvGrpSpPr/>
+        <p:nvPr/>
+      </p:nvGrpSpPr>
+      <p:grpSpPr>
+        <a:xfrm>
+          <a:off x="0" y="0"/>
+          <a:ext cx="0" cy="0"/>
+          <a:chOff x="0" y="0"/>
+          <a:chExt cx="0" cy="0"/>
+        </a:xfrm>
+      </p:grpSpPr>
+      <p:sp>
+        <p:nvSpPr>
+          <p:cNvPr id="2" name="Slide Image Placeholder 1"/>
+          <p:cNvSpPr>
+            <a:spLocks noGrp="1"/>
+          </p:cNvSpPr>
+          <p:nvPr>
+            <p:ph type="sldImg" idx="2"/>
+          </p:nvPr>
+        </p:nvSpPr>
+        <p:spPr/>
+      </p:sp>
+      <p:sp>
+        <p:nvSpPr>
+          <p:cNvPr id="3" name="Notes Placeholder 2"/>
+          <p:cNvSpPr>
+            <a:spLocks noGrp="1"/>
+          </p:cNvSpPr>
+          <p:nvPr>
+            <p:ph type="body" idx="3" sz="quarter"/>
+          </p:nvPr>
+        </p:nvSpPr>
+        <p:spPr/>
+        <p:txBody>
+          <a:bodyPr/>
+          <a:lstStyle/>
+          <a:p>
+            <a:r>
+              <a:t>Objetivo docente: Documentar H1 y seleccionar evidencias verificables sin duplicar el diario.</a:t>
+            </a:r>
+          </a:p>
+          <a:p>
+            <a:r>
+              <a:t>Diapositiva 5 de 9: Actividad central · 1</a:t>
+            </a:r>
+          </a:p>
+          <a:p>
+            <a:r>
+              <a:t>Fase HEXA: Comunicar — evaluar y reflexionar</a:t>
+            </a:r>
+          </a:p>
+          <a:p>
+            <a:r>
+              <a:t>Entrega la consigna, observa decisiones y pide una prueba reproducible.</a:t>
+            </a:r>
+          </a:p>
+          <a:p>
+            <a:r>
+              <a:t>- Predice antes de ejecutar cuando haya código.</a:t>
+            </a:r>
+          </a:p>
+          <a:p>
+            <a:r>
+              <a:t>- Realiza la micropráctica o modificación prevista.</a:t>
+            </a:r>
+          </a:p>
+          <a:p>
+            <a:r>
+              <a:t>- Prueba el caso normal y, cuando exista una decisión o conversión, también el caso alternativo o erróneo.</a:t>
+            </a:r>
+          </a:p>
+          <a:p>
+            <a:r>
+              <a:t>- Conserva el código o resultado en el repositorio o espacio indicado.</a:t>
+            </a:r>
+          </a:p>
+          <a:p>
+            <a:r>
+              <a:t>Fuente docente: /mnt/compartido/Programación-26-27/Minijarvis/02-PROFESORADO/02-SESIONES/h1/S214-readme-y-evidencia-de-ejecucion-docente.md</a:t>
+            </a:r>
+          </a:p>
+        </p:txBody>
+      </p:sp>
+      <p:sp>
+        <p:nvSpPr>
+          <p:cNvPr id="4" name="Slide Number Placeholder 3"/>
+          <p:cNvSpPr>
+            <a:spLocks noGrp="1"/>
+          </p:cNvSpPr>
+          <p:nvPr>
+            <p:ph type="sldNum" idx="5" sz="quarter"/>
+          </p:nvPr>
+        </p:nvSpPr>
+        <p:spPr/>
+      </p:sp>
+    </p:spTree>
+  </p:cSld>
+  <p:clrMapOvr>
+    <a:masterClrMapping/>
+  </p:clrMapOvr>
+</p:notes>
+</file>
+
+<file path=ppt/notesSlides/notesSlide6.xml><?xml version="1.0" encoding="utf-8"?>
+<p:notes xmlns:a="http://schemas.openxmlformats.org/drawingml/2006/main" xmlns:p="http://schemas.openxmlformats.org/presentationml/2006/main" xmlns:r="http://schemas.openxmlformats.org/officeDocument/2006/relationships">
+  <p:cSld>
+    <p:spTree>
+      <p:nvGrpSpPr>
+        <p:cNvPr id="1" name=""/>
+        <p:cNvGrpSpPr/>
+        <p:nvPr/>
+      </p:nvGrpSpPr>
+      <p:grpSpPr>
+        <a:xfrm>
+          <a:off x="0" y="0"/>
+          <a:ext cx="0" cy="0"/>
+          <a:chOff x="0" y="0"/>
+          <a:chExt cx="0" cy="0"/>
+        </a:xfrm>
+      </p:grpSpPr>
+      <p:sp>
+        <p:nvSpPr>
+          <p:cNvPr id="2" name="Slide Image Placeholder 1"/>
+          <p:cNvSpPr>
+            <a:spLocks noGrp="1"/>
+          </p:cNvSpPr>
+          <p:nvPr>
+            <p:ph type="sldImg" idx="2"/>
+          </p:nvPr>
+        </p:nvSpPr>
+        <p:spPr/>
+      </p:sp>
+      <p:sp>
+        <p:nvSpPr>
+          <p:cNvPr id="3" name="Notes Placeholder 2"/>
+          <p:cNvSpPr>
+            <a:spLocks noGrp="1"/>
+          </p:cNvSpPr>
+          <p:nvPr>
+            <p:ph type="body" idx="3" sz="quarter"/>
+          </p:nvPr>
+        </p:nvSpPr>
+        <p:spPr/>
+        <p:txBody>
+          <a:bodyPr/>
+          <a:lstStyle/>
+          <a:p>
+            <a:r>
+              <a:t>Objetivo docente: Documentar H1 y seleccionar evidencias verificables sin duplicar el diario.</a:t>
+            </a:r>
+          </a:p>
+          <a:p>
+            <a:r>
+              <a:t>Diapositiva 6 de 9: Actividad central · 2</a:t>
+            </a:r>
+          </a:p>
+          <a:p>
+            <a:r>
+              <a:t>Fase HEXA: Comunicar — evaluar y reflexionar</a:t>
+            </a:r>
+          </a:p>
+          <a:p>
+            <a:r>
+              <a:t>Entrega la consigna, observa decisiones y pide una prueba reproducible.</a:t>
+            </a:r>
+          </a:p>
+          <a:p>
+            <a:r>
+              <a:t>- Registra una sola entrada en el diario individual; no crees un informe paralelo.</a:t>
+            </a:r>
+          </a:p>
+          <a:p>
+            <a:r>
+              <a:t>- ¿Qué puedes señalar, explicar y probar al terminar este checkpoint?</a:t>
+            </a:r>
+          </a:p>
+          <a:p>
+            <a:r>
+              <a:t>Fuente docente: /mnt/compartido/Programación-26-27/Minijarvis/02-PROFESORADO/02-SESIONES/h1/S214-readme-y-evidencia-de-ejecucion-docente.md</a:t>
+            </a:r>
+          </a:p>
+        </p:txBody>
+      </p:sp>
+      <p:sp>
+        <p:nvSpPr>
+          <p:cNvPr id="4" name="Slide Number Placeholder 3"/>
+          <p:cNvSpPr>
+            <a:spLocks noGrp="1"/>
+          </p:cNvSpPr>
+          <p:nvPr>
+            <p:ph type="sldNum" idx="5" sz="quarter"/>
+          </p:nvPr>
+        </p:nvSpPr>
+        <p:spPr/>
+      </p:sp>
+    </p:spTree>
+  </p:cSld>
+  <p:clrMapOvr>
+    <a:masterClrMapping/>
+  </p:clrMapOvr>
+</p:notes>
+</file>
+
+<file path=ppt/notesSlides/notesSlide7.xml><?xml version="1.0" encoding="utf-8"?>
+<p:notes xmlns:a="http://schemas.openxmlformats.org/drawingml/2006/main" xmlns:p="http://schemas.openxmlformats.org/presentationml/2006/main" xmlns:r="http://schemas.openxmlformats.org/officeDocument/2006/relationships">
+  <p:cSld>
+    <p:spTree>
+      <p:nvGrpSpPr>
+        <p:cNvPr id="1" name=""/>
+        <p:cNvGrpSpPr/>
+        <p:nvPr/>
+      </p:nvGrpSpPr>
+      <p:grpSpPr>
+        <a:xfrm>
+          <a:off x="0" y="0"/>
+          <a:ext cx="0" cy="0"/>
+          <a:chOff x="0" y="0"/>
+          <a:chExt cx="0" cy="0"/>
+        </a:xfrm>
+      </p:grpSpPr>
+      <p:sp>
+        <p:nvSpPr>
+          <p:cNvPr id="2" name="Slide Image Placeholder 1"/>
+          <p:cNvSpPr>
+            <a:spLocks noGrp="1"/>
+          </p:cNvSpPr>
+          <p:nvPr>
+            <p:ph type="sldImg" idx="2"/>
+          </p:nvPr>
+        </p:nvSpPr>
+        <p:spPr/>
+      </p:sp>
+      <p:sp>
+        <p:nvSpPr>
+          <p:cNvPr id="3" name="Notes Placeholder 2"/>
+          <p:cNvSpPr>
+            <a:spLocks noGrp="1"/>
+          </p:cNvSpPr>
+          <p:nvPr>
+            <p:ph type="body" idx="3" sz="quarter"/>
+          </p:nvPr>
+        </p:nvSpPr>
+        <p:spPr/>
+        <p:txBody>
+          <a:bodyPr/>
+          <a:lstStyle/>
+          <a:p>
+            <a:r>
+              <a:t>Objetivo docente: Documentar H1 y seleccionar evidencias verificables sin duplicar el diario.</a:t>
+            </a:r>
+          </a:p>
+          <a:p>
+            <a:r>
+              <a:t>Diapositiva 7 de 9: Evidencia y comprobación</a:t>
+            </a:r>
+          </a:p>
+          <a:p>
+            <a:r>
+              <a:t>Fase HEXA: Comunicar — evaluar y reflexionar</a:t>
+            </a:r>
+          </a:p>
+          <a:p>
+            <a:r>
+              <a:t>Comprueba la evidencia en su fuente canónica: Quede H1 listo para defensa.</a:t>
+            </a:r>
+          </a:p>
+          <a:p>
+            <a:r>
+              <a:t>- conserva el código o la prueba en el lugar indicado por la sesión;</a:t>
+            </a:r>
+          </a:p>
+          <a:p>
+            <a:r>
+              <a:t>- añade una sola entrada al diario individual con prueba, bloqueo y siguiente paso;</a:t>
+            </a:r>
+          </a:p>
+          <a:p>
+            <a:r>
+              <a:t>- no copies la misma reflexión en otro documento; el Site personal seleccionará evidencias al cerrar H1.</a:t>
+            </a:r>
+          </a:p>
+          <a:p>
+            <a:r>
+              <a:t>Fuente docente: /mnt/compartido/Programación-26-27/Minijarvis/02-PROFESORADO/02-SESIONES/h1/S214-readme-y-evidencia-de-ejecucion-docente.md</a:t>
+            </a:r>
+          </a:p>
+        </p:txBody>
+      </p:sp>
+      <p:sp>
+        <p:nvSpPr>
+          <p:cNvPr id="4" name="Slide Number Placeholder 3"/>
+          <p:cNvSpPr>
+            <a:spLocks noGrp="1"/>
+          </p:cNvSpPr>
+          <p:nvPr>
+            <p:ph type="sldNum" idx="5" sz="quarter"/>
+          </p:nvPr>
+        </p:nvSpPr>
+        <p:spPr/>
+      </p:sp>
+    </p:spTree>
+  </p:cSld>
+  <p:clrMapOvr>
+    <a:masterClrMapping/>
+  </p:clrMapOvr>
+</p:notes>
+</file>
+
+<file path=ppt/notesSlides/notesSlide8.xml><?xml version="1.0" encoding="utf-8"?>
+<p:notes xmlns:a="http://schemas.openxmlformats.org/drawingml/2006/main" xmlns:p="http://schemas.openxmlformats.org/presentationml/2006/main" xmlns:r="http://schemas.openxmlformats.org/officeDocument/2006/relationships">
+  <p:cSld>
+    <p:spTree>
+      <p:nvGrpSpPr>
+        <p:cNvPr id="1" name=""/>
+        <p:cNvGrpSpPr/>
+        <p:nvPr/>
+      </p:nvGrpSpPr>
+      <p:grpSpPr>
+        <a:xfrm>
+          <a:off x="0" y="0"/>
+          <a:ext cx="0" cy="0"/>
+          <a:chOff x="0" y="0"/>
+          <a:chExt cx="0" cy="0"/>
+        </a:xfrm>
+      </p:grpSpPr>
+      <p:sp>
+        <p:nvSpPr>
+          <p:cNvPr id="2" name="Slide Image Placeholder 1"/>
+          <p:cNvSpPr>
+            <a:spLocks noGrp="1"/>
+          </p:cNvSpPr>
+          <p:nvPr>
+            <p:ph type="sldImg" idx="2"/>
+          </p:nvPr>
+        </p:nvSpPr>
+        <p:spPr/>
+      </p:sp>
+      <p:sp>
+        <p:nvSpPr>
+          <p:cNvPr id="3" name="Notes Placeholder 2"/>
+          <p:cNvSpPr>
+            <a:spLocks noGrp="1"/>
+          </p:cNvSpPr>
+          <p:nvPr>
+            <p:ph type="body" idx="3" sz="quarter"/>
+          </p:nvPr>
+        </p:nvSpPr>
+        <p:spPr/>
+        <p:txBody>
+          <a:bodyPr/>
+          <a:lstStyle/>
+          <a:p>
+            <a:r>
+              <a:t>Objetivo docente: Documentar H1 y seleccionar evidencias verificables sin duplicar el diario.</a:t>
+            </a:r>
+          </a:p>
+          <a:p>
+            <a:r>
+              <a:t>Diapositiva 8 de 9: Seguridad y uso responsable</a:t>
+            </a:r>
+          </a:p>
+          <a:p>
+            <a:r>
+              <a:t>Fase HEXA: Comunicar — evaluar y reflexionar</a:t>
+            </a:r>
+          </a:p>
+          <a:p>
+            <a:r>
+              <a:t>Recuerda estos límites antes de que el alumnado comparta o publique:</a:t>
+            </a:r>
+          </a:p>
+          <a:p>
+            <a:r>
+              <a:t>- Usa datos ficticios y no publiques credenciales ni información personal.</a:t>
+            </a:r>
+          </a:p>
+          <a:p>
+            <a:r>
+              <a:t>- Si utilizas IA de forma sustantiva, registra propósito, propuesta, cambios propios y validación en el registro de IA del hito.</a:t>
+            </a:r>
+          </a:p>
+          <a:p>
+            <a:r>
+              <a:t>Fuente docente: /mnt/compartido/Programación-26-27/Minijarvis/02-PROFESORADO/02-SESIONES/h1/S214-readme-y-evidencia-de-ejecucion-docente.md</a:t>
+            </a:r>
+          </a:p>
+        </p:txBody>
+      </p:sp>
+      <p:sp>
+        <p:nvSpPr>
+          <p:cNvPr id="4" name="Slide Number Placeholder 3"/>
+          <p:cNvSpPr>
+            <a:spLocks noGrp="1"/>
+          </p:cNvSpPr>
+          <p:nvPr>
+            <p:ph type="sldNum" idx="5" sz="quarter"/>
+          </p:nvPr>
+        </p:nvSpPr>
+        <p:spPr/>
+      </p:sp>
+    </p:spTree>
+  </p:cSld>
+  <p:clrMapOvr>
+    <a:masterClrMapping/>
+  </p:clrMapOvr>
+</p:notes>
+</file>
+
+<file path=ppt/notesSlides/notesSlide9.xml><?xml version="1.0" encoding="utf-8"?>
+<p:notes xmlns:a="http://schemas.openxmlformats.org/drawingml/2006/main" xmlns:p="http://schemas.openxmlformats.org/presentationml/2006/main" xmlns:r="http://schemas.openxmlformats.org/officeDocument/2006/relationships">
+  <p:cSld>
+    <p:spTree>
+      <p:nvGrpSpPr>
+        <p:cNvPr id="1" name=""/>
+        <p:cNvGrpSpPr/>
+        <p:nvPr/>
+      </p:nvGrpSpPr>
+      <p:grpSpPr>
+        <a:xfrm>
+          <a:off x="0" y="0"/>
+          <a:ext cx="0" cy="0"/>
+          <a:chOff x="0" y="0"/>
+          <a:chExt cx="0" cy="0"/>
+        </a:xfrm>
+      </p:grpSpPr>
+      <p:sp>
+        <p:nvSpPr>
+          <p:cNvPr id="2" name="Slide Image Placeholder 1"/>
+          <p:cNvSpPr>
+            <a:spLocks noGrp="1"/>
+          </p:cNvSpPr>
+          <p:nvPr>
+            <p:ph type="sldImg" idx="2"/>
+          </p:nvPr>
+        </p:nvSpPr>
+        <p:spPr/>
+      </p:sp>
+      <p:sp>
+        <p:nvSpPr>
+          <p:cNvPr id="3" name="Notes Placeholder 2"/>
+          <p:cNvSpPr>
+            <a:spLocks noGrp="1"/>
+          </p:cNvSpPr>
+          <p:nvPr>
+            <p:ph type="body" idx="3" sz="quarter"/>
+          </p:nvPr>
+        </p:nvSpPr>
+        <p:spPr/>
+        <p:txBody>
+          <a:bodyPr/>
+          <a:lstStyle/>
+          <a:p>
+            <a:r>
+              <a:t>Objetivo docente: Documentar H1 y seleccionar evidencias verificables sin duplicar el diario.</a:t>
+            </a:r>
+          </a:p>
+          <a:p>
+            <a:r>
+              <a:t>Diapositiva 9 de 9: Cierre y defensa</a:t>
+            </a:r>
+          </a:p>
+          <a:p>
+            <a:r>
+              <a:t>Fase HEXA: Comunicar — evaluar y reflexionar</a:t>
+            </a:r>
+          </a:p>
+          <a:p>
+            <a:r>
+              <a:t>Cierra con explicación individual, prueba observable y siguiente paso concreto.</a:t>
+            </a:r>
+          </a:p>
+          <a:p>
+            <a:r>
+              <a:t>- ¿Qué puedes señalar, explicar y probar al terminar este checkpoint?</a:t>
+            </a:r>
+          </a:p>
+          <a:p>
+            <a:r>
+              <a:t>Fuente docente: /mnt/compartido/Programación-26-27/Minijarvis/02-PROFESORADO/02-SESIONES/h1/S214-readme-y-evidencia-de-ejecucion-docente.md</a:t>
+            </a:r>
+          </a:p>
+        </p:txBody>
+      </p:sp>
+      <p:sp>
+        <p:nvSpPr>
+          <p:cNvPr id="4" name="Slide Number Placeholder 3"/>
+          <p:cNvSpPr>
+            <a:spLocks noGrp="1"/>
+          </p:cNvSpPr>
+          <p:nvPr>
+            <p:ph type="sldNum" idx="5" sz="quarter"/>
+          </p:nvPr>
+        </p:nvSpPr>
+        <p:spPr/>
+      </p:sp>
+    </p:spTree>
+  </p:cSld>
+  <p:clrMapOvr>
+    <a:masterClrMapping/>
+  </p:clrMapOvr>
+</p:notes>
 </file>
 
 <file path=ppt/slideLayouts/slideLayout1.xml><?xml version="1.0" encoding="utf-8"?>
@@ -3293,7 +4614,7 @@
               </a:defRPr>
             </a:pPr>
             <a:r>
-              <a:t>README y evidencia de ejecución</a:t>
+              <a:t>README, evidencia y Site</a:t>
             </a:r>
           </a:p>
         </p:txBody>
@@ -3329,7 +4650,7 @@
               </a:defRPr>
             </a:pPr>
             <a:r>
-              <a:t>H1 · 45 minutos</a:t>
+              <a:t>H1 — Primer MiniJarvis · Fase HEXA: Comunicar — evaluar y reflexionar</a:t>
             </a:r>
           </a:p>
         </p:txBody>
@@ -3378,6 +4699,42 @@
         </p:nvSpPr>
         <p:spPr>
           <a:xfrm>
+            <a:off x="713232" y="4965192"/>
+            <a:ext cx="10241280" cy="594360"/>
+          </a:xfrm>
+          <a:prstGeom prst="rect">
+            <a:avLst/>
+          </a:prstGeom>
+          <a:noFill/>
+        </p:spPr>
+        <p:txBody>
+          <a:bodyPr wrap="square" lIns="45720" rIns="45720" tIns="36576" bIns="36576" anchor="t">
+            <a:spAutoFit/>
+          </a:bodyPr>
+          <a:lstStyle/>
+          <a:p>
+            <a:pPr algn="l">
+              <a:defRPr sz="1700" b="0">
+                <a:solidFill>
+                  <a:srgbClr val="D2D9E4"/>
+                </a:solidFill>
+                <a:latin typeface="Aptos"/>
+              </a:defRPr>
+            </a:pPr>
+            <a:r>
+              <a:t>Individual con contraste por parejas o equipo cuando la práctica lo requiera</a:t>
+            </a:r>
+          </a:p>
+        </p:txBody>
+      </p:sp>
+      <p:sp>
+        <p:nvSpPr>
+          <p:cNvPr id="10" name="TextBox 9"/>
+          <p:cNvSpPr txBox="1"/>
+          <p:nvPr/>
+        </p:nvSpPr>
+        <p:spPr>
+          <a:xfrm>
             <a:off x="713232" y="6272784"/>
             <a:ext cx="10607040" cy="201168"/>
           </a:xfrm>
@@ -3401,7 +4758,7 @@
               </a:defRPr>
             </a:pPr>
             <a:r>
-              <a:t>MINIJARVIS · PROGRAMACIÓN + ENTORNOS DE DESARROLLO</a:t>
+              <a:t>MINIJARVIS · PROGRAMACIÓN</a:t>
             </a:r>
           </a:p>
         </p:txBody>
@@ -3656,7 +5013,7 @@
               </a:defRPr>
             </a:pPr>
             <a:r>
-              <a:t>MiniJarvis · 1.º DAW · Sesión 214 · H1</a:t>
+              <a:t>MiniJarvis · 1.º DAW · Sesión 214 · H1 — Primer MiniJarvis</a:t>
             </a:r>
           </a:p>
         </p:txBody>
@@ -3737,7 +5094,7 @@
               </a:defRPr>
             </a:pPr>
             <a:r>
-              <a:t>Objetivo: Documentar cómo ejecutar H1.</a:t>
+              <a:t>Objetivo: Documentar H1 y seleccionar evidencias verificables sin duplicar el diario.</a:t>
             </a:r>
           </a:p>
         </p:txBody>
@@ -3818,7 +5175,7 @@
               </a:defRPr>
             </a:pPr>
             <a:r>
-              <a:t>Evidencia: README H1 y documento/captura de ejecución.</a:t>
+              <a:t>Al terminar: señala la evidencia, explica qué demuestra y reproduce la prueba.</a:t>
             </a:r>
           </a:p>
         </p:txBody>
@@ -3958,7 +5315,7 @@
               </a:defRPr>
             </a:pPr>
             <a:r>
-              <a:t>RITMO DE LA SESIÓN</a:t>
+              <a:t>OBSERVAR ANTES DE ACTUAR</a:t>
             </a:r>
           </a:p>
         </p:txBody>
@@ -3994,7 +5351,7 @@
               </a:defRPr>
             </a:pPr>
             <a:r>
-              <a:t>Secuencia de aula</a:t>
+              <a:t>Ejemplo o demostración · 1</a:t>
             </a:r>
           </a:p>
         </p:txBody>
@@ -4073,27 +5430,27 @@
               </a:defRPr>
             </a:pPr>
             <a:r>
-              <a:t>MiniJarvis · 1.º DAW · Sesión 214 · H1</a:t>
-            </a:r>
-          </a:p>
-        </p:txBody>
-      </p:sp>
-      <p:sp>
-        <p:nvSpPr>
-          <p:cNvPr id="8" name="Oval 7"/>
+              <a:t>MiniJarvis · 1.º DAW · Sesión 214 · H1 — Primer MiniJarvis</a:t>
+            </a:r>
+          </a:p>
+        </p:txBody>
+      </p:sp>
+      <p:sp>
+        <p:nvSpPr>
+          <p:cNvPr id="8" name="Rounded Rectangle 7"/>
           <p:cNvSpPr/>
           <p:nvPr/>
         </p:nvSpPr>
         <p:spPr>
           <a:xfrm>
-            <a:off x="658368" y="1280160"/>
-            <a:ext cx="475488" cy="475488"/>
-          </a:xfrm>
-          <a:prstGeom prst="ellipse">
+            <a:off x="621792" y="1353312"/>
+            <a:ext cx="10927080" cy="4526280"/>
+          </a:xfrm>
+          <a:prstGeom prst="roundRect">
             <a:avLst/>
           </a:prstGeom>
           <a:solidFill>
-            <a:srgbClr val="2F5BA8"/>
+            <a:srgbClr val="121824"/>
           </a:solidFill>
           <a:ln>
             <a:noFill/>
@@ -4129,8 +5486,8 @@
         </p:nvSpPr>
         <p:spPr>
           <a:xfrm>
-            <a:off x="658368" y="1380744"/>
-            <a:ext cx="475488" cy="201168"/>
+            <a:off x="932688" y="1627632"/>
+            <a:ext cx="2057400" cy="411480"/>
           </a:xfrm>
           <a:prstGeom prst="rect">
             <a:avLst/>
@@ -4143,8 +5500,47 @@
           </a:bodyPr>
           <a:lstStyle/>
           <a:p>
-            <a:pPr algn="ctr">
+            <a:pPr algn="l">
               <a:defRPr sz="1300" b="1">
+                <a:solidFill>
+                  <a:srgbClr val="2F5BA8"/>
+                </a:solidFill>
+                <a:latin typeface="Aptos"/>
+              </a:defRPr>
+            </a:pPr>
+            <a:r>
+              <a:t>DEMOSTRACIÓN</a:t>
+            </a:r>
+          </a:p>
+        </p:txBody>
+      </p:sp>
+      <p:sp>
+        <p:nvSpPr>
+          <p:cNvPr id="10" name="TextBox 9"/>
+          <p:cNvSpPr txBox="1"/>
+          <p:nvPr/>
+        </p:nvSpPr>
+        <p:spPr>
+          <a:xfrm>
+            <a:off x="932688" y="2212848"/>
+            <a:ext cx="9966960" cy="3246120"/>
+          </a:xfrm>
+          <a:prstGeom prst="rect">
+            <a:avLst/>
+          </a:prstGeom>
+          <a:noFill/>
+        </p:spPr>
+        <p:txBody>
+          <a:bodyPr wrap="square" lIns="73152" rIns="45720" tIns="36576">
+            <a:spAutoFit/>
+          </a:bodyPr>
+          <a:lstStyle/>
+          <a:p>
+            <a:pPr>
+              <a:spcAft>
+                <a:spcPts val="900"/>
+              </a:spcAft>
+              <a:defRPr sz="1900">
                 <a:solidFill>
                   <a:srgbClr val="FFFFFF"/>
                 </a:solidFill>
@@ -4152,114 +5548,15 @@
               </a:defRPr>
             </a:pPr>
             <a:r>
-              <a:t>1</a:t>
-            </a:r>
-          </a:p>
-        </p:txBody>
-      </p:sp>
-      <p:sp>
-        <p:nvSpPr>
-          <p:cNvPr id="10" name="TextBox 9"/>
-          <p:cNvSpPr txBox="1"/>
-          <p:nvPr/>
-        </p:nvSpPr>
-        <p:spPr>
-          <a:xfrm>
-            <a:off x="1389888" y="1261872"/>
-            <a:ext cx="10058400" cy="772668"/>
-          </a:xfrm>
-          <a:prstGeom prst="rect">
-            <a:avLst/>
-          </a:prstGeom>
-          <a:noFill/>
-        </p:spPr>
-        <p:txBody>
-          <a:bodyPr wrap="square" lIns="45720" rIns="45720" tIns="36576" bIns="36576" anchor="t">
-            <a:spAutoFit/>
-          </a:bodyPr>
-          <a:lstStyle/>
-          <a:p>
-            <a:pPr algn="l">
-              <a:defRPr sz="1600" b="0">
-                <a:solidFill>
-                  <a:srgbClr val="1C2330"/>
-                </a:solidFill>
-                <a:latin typeface="Aptos"/>
-              </a:defRPr>
-            </a:pPr>
-            <a:r>
-              <a:t>0–5 min — Presentar objetivo, producto y evidencia de hoy.</a:t>
-            </a:r>
-          </a:p>
-        </p:txBody>
-      </p:sp>
-      <p:sp>
-        <p:nvSpPr>
-          <p:cNvPr id="11" name="Oval 10"/>
-          <p:cNvSpPr/>
-          <p:nvPr/>
-        </p:nvSpPr>
-        <p:spPr>
-          <a:xfrm>
-            <a:off x="658368" y="2125979"/>
-            <a:ext cx="475488" cy="475488"/>
-          </a:xfrm>
-          <a:prstGeom prst="ellipse">
-            <a:avLst/>
-          </a:prstGeom>
-          <a:solidFill>
-            <a:srgbClr val="2F5BA8"/>
-          </a:solidFill>
-          <a:ln>
-            <a:noFill/>
-          </a:ln>
-        </p:spPr>
-        <p:style>
-          <a:lnRef idx="1">
-            <a:schemeClr val="accent1"/>
-          </a:lnRef>
-          <a:fillRef idx="3">
-            <a:schemeClr val="accent1"/>
-          </a:fillRef>
-          <a:effectRef idx="2">
-            <a:schemeClr val="accent1"/>
-          </a:effectRef>
-          <a:fontRef idx="minor">
-            <a:schemeClr val="lt1"/>
-          </a:fontRef>
-        </p:style>
-        <p:txBody>
-          <a:bodyPr rtlCol="0" anchor="ctr"/>
-          <a:lstStyle/>
-          <a:p>
-            <a:pPr algn="ctr"/>
-          </a:p>
-        </p:txBody>
-      </p:sp>
-      <p:sp>
-        <p:nvSpPr>
-          <p:cNvPr id="12" name="TextBox 11"/>
-          <p:cNvSpPr txBox="1"/>
-          <p:nvPr/>
-        </p:nvSpPr>
-        <p:spPr>
-          <a:xfrm>
-            <a:off x="658368" y="2226563"/>
-            <a:ext cx="475488" cy="201168"/>
-          </a:xfrm>
-          <a:prstGeom prst="rect">
-            <a:avLst/>
-          </a:prstGeom>
-          <a:noFill/>
-        </p:spPr>
-        <p:txBody>
-          <a:bodyPr wrap="square" lIns="45720" rIns="45720" tIns="36576" bIns="36576" anchor="t">
-            <a:spAutoFit/>
-          </a:bodyPr>
-          <a:lstStyle/>
-          <a:p>
-            <a:pPr algn="ctr">
-              <a:defRPr sz="1300" b="1">
+              <a:t>•  D1 · ¿Podría otra persona entender tu proyecto sin ti? — README + evidencia + enlaces claros convierten “funciona” en algo verificable.</a:t>
+            </a:r>
+          </a:p>
+          <a:p>
+            <a:pPr>
+              <a:spcAft>
+                <a:spcPts val="900"/>
+              </a:spcAft>
+              <a:defRPr sz="1900">
                 <a:solidFill>
                   <a:srgbClr val="FFFFFF"/>
                 </a:solidFill>
@@ -4267,114 +5564,15 @@
               </a:defRPr>
             </a:pPr>
             <a:r>
-              <a:t>2</a:t>
-            </a:r>
-          </a:p>
-        </p:txBody>
-      </p:sp>
-      <p:sp>
-        <p:nvSpPr>
-          <p:cNvPr id="13" name="TextBox 12"/>
-          <p:cNvSpPr txBox="1"/>
-          <p:nvPr/>
-        </p:nvSpPr>
-        <p:spPr>
-          <a:xfrm>
-            <a:off x="1389888" y="2107691"/>
-            <a:ext cx="10058400" cy="772668"/>
-          </a:xfrm>
-          <a:prstGeom prst="rect">
-            <a:avLst/>
-          </a:prstGeom>
-          <a:noFill/>
-        </p:spPr>
-        <p:txBody>
-          <a:bodyPr wrap="square" lIns="45720" rIns="45720" tIns="36576" bIns="36576" anchor="t">
-            <a:spAutoFit/>
-          </a:bodyPr>
-          <a:lstStyle/>
-          <a:p>
-            <a:pPr algn="l">
-              <a:defRPr sz="1600" b="0">
-                <a:solidFill>
-                  <a:srgbClr val="1C2330"/>
-                </a:solidFill>
-                <a:latin typeface="Aptos"/>
-              </a:defRPr>
-            </a:pPr>
-            <a:r>
-              <a:t>5–13 min — Explicación breve: Un README permite que otra persona entienda y ejecute el proyecto.</a:t>
-            </a:r>
-          </a:p>
-        </p:txBody>
-      </p:sp>
-      <p:sp>
-        <p:nvSpPr>
-          <p:cNvPr id="14" name="Oval 13"/>
-          <p:cNvSpPr/>
-          <p:nvPr/>
-        </p:nvSpPr>
-        <p:spPr>
-          <a:xfrm>
-            <a:off x="658368" y="2971799"/>
-            <a:ext cx="475488" cy="475488"/>
-          </a:xfrm>
-          <a:prstGeom prst="ellipse">
-            <a:avLst/>
-          </a:prstGeom>
-          <a:solidFill>
-            <a:srgbClr val="2F5BA8"/>
-          </a:solidFill>
-          <a:ln>
-            <a:noFill/>
-          </a:ln>
-        </p:spPr>
-        <p:style>
-          <a:lnRef idx="1">
-            <a:schemeClr val="accent1"/>
-          </a:lnRef>
-          <a:fillRef idx="3">
-            <a:schemeClr val="accent1"/>
-          </a:fillRef>
-          <a:effectRef idx="2">
-            <a:schemeClr val="accent1"/>
-          </a:effectRef>
-          <a:fontRef idx="minor">
-            <a:schemeClr val="lt1"/>
-          </a:fontRef>
-        </p:style>
-        <p:txBody>
-          <a:bodyPr rtlCol="0" anchor="ctr"/>
-          <a:lstStyle/>
-          <a:p>
-            <a:pPr algn="ctr"/>
-          </a:p>
-        </p:txBody>
-      </p:sp>
-      <p:sp>
-        <p:nvSpPr>
-          <p:cNvPr id="15" name="TextBox 14"/>
-          <p:cNvSpPr txBox="1"/>
-          <p:nvPr/>
-        </p:nvSpPr>
-        <p:spPr>
-          <a:xfrm>
-            <a:off x="658368" y="3072383"/>
-            <a:ext cx="475488" cy="201168"/>
-          </a:xfrm>
-          <a:prstGeom prst="rect">
-            <a:avLst/>
-          </a:prstGeom>
-          <a:noFill/>
-        </p:spPr>
-        <p:txBody>
-          <a:bodyPr wrap="square" lIns="45720" rIns="45720" tIns="36576" bIns="36576" anchor="t">
-            <a:spAutoFit/>
-          </a:bodyPr>
-          <a:lstStyle/>
-          <a:p>
-            <a:pPr algn="ctr">
-              <a:defRPr sz="1300" b="1">
+              <a:t>•  D2 · README mínimo de H1 — QUÉ HACE: alcance real / y limitaciones \| CÓMO EJECUTAR: pasos suficientes / para reproducir \| EJEMPLO: entrada + salida / verificables</a:t>
+            </a:r>
+          </a:p>
+          <a:p>
+            <a:pPr>
+              <a:spcAft>
+                <a:spcPts val="900"/>
+              </a:spcAft>
+              <a:defRPr sz="1900">
                 <a:solidFill>
                   <a:srgbClr val="FFFFFF"/>
                 </a:solidFill>
@@ -4382,114 +5580,15 @@
               </a:defRPr>
             </a:pPr>
             <a:r>
-              <a:t>3</a:t>
-            </a:r>
-          </a:p>
-        </p:txBody>
-      </p:sp>
-      <p:sp>
-        <p:nvSpPr>
-          <p:cNvPr id="16" name="TextBox 15"/>
-          <p:cNvSpPr txBox="1"/>
-          <p:nvPr/>
-        </p:nvSpPr>
-        <p:spPr>
-          <a:xfrm>
-            <a:off x="1389888" y="2953511"/>
-            <a:ext cx="10058400" cy="772668"/>
-          </a:xfrm>
-          <a:prstGeom prst="rect">
-            <a:avLst/>
-          </a:prstGeom>
-          <a:noFill/>
-        </p:spPr>
-        <p:txBody>
-          <a:bodyPr wrap="square" lIns="45720" rIns="45720" tIns="36576" bIns="36576" anchor="t">
-            <a:spAutoFit/>
-          </a:bodyPr>
-          <a:lstStyle/>
-          <a:p>
-            <a:pPr algn="l">
-              <a:defRPr sz="1600" b="0">
-                <a:solidFill>
-                  <a:srgbClr val="1C2330"/>
-                </a:solidFill>
-                <a:latin typeface="Aptos"/>
-              </a:defRPr>
-            </a:pPr>
-            <a:r>
-              <a:t>13–18 min — Demostración o ejemplo: Modelo mínimo: qué hace, cómo ejecutar, ejemplo de salida, limitaciones.</a:t>
-            </a:r>
-          </a:p>
-        </p:txBody>
-      </p:sp>
-      <p:sp>
-        <p:nvSpPr>
-          <p:cNvPr id="17" name="Oval 16"/>
-          <p:cNvSpPr/>
-          <p:nvPr/>
-        </p:nvSpPr>
-        <p:spPr>
-          <a:xfrm>
-            <a:off x="658368" y="3817620"/>
-            <a:ext cx="475488" cy="475488"/>
-          </a:xfrm>
-          <a:prstGeom prst="ellipse">
-            <a:avLst/>
-          </a:prstGeom>
-          <a:solidFill>
-            <a:srgbClr val="2F5BA8"/>
-          </a:solidFill>
-          <a:ln>
-            <a:noFill/>
-          </a:ln>
-        </p:spPr>
-        <p:style>
-          <a:lnRef idx="1">
-            <a:schemeClr val="accent1"/>
-          </a:lnRef>
-          <a:fillRef idx="3">
-            <a:schemeClr val="accent1"/>
-          </a:fillRef>
-          <a:effectRef idx="2">
-            <a:schemeClr val="accent1"/>
-          </a:effectRef>
-          <a:fontRef idx="minor">
-            <a:schemeClr val="lt1"/>
-          </a:fontRef>
-        </p:style>
-        <p:txBody>
-          <a:bodyPr rtlCol="0" anchor="ctr"/>
-          <a:lstStyle/>
-          <a:p>
-            <a:pPr algn="ctr"/>
-          </a:p>
-        </p:txBody>
-      </p:sp>
-      <p:sp>
-        <p:nvSpPr>
-          <p:cNvPr id="18" name="TextBox 17"/>
-          <p:cNvSpPr txBox="1"/>
-          <p:nvPr/>
-        </p:nvSpPr>
-        <p:spPr>
-          <a:xfrm>
-            <a:off x="658368" y="3918204"/>
-            <a:ext cx="475488" cy="201168"/>
-          </a:xfrm>
-          <a:prstGeom prst="rect">
-            <a:avLst/>
-          </a:prstGeom>
-          <a:noFill/>
-        </p:spPr>
-        <p:txBody>
-          <a:bodyPr wrap="square" lIns="45720" rIns="45720" tIns="36576" bIns="36576" anchor="t">
-            <a:spAutoFit/>
-          </a:bodyPr>
-          <a:lstStyle/>
-          <a:p>
-            <a:pPr algn="ctr">
-              <a:defRPr sz="1300" b="1">
+              <a:t>•  D3 · Una evidencia debe demostrar algo — DÉBIL: “Funciona.”</a:t>
+            </a:r>
+          </a:p>
+          <a:p>
+            <a:pPr>
+              <a:spcAft>
+                <a:spcPts val="900"/>
+              </a:spcAft>
+              <a:defRPr sz="1900">
                 <a:solidFill>
                   <a:srgbClr val="FFFFFF"/>
                 </a:solidFill>
@@ -4497,114 +5596,15 @@
               </a:defRPr>
             </a:pPr>
             <a:r>
-              <a:t>4</a:t>
-            </a:r>
-          </a:p>
-        </p:txBody>
-      </p:sp>
-      <p:sp>
-        <p:nvSpPr>
-          <p:cNvPr id="19" name="TextBox 18"/>
-          <p:cNvSpPr txBox="1"/>
-          <p:nvPr/>
-        </p:nvSpPr>
-        <p:spPr>
-          <a:xfrm>
-            <a:off x="1389888" y="3799332"/>
-            <a:ext cx="10058400" cy="772668"/>
-          </a:xfrm>
-          <a:prstGeom prst="rect">
-            <a:avLst/>
-          </a:prstGeom>
-          <a:noFill/>
-        </p:spPr>
-        <p:txBody>
-          <a:bodyPr wrap="square" lIns="45720" rIns="45720" tIns="36576" bIns="36576" anchor="t">
-            <a:spAutoFit/>
-          </a:bodyPr>
-          <a:lstStyle/>
-          <a:p>
-            <a:pPr algn="l">
-              <a:defRPr sz="1600" b="0">
-                <a:solidFill>
-                  <a:srgbClr val="1C2330"/>
-                </a:solidFill>
-                <a:latin typeface="Aptos"/>
-              </a:defRPr>
-            </a:pPr>
-            <a:r>
-              <a:t>18–35 min — Trabajo del alumnado: Crear README.md y evidencia de ejecución.</a:t>
-            </a:r>
-          </a:p>
-        </p:txBody>
-      </p:sp>
-      <p:sp>
-        <p:nvSpPr>
-          <p:cNvPr id="20" name="Oval 19"/>
-          <p:cNvSpPr/>
-          <p:nvPr/>
-        </p:nvSpPr>
-        <p:spPr>
-          <a:xfrm>
-            <a:off x="658368" y="4663440"/>
-            <a:ext cx="475488" cy="475488"/>
-          </a:xfrm>
-          <a:prstGeom prst="ellipse">
-            <a:avLst/>
-          </a:prstGeom>
-          <a:solidFill>
-            <a:srgbClr val="2F5BA8"/>
-          </a:solidFill>
-          <a:ln>
-            <a:noFill/>
-          </a:ln>
-        </p:spPr>
-        <p:style>
-          <a:lnRef idx="1">
-            <a:schemeClr val="accent1"/>
-          </a:lnRef>
-          <a:fillRef idx="3">
-            <a:schemeClr val="accent1"/>
-          </a:fillRef>
-          <a:effectRef idx="2">
-            <a:schemeClr val="accent1"/>
-          </a:effectRef>
-          <a:fontRef idx="minor">
-            <a:schemeClr val="lt1"/>
-          </a:fontRef>
-        </p:style>
-        <p:txBody>
-          <a:bodyPr rtlCol="0" anchor="ctr"/>
-          <a:lstStyle/>
-          <a:p>
-            <a:pPr algn="ctr"/>
-          </a:p>
-        </p:txBody>
-      </p:sp>
-      <p:sp>
-        <p:nvSpPr>
-          <p:cNvPr id="21" name="TextBox 20"/>
-          <p:cNvSpPr txBox="1"/>
-          <p:nvPr/>
-        </p:nvSpPr>
-        <p:spPr>
-          <a:xfrm>
-            <a:off x="658368" y="4764024"/>
-            <a:ext cx="475488" cy="201168"/>
-          </a:xfrm>
-          <a:prstGeom prst="rect">
-            <a:avLst/>
-          </a:prstGeom>
-          <a:noFill/>
-        </p:spPr>
-        <p:txBody>
-          <a:bodyPr wrap="square" lIns="45720" rIns="45720" tIns="36576" bIns="36576" anchor="t">
-            <a:spAutoFit/>
-          </a:bodyPr>
-          <a:lstStyle/>
-          <a:p>
-            <a:pPr algn="ctr">
-              <a:defRPr sz="1300" b="1">
+              <a:t>•  Enlace a una carpeta general. \| VERIFICABLE: entrada usada</a:t>
+            </a:r>
+          </a:p>
+          <a:p>
+            <a:pPr>
+              <a:spcAft>
+                <a:spcPts val="900"/>
+              </a:spcAft>
+              <a:defRPr sz="1900">
                 <a:solidFill>
                   <a:srgbClr val="FFFFFF"/>
                 </a:solidFill>
@@ -4612,158 +5612,7 @@
               </a:defRPr>
             </a:pPr>
             <a:r>
-              <a:t>5</a:t>
-            </a:r>
-          </a:p>
-        </p:txBody>
-      </p:sp>
-      <p:sp>
-        <p:nvSpPr>
-          <p:cNvPr id="22" name="TextBox 21"/>
-          <p:cNvSpPr txBox="1"/>
-          <p:nvPr/>
-        </p:nvSpPr>
-        <p:spPr>
-          <a:xfrm>
-            <a:off x="1389888" y="4645152"/>
-            <a:ext cx="10058400" cy="772668"/>
-          </a:xfrm>
-          <a:prstGeom prst="rect">
-            <a:avLst/>
-          </a:prstGeom>
-          <a:noFill/>
-        </p:spPr>
-        <p:txBody>
-          <a:bodyPr wrap="square" lIns="45720" rIns="45720" tIns="36576" bIns="36576" anchor="t">
-            <a:spAutoFit/>
-          </a:bodyPr>
-          <a:lstStyle/>
-          <a:p>
-            <a:pPr algn="l">
-              <a:defRPr sz="1600" b="0">
-                <a:solidFill>
-                  <a:srgbClr val="1C2330"/>
-                </a:solidFill>
-                <a:latin typeface="Aptos"/>
-              </a:defRPr>
-            </a:pPr>
-            <a:r>
-              <a:t>35–40 min — Comprobar la evidencia con una explicación o prueba breve.</a:t>
-            </a:r>
-          </a:p>
-        </p:txBody>
-      </p:sp>
-      <p:sp>
-        <p:nvSpPr>
-          <p:cNvPr id="23" name="Oval 22"/>
-          <p:cNvSpPr/>
-          <p:nvPr/>
-        </p:nvSpPr>
-        <p:spPr>
-          <a:xfrm>
-            <a:off x="658368" y="5509259"/>
-            <a:ext cx="475488" cy="475488"/>
-          </a:xfrm>
-          <a:prstGeom prst="ellipse">
-            <a:avLst/>
-          </a:prstGeom>
-          <a:solidFill>
-            <a:srgbClr val="2F5BA8"/>
-          </a:solidFill>
-          <a:ln>
-            <a:noFill/>
-          </a:ln>
-        </p:spPr>
-        <p:style>
-          <a:lnRef idx="1">
-            <a:schemeClr val="accent1"/>
-          </a:lnRef>
-          <a:fillRef idx="3">
-            <a:schemeClr val="accent1"/>
-          </a:fillRef>
-          <a:effectRef idx="2">
-            <a:schemeClr val="accent1"/>
-          </a:effectRef>
-          <a:fontRef idx="minor">
-            <a:schemeClr val="lt1"/>
-          </a:fontRef>
-        </p:style>
-        <p:txBody>
-          <a:bodyPr rtlCol="0" anchor="ctr"/>
-          <a:lstStyle/>
-          <a:p>
-            <a:pPr algn="ctr"/>
-          </a:p>
-        </p:txBody>
-      </p:sp>
-      <p:sp>
-        <p:nvSpPr>
-          <p:cNvPr id="24" name="TextBox 23"/>
-          <p:cNvSpPr txBox="1"/>
-          <p:nvPr/>
-        </p:nvSpPr>
-        <p:spPr>
-          <a:xfrm>
-            <a:off x="658368" y="5609844"/>
-            <a:ext cx="475488" cy="201168"/>
-          </a:xfrm>
-          <a:prstGeom prst="rect">
-            <a:avLst/>
-          </a:prstGeom>
-          <a:noFill/>
-        </p:spPr>
-        <p:txBody>
-          <a:bodyPr wrap="square" lIns="45720" rIns="45720" tIns="36576" bIns="36576" anchor="t">
-            <a:spAutoFit/>
-          </a:bodyPr>
-          <a:lstStyle/>
-          <a:p>
-            <a:pPr algn="ctr">
-              <a:defRPr sz="1300" b="1">
-                <a:solidFill>
-                  <a:srgbClr val="FFFFFF"/>
-                </a:solidFill>
-                <a:latin typeface="Aptos"/>
-              </a:defRPr>
-            </a:pPr>
-            <a:r>
-              <a:t>6</a:t>
-            </a:r>
-          </a:p>
-        </p:txBody>
-      </p:sp>
-      <p:sp>
-        <p:nvSpPr>
-          <p:cNvPr id="25" name="TextBox 24"/>
-          <p:cNvSpPr txBox="1"/>
-          <p:nvPr/>
-        </p:nvSpPr>
-        <p:spPr>
-          <a:xfrm>
-            <a:off x="1389888" y="5490972"/>
-            <a:ext cx="10058400" cy="772668"/>
-          </a:xfrm>
-          <a:prstGeom prst="rect">
-            <a:avLst/>
-          </a:prstGeom>
-          <a:noFill/>
-        </p:spPr>
-        <p:txBody>
-          <a:bodyPr wrap="square" lIns="45720" rIns="45720" tIns="36576" bIns="36576" anchor="t">
-            <a:spAutoFit/>
-          </a:bodyPr>
-          <a:lstStyle/>
-          <a:p>
-            <a:pPr algn="l">
-              <a:defRPr sz="1600" b="0">
-                <a:solidFill>
-                  <a:srgbClr val="1C2330"/>
-                </a:solidFill>
-                <a:latin typeface="Aptos"/>
-              </a:defRPr>
-            </a:pPr>
-            <a:r>
-              <a:t>40–45 min — Cierre: Intercambio: otro equipo intenta entender el README.</a:t>
+              <a:t>•  salida observada</a:t>
             </a:r>
           </a:p>
         </p:txBody>
@@ -4903,7 +5752,7 @@
               </a:defRPr>
             </a:pPr>
             <a:r>
-              <a:t>COMPRENDER Y TRANSFERIR</a:t>
+              <a:t>OBSERVAR ANTES DE ACTUAR</a:t>
             </a:r>
           </a:p>
         </p:txBody>
@@ -4939,7 +5788,7 @@
               </a:defRPr>
             </a:pPr>
             <a:r>
-              <a:t>Idea clave y puesta en práctica</a:t>
+              <a:t>Ejemplo o demostración · 2</a:t>
             </a:r>
           </a:p>
         </p:txBody>
@@ -5018,7 +5867,7 @@
               </a:defRPr>
             </a:pPr>
             <a:r>
-              <a:t>MiniJarvis · 1.º DAW · Sesión 214 · H1</a:t>
+              <a:t>MiniJarvis · 1.º DAW · Sesión 214 · H1 — Primer MiniJarvis</a:t>
             </a:r>
           </a:p>
         </p:txBody>
@@ -5031,19 +5880,17 @@
         </p:nvSpPr>
         <p:spPr>
           <a:xfrm>
-            <a:off x="621792" y="1325880"/>
-            <a:ext cx="5285232" cy="4736592"/>
+            <a:off x="621792" y="1353312"/>
+            <a:ext cx="10927080" cy="4526280"/>
           </a:xfrm>
           <a:prstGeom prst="roundRect">
             <a:avLst/>
           </a:prstGeom>
           <a:solidFill>
-            <a:srgbClr val="FFFFFF"/>
+            <a:srgbClr val="121824"/>
           </a:solidFill>
           <a:ln>
-            <a:solidFill>
-              <a:srgbClr val="E5E9EF"/>
-            </a:solidFill>
+            <a:noFill/>
           </a:ln>
         </p:spPr>
         <p:style>
@@ -5077,7 +5924,7 @@
         <p:spPr>
           <a:xfrm>
             <a:off x="932688" y="1627632"/>
-            <a:ext cx="2011680" cy="329184"/>
+            <a:ext cx="2057400" cy="411480"/>
           </a:xfrm>
           <a:prstGeom prst="rect">
             <a:avLst/>
@@ -5099,7 +5946,7 @@
               </a:defRPr>
             </a:pPr>
             <a:r>
-              <a:t>IDEA CLAVE</a:t>
+              <a:t>DEMOSTRACIÓN</a:t>
             </a:r>
           </a:p>
         </p:txBody>
@@ -5112,8 +5959,8 @@
         </p:nvSpPr>
         <p:spPr>
           <a:xfrm>
-            <a:off x="932688" y="2176272"/>
-            <a:ext cx="4617720" cy="3429000"/>
+            <a:off x="932688" y="2212848"/>
+            <a:ext cx="9966960" cy="3246120"/>
           </a:xfrm>
           <a:prstGeom prst="rect">
             <a:avLst/>
@@ -5130,125 +5977,7 @@
               <a:spcAft>
                 <a:spcPts val="900"/>
               </a:spcAft>
-              <a:defRPr sz="2300">
-                <a:solidFill>
-                  <a:srgbClr val="1C2330"/>
-                </a:solidFill>
-                <a:latin typeface="Aptos"/>
-              </a:defRPr>
-            </a:pPr>
-            <a:r>
-              <a:t>•  README mínimo: qué hace, cómo se ejecuta, ejemplo de salida y limitaciones.</a:t>
-            </a:r>
-          </a:p>
-        </p:txBody>
-      </p:sp>
-      <p:sp>
-        <p:nvSpPr>
-          <p:cNvPr id="11" name="Rounded Rectangle 10"/>
-          <p:cNvSpPr/>
-          <p:nvPr/>
-        </p:nvSpPr>
-        <p:spPr>
-          <a:xfrm>
-            <a:off x="6172200" y="1325880"/>
-            <a:ext cx="5394960" cy="4736592"/>
-          </a:xfrm>
-          <a:prstGeom prst="roundRect">
-            <a:avLst/>
-          </a:prstGeom>
-          <a:solidFill>
-            <a:srgbClr val="121824"/>
-          </a:solidFill>
-          <a:ln>
-            <a:noFill/>
-          </a:ln>
-        </p:spPr>
-        <p:style>
-          <a:lnRef idx="1">
-            <a:schemeClr val="accent1"/>
-          </a:lnRef>
-          <a:fillRef idx="3">
-            <a:schemeClr val="accent1"/>
-          </a:fillRef>
-          <a:effectRef idx="2">
-            <a:schemeClr val="accent1"/>
-          </a:effectRef>
-          <a:fontRef idx="minor">
-            <a:schemeClr val="lt1"/>
-          </a:fontRef>
-        </p:style>
-        <p:txBody>
-          <a:bodyPr rtlCol="0" anchor="ctr"/>
-          <a:lstStyle/>
-          <a:p>
-            <a:pPr algn="ctr"/>
-          </a:p>
-        </p:txBody>
-      </p:sp>
-      <p:sp>
-        <p:nvSpPr>
-          <p:cNvPr id="12" name="TextBox 11"/>
-          <p:cNvSpPr txBox="1"/>
-          <p:nvPr/>
-        </p:nvSpPr>
-        <p:spPr>
-          <a:xfrm>
-            <a:off x="6492240" y="1627632"/>
-            <a:ext cx="2194560" cy="329184"/>
-          </a:xfrm>
-          <a:prstGeom prst="rect">
-            <a:avLst/>
-          </a:prstGeom>
-          <a:noFill/>
-        </p:spPr>
-        <p:txBody>
-          <a:bodyPr wrap="square" lIns="45720" rIns="45720" tIns="36576" bIns="36576" anchor="t">
-            <a:spAutoFit/>
-          </a:bodyPr>
-          <a:lstStyle/>
-          <a:p>
-            <a:pPr algn="l">
-              <a:defRPr sz="1300" b="1">
-                <a:solidFill>
-                  <a:srgbClr val="2F5BA8"/>
-                </a:solidFill>
-                <a:latin typeface="Aptos"/>
-              </a:defRPr>
-            </a:pPr>
-            <a:r>
-              <a:t>EN PRÁCTICA</a:t>
-            </a:r>
-          </a:p>
-        </p:txBody>
-      </p:sp>
-      <p:sp>
-        <p:nvSpPr>
-          <p:cNvPr id="13" name="TextBox 12"/>
-          <p:cNvSpPr txBox="1"/>
-          <p:nvPr/>
-        </p:nvSpPr>
-        <p:spPr>
-          <a:xfrm>
-            <a:off x="6492240" y="2176272"/>
-            <a:ext cx="4617720" cy="3429000"/>
-          </a:xfrm>
-          <a:prstGeom prst="rect">
-            <a:avLst/>
-          </a:prstGeom>
-          <a:noFill/>
-        </p:spPr>
-        <p:txBody>
-          <a:bodyPr wrap="square" lIns="73152" rIns="45720" tIns="36576">
-            <a:spAutoFit/>
-          </a:bodyPr>
-          <a:lstStyle/>
-          <a:p>
-            <a:pPr>
-              <a:spcAft>
-                <a:spcPts val="900"/>
-              </a:spcAft>
-              <a:defRPr sz="2300">
+              <a:defRPr sz="2200">
                 <a:solidFill>
                   <a:srgbClr val="FFFFFF"/>
                 </a:solidFill>
@@ -5256,7 +5985,55 @@
               </a:defRPr>
             </a:pPr>
             <a:r>
-              <a:t>•  Modelo mínimo: qué hace, cómo ejecutar, ejemplo de salida, limitaciones.</a:t>
+              <a:t>•  enlace profundo</a:t>
+            </a:r>
+          </a:p>
+          <a:p>
+            <a:pPr>
+              <a:spcAft>
+                <a:spcPts val="900"/>
+              </a:spcAft>
+              <a:defRPr sz="2200">
+                <a:solidFill>
+                  <a:srgbClr val="FFFFFF"/>
+                </a:solidFill>
+                <a:latin typeface="Aptos"/>
+              </a:defRPr>
+            </a:pPr>
+            <a:r>
+              <a:t>•  qué demuestra</a:t>
+            </a:r>
+          </a:p>
+          <a:p>
+            <a:pPr>
+              <a:spcAft>
+                <a:spcPts val="900"/>
+              </a:spcAft>
+              <a:defRPr sz="2200">
+                <a:solidFill>
+                  <a:srgbClr val="FFFFFF"/>
+                </a:solidFill>
+                <a:latin typeface="Aptos"/>
+              </a:defRPr>
+            </a:pPr>
+            <a:r>
+              <a:t>•  D4 · Diario, Site personal y Site de equipo no son lo mismo DIARIO: Proceso individual: / objetivo, acción, prueba, bloqueo, siguiente paso. \| SITE PERSONAL:</a:t>
+            </a:r>
+          </a:p>
+          <a:p>
+            <a:pPr>
+              <a:spcAft>
+                <a:spcPts val="900"/>
+              </a:spcAft>
+              <a:defRPr sz="2200">
+                <a:solidFill>
+                  <a:srgbClr val="FFFFFF"/>
+                </a:solidFill>
+                <a:latin typeface="Aptos"/>
+              </a:defRPr>
+            </a:pPr>
+            <a:r>
+              <a:t>•  Selección razonada de evidencias + qué demuestran. \| SITE EQUIPO: Reto, decisiones, pruebas, review y retrospectiva.</a:t>
             </a:r>
           </a:p>
         </p:txBody>
@@ -5432,7 +6209,7 @@
               </a:defRPr>
             </a:pPr>
             <a:r>
-              <a:t>Actividad central</a:t>
+              <a:t>Actividad central · 1</a:t>
             </a:r>
           </a:p>
         </p:txBody>
@@ -5511,7 +6288,7 @@
               </a:defRPr>
             </a:pPr>
             <a:r>
-              <a:t>MiniJarvis · 1.º DAW · Sesión 214 · H1</a:t>
+              <a:t>MiniJarvis · 1.º DAW · Sesión 214 · H1 — Primer MiniJarvis</a:t>
             </a:r>
           </a:p>
         </p:txBody>
@@ -5525,7 +6302,7 @@
         <p:spPr>
           <a:xfrm>
             <a:off x="658368" y="1307592"/>
-            <a:ext cx="10835640" cy="2226564"/>
+            <a:ext cx="10835640" cy="1049274"/>
           </a:xfrm>
           <a:prstGeom prst="roundRect">
             <a:avLst/>
@@ -5606,7 +6383,7 @@
         <p:spPr>
           <a:xfrm>
             <a:off x="1664208" y="1417319"/>
-            <a:ext cx="9464040" cy="2007108"/>
+            <a:ext cx="9464040" cy="829818"/>
           </a:xfrm>
           <a:prstGeom prst="rect">
             <a:avLst/>
@@ -5628,7 +6405,7 @@
               </a:defRPr>
             </a:pPr>
             <a:r>
-              <a:t>Crear README H1.</a:t>
+              <a:t>Predice antes de ejecutar cuando haya código.</a:t>
             </a:r>
           </a:p>
         </p:txBody>
@@ -5641,8 +6418,8 @@
         </p:nvSpPr>
         <p:spPr>
           <a:xfrm>
-            <a:off x="658368" y="3776472"/>
-            <a:ext cx="10835640" cy="2226564"/>
+            <a:off x="658368" y="2542032"/>
+            <a:ext cx="10835640" cy="1049274"/>
           </a:xfrm>
           <a:prstGeom prst="roundRect">
             <a:avLst/>
@@ -5686,7 +6463,7 @@
         </p:nvSpPr>
         <p:spPr>
           <a:xfrm>
-            <a:off x="850392" y="3922776"/>
+            <a:off x="850392" y="2688336"/>
             <a:ext cx="685800" cy="384048"/>
           </a:xfrm>
           <a:prstGeom prst="rect">
@@ -5722,8 +6499,8 @@
         </p:nvSpPr>
         <p:spPr>
           <a:xfrm>
-            <a:off x="1664208" y="3886200"/>
-            <a:ext cx="9464040" cy="2007108"/>
+            <a:off x="1664208" y="2651760"/>
+            <a:ext cx="9464040" cy="829818"/>
           </a:xfrm>
           <a:prstGeom prst="rect">
             <a:avLst/>
@@ -5745,7 +6522,241 @@
               </a:defRPr>
             </a:pPr>
             <a:r>
-              <a:t>Comprueba y registra la evidencia: README H1 y documento/captura de ejecución.</a:t>
+              <a:t>Realiza la micropráctica o modificación prevista.</a:t>
+            </a:r>
+          </a:p>
+        </p:txBody>
+      </p:sp>
+      <p:sp>
+        <p:nvSpPr>
+          <p:cNvPr id="14" name="Rounded Rectangle 13"/>
+          <p:cNvSpPr/>
+          <p:nvPr/>
+        </p:nvSpPr>
+        <p:spPr>
+          <a:xfrm>
+            <a:off x="658368" y="3776472"/>
+            <a:ext cx="10835640" cy="1049274"/>
+          </a:xfrm>
+          <a:prstGeom prst="roundRect">
+            <a:avLst/>
+          </a:prstGeom>
+          <a:solidFill>
+            <a:srgbClr val="FFFFFF"/>
+          </a:solidFill>
+          <a:ln>
+            <a:solidFill>
+              <a:srgbClr val="E5E9EF"/>
+            </a:solidFill>
+          </a:ln>
+        </p:spPr>
+        <p:style>
+          <a:lnRef idx="1">
+            <a:schemeClr val="accent1"/>
+          </a:lnRef>
+          <a:fillRef idx="3">
+            <a:schemeClr val="accent1"/>
+          </a:fillRef>
+          <a:effectRef idx="2">
+            <a:schemeClr val="accent1"/>
+          </a:effectRef>
+          <a:fontRef idx="minor">
+            <a:schemeClr val="lt1"/>
+          </a:fontRef>
+        </p:style>
+        <p:txBody>
+          <a:bodyPr rtlCol="0" anchor="ctr"/>
+          <a:lstStyle/>
+          <a:p>
+            <a:pPr algn="ctr"/>
+          </a:p>
+        </p:txBody>
+      </p:sp>
+      <p:sp>
+        <p:nvSpPr>
+          <p:cNvPr id="15" name="TextBox 14"/>
+          <p:cNvSpPr txBox="1"/>
+          <p:nvPr/>
+        </p:nvSpPr>
+        <p:spPr>
+          <a:xfrm>
+            <a:off x="850392" y="3922776"/>
+            <a:ext cx="685800" cy="384048"/>
+          </a:xfrm>
+          <a:prstGeom prst="rect">
+            <a:avLst/>
+          </a:prstGeom>
+          <a:noFill/>
+        </p:spPr>
+        <p:txBody>
+          <a:bodyPr wrap="square" lIns="45720" rIns="45720" tIns="36576" bIns="36576" anchor="t">
+            <a:spAutoFit/>
+          </a:bodyPr>
+          <a:lstStyle/>
+          <a:p>
+            <a:pPr algn="l">
+              <a:defRPr sz="1200" b="1">
+                <a:solidFill>
+                  <a:srgbClr val="2F5BA8"/>
+                </a:solidFill>
+                <a:latin typeface="Aptos"/>
+              </a:defRPr>
+            </a:pPr>
+            <a:r>
+              <a:t>PASO 3</a:t>
+            </a:r>
+          </a:p>
+        </p:txBody>
+      </p:sp>
+      <p:sp>
+        <p:nvSpPr>
+          <p:cNvPr id="16" name="TextBox 15"/>
+          <p:cNvSpPr txBox="1"/>
+          <p:nvPr/>
+        </p:nvSpPr>
+        <p:spPr>
+          <a:xfrm>
+            <a:off x="1664208" y="3886200"/>
+            <a:ext cx="9464040" cy="829818"/>
+          </a:xfrm>
+          <a:prstGeom prst="rect">
+            <a:avLst/>
+          </a:prstGeom>
+          <a:noFill/>
+        </p:spPr>
+        <p:txBody>
+          <a:bodyPr wrap="square" lIns="45720" rIns="45720" tIns="36576" bIns="36576" anchor="t">
+            <a:spAutoFit/>
+          </a:bodyPr>
+          <a:lstStyle/>
+          <a:p>
+            <a:pPr algn="l">
+              <a:defRPr sz="2000" b="0">
+                <a:solidFill>
+                  <a:srgbClr val="1C2330"/>
+                </a:solidFill>
+                <a:latin typeface="Aptos"/>
+              </a:defRPr>
+            </a:pPr>
+            <a:r>
+              <a:t>Prueba el caso normal y, cuando exista una decisión o conversión, también el caso alternativo o erróneo.</a:t>
+            </a:r>
+          </a:p>
+        </p:txBody>
+      </p:sp>
+      <p:sp>
+        <p:nvSpPr>
+          <p:cNvPr id="17" name="Rounded Rectangle 16"/>
+          <p:cNvSpPr/>
+          <p:nvPr/>
+        </p:nvSpPr>
+        <p:spPr>
+          <a:xfrm>
+            <a:off x="658368" y="5010912"/>
+            <a:ext cx="10835640" cy="1049274"/>
+          </a:xfrm>
+          <a:prstGeom prst="roundRect">
+            <a:avLst/>
+          </a:prstGeom>
+          <a:solidFill>
+            <a:srgbClr val="FFFFFF"/>
+          </a:solidFill>
+          <a:ln>
+            <a:solidFill>
+              <a:srgbClr val="E5E9EF"/>
+            </a:solidFill>
+          </a:ln>
+        </p:spPr>
+        <p:style>
+          <a:lnRef idx="1">
+            <a:schemeClr val="accent1"/>
+          </a:lnRef>
+          <a:fillRef idx="3">
+            <a:schemeClr val="accent1"/>
+          </a:fillRef>
+          <a:effectRef idx="2">
+            <a:schemeClr val="accent1"/>
+          </a:effectRef>
+          <a:fontRef idx="minor">
+            <a:schemeClr val="lt1"/>
+          </a:fontRef>
+        </p:style>
+        <p:txBody>
+          <a:bodyPr rtlCol="0" anchor="ctr"/>
+          <a:lstStyle/>
+          <a:p>
+            <a:pPr algn="ctr"/>
+          </a:p>
+        </p:txBody>
+      </p:sp>
+      <p:sp>
+        <p:nvSpPr>
+          <p:cNvPr id="18" name="TextBox 17"/>
+          <p:cNvSpPr txBox="1"/>
+          <p:nvPr/>
+        </p:nvSpPr>
+        <p:spPr>
+          <a:xfrm>
+            <a:off x="850392" y="5157216"/>
+            <a:ext cx="685800" cy="384048"/>
+          </a:xfrm>
+          <a:prstGeom prst="rect">
+            <a:avLst/>
+          </a:prstGeom>
+          <a:noFill/>
+        </p:spPr>
+        <p:txBody>
+          <a:bodyPr wrap="square" lIns="45720" rIns="45720" tIns="36576" bIns="36576" anchor="t">
+            <a:spAutoFit/>
+          </a:bodyPr>
+          <a:lstStyle/>
+          <a:p>
+            <a:pPr algn="l">
+              <a:defRPr sz="1200" b="1">
+                <a:solidFill>
+                  <a:srgbClr val="2F5BA8"/>
+                </a:solidFill>
+                <a:latin typeface="Aptos"/>
+              </a:defRPr>
+            </a:pPr>
+            <a:r>
+              <a:t>PASO 4</a:t>
+            </a:r>
+          </a:p>
+        </p:txBody>
+      </p:sp>
+      <p:sp>
+        <p:nvSpPr>
+          <p:cNvPr id="19" name="TextBox 18"/>
+          <p:cNvSpPr txBox="1"/>
+          <p:nvPr/>
+        </p:nvSpPr>
+        <p:spPr>
+          <a:xfrm>
+            <a:off x="1664208" y="5120640"/>
+            <a:ext cx="9464040" cy="829818"/>
+          </a:xfrm>
+          <a:prstGeom prst="rect">
+            <a:avLst/>
+          </a:prstGeom>
+          <a:noFill/>
+        </p:spPr>
+        <p:txBody>
+          <a:bodyPr wrap="square" lIns="45720" rIns="45720" tIns="36576" bIns="36576" anchor="t">
+            <a:spAutoFit/>
+          </a:bodyPr>
+          <a:lstStyle/>
+          <a:p>
+            <a:pPr algn="l">
+              <a:defRPr sz="2000" b="0">
+                <a:solidFill>
+                  <a:srgbClr val="1C2330"/>
+                </a:solidFill>
+                <a:latin typeface="Aptos"/>
+              </a:defRPr>
+            </a:pPr>
+            <a:r>
+              <a:t>Conserva el código o resultado en el repositorio o espacio indicado.</a:t>
             </a:r>
           </a:p>
         </p:txBody>
@@ -5885,7 +6896,7 @@
               </a:defRPr>
             </a:pPr>
             <a:r>
-              <a:t>COMPROBAR</a:t>
+              <a:t>APLICAR Y DECIDIR</a:t>
             </a:r>
           </a:p>
         </p:txBody>
@@ -5921,7 +6932,7 @@
               </a:defRPr>
             </a:pPr>
             <a:r>
-              <a:t>Evidencia y comprobación</a:t>
+              <a:t>Actividad central · 2</a:t>
             </a:r>
           </a:p>
         </p:txBody>
@@ -6000,7 +7011,7 @@
               </a:defRPr>
             </a:pPr>
             <a:r>
-              <a:t>MiniJarvis · 1.º DAW · Sesión 214 · H1</a:t>
+              <a:t>MiniJarvis · 1.º DAW · Sesión 214 · H1 — Primer MiniJarvis</a:t>
             </a:r>
           </a:p>
         </p:txBody>
@@ -6013,8 +7024,8 @@
         </p:nvSpPr>
         <p:spPr>
           <a:xfrm>
-            <a:off x="713232" y="1298448"/>
-            <a:ext cx="420624" cy="420624"/>
+            <a:off x="658368" y="1307592"/>
+            <a:ext cx="10835640" cy="2226564"/>
           </a:xfrm>
           <a:prstGeom prst="roundRect">
             <a:avLst/>
@@ -6024,7 +7035,7 @@
           </a:solidFill>
           <a:ln>
             <a:solidFill>
-              <a:srgbClr val="2F5BA8"/>
+              <a:srgbClr val="E5E9EF"/>
             </a:solidFill>
           </a:ln>
         </p:spPr>
@@ -6058,8 +7069,8 @@
         </p:nvSpPr>
         <p:spPr>
           <a:xfrm>
-            <a:off x="1389888" y="1280160"/>
-            <a:ext cx="9829800" cy="960120"/>
+            <a:off x="850392" y="1453895"/>
+            <a:ext cx="685800" cy="384048"/>
           </a:xfrm>
           <a:prstGeom prst="rect">
             <a:avLst/>
@@ -6073,7 +7084,43 @@
           <a:lstStyle/>
           <a:p>
             <a:pPr algn="l">
-              <a:defRPr sz="1900" b="0">
+              <a:defRPr sz="1200" b="1">
+                <a:solidFill>
+                  <a:srgbClr val="2F5BA8"/>
+                </a:solidFill>
+                <a:latin typeface="Aptos"/>
+              </a:defRPr>
+            </a:pPr>
+            <a:r>
+              <a:t>PASO 6</a:t>
+            </a:r>
+          </a:p>
+        </p:txBody>
+      </p:sp>
+      <p:sp>
+        <p:nvSpPr>
+          <p:cNvPr id="10" name="TextBox 9"/>
+          <p:cNvSpPr txBox="1"/>
+          <p:nvPr/>
+        </p:nvSpPr>
+        <p:spPr>
+          <a:xfrm>
+            <a:off x="1664208" y="1417319"/>
+            <a:ext cx="9464040" cy="2007108"/>
+          </a:xfrm>
+          <a:prstGeom prst="rect">
+            <a:avLst/>
+          </a:prstGeom>
+          <a:noFill/>
+        </p:spPr>
+        <p:txBody>
+          <a:bodyPr wrap="square" lIns="45720" rIns="45720" tIns="36576" bIns="36576" anchor="t">
+            <a:spAutoFit/>
+          </a:bodyPr>
+          <a:lstStyle/>
+          <a:p>
+            <a:pPr algn="l">
+              <a:defRPr sz="2000" b="0">
                 <a:solidFill>
                   <a:srgbClr val="1C2330"/>
                 </a:solidFill>
@@ -6081,21 +7128,21 @@
               </a:defRPr>
             </a:pPr>
             <a:r>
-              <a:t>He producido o actualizado: README H1 y documento/captura de ejecución.</a:t>
-            </a:r>
-          </a:p>
-        </p:txBody>
-      </p:sp>
-      <p:sp>
-        <p:nvSpPr>
-          <p:cNvPr id="10" name="Rounded Rectangle 9"/>
+              <a:t>Registra una sola entrada en el diario individual; no crees un informe paralelo.</a:t>
+            </a:r>
+          </a:p>
+        </p:txBody>
+      </p:sp>
+      <p:sp>
+        <p:nvSpPr>
+          <p:cNvPr id="11" name="Rounded Rectangle 10"/>
           <p:cNvSpPr/>
           <p:nvPr/>
         </p:nvSpPr>
         <p:spPr>
           <a:xfrm>
-            <a:off x="713232" y="2295144"/>
-            <a:ext cx="420624" cy="420624"/>
+            <a:off x="658368" y="3776472"/>
+            <a:ext cx="10835640" cy="2226564"/>
           </a:xfrm>
           <a:prstGeom prst="roundRect">
             <a:avLst/>
@@ -6105,7 +7152,7 @@
           </a:solidFill>
           <a:ln>
             <a:solidFill>
-              <a:srgbClr val="2F5BA8"/>
+              <a:srgbClr val="E5E9EF"/>
             </a:solidFill>
           </a:ln>
         </p:spPr>
@@ -6133,14 +7180,14 @@
       </p:sp>
       <p:sp>
         <p:nvSpPr>
-          <p:cNvPr id="11" name="TextBox 10"/>
+          <p:cNvPr id="12" name="TextBox 11"/>
           <p:cNvSpPr txBox="1"/>
           <p:nvPr/>
         </p:nvSpPr>
         <p:spPr>
           <a:xfrm>
-            <a:off x="1389888" y="2276856"/>
-            <a:ext cx="9829800" cy="960120"/>
+            <a:off x="850392" y="3922776"/>
+            <a:ext cx="685800" cy="384048"/>
           </a:xfrm>
           <a:prstGeom prst="rect">
             <a:avLst/>
@@ -6154,7 +7201,43 @@
           <a:lstStyle/>
           <a:p>
             <a:pPr algn="l">
-              <a:defRPr sz="1900" b="0">
+              <a:defRPr sz="1200" b="1">
+                <a:solidFill>
+                  <a:srgbClr val="2F5BA8"/>
+                </a:solidFill>
+                <a:latin typeface="Aptos"/>
+              </a:defRPr>
+            </a:pPr>
+            <a:r>
+              <a:t>PASO 7</a:t>
+            </a:r>
+          </a:p>
+        </p:txBody>
+      </p:sp>
+      <p:sp>
+        <p:nvSpPr>
+          <p:cNvPr id="13" name="TextBox 12"/>
+          <p:cNvSpPr txBox="1"/>
+          <p:nvPr/>
+        </p:nvSpPr>
+        <p:spPr>
+          <a:xfrm>
+            <a:off x="1664208" y="3886200"/>
+            <a:ext cx="9464040" cy="2007108"/>
+          </a:xfrm>
+          <a:prstGeom prst="rect">
+            <a:avLst/>
+          </a:prstGeom>
+          <a:noFill/>
+        </p:spPr>
+        <p:txBody>
+          <a:bodyPr wrap="square" lIns="45720" rIns="45720" tIns="36576" bIns="36576" anchor="t">
+            <a:spAutoFit/>
+          </a:bodyPr>
+          <a:lstStyle/>
+          <a:p>
+            <a:pPr algn="l">
+              <a:defRPr sz="2000" b="0">
                 <a:solidFill>
                   <a:srgbClr val="1C2330"/>
                 </a:solidFill>
@@ -6162,250 +7245,7 @@
               </a:defRPr>
             </a:pPr>
             <a:r>
-              <a:t>Puedo señalar dónde está.</a:t>
-            </a:r>
-          </a:p>
-        </p:txBody>
-      </p:sp>
-      <p:sp>
-        <p:nvSpPr>
-          <p:cNvPr id="12" name="Rounded Rectangle 11"/>
-          <p:cNvSpPr/>
-          <p:nvPr/>
-        </p:nvSpPr>
-        <p:spPr>
-          <a:xfrm>
-            <a:off x="713232" y="3291839"/>
-            <a:ext cx="420624" cy="420624"/>
-          </a:xfrm>
-          <a:prstGeom prst="roundRect">
-            <a:avLst/>
-          </a:prstGeom>
-          <a:solidFill>
-            <a:srgbClr val="FFFFFF"/>
-          </a:solidFill>
-          <a:ln>
-            <a:solidFill>
-              <a:srgbClr val="2F5BA8"/>
-            </a:solidFill>
-          </a:ln>
-        </p:spPr>
-        <p:style>
-          <a:lnRef idx="1">
-            <a:schemeClr val="accent1"/>
-          </a:lnRef>
-          <a:fillRef idx="3">
-            <a:schemeClr val="accent1"/>
-          </a:fillRef>
-          <a:effectRef idx="2">
-            <a:schemeClr val="accent1"/>
-          </a:effectRef>
-          <a:fontRef idx="minor">
-            <a:schemeClr val="lt1"/>
-          </a:fontRef>
-        </p:style>
-        <p:txBody>
-          <a:bodyPr rtlCol="0" anchor="ctr"/>
-          <a:lstStyle/>
-          <a:p>
-            <a:pPr algn="ctr"/>
-          </a:p>
-        </p:txBody>
-      </p:sp>
-      <p:sp>
-        <p:nvSpPr>
-          <p:cNvPr id="13" name="TextBox 12"/>
-          <p:cNvSpPr txBox="1"/>
-          <p:nvPr/>
-        </p:nvSpPr>
-        <p:spPr>
-          <a:xfrm>
-            <a:off x="1389888" y="3273551"/>
-            <a:ext cx="9829800" cy="960120"/>
-          </a:xfrm>
-          <a:prstGeom prst="rect">
-            <a:avLst/>
-          </a:prstGeom>
-          <a:noFill/>
-        </p:spPr>
-        <p:txBody>
-          <a:bodyPr wrap="square" lIns="45720" rIns="45720" tIns="36576" bIns="36576" anchor="t">
-            <a:spAutoFit/>
-          </a:bodyPr>
-          <a:lstStyle/>
-          <a:p>
-            <a:pPr algn="l">
-              <a:defRPr sz="1900" b="0">
-                <a:solidFill>
-                  <a:srgbClr val="1C2330"/>
-                </a:solidFill>
-                <a:latin typeface="Aptos"/>
-              </a:defRPr>
-            </a:pPr>
-            <a:r>
-              <a:t>Puedo explicar una decisión tomada.</a:t>
-            </a:r>
-          </a:p>
-        </p:txBody>
-      </p:sp>
-      <p:sp>
-        <p:nvSpPr>
-          <p:cNvPr id="14" name="Rounded Rectangle 13"/>
-          <p:cNvSpPr/>
-          <p:nvPr/>
-        </p:nvSpPr>
-        <p:spPr>
-          <a:xfrm>
-            <a:off x="713232" y="4288536"/>
-            <a:ext cx="420624" cy="420624"/>
-          </a:xfrm>
-          <a:prstGeom prst="roundRect">
-            <a:avLst/>
-          </a:prstGeom>
-          <a:solidFill>
-            <a:srgbClr val="FFFFFF"/>
-          </a:solidFill>
-          <a:ln>
-            <a:solidFill>
-              <a:srgbClr val="2F5BA8"/>
-            </a:solidFill>
-          </a:ln>
-        </p:spPr>
-        <p:style>
-          <a:lnRef idx="1">
-            <a:schemeClr val="accent1"/>
-          </a:lnRef>
-          <a:fillRef idx="3">
-            <a:schemeClr val="accent1"/>
-          </a:fillRef>
-          <a:effectRef idx="2">
-            <a:schemeClr val="accent1"/>
-          </a:effectRef>
-          <a:fontRef idx="minor">
-            <a:schemeClr val="lt1"/>
-          </a:fontRef>
-        </p:style>
-        <p:txBody>
-          <a:bodyPr rtlCol="0" anchor="ctr"/>
-          <a:lstStyle/>
-          <a:p>
-            <a:pPr algn="ctr"/>
-          </a:p>
-        </p:txBody>
-      </p:sp>
-      <p:sp>
-        <p:nvSpPr>
-          <p:cNvPr id="15" name="TextBox 14"/>
-          <p:cNvSpPr txBox="1"/>
-          <p:nvPr/>
-        </p:nvSpPr>
-        <p:spPr>
-          <a:xfrm>
-            <a:off x="1389888" y="4270248"/>
-            <a:ext cx="9829800" cy="960120"/>
-          </a:xfrm>
-          <a:prstGeom prst="rect">
-            <a:avLst/>
-          </a:prstGeom>
-          <a:noFill/>
-        </p:spPr>
-        <p:txBody>
-          <a:bodyPr wrap="square" lIns="45720" rIns="45720" tIns="36576" bIns="36576" anchor="t">
-            <a:spAutoFit/>
-          </a:bodyPr>
-          <a:lstStyle/>
-          <a:p>
-            <a:pPr algn="l">
-              <a:defRPr sz="1900" b="0">
-                <a:solidFill>
-                  <a:srgbClr val="1C2330"/>
-                </a:solidFill>
-                <a:latin typeface="Aptos"/>
-              </a:defRPr>
-            </a:pPr>
-            <a:r>
-              <a:t>Puedo mostrar una prueba o comprobación.</a:t>
-            </a:r>
-          </a:p>
-        </p:txBody>
-      </p:sp>
-      <p:sp>
-        <p:nvSpPr>
-          <p:cNvPr id="16" name="Rounded Rectangle 15"/>
-          <p:cNvSpPr/>
-          <p:nvPr/>
-        </p:nvSpPr>
-        <p:spPr>
-          <a:xfrm>
-            <a:off x="713232" y="5285231"/>
-            <a:ext cx="420624" cy="420624"/>
-          </a:xfrm>
-          <a:prstGeom prst="roundRect">
-            <a:avLst/>
-          </a:prstGeom>
-          <a:solidFill>
-            <a:srgbClr val="FFFFFF"/>
-          </a:solidFill>
-          <a:ln>
-            <a:solidFill>
-              <a:srgbClr val="2F5BA8"/>
-            </a:solidFill>
-          </a:ln>
-        </p:spPr>
-        <p:style>
-          <a:lnRef idx="1">
-            <a:schemeClr val="accent1"/>
-          </a:lnRef>
-          <a:fillRef idx="3">
-            <a:schemeClr val="accent1"/>
-          </a:fillRef>
-          <a:effectRef idx="2">
-            <a:schemeClr val="accent1"/>
-          </a:effectRef>
-          <a:fontRef idx="minor">
-            <a:schemeClr val="lt1"/>
-          </a:fontRef>
-        </p:style>
-        <p:txBody>
-          <a:bodyPr rtlCol="0" anchor="ctr"/>
-          <a:lstStyle/>
-          <a:p>
-            <a:pPr algn="ctr"/>
-          </a:p>
-        </p:txBody>
-      </p:sp>
-      <p:sp>
-        <p:nvSpPr>
-          <p:cNvPr id="17" name="TextBox 16"/>
-          <p:cNvSpPr txBox="1"/>
-          <p:nvPr/>
-        </p:nvSpPr>
-        <p:spPr>
-          <a:xfrm>
-            <a:off x="1389888" y="5266944"/>
-            <a:ext cx="9829800" cy="960120"/>
-          </a:xfrm>
-          <a:prstGeom prst="rect">
-            <a:avLst/>
-          </a:prstGeom>
-          <a:noFill/>
-        </p:spPr>
-        <p:txBody>
-          <a:bodyPr wrap="square" lIns="45720" rIns="45720" tIns="36576" bIns="36576" anchor="t">
-            <a:spAutoFit/>
-          </a:bodyPr>
-          <a:lstStyle/>
-          <a:p>
-            <a:pPr algn="l">
-              <a:defRPr sz="1900" b="0">
-                <a:solidFill>
-                  <a:srgbClr val="1C2330"/>
-                </a:solidFill>
-                <a:latin typeface="Aptos"/>
-              </a:defRPr>
-            </a:pPr>
-            <a:r>
-              <a:t>He registrado mi aportación individual si el trabajo era de equipo.</a:t>
+              <a:t>¿Qué puedes señalar, explicar y probar al terminar este checkpoint?</a:t>
             </a:r>
           </a:p>
         </p:txBody>
@@ -6545,7 +7385,7 @@
               </a:defRPr>
             </a:pPr>
             <a:r>
-              <a:t>LÍMITES QUE PROTEGEN EL APRENDIZAJE</a:t>
+              <a:t>COMPROBAR</a:t>
             </a:r>
           </a:p>
         </p:txBody>
@@ -6581,7 +7421,7 @@
               </a:defRPr>
             </a:pPr>
             <a:r>
-              <a:t>Seguridad y uso responsable</a:t>
+              <a:t>Evidencia y comprobación</a:t>
             </a:r>
           </a:p>
         </p:txBody>
@@ -6660,7 +7500,7 @@
               </a:defRPr>
             </a:pPr>
             <a:r>
-              <a:t>MiniJarvis · 1.º DAW · Sesión 214 · H1</a:t>
+              <a:t>MiniJarvis · 1.º DAW · Sesión 214 · H1 — Primer MiniJarvis</a:t>
             </a:r>
           </a:p>
         </p:txBody>
@@ -6673,8 +7513,8 @@
         </p:nvSpPr>
         <p:spPr>
           <a:xfrm>
-            <a:off x="621792" y="1298448"/>
-            <a:ext cx="5230368" cy="2176272"/>
+            <a:off x="713232" y="1298448"/>
+            <a:ext cx="420624" cy="420624"/>
           </a:xfrm>
           <a:prstGeom prst="roundRect">
             <a:avLst/>
@@ -6684,7 +7524,7 @@
           </a:solidFill>
           <a:ln>
             <a:solidFill>
-              <a:srgbClr val="E5E9EF"/>
+              <a:srgbClr val="2F5BA8"/>
             </a:solidFill>
           </a:ln>
         </p:spPr>
@@ -6712,57 +7552,14 @@
       </p:sp>
       <p:sp>
         <p:nvSpPr>
-          <p:cNvPr id="9" name="Rounded Rectangle 8"/>
-          <p:cNvSpPr/>
-          <p:nvPr/>
-        </p:nvSpPr>
-        <p:spPr>
-          <a:xfrm>
-            <a:off x="841248" y="1527048"/>
-            <a:ext cx="237744" cy="1719072"/>
-          </a:xfrm>
-          <a:prstGeom prst="roundRect">
-            <a:avLst/>
-          </a:prstGeom>
-          <a:solidFill>
-            <a:srgbClr val="247E5C"/>
-          </a:solidFill>
-          <a:ln>
-            <a:noFill/>
-          </a:ln>
-        </p:spPr>
-        <p:style>
-          <a:lnRef idx="1">
-            <a:schemeClr val="accent1"/>
-          </a:lnRef>
-          <a:fillRef idx="3">
-            <a:schemeClr val="accent1"/>
-          </a:fillRef>
-          <a:effectRef idx="2">
-            <a:schemeClr val="accent1"/>
-          </a:effectRef>
-          <a:fontRef idx="minor">
-            <a:schemeClr val="lt1"/>
-          </a:fontRef>
-        </p:style>
-        <p:txBody>
-          <a:bodyPr rtlCol="0" anchor="ctr"/>
-          <a:lstStyle/>
-          <a:p>
-            <a:pPr algn="ctr"/>
-          </a:p>
-        </p:txBody>
-      </p:sp>
-      <p:sp>
-        <p:nvSpPr>
-          <p:cNvPr id="10" name="TextBox 9"/>
+          <p:cNvPr id="9" name="TextBox 8"/>
           <p:cNvSpPr txBox="1"/>
           <p:nvPr/>
         </p:nvSpPr>
         <p:spPr>
           <a:xfrm>
-            <a:off x="1280160" y="1527048"/>
-            <a:ext cx="4224528" cy="1783080"/>
+            <a:off x="1389888" y="1280160"/>
+            <a:ext cx="9829800" cy="1624584"/>
           </a:xfrm>
           <a:prstGeom prst="rect">
             <a:avLst/>
@@ -6784,21 +7581,21 @@
               </a:defRPr>
             </a:pPr>
             <a:r>
-              <a:t>Trabaja únicamente con datos ficticios.</a:t>
-            </a:r>
-          </a:p>
-        </p:txBody>
-      </p:sp>
-      <p:sp>
-        <p:nvSpPr>
-          <p:cNvPr id="11" name="Rounded Rectangle 10"/>
+              <a:t>conserva el código o la prueba en el lugar indicado por la sesión;</a:t>
+            </a:r>
+          </a:p>
+        </p:txBody>
+      </p:sp>
+      <p:sp>
+        <p:nvSpPr>
+          <p:cNvPr id="10" name="Rounded Rectangle 9"/>
           <p:cNvSpPr/>
           <p:nvPr/>
         </p:nvSpPr>
         <p:spPr>
           <a:xfrm>
-            <a:off x="6126479" y="1298448"/>
-            <a:ext cx="5230368" cy="2176272"/>
+            <a:off x="713232" y="2959607"/>
+            <a:ext cx="420624" cy="420624"/>
           </a:xfrm>
           <a:prstGeom prst="roundRect">
             <a:avLst/>
@@ -6808,7 +7605,7 @@
           </a:solidFill>
           <a:ln>
             <a:solidFill>
-              <a:srgbClr val="E5E9EF"/>
+              <a:srgbClr val="2F5BA8"/>
             </a:solidFill>
           </a:ln>
         </p:spPr>
@@ -6836,57 +7633,14 @@
       </p:sp>
       <p:sp>
         <p:nvSpPr>
-          <p:cNvPr id="12" name="Rounded Rectangle 11"/>
-          <p:cNvSpPr/>
-          <p:nvPr/>
-        </p:nvSpPr>
-        <p:spPr>
-          <a:xfrm>
-            <a:off x="6345936" y="1527048"/>
-            <a:ext cx="237744" cy="1719072"/>
-          </a:xfrm>
-          <a:prstGeom prst="roundRect">
-            <a:avLst/>
-          </a:prstGeom>
-          <a:solidFill>
-            <a:srgbClr val="C07020"/>
-          </a:solidFill>
-          <a:ln>
-            <a:noFill/>
-          </a:ln>
-        </p:spPr>
-        <p:style>
-          <a:lnRef idx="1">
-            <a:schemeClr val="accent1"/>
-          </a:lnRef>
-          <a:fillRef idx="3">
-            <a:schemeClr val="accent1"/>
-          </a:fillRef>
-          <a:effectRef idx="2">
-            <a:schemeClr val="accent1"/>
-          </a:effectRef>
-          <a:fontRef idx="minor">
-            <a:schemeClr val="lt1"/>
-          </a:fontRef>
-        </p:style>
-        <p:txBody>
-          <a:bodyPr rtlCol="0" anchor="ctr"/>
-          <a:lstStyle/>
-          <a:p>
-            <a:pPr algn="ctr"/>
-          </a:p>
-        </p:txBody>
-      </p:sp>
-      <p:sp>
-        <p:nvSpPr>
-          <p:cNvPr id="13" name="TextBox 12"/>
+          <p:cNvPr id="11" name="TextBox 10"/>
           <p:cNvSpPr txBox="1"/>
           <p:nvPr/>
         </p:nvSpPr>
         <p:spPr>
           <a:xfrm>
-            <a:off x="6784847" y="1527048"/>
-            <a:ext cx="4224528" cy="1783080"/>
+            <a:off x="1389888" y="2941319"/>
+            <a:ext cx="9829800" cy="1624584"/>
           </a:xfrm>
           <a:prstGeom prst="rect">
             <a:avLst/>
@@ -6908,21 +7662,21 @@
               </a:defRPr>
             </a:pPr>
             <a:r>
-              <a:t>No escribas contraseñas, tokens, claves API ni datos personales.</a:t>
-            </a:r>
-          </a:p>
-        </p:txBody>
-      </p:sp>
-      <p:sp>
-        <p:nvSpPr>
-          <p:cNvPr id="14" name="Rounded Rectangle 13"/>
+              <a:t>añade una sola entrada al diario individual con prueba, bloqueo y siguiente paso;</a:t>
+            </a:r>
+          </a:p>
+        </p:txBody>
+      </p:sp>
+      <p:sp>
+        <p:nvSpPr>
+          <p:cNvPr id="12" name="Rounded Rectangle 11"/>
           <p:cNvSpPr/>
           <p:nvPr/>
         </p:nvSpPr>
         <p:spPr>
           <a:xfrm>
-            <a:off x="621792" y="3675887"/>
-            <a:ext cx="5230368" cy="2176272"/>
+            <a:off x="713232" y="4620767"/>
+            <a:ext cx="420624" cy="420624"/>
           </a:xfrm>
           <a:prstGeom prst="roundRect">
             <a:avLst/>
@@ -6932,7 +7686,7 @@
           </a:solidFill>
           <a:ln>
             <a:solidFill>
-              <a:srgbClr val="E5E9EF"/>
+              <a:srgbClr val="2F5BA8"/>
             </a:solidFill>
           </a:ln>
         </p:spPr>
@@ -6960,57 +7714,14 @@
       </p:sp>
       <p:sp>
         <p:nvSpPr>
-          <p:cNvPr id="15" name="Rounded Rectangle 14"/>
-          <p:cNvSpPr/>
-          <p:nvPr/>
-        </p:nvSpPr>
-        <p:spPr>
-          <a:xfrm>
-            <a:off x="841248" y="3904487"/>
-            <a:ext cx="237744" cy="1719072"/>
-          </a:xfrm>
-          <a:prstGeom prst="roundRect">
-            <a:avLst/>
-          </a:prstGeom>
-          <a:solidFill>
-            <a:srgbClr val="B13A3A"/>
-          </a:solidFill>
-          <a:ln>
-            <a:noFill/>
-          </a:ln>
-        </p:spPr>
-        <p:style>
-          <a:lnRef idx="1">
-            <a:schemeClr val="accent1"/>
-          </a:lnRef>
-          <a:fillRef idx="3">
-            <a:schemeClr val="accent1"/>
-          </a:fillRef>
-          <a:effectRef idx="2">
-            <a:schemeClr val="accent1"/>
-          </a:effectRef>
-          <a:fontRef idx="minor">
-            <a:schemeClr val="lt1"/>
-          </a:fontRef>
-        </p:style>
-        <p:txBody>
-          <a:bodyPr rtlCol="0" anchor="ctr"/>
-          <a:lstStyle/>
-          <a:p>
-            <a:pPr algn="ctr"/>
-          </a:p>
-        </p:txBody>
-      </p:sp>
-      <p:sp>
-        <p:nvSpPr>
-          <p:cNvPr id="16" name="TextBox 15"/>
+          <p:cNvPr id="13" name="TextBox 12"/>
           <p:cNvSpPr txBox="1"/>
           <p:nvPr/>
         </p:nvSpPr>
         <p:spPr>
           <a:xfrm>
-            <a:off x="1280160" y="3904487"/>
-            <a:ext cx="4224528" cy="1783080"/>
+            <a:off x="1389888" y="4602480"/>
+            <a:ext cx="9829800" cy="1624584"/>
           </a:xfrm>
           <a:prstGeom prst="rect">
             <a:avLst/>
@@ -7032,131 +7743,7 @@
               </a:defRPr>
             </a:pPr>
             <a:r>
-              <a:t>Si utilizas IA en un uso permitido, registra qué pediste, qué recibiste, qué cambiaste y cómo lo comprobaste.</a:t>
-            </a:r>
-          </a:p>
-        </p:txBody>
-      </p:sp>
-      <p:sp>
-        <p:nvSpPr>
-          <p:cNvPr id="17" name="Rounded Rectangle 16"/>
-          <p:cNvSpPr/>
-          <p:nvPr/>
-        </p:nvSpPr>
-        <p:spPr>
-          <a:xfrm>
-            <a:off x="6126479" y="3675887"/>
-            <a:ext cx="5230368" cy="2176272"/>
-          </a:xfrm>
-          <a:prstGeom prst="roundRect">
-            <a:avLst/>
-          </a:prstGeom>
-          <a:solidFill>
-            <a:srgbClr val="FFFFFF"/>
-          </a:solidFill>
-          <a:ln>
-            <a:solidFill>
-              <a:srgbClr val="E5E9EF"/>
-            </a:solidFill>
-          </a:ln>
-        </p:spPr>
-        <p:style>
-          <a:lnRef idx="1">
-            <a:schemeClr val="accent1"/>
-          </a:lnRef>
-          <a:fillRef idx="3">
-            <a:schemeClr val="accent1"/>
-          </a:fillRef>
-          <a:effectRef idx="2">
-            <a:schemeClr val="accent1"/>
-          </a:effectRef>
-          <a:fontRef idx="minor">
-            <a:schemeClr val="lt1"/>
-          </a:fontRef>
-        </p:style>
-        <p:txBody>
-          <a:bodyPr rtlCol="0" anchor="ctr"/>
-          <a:lstStyle/>
-          <a:p>
-            <a:pPr algn="ctr"/>
-          </a:p>
-        </p:txBody>
-      </p:sp>
-      <p:sp>
-        <p:nvSpPr>
-          <p:cNvPr id="18" name="Rounded Rectangle 17"/>
-          <p:cNvSpPr/>
-          <p:nvPr/>
-        </p:nvSpPr>
-        <p:spPr>
-          <a:xfrm>
-            <a:off x="6345936" y="3904487"/>
-            <a:ext cx="237744" cy="1719072"/>
-          </a:xfrm>
-          <a:prstGeom prst="roundRect">
-            <a:avLst/>
-          </a:prstGeom>
-          <a:solidFill>
-            <a:srgbClr val="2F5BA8"/>
-          </a:solidFill>
-          <a:ln>
-            <a:noFill/>
-          </a:ln>
-        </p:spPr>
-        <p:style>
-          <a:lnRef idx="1">
-            <a:schemeClr val="accent1"/>
-          </a:lnRef>
-          <a:fillRef idx="3">
-            <a:schemeClr val="accent1"/>
-          </a:fillRef>
-          <a:effectRef idx="2">
-            <a:schemeClr val="accent1"/>
-          </a:effectRef>
-          <a:fontRef idx="minor">
-            <a:schemeClr val="lt1"/>
-          </a:fontRef>
-        </p:style>
-        <p:txBody>
-          <a:bodyPr rtlCol="0" anchor="ctr"/>
-          <a:lstStyle/>
-          <a:p>
-            <a:pPr algn="ctr"/>
-          </a:p>
-        </p:txBody>
-      </p:sp>
-      <p:sp>
-        <p:nvSpPr>
-          <p:cNvPr id="19" name="TextBox 18"/>
-          <p:cNvSpPr txBox="1"/>
-          <p:nvPr/>
-        </p:nvSpPr>
-        <p:spPr>
-          <a:xfrm>
-            <a:off x="6784847" y="3904487"/>
-            <a:ext cx="4224528" cy="1783080"/>
-          </a:xfrm>
-          <a:prstGeom prst="rect">
-            <a:avLst/>
-          </a:prstGeom>
-          <a:noFill/>
-        </p:spPr>
-        <p:txBody>
-          <a:bodyPr wrap="square" lIns="45720" rIns="45720" tIns="36576" bIns="36576" anchor="t">
-            <a:spAutoFit/>
-          </a:bodyPr>
-          <a:lstStyle/>
-          <a:p>
-            <a:pPr algn="l">
-              <a:defRPr sz="1900" b="0">
-                <a:solidFill>
-                  <a:srgbClr val="1C2330"/>
-                </a:solidFill>
-                <a:latin typeface="Aptos"/>
-              </a:defRPr>
-            </a:pPr>
-            <a:r>
-              <a:t>Los ejemplos de Laura solo se consultan después del intento propio.</a:t>
+              <a:t>no copies la misma reflexión en otro documento; el Site personal seleccionará evidencias al cerrar H1.</a:t>
             </a:r>
           </a:p>
         </p:txBody>
@@ -7296,7 +7883,7 @@
               </a:defRPr>
             </a:pPr>
             <a:r>
-              <a:t>EXPLICAR Y DEFENDER</a:t>
+              <a:t>LÍMITES QUE PROTEGEN EL APRENDIZAJE</a:t>
             </a:r>
           </a:p>
         </p:txBody>
@@ -7332,7 +7919,7 @@
               </a:defRPr>
             </a:pPr>
             <a:r>
-              <a:t>Cierre y defensa</a:t>
+              <a:t>Seguridad y uso responsable</a:t>
             </a:r>
           </a:p>
         </p:txBody>
@@ -7411,7 +7998,510 @@
               </a:defRPr>
             </a:pPr>
             <a:r>
-              <a:t>MiniJarvis · 1.º DAW · Sesión 214 · H1</a:t>
+              <a:t>MiniJarvis · 1.º DAW · Sesión 214 · H1 — Primer MiniJarvis</a:t>
+            </a:r>
+          </a:p>
+        </p:txBody>
+      </p:sp>
+      <p:sp>
+        <p:nvSpPr>
+          <p:cNvPr id="8" name="Rounded Rectangle 7"/>
+          <p:cNvSpPr/>
+          <p:nvPr/>
+        </p:nvSpPr>
+        <p:spPr>
+          <a:xfrm>
+            <a:off x="621792" y="1298448"/>
+            <a:ext cx="5230368" cy="4553712"/>
+          </a:xfrm>
+          <a:prstGeom prst="roundRect">
+            <a:avLst/>
+          </a:prstGeom>
+          <a:solidFill>
+            <a:srgbClr val="FFFFFF"/>
+          </a:solidFill>
+          <a:ln>
+            <a:solidFill>
+              <a:srgbClr val="E5E9EF"/>
+            </a:solidFill>
+          </a:ln>
+        </p:spPr>
+        <p:style>
+          <a:lnRef idx="1">
+            <a:schemeClr val="accent1"/>
+          </a:lnRef>
+          <a:fillRef idx="3">
+            <a:schemeClr val="accent1"/>
+          </a:fillRef>
+          <a:effectRef idx="2">
+            <a:schemeClr val="accent1"/>
+          </a:effectRef>
+          <a:fontRef idx="minor">
+            <a:schemeClr val="lt1"/>
+          </a:fontRef>
+        </p:style>
+        <p:txBody>
+          <a:bodyPr rtlCol="0" anchor="ctr"/>
+          <a:lstStyle/>
+          <a:p>
+            <a:pPr algn="ctr"/>
+          </a:p>
+        </p:txBody>
+      </p:sp>
+      <p:sp>
+        <p:nvSpPr>
+          <p:cNvPr id="9" name="Rounded Rectangle 8"/>
+          <p:cNvSpPr/>
+          <p:nvPr/>
+        </p:nvSpPr>
+        <p:spPr>
+          <a:xfrm>
+            <a:off x="841248" y="1527048"/>
+            <a:ext cx="237744" cy="4096512"/>
+          </a:xfrm>
+          <a:prstGeom prst="roundRect">
+            <a:avLst/>
+          </a:prstGeom>
+          <a:solidFill>
+            <a:srgbClr val="247E5C"/>
+          </a:solidFill>
+          <a:ln>
+            <a:noFill/>
+          </a:ln>
+        </p:spPr>
+        <p:style>
+          <a:lnRef idx="1">
+            <a:schemeClr val="accent1"/>
+          </a:lnRef>
+          <a:fillRef idx="3">
+            <a:schemeClr val="accent1"/>
+          </a:fillRef>
+          <a:effectRef idx="2">
+            <a:schemeClr val="accent1"/>
+          </a:effectRef>
+          <a:fontRef idx="minor">
+            <a:schemeClr val="lt1"/>
+          </a:fontRef>
+        </p:style>
+        <p:txBody>
+          <a:bodyPr rtlCol="0" anchor="ctr"/>
+          <a:lstStyle/>
+          <a:p>
+            <a:pPr algn="ctr"/>
+          </a:p>
+        </p:txBody>
+      </p:sp>
+      <p:sp>
+        <p:nvSpPr>
+          <p:cNvPr id="10" name="TextBox 9"/>
+          <p:cNvSpPr txBox="1"/>
+          <p:nvPr/>
+        </p:nvSpPr>
+        <p:spPr>
+          <a:xfrm>
+            <a:off x="1280160" y="1527048"/>
+            <a:ext cx="4224528" cy="4160520"/>
+          </a:xfrm>
+          <a:prstGeom prst="rect">
+            <a:avLst/>
+          </a:prstGeom>
+          <a:noFill/>
+        </p:spPr>
+        <p:txBody>
+          <a:bodyPr wrap="square" lIns="45720" rIns="45720" tIns="36576" bIns="36576" anchor="t">
+            <a:spAutoFit/>
+          </a:bodyPr>
+          <a:lstStyle/>
+          <a:p>
+            <a:pPr algn="l">
+              <a:defRPr sz="1900" b="0">
+                <a:solidFill>
+                  <a:srgbClr val="1C2330"/>
+                </a:solidFill>
+                <a:latin typeface="Aptos"/>
+              </a:defRPr>
+            </a:pPr>
+            <a:r>
+              <a:t>Usa datos ficticios y no publiques credenciales ni información personal.</a:t>
+            </a:r>
+          </a:p>
+        </p:txBody>
+      </p:sp>
+      <p:sp>
+        <p:nvSpPr>
+          <p:cNvPr id="11" name="Rounded Rectangle 10"/>
+          <p:cNvSpPr/>
+          <p:nvPr/>
+        </p:nvSpPr>
+        <p:spPr>
+          <a:xfrm>
+            <a:off x="6126479" y="1298448"/>
+            <a:ext cx="5230368" cy="4553712"/>
+          </a:xfrm>
+          <a:prstGeom prst="roundRect">
+            <a:avLst/>
+          </a:prstGeom>
+          <a:solidFill>
+            <a:srgbClr val="FFFFFF"/>
+          </a:solidFill>
+          <a:ln>
+            <a:solidFill>
+              <a:srgbClr val="E5E9EF"/>
+            </a:solidFill>
+          </a:ln>
+        </p:spPr>
+        <p:style>
+          <a:lnRef idx="1">
+            <a:schemeClr val="accent1"/>
+          </a:lnRef>
+          <a:fillRef idx="3">
+            <a:schemeClr val="accent1"/>
+          </a:fillRef>
+          <a:effectRef idx="2">
+            <a:schemeClr val="accent1"/>
+          </a:effectRef>
+          <a:fontRef idx="minor">
+            <a:schemeClr val="lt1"/>
+          </a:fontRef>
+        </p:style>
+        <p:txBody>
+          <a:bodyPr rtlCol="0" anchor="ctr"/>
+          <a:lstStyle/>
+          <a:p>
+            <a:pPr algn="ctr"/>
+          </a:p>
+        </p:txBody>
+      </p:sp>
+      <p:sp>
+        <p:nvSpPr>
+          <p:cNvPr id="12" name="Rounded Rectangle 11"/>
+          <p:cNvSpPr/>
+          <p:nvPr/>
+        </p:nvSpPr>
+        <p:spPr>
+          <a:xfrm>
+            <a:off x="6345936" y="1527048"/>
+            <a:ext cx="237744" cy="4096512"/>
+          </a:xfrm>
+          <a:prstGeom prst="roundRect">
+            <a:avLst/>
+          </a:prstGeom>
+          <a:solidFill>
+            <a:srgbClr val="C07020"/>
+          </a:solidFill>
+          <a:ln>
+            <a:noFill/>
+          </a:ln>
+        </p:spPr>
+        <p:style>
+          <a:lnRef idx="1">
+            <a:schemeClr val="accent1"/>
+          </a:lnRef>
+          <a:fillRef idx="3">
+            <a:schemeClr val="accent1"/>
+          </a:fillRef>
+          <a:effectRef idx="2">
+            <a:schemeClr val="accent1"/>
+          </a:effectRef>
+          <a:fontRef idx="minor">
+            <a:schemeClr val="lt1"/>
+          </a:fontRef>
+        </p:style>
+        <p:txBody>
+          <a:bodyPr rtlCol="0" anchor="ctr"/>
+          <a:lstStyle/>
+          <a:p>
+            <a:pPr algn="ctr"/>
+          </a:p>
+        </p:txBody>
+      </p:sp>
+      <p:sp>
+        <p:nvSpPr>
+          <p:cNvPr id="13" name="TextBox 12"/>
+          <p:cNvSpPr txBox="1"/>
+          <p:nvPr/>
+        </p:nvSpPr>
+        <p:spPr>
+          <a:xfrm>
+            <a:off x="6784847" y="1527048"/>
+            <a:ext cx="4224528" cy="4160520"/>
+          </a:xfrm>
+          <a:prstGeom prst="rect">
+            <a:avLst/>
+          </a:prstGeom>
+          <a:noFill/>
+        </p:spPr>
+        <p:txBody>
+          <a:bodyPr wrap="square" lIns="45720" rIns="45720" tIns="36576" bIns="36576" anchor="t">
+            <a:spAutoFit/>
+          </a:bodyPr>
+          <a:lstStyle/>
+          <a:p>
+            <a:pPr algn="l">
+              <a:defRPr sz="1900" b="0">
+                <a:solidFill>
+                  <a:srgbClr val="1C2330"/>
+                </a:solidFill>
+                <a:latin typeface="Aptos"/>
+              </a:defRPr>
+            </a:pPr>
+            <a:r>
+              <a:t>Si utilizas IA de forma sustantiva, registra propósito, propuesta, cambios propios y validación en el registro de IA del hito.</a:t>
+            </a:r>
+          </a:p>
+        </p:txBody>
+      </p:sp>
+    </p:spTree>
+  </p:cSld>
+  <p:clrMapOvr>
+    <a:masterClrMapping/>
+  </p:clrMapOvr>
+</p:sld>
+</file>
+
+<file path=ppt/slides/slide9.xml><?xml version="1.0" encoding="utf-8"?>
+<p:sld xmlns:a="http://schemas.openxmlformats.org/drawingml/2006/main" xmlns:p="http://schemas.openxmlformats.org/presentationml/2006/main" xmlns:r="http://schemas.openxmlformats.org/officeDocument/2006/relationships">
+  <p:cSld>
+    <p:spTree>
+      <p:nvGrpSpPr>
+        <p:cNvPr id="1" name=""/>
+        <p:cNvGrpSpPr/>
+        <p:nvPr/>
+      </p:nvGrpSpPr>
+      <p:grpSpPr/>
+      <p:sp>
+        <p:nvSpPr>
+          <p:cNvPr id="2" name="Rectangle 1"/>
+          <p:cNvSpPr/>
+          <p:nvPr/>
+        </p:nvSpPr>
+        <p:spPr>
+          <a:xfrm>
+            <a:off x="0" y="0"/>
+            <a:ext cx="12191695" cy="6858000"/>
+          </a:xfrm>
+          <a:prstGeom prst="rect">
+            <a:avLst/>
+          </a:prstGeom>
+          <a:solidFill>
+            <a:srgbClr val="F9F7F2"/>
+          </a:solidFill>
+          <a:ln>
+            <a:noFill/>
+          </a:ln>
+        </p:spPr>
+        <p:style>
+          <a:lnRef idx="1">
+            <a:schemeClr val="accent1"/>
+          </a:lnRef>
+          <a:fillRef idx="3">
+            <a:schemeClr val="accent1"/>
+          </a:fillRef>
+          <a:effectRef idx="2">
+            <a:schemeClr val="accent1"/>
+          </a:effectRef>
+          <a:fontRef idx="minor">
+            <a:schemeClr val="lt1"/>
+          </a:fontRef>
+        </p:style>
+        <p:txBody>
+          <a:bodyPr rtlCol="0" anchor="ctr"/>
+          <a:lstStyle/>
+          <a:p>
+            <a:pPr algn="ctr"/>
+          </a:p>
+        </p:txBody>
+      </p:sp>
+      <p:sp>
+        <p:nvSpPr>
+          <p:cNvPr id="3" name="Rectangle 2"/>
+          <p:cNvSpPr/>
+          <p:nvPr/>
+        </p:nvSpPr>
+        <p:spPr>
+          <a:xfrm>
+            <a:off x="0" y="0"/>
+            <a:ext cx="164592" cy="6858000"/>
+          </a:xfrm>
+          <a:prstGeom prst="rect">
+            <a:avLst/>
+          </a:prstGeom>
+          <a:solidFill>
+            <a:srgbClr val="2F5BA8"/>
+          </a:solidFill>
+          <a:ln>
+            <a:noFill/>
+          </a:ln>
+        </p:spPr>
+        <p:style>
+          <a:lnRef idx="1">
+            <a:schemeClr val="accent1"/>
+          </a:lnRef>
+          <a:fillRef idx="3">
+            <a:schemeClr val="accent1"/>
+          </a:fillRef>
+          <a:effectRef idx="2">
+            <a:schemeClr val="accent1"/>
+          </a:effectRef>
+          <a:fontRef idx="minor">
+            <a:schemeClr val="lt1"/>
+          </a:fontRef>
+        </p:style>
+        <p:txBody>
+          <a:bodyPr rtlCol="0" anchor="ctr"/>
+          <a:lstStyle/>
+          <a:p>
+            <a:pPr algn="ctr"/>
+          </a:p>
+        </p:txBody>
+      </p:sp>
+      <p:sp>
+        <p:nvSpPr>
+          <p:cNvPr id="4" name="TextBox 3"/>
+          <p:cNvSpPr txBox="1"/>
+          <p:nvPr/>
+        </p:nvSpPr>
+        <p:spPr>
+          <a:xfrm>
+            <a:off x="502920" y="274320"/>
+            <a:ext cx="5486400" cy="256032"/>
+          </a:xfrm>
+          <a:prstGeom prst="rect">
+            <a:avLst/>
+          </a:prstGeom>
+          <a:noFill/>
+        </p:spPr>
+        <p:txBody>
+          <a:bodyPr wrap="square" lIns="45720" rIns="45720" tIns="36576" bIns="36576" anchor="t">
+            <a:spAutoFit/>
+          </a:bodyPr>
+          <a:lstStyle/>
+          <a:p>
+            <a:pPr algn="l">
+              <a:defRPr sz="1000" b="1">
+                <a:solidFill>
+                  <a:srgbClr val="2F5BA8"/>
+                </a:solidFill>
+                <a:latin typeface="Aptos"/>
+              </a:defRPr>
+            </a:pPr>
+            <a:r>
+              <a:t>EXPLICAR Y DEFENDER</a:t>
+            </a:r>
+          </a:p>
+        </p:txBody>
+      </p:sp>
+      <p:sp>
+        <p:nvSpPr>
+          <p:cNvPr id="5" name="TextBox 4"/>
+          <p:cNvSpPr txBox="1"/>
+          <p:nvPr/>
+        </p:nvSpPr>
+        <p:spPr>
+          <a:xfrm>
+            <a:off x="502920" y="603504"/>
+            <a:ext cx="11064240" cy="530352"/>
+          </a:xfrm>
+          <a:prstGeom prst="rect">
+            <a:avLst/>
+          </a:prstGeom>
+          <a:noFill/>
+        </p:spPr>
+        <p:txBody>
+          <a:bodyPr wrap="square" lIns="45720" rIns="45720" tIns="36576" bIns="36576" anchor="t">
+            <a:spAutoFit/>
+          </a:bodyPr>
+          <a:lstStyle/>
+          <a:p>
+            <a:pPr algn="l">
+              <a:defRPr sz="2800" b="1">
+                <a:solidFill>
+                  <a:srgbClr val="1C2330"/>
+                </a:solidFill>
+                <a:latin typeface="Aptos"/>
+              </a:defRPr>
+            </a:pPr>
+            <a:r>
+              <a:t>Cierre y defensa</a:t>
+            </a:r>
+          </a:p>
+        </p:txBody>
+      </p:sp>
+      <p:sp>
+        <p:nvSpPr>
+          <p:cNvPr id="6" name="Rectangle 5"/>
+          <p:cNvSpPr/>
+          <p:nvPr/>
+        </p:nvSpPr>
+        <p:spPr>
+          <a:xfrm>
+            <a:off x="0" y="6601968"/>
+            <a:ext cx="12191695" cy="256032"/>
+          </a:xfrm>
+          <a:prstGeom prst="rect">
+            <a:avLst/>
+          </a:prstGeom>
+          <a:solidFill>
+            <a:srgbClr val="2F5BA8"/>
+          </a:solidFill>
+          <a:ln>
+            <a:noFill/>
+          </a:ln>
+        </p:spPr>
+        <p:style>
+          <a:lnRef idx="1">
+            <a:schemeClr val="accent1"/>
+          </a:lnRef>
+          <a:fillRef idx="3">
+            <a:schemeClr val="accent1"/>
+          </a:fillRef>
+          <a:effectRef idx="2">
+            <a:schemeClr val="accent1"/>
+          </a:effectRef>
+          <a:fontRef idx="minor">
+            <a:schemeClr val="lt1"/>
+          </a:fontRef>
+        </p:style>
+        <p:txBody>
+          <a:bodyPr rtlCol="0" anchor="ctr"/>
+          <a:lstStyle/>
+          <a:p>
+            <a:pPr algn="ctr"/>
+          </a:p>
+        </p:txBody>
+      </p:sp>
+      <p:sp>
+        <p:nvSpPr>
+          <p:cNvPr id="7" name="TextBox 6"/>
+          <p:cNvSpPr txBox="1"/>
+          <p:nvPr/>
+        </p:nvSpPr>
+        <p:spPr>
+          <a:xfrm>
+            <a:off x="411480" y="6629400"/>
+            <a:ext cx="11247120" cy="164592"/>
+          </a:xfrm>
+          <a:prstGeom prst="rect">
+            <a:avLst/>
+          </a:prstGeom>
+          <a:noFill/>
+        </p:spPr>
+        <p:txBody>
+          <a:bodyPr wrap="square" lIns="45720" rIns="45720" tIns="36576" bIns="36576" anchor="t">
+            <a:spAutoFit/>
+          </a:bodyPr>
+          <a:lstStyle/>
+          <a:p>
+            <a:pPr algn="l">
+              <a:defRPr sz="900" b="0">
+                <a:solidFill>
+                  <a:srgbClr val="FFFFFF"/>
+                </a:solidFill>
+                <a:latin typeface="Aptos"/>
+              </a:defRPr>
+            </a:pPr>
+            <a:r>
+              <a:t>MiniJarvis · 1.º DAW · Sesión 214 · H1 — Primer MiniJarvis</a:t>
             </a:r>
           </a:p>
         </p:txBody>
@@ -7528,7 +8618,7 @@
               </a:defRPr>
             </a:pPr>
             <a:r>
-              <a:t>Intercambio: otro equipo intenta entender el README.</a:t>
+              <a:t>¿Qué puedes señalar, explicar y probar al terminar este checkpoint?</a:t>
             </a:r>
           </a:p>
         </p:txBody>
@@ -7895,4 +8985,324 @@
   </a:objectDefaults>
   <a:extraClrSchemeLst/>
 </a:theme>
+</file>
+
+<file path=ppt/theme/theme2.xml><?xml version="1.0" encoding="utf-8"?>
+<a:theme xmlns:a="http://schemas.openxmlformats.org/drawingml/2006/main" name="Office Theme">
+  <a:themeElements>
+    <a:clrScheme name="Office">
+      <a:dk1>
+        <a:sysClr val="windowText" lastClr="000000"/>
+      </a:dk1>
+      <a:lt1>
+        <a:sysClr val="window" lastClr="FFFFFF"/>
+      </a:lt1>
+      <a:dk2>
+        <a:srgbClr val="1F497D"/>
+      </a:dk2>
+      <a:lt2>
+        <a:srgbClr val="EEECE1"/>
+      </a:lt2>
+      <a:accent1>
+        <a:srgbClr val="4F81BD"/>
+      </a:accent1>
+      <a:accent2>
+        <a:srgbClr val="C0504D"/>
+      </a:accent2>
+      <a:accent3>
+        <a:srgbClr val="9BBB59"/>
+      </a:accent3>
+      <a:accent4>
+        <a:srgbClr val="8064A2"/>
+      </a:accent4>
+      <a:accent5>
+        <a:srgbClr val="4BACC6"/>
+      </a:accent5>
+      <a:accent6>
+        <a:srgbClr val="F79646"/>
+      </a:accent6>
+      <a:hlink>
+        <a:srgbClr val="0000FF"/>
+      </a:hlink>
+      <a:folHlink>
+        <a:srgbClr val="800080"/>
+      </a:folHlink>
+    </a:clrScheme>
+    <a:fontScheme name="Office">
+      <a:majorFont>
+        <a:latin typeface="Calibri"/>
+        <a:ea typeface=""/>
+        <a:cs typeface=""/>
+        <a:font script="Jpan" typeface="ＭＳ Ｐゴシック"/>
+        <a:font script="Hang" typeface="맑은 고딕"/>
+        <a:font script="Hans" typeface="宋体"/>
+        <a:font script="Hant" typeface="新細明體"/>
+        <a:font script="Arab" typeface="Times New Roman"/>
+        <a:font script="Hebr" typeface="Times New Roman"/>
+        <a:font script="Thai" typeface="Angsana New"/>
+        <a:font script="Ethi" typeface="Nyala"/>
+        <a:font script="Beng" typeface="Vrinda"/>
+        <a:font script="Gujr" typeface="Shruti"/>
+        <a:font script="Khmr" typeface="MoolBoran"/>
+        <a:font script="Knda" typeface="Tunga"/>
+        <a:font script="Guru" typeface="Raavi"/>
+        <a:font script="Cans" typeface="Euphemia"/>
+        <a:font script="Cher" typeface="Plantagenet Cherokee"/>
+        <a:font script="Yiii" typeface="Microsoft Yi Baiti"/>
+        <a:font script="Tibt" typeface="Microsoft Himalaya"/>
+        <a:font script="Thaa" typeface="MV Boli"/>
+        <a:font script="Deva" typeface="Mangal"/>
+        <a:font script="Telu" typeface="Gautami"/>
+        <a:font script="Taml" typeface="Latha"/>
+        <a:font script="Syrc" typeface="Estrangelo Edessa"/>
+        <a:font script="Orya" typeface="Kalinga"/>
+        <a:font script="Mlym" typeface="Kartika"/>
+        <a:font script="Laoo" typeface="DokChampa"/>
+        <a:font script="Sinh" typeface="Iskoola Pota"/>
+        <a:font script="Mong" typeface="Mongolian Baiti"/>
+        <a:font script="Viet" typeface="Times New Roman"/>
+        <a:font script="Uigh" typeface="Microsoft Uighur"/>
+        <a:font script="Geor" typeface="Sylfaen"/>
+      </a:majorFont>
+      <a:minorFont>
+        <a:latin typeface="Calibri"/>
+        <a:ea typeface=""/>
+        <a:cs typeface=""/>
+        <a:font script="Jpan" typeface="ＭＳ Ｐゴシック"/>
+        <a:font script="Hang" typeface="맑은 고딕"/>
+        <a:font script="Hans" typeface="宋体"/>
+        <a:font script="Hant" typeface="新細明體"/>
+        <a:font script="Arab" typeface="Arial"/>
+        <a:font script="Hebr" typeface="Arial"/>
+        <a:font script="Thai" typeface="Cordia New"/>
+        <a:font script="Ethi" typeface="Nyala"/>
+        <a:font script="Beng" typeface="Vrinda"/>
+        <a:font script="Gujr" typeface="Shruti"/>
+        <a:font script="Khmr" typeface="DaunPenh"/>
+        <a:font script="Knda" typeface="Tunga"/>
+        <a:font script="Guru" typeface="Raavi"/>
+        <a:font script="Cans" typeface="Euphemia"/>
+        <a:font script="Cher" typeface="Plantagenet Cherokee"/>
+        <a:font script="Yiii" typeface="Microsoft Yi Baiti"/>
+        <a:font script="Tibt" typeface="Microsoft Himalaya"/>
+        <a:font script="Thaa" typeface="MV Boli"/>
+        <a:font script="Deva" typeface="Mangal"/>
+        <a:font script="Telu" typeface="Gautami"/>
+        <a:font script="Taml" typeface="Latha"/>
+        <a:font script="Syrc" typeface="Estrangelo Edessa"/>
+        <a:font script="Orya" typeface="Kalinga"/>
+        <a:font script="Mlym" typeface="Kartika"/>
+        <a:font script="Laoo" typeface="DokChampa"/>
+        <a:font script="Sinh" typeface="Iskoola Pota"/>
+        <a:font script="Mong" typeface="Mongolian Baiti"/>
+        <a:font script="Viet" typeface="Arial"/>
+        <a:font script="Uigh" typeface="Microsoft Uighur"/>
+        <a:font script="Geor" typeface="Sylfaen"/>
+      </a:minorFont>
+    </a:fontScheme>
+    <a:fmtScheme name="Office">
+      <a:fillStyleLst>
+        <a:solidFill>
+          <a:schemeClr val="phClr"/>
+        </a:solidFill>
+        <a:gradFill rotWithShape="1">
+          <a:gsLst>
+            <a:gs pos="0">
+              <a:schemeClr val="phClr">
+                <a:tint val="50000"/>
+                <a:satMod val="300000"/>
+              </a:schemeClr>
+            </a:gs>
+            <a:gs pos="35000">
+              <a:schemeClr val="phClr">
+                <a:tint val="37000"/>
+                <a:satMod val="300000"/>
+              </a:schemeClr>
+            </a:gs>
+            <a:gs pos="100000">
+              <a:schemeClr val="phClr">
+                <a:tint val="15000"/>
+                <a:satMod val="350000"/>
+              </a:schemeClr>
+            </a:gs>
+          </a:gsLst>
+          <a:lin ang="16200000" scaled="1"/>
+        </a:gradFill>
+        <a:gradFill rotWithShape="1">
+          <a:gsLst>
+            <a:gs pos="0">
+              <a:schemeClr val="phClr">
+                <a:tint val="100000"/>
+                <a:shade val="100000"/>
+                <a:satMod val="130000"/>
+              </a:schemeClr>
+            </a:gs>
+            <a:gs pos="100000">
+              <a:schemeClr val="phClr">
+                <a:tint val="50000"/>
+                <a:shade val="100000"/>
+                <a:satMod val="350000"/>
+              </a:schemeClr>
+            </a:gs>
+          </a:gsLst>
+          <a:lin ang="16200000" scaled="0"/>
+        </a:gradFill>
+      </a:fillStyleLst>
+      <a:lnStyleLst>
+        <a:ln w="9525" cap="flat" cmpd="sng" algn="ctr">
+          <a:solidFill>
+            <a:schemeClr val="phClr">
+              <a:shade val="95000"/>
+              <a:satMod val="105000"/>
+            </a:schemeClr>
+          </a:solidFill>
+          <a:prstDash val="solid"/>
+        </a:ln>
+        <a:ln w="25400" cap="flat" cmpd="sng" algn="ctr">
+          <a:solidFill>
+            <a:schemeClr val="phClr"/>
+          </a:solidFill>
+          <a:prstDash val="solid"/>
+        </a:ln>
+        <a:ln w="38100" cap="flat" cmpd="sng" algn="ctr">
+          <a:solidFill>
+            <a:schemeClr val="phClr"/>
+          </a:solidFill>
+          <a:prstDash val="solid"/>
+        </a:ln>
+      </a:lnStyleLst>
+      <a:effectStyleLst>
+        <a:effectStyle>
+          <a:effectLst>
+            <a:outerShdw blurRad="40000" dist="20000" dir="5400000" rotWithShape="0">
+              <a:srgbClr val="000000">
+                <a:alpha val="38000"/>
+              </a:srgbClr>
+            </a:outerShdw>
+          </a:effectLst>
+        </a:effectStyle>
+        <a:effectStyle>
+          <a:effectLst>
+            <a:outerShdw blurRad="40000" dist="23000" dir="5400000" rotWithShape="0">
+              <a:srgbClr val="000000">
+                <a:alpha val="35000"/>
+              </a:srgbClr>
+            </a:outerShdw>
+          </a:effectLst>
+        </a:effectStyle>
+        <a:effectStyle>
+          <a:effectLst>
+            <a:outerShdw blurRad="40000" dist="23000" dir="5400000" rotWithShape="0">
+              <a:srgbClr val="000000">
+                <a:alpha val="35000"/>
+              </a:srgbClr>
+            </a:outerShdw>
+          </a:effectLst>
+          <a:scene3d>
+            <a:camera prst="orthographicFront">
+              <a:rot lat="0" lon="0" rev="0"/>
+            </a:camera>
+            <a:lightRig rig="threePt" dir="t">
+              <a:rot lat="0" lon="0" rev="1200000"/>
+            </a:lightRig>
+          </a:scene3d>
+          <a:sp3d>
+            <a:bevelT w="63500" h="25400"/>
+          </a:sp3d>
+        </a:effectStyle>
+      </a:effectStyleLst>
+      <a:bgFillStyleLst>
+        <a:solidFill>
+          <a:schemeClr val="phClr"/>
+        </a:solidFill>
+        <a:gradFill rotWithShape="1">
+          <a:gsLst>
+            <a:gs pos="0">
+              <a:schemeClr val="phClr">
+                <a:tint val="40000"/>
+                <a:satMod val="350000"/>
+              </a:schemeClr>
+            </a:gs>
+            <a:gs pos="40000">
+              <a:schemeClr val="phClr">
+                <a:tint val="45000"/>
+                <a:shade val="99000"/>
+                <a:satMod val="350000"/>
+              </a:schemeClr>
+            </a:gs>
+            <a:gs pos="100000">
+              <a:schemeClr val="phClr">
+                <a:shade val="20000"/>
+                <a:satMod val="255000"/>
+              </a:schemeClr>
+            </a:gs>
+          </a:gsLst>
+          <a:path path="circle">
+            <a:fillToRect l="50000" t="-80000" r="50000" b="180000"/>
+          </a:path>
+        </a:gradFill>
+        <a:gradFill rotWithShape="1">
+          <a:gsLst>
+            <a:gs pos="0">
+              <a:schemeClr val="phClr">
+                <a:tint val="80000"/>
+                <a:satMod val="300000"/>
+              </a:schemeClr>
+            </a:gs>
+            <a:gs pos="100000">
+              <a:schemeClr val="phClr">
+                <a:shade val="30000"/>
+                <a:satMod val="200000"/>
+              </a:schemeClr>
+            </a:gs>
+          </a:gsLst>
+          <a:path path="circle">
+            <a:fillToRect l="50000" t="50000" r="50000" b="50000"/>
+          </a:path>
+        </a:gradFill>
+      </a:bgFillStyleLst>
+    </a:fmtScheme>
+  </a:themeElements>
+  <a:objectDefaults>
+    <a:spDef>
+      <a:spPr/>
+      <a:bodyPr/>
+      <a:lstStyle/>
+      <a:style>
+        <a:lnRef idx="1">
+          <a:schemeClr val="accent1"/>
+        </a:lnRef>
+        <a:fillRef idx="3">
+          <a:schemeClr val="accent1"/>
+        </a:fillRef>
+        <a:effectRef idx="2">
+          <a:schemeClr val="accent1"/>
+        </a:effectRef>
+        <a:fontRef idx="minor">
+          <a:schemeClr val="lt1"/>
+        </a:fontRef>
+      </a:style>
+    </a:spDef>
+    <a:lnDef>
+      <a:spPr/>
+      <a:bodyPr/>
+      <a:lstStyle/>
+      <a:style>
+        <a:lnRef idx="2">
+          <a:schemeClr val="accent1"/>
+        </a:lnRef>
+        <a:fillRef idx="0">
+          <a:schemeClr val="accent1"/>
+        </a:fillRef>
+        <a:effectRef idx="1">
+          <a:schemeClr val="accent1"/>
+        </a:effectRef>
+        <a:fontRef idx="minor">
+          <a:schemeClr val="tx1"/>
+        </a:fontRef>
+      </a:style>
+    </a:lnDef>
+  </a:objectDefaults>
+  <a:extraClrSchemeLst/>
+</a:theme>
 </file>
--- a/02-PROFESORADO/03-PRESENTACIONES/POR-SESION/h1/S214-readme-y-evidencia-de-ejecucion-presentacion.pptx
+++ b/02-PROFESORADO/03-PRESENTACIONES/POR-SESION/h1/S214-readme-y-evidencia-de-ejecucion-presentacion.pptx
@@ -655,7 +655,7 @@
           </a:p>
           <a:p>
             <a:r>
-              <a:t>Diapositiva 2 de 9: Qué debe conseguirse</a:t>
+              <a:t>Diapositiva 2 de 9: Qué aprenderás y cómo lo demostrarás</a:t>
             </a:r>
           </a:p>
           <a:p>
@@ -670,7 +670,7 @@
           </a:p>
           <a:p>
             <a:r>
-              <a:t>- Al terminar: señala la evidencia, explica qué demuestra y reproduce la prueba.</a:t>
+              <a:t>- Comprobación: Quede H1 listo para defensa.</a:t>
             </a:r>
           </a:p>
           <a:p>
@@ -750,7 +750,7 @@
           </a:p>
           <a:p>
             <a:r>
-              <a:t>Diapositiva 3 de 9: Ejemplo o demostración · 1</a:t>
+              <a:t>Diapositiva 3 de 9: README mínimo y honesto</a:t>
             </a:r>
           </a:p>
           <a:p>
@@ -760,32 +760,59 @@
           </a:p>
           <a:p>
             <a:r>
-              <a:t>Modela el ejemplo sin resolver la actividad completa; pide una predicción antes de ejecutar.</a:t>
-            </a:r>
-          </a:p>
-          <a:p>
-            <a:r>
-              <a:t>- D1 · ¿Podría otra persona entender tu proyecto sin ti? — README + evidencia + enlaces claros convierten “funciona” en algo verificable.</a:t>
-            </a:r>
-          </a:p>
-          <a:p>
-            <a:r>
-              <a:t>- D2 · README mínimo de H1 — QUÉ HACE: alcance real / y limitaciones \| CÓMO EJECUTAR: pasos suficientes / para reproducir \| EJEMPLO: entrada + salida / verificables</a:t>
-            </a:r>
-          </a:p>
-          <a:p>
-            <a:r>
-              <a:t>- D3 · Una evidencia debe demostrar algo — DÉBIL: “Funciona.”</a:t>
-            </a:r>
-          </a:p>
-          <a:p>
-            <a:r>
-              <a:t>- Enlace a una carpeta general. \| VERIFICABLE: entrada usada</a:t>
-            </a:r>
-          </a:p>
-          <a:p>
-            <a:r>
-              <a:t>- salida observada</a:t>
+              <a:t>Explica con predicción y ejemplo mínimo; comprueba comprensión antes de continuar.</a:t>
+            </a:r>
+          </a:p>
+          <a:p>
+            <a:r>
+              <a:t>- ## Qué hace</a:t>
+            </a:r>
+          </a:p>
+          <a:p>
+            <a:r>
+              <a:t>MiniJarvis saluda y pide un nombre ficticio.</a:t>
+            </a:r>
+          </a:p>
+          <a:p/>
+          <a:p>
+            <a:r>
+              <a:t>## Límites de H1</a:t>
+            </a:r>
+          </a:p>
+          <a:p>
+            <a:r>
+              <a:t>No incluye menú, memoria, ficheros ni IA real.</a:t>
+            </a:r>
+          </a:p>
+          <a:p/>
+          <a:p>
+            <a:r>
+              <a:t>## Cómo ejecutar</a:t>
+            </a:r>
+          </a:p>
+          <a:p>
+            <a:r>
+              <a:t>1. Abre el proyecto.</a:t>
+            </a:r>
+          </a:p>
+          <a:p>
+            <a:r>
+              <a:t>2. Ejecuta Main.</a:t>
+            </a:r>
+          </a:p>
+          <a:p>
+            <a:r>
+              <a:t>3. Introduce datos ficticios.</a:t>
+            </a:r>
+          </a:p>
+          <a:p>
+            <a:r>
+              <a:t>- Otra persona debe poder reproducir la ejecución sin explicación oral.</a:t>
+            </a:r>
+          </a:p>
+          <a:p>
+            <a:r>
+              <a:t>- El README describe el producto real, no el futuro.</a:t>
             </a:r>
           </a:p>
           <a:p>
@@ -865,7 +892,7 @@
           </a:p>
           <a:p>
             <a:r>
-              <a:t>Diapositiva 4 de 9: Ejemplo o demostración · 2</a:t>
+              <a:t>Diapositiva 4 de 9: Una evidencia debe demostrar algo</a:t>
             </a:r>
           </a:p>
           <a:p>
@@ -875,27 +902,27 @@
           </a:p>
           <a:p>
             <a:r>
-              <a:t>Modela el ejemplo sin resolver la actividad completa; pide una predicción antes de ejecutar.</a:t>
-            </a:r>
-          </a:p>
-          <a:p>
-            <a:r>
-              <a:t>- enlace profundo</a:t>
-            </a:r>
-          </a:p>
-          <a:p>
-            <a:r>
-              <a:t>- qué demuestra</a:t>
-            </a:r>
-          </a:p>
-          <a:p>
-            <a:r>
-              <a:t>- D4 · Diario, Site personal y Site de equipo no son lo mismo DIARIO: Proceso individual: / objetivo, acción, prueba, bloqueo, siguiente paso. \| SITE PERSONAL:</a:t>
-            </a:r>
-          </a:p>
-          <a:p>
-            <a:r>
-              <a:t>- Selección razonada de evidencias + qué demuestran. \| SITE EQUIPO: Reto, decisiones, pruebas, review y retrospectiva.</a:t>
+              <a:t>Explica con predicción y ejemplo mínimo; comprueba comprensión antes de continuar.</a:t>
+            </a:r>
+          </a:p>
+          <a:p>
+            <a:r>
+              <a:t>- DÉBIL · Funciona.</a:t>
+            </a:r>
+          </a:p>
+          <a:p>
+            <a:r>
+              <a:t>Enlace a una carpeta general.</a:t>
+            </a:r>
+          </a:p>
+          <a:p>
+            <a:r>
+              <a:t>- VERIFICABLE · entrada, salida esperada, salida obtenida, qué demuestra y enlace profundo.</a:t>
+            </a:r>
+          </a:p>
+          <a:p>
+            <a:r>
+              <a:t>- Una captura aislada no explica qué se probó ni con qué resultado.</a:t>
             </a:r>
           </a:p>
           <a:p>
@@ -975,7 +1002,7 @@
           </a:p>
           <a:p>
             <a:r>
-              <a:t>Diapositiva 5 de 9: Actividad central · 1</a:t>
+              <a:t>Diapositiva 5 de 9: Cada espacio responde a una pregunta</a:t>
             </a:r>
           </a:p>
           <a:p>
@@ -985,27 +1012,27 @@
           </a:p>
           <a:p>
             <a:r>
-              <a:t>Entrega la consigna, observa decisiones y pide una prueba reproducible.</a:t>
-            </a:r>
-          </a:p>
-          <a:p>
-            <a:r>
-              <a:t>- Predice antes de ejecutar cuando haya código.</a:t>
-            </a:r>
-          </a:p>
-          <a:p>
-            <a:r>
-              <a:t>- Realiza la micropráctica o modificación prevista.</a:t>
-            </a:r>
-          </a:p>
-          <a:p>
-            <a:r>
-              <a:t>- Prueba el caso normal y, cuando exista una decisión o conversión, también el caso alternativo o erróneo.</a:t>
-            </a:r>
-          </a:p>
-          <a:p>
-            <a:r>
-              <a:t>- Conserva el código o resultado en el repositorio o espacio indicado.</a:t>
+              <a:t>Explica con predicción y ejemplo mínimo; comprueba comprensión antes de continuar.</a:t>
+            </a:r>
+          </a:p>
+          <a:p>
+            <a:r>
+              <a:t>- Diario · proceso individual: objetivo, acción, prueba, bloqueo y siguiente paso.</a:t>
+            </a:r>
+          </a:p>
+          <a:p>
+            <a:r>
+              <a:t>- Site personal · selección razonada de evidencias y qué demuestran.</a:t>
+            </a:r>
+          </a:p>
+          <a:p>
+            <a:r>
+              <a:t>- Site de equipo · reto, decisiones, pruebas, review y retrospectiva.</a:t>
+            </a:r>
+          </a:p>
+          <a:p>
+            <a:r>
+              <a:t>- Moodle · índice de entrega y enlaces solicitados, no otra copia completa.</a:t>
             </a:r>
           </a:p>
           <a:p>
@@ -1085,7 +1112,7 @@
           </a:p>
           <a:p>
             <a:r>
-              <a:t>Diapositiva 6 de 9: Actividad central · 2</a:t>
+              <a:t>Diapositiva 6 de 9: Prueba tu documentación con otra persona</a:t>
             </a:r>
           </a:p>
           <a:p>
@@ -1100,12 +1127,22 @@
           </a:p>
           <a:p>
             <a:r>
-              <a:t>- Registra una sola entrada en el diario individual; no crees un informe paralelo.</a:t>
-            </a:r>
-          </a:p>
-          <a:p>
-            <a:r>
-              <a:t>- ¿Qué puedes señalar, explicar y probar al terminar este checkpoint?</a:t>
+              <a:t>- Completa alcance, límites, ejecución y ejemplo del README.</a:t>
+            </a:r>
+          </a:p>
+          <a:p>
+            <a:r>
+              <a:t>- Crea una evidencia con entrada, salida esperada, observada y explicación.</a:t>
+            </a:r>
+          </a:p>
+          <a:p>
+            <a:r>
+              <a:t>- Pide a otra persona que ejecute siguiendo solo el README.</a:t>
+            </a:r>
+          </a:p>
+          <a:p>
+            <a:r>
+              <a:t>- Corrige la primera ambigüedad y verifica enlaces y permisos.</a:t>
             </a:r>
           </a:p>
           <a:p>
@@ -1185,7 +1222,7 @@
           </a:p>
           <a:p>
             <a:r>
-              <a:t>Diapositiva 7 de 9: Evidencia y comprobación</a:t>
+              <a:t>Diapositiva 7 de 9: Documentación reproducible</a:t>
             </a:r>
           </a:p>
           <a:p>
@@ -1200,17 +1237,22 @@
           </a:p>
           <a:p>
             <a:r>
-              <a:t>- conserva el código o la prueba en el lugar indicado por la sesión;</a:t>
-            </a:r>
-          </a:p>
-          <a:p>
-            <a:r>
-              <a:t>- añade una sola entrada al diario individual con prueba, bloqueo y siguiente paso;</a:t>
-            </a:r>
-          </a:p>
-          <a:p>
-            <a:r>
-              <a:t>- no copies la misma reflexión en otro documento; el Site personal seleccionará evidencias al cerrar H1.</a:t>
+              <a:t>- El README permite ejecutar H1 sin ayuda oral.</a:t>
+            </a:r>
+          </a:p>
+          <a:p>
+            <a:r>
+              <a:t>- Los enlaces llevan al archivo o prueba concreta.</a:t>
+            </a:r>
+          </a:p>
+          <a:p>
+            <a:r>
+              <a:t>- Diario y Sites no duplican la misma reflexión.</a:t>
+            </a:r>
+          </a:p>
+          <a:p>
+            <a:r>
+              <a:t>- No aparecen datos personales, contraseñas, claves o tokens.</a:t>
             </a:r>
           </a:p>
           <a:p>
@@ -1290,7 +1332,7 @@
           </a:p>
           <a:p>
             <a:r>
-              <a:t>Diapositiva 8 de 9: Seguridad y uso responsable</a:t>
+              <a:t>Diapositiva 8 de 9: Comprobación final</a:t>
             </a:r>
           </a:p>
           <a:p>
@@ -1300,17 +1342,12 @@
           </a:p>
           <a:p>
             <a:r>
-              <a:t>Recuerda estos límites antes de que el alumnado comparta o publique:</a:t>
-            </a:r>
-          </a:p>
-          <a:p>
-            <a:r>
-              <a:t>- Usa datos ficticios y no publiques credenciales ni información personal.</a:t>
-            </a:r>
-          </a:p>
-          <a:p>
-            <a:r>
-              <a:t>- Si utilizas IA de forma sustantiva, registra propósito, propuesta, cambios propios y validación en el registro de IA del hito.</a:t>
+              <a:t>Cierra con explicación individual, prueba observable y siguiente paso concreto.</a:t>
+            </a:r>
+          </a:p>
+          <a:p>
+            <a:r>
+              <a:t>- ¿Qué cambió después de que otra persona intentara seguir tu README sin ayuda?</a:t>
             </a:r>
           </a:p>
           <a:p>
@@ -1390,7 +1427,7 @@
           </a:p>
           <a:p>
             <a:r>
-              <a:t>Diapositiva 9 de 9: Cierre y defensa</a:t>
+              <a:t>Diapositiva 9 de 9: Fuentes utilizadas</a:t>
             </a:r>
           </a:p>
           <a:p>
@@ -1400,12 +1437,22 @@
           </a:p>
           <a:p>
             <a:r>
-              <a:t>Cierra con explicación individual, prueba observable y siguiente paso concreto.</a:t>
-            </a:r>
-          </a:p>
-          <a:p>
-            <a:r>
-              <a:t>- ¿Qué puedes señalar, explicar y probar al terminar este checkpoint?</a:t>
+              <a:t>Indica al alumnado dónde ampliar el contenido y qué fragmentos se han adaptado.</a:t>
+            </a:r>
+          </a:p>
+          <a:p>
+            <a:r>
+              <a:t>- Libro: capítulos 01-02 · Evidencias y README de H1</a:t>
+            </a:r>
+          </a:p>
+          <a:p>
+            <a:r>
+              <a:t>- Fichas S206-S215 y píldoras H1</a:t>
+            </a:r>
+          </a:p>
+          <a:p>
+            <a:r>
+              <a:t>- Ejemplos revisados y adaptados a MiniJarvis; no se copian errores ni capturas antiguas del PDF.</a:t>
             </a:r>
           </a:p>
           <a:p>
@@ -4650,7 +4697,7 @@
               </a:defRPr>
             </a:pPr>
             <a:r>
-              <a:t>H1 — Primer MiniJarvis · Fase HEXA: Comunicar — evaluar y reflexionar</a:t>
+              <a:t>H1 — Primer MiniJarvis</a:t>
             </a:r>
           </a:p>
         </p:txBody>
@@ -4934,7 +4981,7 @@
               </a:defRPr>
             </a:pPr>
             <a:r>
-              <a:t>Qué debe conseguirse</a:t>
+              <a:t>Qué aprenderás y cómo lo demostrarás</a:t>
             </a:r>
           </a:p>
         </p:txBody>
@@ -5175,7 +5222,7 @@
               </a:defRPr>
             </a:pPr>
             <a:r>
-              <a:t>Al terminar: señala la evidencia, explica qué demuestra y reproduce la prueba.</a:t>
+              <a:t>Comprobación: Quede H1 listo para defensa.</a:t>
             </a:r>
           </a:p>
         </p:txBody>
@@ -5315,7 +5362,7 @@
               </a:defRPr>
             </a:pPr>
             <a:r>
-              <a:t>OBSERVAR ANTES DE ACTUAR</a:t>
+              <a:t>CÓDIGO EXPLICADO</a:t>
             </a:r>
           </a:p>
         </p:txBody>
@@ -5351,7 +5398,7 @@
               </a:defRPr>
             </a:pPr>
             <a:r>
-              <a:t>Ejemplo o demostración · 1</a:t>
+              <a:t>README mínimo y honesto</a:t>
             </a:r>
           </a:p>
         </p:txBody>
@@ -5443,8 +5490,8 @@
         </p:nvSpPr>
         <p:spPr>
           <a:xfrm>
-            <a:off x="621792" y="1353312"/>
-            <a:ext cx="10927080" cy="4526280"/>
+            <a:off x="621792" y="1325880"/>
+            <a:ext cx="7315200" cy="4709160"/>
           </a:xfrm>
           <a:prstGeom prst="roundRect">
             <a:avLst/>
@@ -5453,7 +5500,9 @@
             <a:srgbClr val="121824"/>
           </a:solidFill>
           <a:ln>
-            <a:noFill/>
+            <a:solidFill>
+              <a:srgbClr val="121824"/>
+            </a:solidFill>
           </a:ln>
         </p:spPr>
         <p:style>
@@ -5486,8 +5535,122 @@
         </p:nvSpPr>
         <p:spPr>
           <a:xfrm>
-            <a:off x="932688" y="1627632"/>
-            <a:ext cx="2057400" cy="411480"/>
+            <a:off x="822960" y="1572768"/>
+            <a:ext cx="6903720" cy="4251960"/>
+          </a:xfrm>
+          <a:prstGeom prst="rect">
+            <a:avLst/>
+          </a:prstGeom>
+          <a:noFill/>
+        </p:spPr>
+        <p:txBody>
+          <a:bodyPr wrap="none" lIns="164592" rIns="164592" tIns="109728" bIns="109728">
+            <a:spAutoFit/>
+          </a:bodyPr>
+          <a:lstStyle/>
+          <a:p>
+            <a:pPr>
+              <a:spcAft>
+                <a:spcPts val="0"/>
+              </a:spcAft>
+              <a:defRPr sz="1600">
+                <a:solidFill>
+                  <a:srgbClr val="FFFFFF"/>
+                </a:solidFill>
+                <a:latin typeface="Liberation Mono"/>
+              </a:defRPr>
+            </a:pPr>
+            <a:r>
+              <a:t>## Qué hace</a:t>
+            </a:r>
+            <a:br/>
+            <a:r>
+              <a:t>MiniJarvis saluda y pide un nombre ficticio.</a:t>
+            </a:r>
+            <a:br/>
+            <a:br/>
+            <a:r>
+              <a:t>## Límites de H1</a:t>
+            </a:r>
+            <a:br/>
+            <a:r>
+              <a:t>No incluye menú, memoria, ficheros ni IA real.</a:t>
+            </a:r>
+            <a:br/>
+            <a:br/>
+            <a:r>
+              <a:t>## Cómo ejecutar</a:t>
+            </a:r>
+            <a:br/>
+            <a:r>
+              <a:t>1. Abre el proyecto.</a:t>
+            </a:r>
+            <a:br/>
+            <a:r>
+              <a:t>2. Ejecuta Main.</a:t>
+            </a:r>
+            <a:br/>
+            <a:r>
+              <a:t>3. Introduce datos ficticios.</a:t>
+            </a:r>
+          </a:p>
+        </p:txBody>
+      </p:sp>
+      <p:sp>
+        <p:nvSpPr>
+          <p:cNvPr id="10" name="Rounded Rectangle 9"/>
+          <p:cNvSpPr/>
+          <p:nvPr/>
+        </p:nvSpPr>
+        <p:spPr>
+          <a:xfrm>
+            <a:off x="8156448" y="1325880"/>
+            <a:ext cx="3401568" cy="4709160"/>
+          </a:xfrm>
+          <a:prstGeom prst="roundRect">
+            <a:avLst/>
+          </a:prstGeom>
+          <a:solidFill>
+            <a:srgbClr val="FFFFFF"/>
+          </a:solidFill>
+          <a:ln>
+            <a:solidFill>
+              <a:srgbClr val="E5E9EF"/>
+            </a:solidFill>
+          </a:ln>
+        </p:spPr>
+        <p:style>
+          <a:lnRef idx="1">
+            <a:schemeClr val="accent1"/>
+          </a:lnRef>
+          <a:fillRef idx="3">
+            <a:schemeClr val="accent1"/>
+          </a:fillRef>
+          <a:effectRef idx="2">
+            <a:schemeClr val="accent1"/>
+          </a:effectRef>
+          <a:fontRef idx="minor">
+            <a:schemeClr val="lt1"/>
+          </a:fontRef>
+        </p:style>
+        <p:txBody>
+          <a:bodyPr rtlCol="0" anchor="ctr"/>
+          <a:lstStyle/>
+          <a:p>
+            <a:pPr algn="ctr"/>
+          </a:p>
+        </p:txBody>
+      </p:sp>
+      <p:sp>
+        <p:nvSpPr>
+          <p:cNvPr id="11" name="TextBox 10"/>
+          <p:cNvSpPr txBox="1"/>
+          <p:nvPr/>
+        </p:nvSpPr>
+        <p:spPr>
+          <a:xfrm>
+            <a:off x="8412480" y="1627632"/>
+            <a:ext cx="2880360" cy="320040"/>
           </a:xfrm>
           <a:prstGeom prst="rect">
             <a:avLst/>
@@ -5501,7 +5664,7 @@
           <a:lstStyle/>
           <a:p>
             <a:pPr algn="l">
-              <a:defRPr sz="1300" b="1">
+              <a:defRPr sz="1200" b="1">
                 <a:solidFill>
                   <a:srgbClr val="2F5BA8"/>
                 </a:solidFill>
@@ -5509,21 +5672,21 @@
               </a:defRPr>
             </a:pPr>
             <a:r>
-              <a:t>DEMOSTRACIÓN</a:t>
-            </a:r>
-          </a:p>
-        </p:txBody>
-      </p:sp>
-      <p:sp>
-        <p:nvSpPr>
-          <p:cNvPr id="10" name="TextBox 9"/>
+              <a:t>LEE Y PREDICE</a:t>
+            </a:r>
+          </a:p>
+        </p:txBody>
+      </p:sp>
+      <p:sp>
+        <p:nvSpPr>
+          <p:cNvPr id="12" name="TextBox 11"/>
           <p:cNvSpPr txBox="1"/>
           <p:nvPr/>
         </p:nvSpPr>
         <p:spPr>
           <a:xfrm>
-            <a:off x="932688" y="2212848"/>
-            <a:ext cx="9966960" cy="3246120"/>
+            <a:off x="8394192" y="2103120"/>
+            <a:ext cx="2788920" cy="3474720"/>
           </a:xfrm>
           <a:prstGeom prst="rect">
             <a:avLst/>
@@ -5540,15 +5703,15 @@
               <a:spcAft>
                 <a:spcPts val="900"/>
               </a:spcAft>
-              <a:defRPr sz="1900">
+              <a:defRPr sz="1700">
                 <a:solidFill>
-                  <a:srgbClr val="FFFFFF"/>
+                  <a:srgbClr val="1C2330"/>
                 </a:solidFill>
                 <a:latin typeface="Aptos"/>
               </a:defRPr>
             </a:pPr>
             <a:r>
-              <a:t>•  D1 · ¿Podría otra persona entender tu proyecto sin ti? — README + evidencia + enlaces claros convierten “funciona” en algo verificable.</a:t>
+              <a:t>•  Otra persona debe poder reproducir la ejecución sin explicación oral.</a:t>
             </a:r>
           </a:p>
           <a:p>
@@ -5556,63 +5719,15 @@
               <a:spcAft>
                 <a:spcPts val="900"/>
               </a:spcAft>
-              <a:defRPr sz="1900">
+              <a:defRPr sz="1700">
                 <a:solidFill>
-                  <a:srgbClr val="FFFFFF"/>
+                  <a:srgbClr val="1C2330"/>
                 </a:solidFill>
                 <a:latin typeface="Aptos"/>
               </a:defRPr>
             </a:pPr>
             <a:r>
-              <a:t>•  D2 · README mínimo de H1 — QUÉ HACE: alcance real / y limitaciones \| CÓMO EJECUTAR: pasos suficientes / para reproducir \| EJEMPLO: entrada + salida / verificables</a:t>
-            </a:r>
-          </a:p>
-          <a:p>
-            <a:pPr>
-              <a:spcAft>
-                <a:spcPts val="900"/>
-              </a:spcAft>
-              <a:defRPr sz="1900">
-                <a:solidFill>
-                  <a:srgbClr val="FFFFFF"/>
-                </a:solidFill>
-                <a:latin typeface="Aptos"/>
-              </a:defRPr>
-            </a:pPr>
-            <a:r>
-              <a:t>•  D3 · Una evidencia debe demostrar algo — DÉBIL: “Funciona.”</a:t>
-            </a:r>
-          </a:p>
-          <a:p>
-            <a:pPr>
-              <a:spcAft>
-                <a:spcPts val="900"/>
-              </a:spcAft>
-              <a:defRPr sz="1900">
-                <a:solidFill>
-                  <a:srgbClr val="FFFFFF"/>
-                </a:solidFill>
-                <a:latin typeface="Aptos"/>
-              </a:defRPr>
-            </a:pPr>
-            <a:r>
-              <a:t>•  Enlace a una carpeta general. \| VERIFICABLE: entrada usada</a:t>
-            </a:r>
-          </a:p>
-          <a:p>
-            <a:pPr>
-              <a:spcAft>
-                <a:spcPts val="900"/>
-              </a:spcAft>
-              <a:defRPr sz="1900">
-                <a:solidFill>
-                  <a:srgbClr val="FFFFFF"/>
-                </a:solidFill>
-                <a:latin typeface="Aptos"/>
-              </a:defRPr>
-            </a:pPr>
-            <a:r>
-              <a:t>•  salida observada</a:t>
+              <a:t>•  El README describe el producto real, no el futuro.</a:t>
             </a:r>
           </a:p>
         </p:txBody>
@@ -5752,7 +5867,7 @@
               </a:defRPr>
             </a:pPr>
             <a:r>
-              <a:t>OBSERVAR ANTES DE ACTUAR</a:t>
+              <a:t>CONTRASTAR PARA DECIDIR</a:t>
             </a:r>
           </a:p>
         </p:txBody>
@@ -5788,7 +5903,7 @@
               </a:defRPr>
             </a:pPr>
             <a:r>
-              <a:t>Ejemplo o demostración · 2</a:t>
+              <a:t>Una evidencia debe demostrar algo</a:t>
             </a:r>
           </a:p>
         </p:txBody>
@@ -5880,17 +5995,19 @@
         </p:nvSpPr>
         <p:spPr>
           <a:xfrm>
-            <a:off x="621792" y="1353312"/>
-            <a:ext cx="10927080" cy="4526280"/>
+            <a:off x="621792" y="1325880"/>
+            <a:ext cx="5230368" cy="3401568"/>
           </a:xfrm>
           <a:prstGeom prst="roundRect">
             <a:avLst/>
           </a:prstGeom>
           <a:solidFill>
-            <a:srgbClr val="121824"/>
+            <a:srgbClr val="FFFFFF"/>
           </a:solidFill>
           <a:ln>
-            <a:noFill/>
+            <a:solidFill>
+              <a:srgbClr val="445B80"/>
+            </a:solidFill>
           </a:ln>
         </p:spPr>
         <p:style>
@@ -5917,14 +6034,59 @@
       </p:sp>
       <p:sp>
         <p:nvSpPr>
-          <p:cNvPr id="9" name="TextBox 8"/>
+          <p:cNvPr id="9" name="Rounded Rectangle 8"/>
+          <p:cNvSpPr/>
+          <p:nvPr/>
+        </p:nvSpPr>
+        <p:spPr>
+          <a:xfrm>
+            <a:off x="850392" y="1572768"/>
+            <a:ext cx="566928" cy="475488"/>
+          </a:xfrm>
+          <a:prstGeom prst="roundRect">
+            <a:avLst/>
+          </a:prstGeom>
+          <a:solidFill>
+            <a:srgbClr val="445B80"/>
+          </a:solidFill>
+          <a:ln>
+            <a:solidFill>
+              <a:srgbClr val="445B80"/>
+            </a:solidFill>
+          </a:ln>
+        </p:spPr>
+        <p:style>
+          <a:lnRef idx="1">
+            <a:schemeClr val="accent1"/>
+          </a:lnRef>
+          <a:fillRef idx="3">
+            <a:schemeClr val="accent1"/>
+          </a:fillRef>
+          <a:effectRef idx="2">
+            <a:schemeClr val="accent1"/>
+          </a:effectRef>
+          <a:fontRef idx="minor">
+            <a:schemeClr val="lt1"/>
+          </a:fontRef>
+        </p:style>
+        <p:txBody>
+          <a:bodyPr rtlCol="0" anchor="ctr"/>
+          <a:lstStyle/>
+          <a:p>
+            <a:pPr algn="ctr"/>
+          </a:p>
+        </p:txBody>
+      </p:sp>
+      <p:sp>
+        <p:nvSpPr>
+          <p:cNvPr id="10" name="TextBox 9"/>
           <p:cNvSpPr txBox="1"/>
           <p:nvPr/>
         </p:nvSpPr>
         <p:spPr>
           <a:xfrm>
-            <a:off x="932688" y="1627632"/>
-            <a:ext cx="2057400" cy="411480"/>
+            <a:off x="850392" y="1682496"/>
+            <a:ext cx="566928" cy="182880"/>
           </a:xfrm>
           <a:prstGeom prst="rect">
             <a:avLst/>
@@ -5937,47 +6099,8 @@
           </a:bodyPr>
           <a:lstStyle/>
           <a:p>
-            <a:pPr algn="l">
+            <a:pPr algn="ctr">
               <a:defRPr sz="1300" b="1">
-                <a:solidFill>
-                  <a:srgbClr val="2F5BA8"/>
-                </a:solidFill>
-                <a:latin typeface="Aptos"/>
-              </a:defRPr>
-            </a:pPr>
-            <a:r>
-              <a:t>DEMOSTRACIÓN</a:t>
-            </a:r>
-          </a:p>
-        </p:txBody>
-      </p:sp>
-      <p:sp>
-        <p:nvSpPr>
-          <p:cNvPr id="10" name="TextBox 9"/>
-          <p:cNvSpPr txBox="1"/>
-          <p:nvPr/>
-        </p:nvSpPr>
-        <p:spPr>
-          <a:xfrm>
-            <a:off x="932688" y="2212848"/>
-            <a:ext cx="9966960" cy="3246120"/>
-          </a:xfrm>
-          <a:prstGeom prst="rect">
-            <a:avLst/>
-          </a:prstGeom>
-          <a:noFill/>
-        </p:spPr>
-        <p:txBody>
-          <a:bodyPr wrap="square" lIns="73152" rIns="45720" tIns="36576">
-            <a:spAutoFit/>
-          </a:bodyPr>
-          <a:lstStyle/>
-          <a:p>
-            <a:pPr>
-              <a:spcAft>
-                <a:spcPts val="900"/>
-              </a:spcAft>
-              <a:defRPr sz="2200">
                 <a:solidFill>
                   <a:srgbClr val="FFFFFF"/>
                 </a:solidFill>
@@ -5985,15 +6108,168 @@
               </a:defRPr>
             </a:pPr>
             <a:r>
-              <a:t>•  enlace profundo</a:t>
-            </a:r>
-          </a:p>
+              <a:t>A</a:t>
+            </a:r>
+          </a:p>
+        </p:txBody>
+      </p:sp>
+      <p:sp>
+        <p:nvSpPr>
+          <p:cNvPr id="11" name="TextBox 10"/>
+          <p:cNvSpPr txBox="1"/>
+          <p:nvPr/>
+        </p:nvSpPr>
+        <p:spPr>
+          <a:xfrm>
+            <a:off x="896112" y="2304288"/>
+            <a:ext cx="4663440" cy="2011680"/>
+          </a:xfrm>
+          <a:prstGeom prst="rect">
+            <a:avLst/>
+          </a:prstGeom>
+          <a:noFill/>
+        </p:spPr>
+        <p:txBody>
+          <a:bodyPr wrap="none" lIns="164592" rIns="164592" tIns="109728" bIns="109728">
+            <a:spAutoFit/>
+          </a:bodyPr>
+          <a:lstStyle/>
           <a:p>
             <a:pPr>
               <a:spcAft>
-                <a:spcPts val="900"/>
+                <a:spcPts val="0"/>
               </a:spcAft>
-              <a:defRPr sz="2200">
+              <a:defRPr sz="1600">
+                <a:solidFill>
+                  <a:srgbClr val="1C2330"/>
+                </a:solidFill>
+                <a:latin typeface="Liberation Mono"/>
+              </a:defRPr>
+            </a:pPr>
+            <a:r>
+              <a:t>DÉBIL · Funciona.</a:t>
+            </a:r>
+            <a:br/>
+            <a:r>
+              <a:t>Enlace a una carpeta general.</a:t>
+            </a:r>
+          </a:p>
+        </p:txBody>
+      </p:sp>
+      <p:sp>
+        <p:nvSpPr>
+          <p:cNvPr id="12" name="Rounded Rectangle 11"/>
+          <p:cNvSpPr/>
+          <p:nvPr/>
+        </p:nvSpPr>
+        <p:spPr>
+          <a:xfrm>
+            <a:off x="6153912" y="1325880"/>
+            <a:ext cx="5230368" cy="3401568"/>
+          </a:xfrm>
+          <a:prstGeom prst="roundRect">
+            <a:avLst/>
+          </a:prstGeom>
+          <a:solidFill>
+            <a:srgbClr val="FFFFFF"/>
+          </a:solidFill>
+          <a:ln>
+            <a:solidFill>
+              <a:srgbClr val="2F5BA8"/>
+            </a:solidFill>
+          </a:ln>
+        </p:spPr>
+        <p:style>
+          <a:lnRef idx="1">
+            <a:schemeClr val="accent1"/>
+          </a:lnRef>
+          <a:fillRef idx="3">
+            <a:schemeClr val="accent1"/>
+          </a:fillRef>
+          <a:effectRef idx="2">
+            <a:schemeClr val="accent1"/>
+          </a:effectRef>
+          <a:fontRef idx="minor">
+            <a:schemeClr val="lt1"/>
+          </a:fontRef>
+        </p:style>
+        <p:txBody>
+          <a:bodyPr rtlCol="0" anchor="ctr"/>
+          <a:lstStyle/>
+          <a:p>
+            <a:pPr algn="ctr"/>
+          </a:p>
+        </p:txBody>
+      </p:sp>
+      <p:sp>
+        <p:nvSpPr>
+          <p:cNvPr id="13" name="Rounded Rectangle 12"/>
+          <p:cNvSpPr/>
+          <p:nvPr/>
+        </p:nvSpPr>
+        <p:spPr>
+          <a:xfrm>
+            <a:off x="6382512" y="1572768"/>
+            <a:ext cx="566928" cy="475488"/>
+          </a:xfrm>
+          <a:prstGeom prst="roundRect">
+            <a:avLst/>
+          </a:prstGeom>
+          <a:solidFill>
+            <a:srgbClr val="2F5BA8"/>
+          </a:solidFill>
+          <a:ln>
+            <a:solidFill>
+              <a:srgbClr val="2F5BA8"/>
+            </a:solidFill>
+          </a:ln>
+        </p:spPr>
+        <p:style>
+          <a:lnRef idx="1">
+            <a:schemeClr val="accent1"/>
+          </a:lnRef>
+          <a:fillRef idx="3">
+            <a:schemeClr val="accent1"/>
+          </a:fillRef>
+          <a:effectRef idx="2">
+            <a:schemeClr val="accent1"/>
+          </a:effectRef>
+          <a:fontRef idx="minor">
+            <a:schemeClr val="lt1"/>
+          </a:fontRef>
+        </p:style>
+        <p:txBody>
+          <a:bodyPr rtlCol="0" anchor="ctr"/>
+          <a:lstStyle/>
+          <a:p>
+            <a:pPr algn="ctr"/>
+          </a:p>
+        </p:txBody>
+      </p:sp>
+      <p:sp>
+        <p:nvSpPr>
+          <p:cNvPr id="14" name="TextBox 13"/>
+          <p:cNvSpPr txBox="1"/>
+          <p:nvPr/>
+        </p:nvSpPr>
+        <p:spPr>
+          <a:xfrm>
+            <a:off x="6382512" y="1682496"/>
+            <a:ext cx="566928" cy="182880"/>
+          </a:xfrm>
+          <a:prstGeom prst="rect">
+            <a:avLst/>
+          </a:prstGeom>
+          <a:noFill/>
+        </p:spPr>
+        <p:txBody>
+          <a:bodyPr wrap="square" lIns="45720" rIns="45720" tIns="36576" bIns="36576" anchor="t">
+            <a:spAutoFit/>
+          </a:bodyPr>
+          <a:lstStyle/>
+          <a:p>
+            <a:pPr algn="ctr">
+              <a:defRPr sz="1300" b="1">
                 <a:solidFill>
                   <a:srgbClr val="FFFFFF"/>
                 </a:solidFill>
@@ -6001,15 +6277,116 @@
               </a:defRPr>
             </a:pPr>
             <a:r>
-              <a:t>•  qué demuestra</a:t>
-            </a:r>
-          </a:p>
-          <a:p>
-            <a:pPr>
-              <a:spcAft>
-                <a:spcPts val="900"/>
-              </a:spcAft>
-              <a:defRPr sz="2200">
+              <a:t>B</a:t>
+            </a:r>
+          </a:p>
+        </p:txBody>
+      </p:sp>
+      <p:sp>
+        <p:nvSpPr>
+          <p:cNvPr id="15" name="TextBox 14"/>
+          <p:cNvSpPr txBox="1"/>
+          <p:nvPr/>
+        </p:nvSpPr>
+        <p:spPr>
+          <a:xfrm>
+            <a:off x="6428232" y="2267712"/>
+            <a:ext cx="4663440" cy="2057400"/>
+          </a:xfrm>
+          <a:prstGeom prst="rect">
+            <a:avLst/>
+          </a:prstGeom>
+          <a:noFill/>
+        </p:spPr>
+        <p:txBody>
+          <a:bodyPr wrap="square" lIns="45720" rIns="45720" tIns="36576" bIns="36576" anchor="t">
+            <a:spAutoFit/>
+          </a:bodyPr>
+          <a:lstStyle/>
+          <a:p>
+            <a:pPr algn="l">
+              <a:defRPr sz="2100" b="1">
+                <a:solidFill>
+                  <a:srgbClr val="1C2330"/>
+                </a:solidFill>
+                <a:latin typeface="Aptos"/>
+              </a:defRPr>
+            </a:pPr>
+            <a:r>
+              <a:t>VERIFICABLE · entrada, salida esperada, salida obtenida, qué demuestra y enlace profundo.</a:t>
+            </a:r>
+          </a:p>
+        </p:txBody>
+      </p:sp>
+      <p:sp>
+        <p:nvSpPr>
+          <p:cNvPr id="16" name="Rounded Rectangle 15"/>
+          <p:cNvSpPr/>
+          <p:nvPr/>
+        </p:nvSpPr>
+        <p:spPr>
+          <a:xfrm>
+            <a:off x="621792" y="5010912"/>
+            <a:ext cx="10762488" cy="932688"/>
+          </a:xfrm>
+          <a:prstGeom prst="roundRect">
+            <a:avLst/>
+          </a:prstGeom>
+          <a:solidFill>
+            <a:srgbClr val="121824"/>
+          </a:solidFill>
+          <a:ln>
+            <a:solidFill>
+              <a:srgbClr val="121824"/>
+            </a:solidFill>
+          </a:ln>
+        </p:spPr>
+        <p:style>
+          <a:lnRef idx="1">
+            <a:schemeClr val="accent1"/>
+          </a:lnRef>
+          <a:fillRef idx="3">
+            <a:schemeClr val="accent1"/>
+          </a:fillRef>
+          <a:effectRef idx="2">
+            <a:schemeClr val="accent1"/>
+          </a:effectRef>
+          <a:fontRef idx="minor">
+            <a:schemeClr val="lt1"/>
+          </a:fontRef>
+        </p:style>
+        <p:txBody>
+          <a:bodyPr rtlCol="0" anchor="ctr"/>
+          <a:lstStyle/>
+          <a:p>
+            <a:pPr algn="ctr"/>
+          </a:p>
+        </p:txBody>
+      </p:sp>
+      <p:sp>
+        <p:nvSpPr>
+          <p:cNvPr id="17" name="TextBox 16"/>
+          <p:cNvSpPr txBox="1"/>
+          <p:nvPr/>
+        </p:nvSpPr>
+        <p:spPr>
+          <a:xfrm>
+            <a:off x="896112" y="5230368"/>
+            <a:ext cx="10204704" cy="475488"/>
+          </a:xfrm>
+          <a:prstGeom prst="rect">
+            <a:avLst/>
+          </a:prstGeom>
+          <a:noFill/>
+        </p:spPr>
+        <p:txBody>
+          <a:bodyPr wrap="square" lIns="45720" rIns="45720" tIns="36576" bIns="36576" anchor="t">
+            <a:spAutoFit/>
+          </a:bodyPr>
+          <a:lstStyle/>
+          <a:p>
+            <a:pPr algn="ctr">
+              <a:defRPr sz="1700" b="1">
                 <a:solidFill>
                   <a:srgbClr val="FFFFFF"/>
                 </a:solidFill>
@@ -6017,23 +6394,7 @@
               </a:defRPr>
             </a:pPr>
             <a:r>
-              <a:t>•  D4 · Diario, Site personal y Site de equipo no son lo mismo DIARIO: Proceso individual: / objetivo, acción, prueba, bloqueo, siguiente paso. \| SITE PERSONAL:</a:t>
-            </a:r>
-          </a:p>
-          <a:p>
-            <a:pPr>
-              <a:spcAft>
-                <a:spcPts val="900"/>
-              </a:spcAft>
-              <a:defRPr sz="2200">
-                <a:solidFill>
-                  <a:srgbClr val="FFFFFF"/>
-                </a:solidFill>
-                <a:latin typeface="Aptos"/>
-              </a:defRPr>
-            </a:pPr>
-            <a:r>
-              <a:t>•  Selección razonada de evidencias + qué demuestran. \| SITE EQUIPO: Reto, decisiones, pruebas, review y retrospectiva.</a:t>
+              <a:t>Una captura aislada no explica qué se probó ni con qué resultado.</a:t>
             </a:r>
           </a:p>
         </p:txBody>
@@ -6173,7 +6534,7 @@
               </a:defRPr>
             </a:pPr>
             <a:r>
-              <a:t>APLICAR Y DECIDIR</a:t>
+              <a:t>COMPRENDER</a:t>
             </a:r>
           </a:p>
         </p:txBody>
@@ -6209,7 +6570,7 @@
               </a:defRPr>
             </a:pPr>
             <a:r>
-              <a:t>Actividad central · 1</a:t>
+              <a:t>Cada espacio responde a una pregunta</a:t>
             </a:r>
           </a:p>
         </p:txBody>
@@ -6301,8 +6662,8 @@
         </p:nvSpPr>
         <p:spPr>
           <a:xfrm>
-            <a:off x="658368" y="1307592"/>
-            <a:ext cx="10835640" cy="1049274"/>
+            <a:off x="566928" y="1261872"/>
+            <a:ext cx="5212080" cy="2199132"/>
           </a:xfrm>
           <a:prstGeom prst="roundRect">
             <a:avLst/>
@@ -6346,8 +6707,8 @@
         </p:nvSpPr>
         <p:spPr>
           <a:xfrm>
-            <a:off x="850392" y="1453895"/>
-            <a:ext cx="685800" cy="384048"/>
+            <a:off x="768096" y="1426463"/>
+            <a:ext cx="384048" cy="347472"/>
           </a:xfrm>
           <a:prstGeom prst="rect">
             <a:avLst/>
@@ -6361,7 +6722,7 @@
           <a:lstStyle/>
           <a:p>
             <a:pPr algn="l">
-              <a:defRPr sz="1200" b="1">
+              <a:defRPr sz="1500" b="1">
                 <a:solidFill>
                   <a:srgbClr val="2F5BA8"/>
                 </a:solidFill>
@@ -6369,7 +6730,7 @@
               </a:defRPr>
             </a:pPr>
             <a:r>
-              <a:t>PASO 1</a:t>
+              <a:t>01</a:t>
             </a:r>
           </a:p>
         </p:txBody>
@@ -6382,8 +6743,8 @@
         </p:nvSpPr>
         <p:spPr>
           <a:xfrm>
-            <a:off x="1664208" y="1417319"/>
-            <a:ext cx="9464040" cy="829818"/>
+            <a:off x="1225295" y="1426463"/>
+            <a:ext cx="4434840" cy="1961388"/>
           </a:xfrm>
           <a:prstGeom prst="rect">
             <a:avLst/>
@@ -6397,7 +6758,7 @@
           <a:lstStyle/>
           <a:p>
             <a:pPr algn="l">
-              <a:defRPr sz="2000" b="0">
+              <a:defRPr sz="1800" b="0">
                 <a:solidFill>
                   <a:srgbClr val="1C2330"/>
                 </a:solidFill>
@@ -6405,7 +6766,7 @@
               </a:defRPr>
             </a:pPr>
             <a:r>
-              <a:t>Predice antes de ejecutar cuando haya código.</a:t>
+              <a:t>Diario · proceso individual: objetivo, acción, prueba, bloqueo y siguiente paso.</a:t>
             </a:r>
           </a:p>
         </p:txBody>
@@ -6418,8 +6779,8 @@
         </p:nvSpPr>
         <p:spPr>
           <a:xfrm>
-            <a:off x="658368" y="2542032"/>
-            <a:ext cx="10835640" cy="1049274"/>
+            <a:off x="6007608" y="1261872"/>
+            <a:ext cx="5212080" cy="2199132"/>
           </a:xfrm>
           <a:prstGeom prst="roundRect">
             <a:avLst/>
@@ -6463,8 +6824,8 @@
         </p:nvSpPr>
         <p:spPr>
           <a:xfrm>
-            <a:off x="850392" y="2688336"/>
-            <a:ext cx="685800" cy="384048"/>
+            <a:off x="6208776" y="1426463"/>
+            <a:ext cx="384048" cy="347472"/>
           </a:xfrm>
           <a:prstGeom prst="rect">
             <a:avLst/>
@@ -6478,7 +6839,7 @@
           <a:lstStyle/>
           <a:p>
             <a:pPr algn="l">
-              <a:defRPr sz="1200" b="1">
+              <a:defRPr sz="1500" b="1">
                 <a:solidFill>
                   <a:srgbClr val="2F5BA8"/>
                 </a:solidFill>
@@ -6486,7 +6847,7 @@
               </a:defRPr>
             </a:pPr>
             <a:r>
-              <a:t>PASO 2</a:t>
+              <a:t>02</a:t>
             </a:r>
           </a:p>
         </p:txBody>
@@ -6499,8 +6860,8 @@
         </p:nvSpPr>
         <p:spPr>
           <a:xfrm>
-            <a:off x="1664208" y="2651760"/>
-            <a:ext cx="9464040" cy="829818"/>
+            <a:off x="6665976" y="1426463"/>
+            <a:ext cx="4434840" cy="1961388"/>
           </a:xfrm>
           <a:prstGeom prst="rect">
             <a:avLst/>
@@ -6514,7 +6875,7 @@
           <a:lstStyle/>
           <a:p>
             <a:pPr algn="l">
-              <a:defRPr sz="2000" b="0">
+              <a:defRPr sz="1800" b="0">
                 <a:solidFill>
                   <a:srgbClr val="1C2330"/>
                 </a:solidFill>
@@ -6522,7 +6883,7 @@
               </a:defRPr>
             </a:pPr>
             <a:r>
-              <a:t>Realiza la micropráctica o modificación prevista.</a:t>
+              <a:t>Site personal · selección razonada de evidencias y qué demuestran.</a:t>
             </a:r>
           </a:p>
         </p:txBody>
@@ -6535,8 +6896,8 @@
         </p:nvSpPr>
         <p:spPr>
           <a:xfrm>
-            <a:off x="658368" y="3776472"/>
-            <a:ext cx="10835640" cy="1049274"/>
+            <a:off x="566928" y="3662172"/>
+            <a:ext cx="5212080" cy="2199132"/>
           </a:xfrm>
           <a:prstGeom prst="roundRect">
             <a:avLst/>
@@ -6580,8 +6941,8 @@
         </p:nvSpPr>
         <p:spPr>
           <a:xfrm>
-            <a:off x="850392" y="3922776"/>
-            <a:ext cx="685800" cy="384048"/>
+            <a:off x="768096" y="3826763"/>
+            <a:ext cx="384048" cy="347472"/>
           </a:xfrm>
           <a:prstGeom prst="rect">
             <a:avLst/>
@@ -6595,7 +6956,7 @@
           <a:lstStyle/>
           <a:p>
             <a:pPr algn="l">
-              <a:defRPr sz="1200" b="1">
+              <a:defRPr sz="1500" b="1">
                 <a:solidFill>
                   <a:srgbClr val="2F5BA8"/>
                 </a:solidFill>
@@ -6603,7 +6964,7 @@
               </a:defRPr>
             </a:pPr>
             <a:r>
-              <a:t>PASO 3</a:t>
+              <a:t>03</a:t>
             </a:r>
           </a:p>
         </p:txBody>
@@ -6616,8 +6977,8 @@
         </p:nvSpPr>
         <p:spPr>
           <a:xfrm>
-            <a:off x="1664208" y="3886200"/>
-            <a:ext cx="9464040" cy="829818"/>
+            <a:off x="1225295" y="3826763"/>
+            <a:ext cx="4434840" cy="1961388"/>
           </a:xfrm>
           <a:prstGeom prst="rect">
             <a:avLst/>
@@ -6631,7 +6992,7 @@
           <a:lstStyle/>
           <a:p>
             <a:pPr algn="l">
-              <a:defRPr sz="2000" b="0">
+              <a:defRPr sz="1800" b="0">
                 <a:solidFill>
                   <a:srgbClr val="1C2330"/>
                 </a:solidFill>
@@ -6639,7 +7000,7 @@
               </a:defRPr>
             </a:pPr>
             <a:r>
-              <a:t>Prueba el caso normal y, cuando exista una decisión o conversión, también el caso alternativo o erróneo.</a:t>
+              <a:t>Site de equipo · reto, decisiones, pruebas, review y retrospectiva.</a:t>
             </a:r>
           </a:p>
         </p:txBody>
@@ -6652,8 +7013,8 @@
         </p:nvSpPr>
         <p:spPr>
           <a:xfrm>
-            <a:off x="658368" y="5010912"/>
-            <a:ext cx="10835640" cy="1049274"/>
+            <a:off x="6007608" y="3662172"/>
+            <a:ext cx="5212080" cy="2199132"/>
           </a:xfrm>
           <a:prstGeom prst="roundRect">
             <a:avLst/>
@@ -6697,8 +7058,8 @@
         </p:nvSpPr>
         <p:spPr>
           <a:xfrm>
-            <a:off x="850392" y="5157216"/>
-            <a:ext cx="685800" cy="384048"/>
+            <a:off x="6208776" y="3826763"/>
+            <a:ext cx="384048" cy="347472"/>
           </a:xfrm>
           <a:prstGeom prst="rect">
             <a:avLst/>
@@ -6712,7 +7073,7 @@
           <a:lstStyle/>
           <a:p>
             <a:pPr algn="l">
-              <a:defRPr sz="1200" b="1">
+              <a:defRPr sz="1500" b="1">
                 <a:solidFill>
                   <a:srgbClr val="2F5BA8"/>
                 </a:solidFill>
@@ -6720,7 +7081,7 @@
               </a:defRPr>
             </a:pPr>
             <a:r>
-              <a:t>PASO 4</a:t>
+              <a:t>04</a:t>
             </a:r>
           </a:p>
         </p:txBody>
@@ -6733,8 +7094,8 @@
         </p:nvSpPr>
         <p:spPr>
           <a:xfrm>
-            <a:off x="1664208" y="5120640"/>
-            <a:ext cx="9464040" cy="829818"/>
+            <a:off x="6665976" y="3826763"/>
+            <a:ext cx="4434840" cy="1961388"/>
           </a:xfrm>
           <a:prstGeom prst="rect">
             <a:avLst/>
@@ -6748,7 +7109,7 @@
           <a:lstStyle/>
           <a:p>
             <a:pPr algn="l">
-              <a:defRPr sz="2000" b="0">
+              <a:defRPr sz="1800" b="0">
                 <a:solidFill>
                   <a:srgbClr val="1C2330"/>
                 </a:solidFill>
@@ -6756,7 +7117,7 @@
               </a:defRPr>
             </a:pPr>
             <a:r>
-              <a:t>Conserva el código o resultado en el repositorio o espacio indicado.</a:t>
+              <a:t>Moodle · índice de entrega y enlaces solicitados, no otra copia completa.</a:t>
             </a:r>
           </a:p>
         </p:txBody>
@@ -6932,7 +7293,7 @@
               </a:defRPr>
             </a:pPr>
             <a:r>
-              <a:t>Actividad central · 2</a:t>
+              <a:t>Prueba tu documentación con otra persona</a:t>
             </a:r>
           </a:p>
         </p:txBody>
@@ -7025,7 +7386,7 @@
         <p:spPr>
           <a:xfrm>
             <a:off x="658368" y="1307592"/>
-            <a:ext cx="10835640" cy="2226564"/>
+            <a:ext cx="10835640" cy="1049274"/>
           </a:xfrm>
           <a:prstGeom prst="roundRect">
             <a:avLst/>
@@ -7092,7 +7453,7 @@
               </a:defRPr>
             </a:pPr>
             <a:r>
-              <a:t>PASO 6</a:t>
+              <a:t>PASO 1</a:t>
             </a:r>
           </a:p>
         </p:txBody>
@@ -7106,7 +7467,7 @@
         <p:spPr>
           <a:xfrm>
             <a:off x="1664208" y="1417319"/>
-            <a:ext cx="9464040" cy="2007108"/>
+            <a:ext cx="9464040" cy="829818"/>
           </a:xfrm>
           <a:prstGeom prst="rect">
             <a:avLst/>
@@ -7128,7 +7489,7 @@
               </a:defRPr>
             </a:pPr>
             <a:r>
-              <a:t>Registra una sola entrada en el diario individual; no crees un informe paralelo.</a:t>
+              <a:t>Completa alcance, límites, ejecución y ejemplo del README.</a:t>
             </a:r>
           </a:p>
         </p:txBody>
@@ -7141,8 +7502,8 @@
         </p:nvSpPr>
         <p:spPr>
           <a:xfrm>
-            <a:off x="658368" y="3776472"/>
-            <a:ext cx="10835640" cy="2226564"/>
+            <a:off x="658368" y="2542032"/>
+            <a:ext cx="10835640" cy="1049274"/>
           </a:xfrm>
           <a:prstGeom prst="roundRect">
             <a:avLst/>
@@ -7186,7 +7547,7 @@
         </p:nvSpPr>
         <p:spPr>
           <a:xfrm>
-            <a:off x="850392" y="3922776"/>
+            <a:off x="850392" y="2688336"/>
             <a:ext cx="685800" cy="384048"/>
           </a:xfrm>
           <a:prstGeom prst="rect">
@@ -7209,7 +7570,7 @@
               </a:defRPr>
             </a:pPr>
             <a:r>
-              <a:t>PASO 7</a:t>
+              <a:t>PASO 2</a:t>
             </a:r>
           </a:p>
         </p:txBody>
@@ -7222,8 +7583,8 @@
         </p:nvSpPr>
         <p:spPr>
           <a:xfrm>
-            <a:off x="1664208" y="3886200"/>
-            <a:ext cx="9464040" cy="2007108"/>
+            <a:off x="1664208" y="2651760"/>
+            <a:ext cx="9464040" cy="829818"/>
           </a:xfrm>
           <a:prstGeom prst="rect">
             <a:avLst/>
@@ -7245,7 +7606,241 @@
               </a:defRPr>
             </a:pPr>
             <a:r>
-              <a:t>¿Qué puedes señalar, explicar y probar al terminar este checkpoint?</a:t>
+              <a:t>Crea una evidencia con entrada, salida esperada, observada y explicación.</a:t>
+            </a:r>
+          </a:p>
+        </p:txBody>
+      </p:sp>
+      <p:sp>
+        <p:nvSpPr>
+          <p:cNvPr id="14" name="Rounded Rectangle 13"/>
+          <p:cNvSpPr/>
+          <p:nvPr/>
+        </p:nvSpPr>
+        <p:spPr>
+          <a:xfrm>
+            <a:off x="658368" y="3776472"/>
+            <a:ext cx="10835640" cy="1049274"/>
+          </a:xfrm>
+          <a:prstGeom prst="roundRect">
+            <a:avLst/>
+          </a:prstGeom>
+          <a:solidFill>
+            <a:srgbClr val="FFFFFF"/>
+          </a:solidFill>
+          <a:ln>
+            <a:solidFill>
+              <a:srgbClr val="E5E9EF"/>
+            </a:solidFill>
+          </a:ln>
+        </p:spPr>
+        <p:style>
+          <a:lnRef idx="1">
+            <a:schemeClr val="accent1"/>
+          </a:lnRef>
+          <a:fillRef idx="3">
+            <a:schemeClr val="accent1"/>
+          </a:fillRef>
+          <a:effectRef idx="2">
+            <a:schemeClr val="accent1"/>
+          </a:effectRef>
+          <a:fontRef idx="minor">
+            <a:schemeClr val="lt1"/>
+          </a:fontRef>
+        </p:style>
+        <p:txBody>
+          <a:bodyPr rtlCol="0" anchor="ctr"/>
+          <a:lstStyle/>
+          <a:p>
+            <a:pPr algn="ctr"/>
+          </a:p>
+        </p:txBody>
+      </p:sp>
+      <p:sp>
+        <p:nvSpPr>
+          <p:cNvPr id="15" name="TextBox 14"/>
+          <p:cNvSpPr txBox="1"/>
+          <p:nvPr/>
+        </p:nvSpPr>
+        <p:spPr>
+          <a:xfrm>
+            <a:off x="850392" y="3922776"/>
+            <a:ext cx="685800" cy="384048"/>
+          </a:xfrm>
+          <a:prstGeom prst="rect">
+            <a:avLst/>
+          </a:prstGeom>
+          <a:noFill/>
+        </p:spPr>
+        <p:txBody>
+          <a:bodyPr wrap="square" lIns="45720" rIns="45720" tIns="36576" bIns="36576" anchor="t">
+            <a:spAutoFit/>
+          </a:bodyPr>
+          <a:lstStyle/>
+          <a:p>
+            <a:pPr algn="l">
+              <a:defRPr sz="1200" b="1">
+                <a:solidFill>
+                  <a:srgbClr val="2F5BA8"/>
+                </a:solidFill>
+                <a:latin typeface="Aptos"/>
+              </a:defRPr>
+            </a:pPr>
+            <a:r>
+              <a:t>PASO 3</a:t>
+            </a:r>
+          </a:p>
+        </p:txBody>
+      </p:sp>
+      <p:sp>
+        <p:nvSpPr>
+          <p:cNvPr id="16" name="TextBox 15"/>
+          <p:cNvSpPr txBox="1"/>
+          <p:nvPr/>
+        </p:nvSpPr>
+        <p:spPr>
+          <a:xfrm>
+            <a:off x="1664208" y="3886200"/>
+            <a:ext cx="9464040" cy="829818"/>
+          </a:xfrm>
+          <a:prstGeom prst="rect">
+            <a:avLst/>
+          </a:prstGeom>
+          <a:noFill/>
+        </p:spPr>
+        <p:txBody>
+          <a:bodyPr wrap="square" lIns="45720" rIns="45720" tIns="36576" bIns="36576" anchor="t">
+            <a:spAutoFit/>
+          </a:bodyPr>
+          <a:lstStyle/>
+          <a:p>
+            <a:pPr algn="l">
+              <a:defRPr sz="2000" b="0">
+                <a:solidFill>
+                  <a:srgbClr val="1C2330"/>
+                </a:solidFill>
+                <a:latin typeface="Aptos"/>
+              </a:defRPr>
+            </a:pPr>
+            <a:r>
+              <a:t>Pide a otra persona que ejecute siguiendo solo el README.</a:t>
+            </a:r>
+          </a:p>
+        </p:txBody>
+      </p:sp>
+      <p:sp>
+        <p:nvSpPr>
+          <p:cNvPr id="17" name="Rounded Rectangle 16"/>
+          <p:cNvSpPr/>
+          <p:nvPr/>
+        </p:nvSpPr>
+        <p:spPr>
+          <a:xfrm>
+            <a:off x="658368" y="5010912"/>
+            <a:ext cx="10835640" cy="1049274"/>
+          </a:xfrm>
+          <a:prstGeom prst="roundRect">
+            <a:avLst/>
+          </a:prstGeom>
+          <a:solidFill>
+            <a:srgbClr val="FFFFFF"/>
+          </a:solidFill>
+          <a:ln>
+            <a:solidFill>
+              <a:srgbClr val="E5E9EF"/>
+            </a:solidFill>
+          </a:ln>
+        </p:spPr>
+        <p:style>
+          <a:lnRef idx="1">
+            <a:schemeClr val="accent1"/>
+          </a:lnRef>
+          <a:fillRef idx="3">
+            <a:schemeClr val="accent1"/>
+          </a:fillRef>
+          <a:effectRef idx="2">
+            <a:schemeClr val="accent1"/>
+          </a:effectRef>
+          <a:fontRef idx="minor">
+            <a:schemeClr val="lt1"/>
+          </a:fontRef>
+        </p:style>
+        <p:txBody>
+          <a:bodyPr rtlCol="0" anchor="ctr"/>
+          <a:lstStyle/>
+          <a:p>
+            <a:pPr algn="ctr"/>
+          </a:p>
+        </p:txBody>
+      </p:sp>
+      <p:sp>
+        <p:nvSpPr>
+          <p:cNvPr id="18" name="TextBox 17"/>
+          <p:cNvSpPr txBox="1"/>
+          <p:nvPr/>
+        </p:nvSpPr>
+        <p:spPr>
+          <a:xfrm>
+            <a:off x="850392" y="5157216"/>
+            <a:ext cx="685800" cy="384048"/>
+          </a:xfrm>
+          <a:prstGeom prst="rect">
+            <a:avLst/>
+          </a:prstGeom>
+          <a:noFill/>
+        </p:spPr>
+        <p:txBody>
+          <a:bodyPr wrap="square" lIns="45720" rIns="45720" tIns="36576" bIns="36576" anchor="t">
+            <a:spAutoFit/>
+          </a:bodyPr>
+          <a:lstStyle/>
+          <a:p>
+            <a:pPr algn="l">
+              <a:defRPr sz="1200" b="1">
+                <a:solidFill>
+                  <a:srgbClr val="2F5BA8"/>
+                </a:solidFill>
+                <a:latin typeface="Aptos"/>
+              </a:defRPr>
+            </a:pPr>
+            <a:r>
+              <a:t>PASO 4</a:t>
+            </a:r>
+          </a:p>
+        </p:txBody>
+      </p:sp>
+      <p:sp>
+        <p:nvSpPr>
+          <p:cNvPr id="19" name="TextBox 18"/>
+          <p:cNvSpPr txBox="1"/>
+          <p:nvPr/>
+        </p:nvSpPr>
+        <p:spPr>
+          <a:xfrm>
+            <a:off x="1664208" y="5120640"/>
+            <a:ext cx="9464040" cy="829818"/>
+          </a:xfrm>
+          <a:prstGeom prst="rect">
+            <a:avLst/>
+          </a:prstGeom>
+          <a:noFill/>
+        </p:spPr>
+        <p:txBody>
+          <a:bodyPr wrap="square" lIns="45720" rIns="45720" tIns="36576" bIns="36576" anchor="t">
+            <a:spAutoFit/>
+          </a:bodyPr>
+          <a:lstStyle/>
+          <a:p>
+            <a:pPr algn="l">
+              <a:defRPr sz="2000" b="0">
+                <a:solidFill>
+                  <a:srgbClr val="1C2330"/>
+                </a:solidFill>
+                <a:latin typeface="Aptos"/>
+              </a:defRPr>
+            </a:pPr>
+            <a:r>
+              <a:t>Corrige la primera ambigüedad y verifica enlaces y permisos.</a:t>
             </a:r>
           </a:p>
         </p:txBody>
@@ -7421,7 +8016,7 @@
               </a:defRPr>
             </a:pPr>
             <a:r>
-              <a:t>Evidencia y comprobación</a:t>
+              <a:t>Documentación reproducible</a:t>
             </a:r>
           </a:p>
         </p:txBody>
@@ -7559,7 +8154,7 @@
         <p:spPr>
           <a:xfrm>
             <a:off x="1389888" y="1280160"/>
-            <a:ext cx="9829800" cy="1624584"/>
+            <a:ext cx="9829800" cy="1209294"/>
           </a:xfrm>
           <a:prstGeom prst="rect">
             <a:avLst/>
@@ -7581,7 +8176,7 @@
               </a:defRPr>
             </a:pPr>
             <a:r>
-              <a:t>conserva el código o la prueba en el lugar indicado por la sesión;</a:t>
+              <a:t>El README permite ejecutar H1 sin ayuda oral.</a:t>
             </a:r>
           </a:p>
         </p:txBody>
@@ -7594,7 +8189,7 @@
         </p:nvSpPr>
         <p:spPr>
           <a:xfrm>
-            <a:off x="713232" y="2959607"/>
+            <a:off x="713232" y="2544318"/>
             <a:ext cx="420624" cy="420624"/>
           </a:xfrm>
           <a:prstGeom prst="roundRect">
@@ -7639,8 +8234,8 @@
         </p:nvSpPr>
         <p:spPr>
           <a:xfrm>
-            <a:off x="1389888" y="2941319"/>
-            <a:ext cx="9829800" cy="1624584"/>
+            <a:off x="1389888" y="2526029"/>
+            <a:ext cx="9829800" cy="1209294"/>
           </a:xfrm>
           <a:prstGeom prst="rect">
             <a:avLst/>
@@ -7662,7 +8257,7 @@
               </a:defRPr>
             </a:pPr>
             <a:r>
-              <a:t>añade una sola entrada al diario individual con prueba, bloqueo y siguiente paso;</a:t>
+              <a:t>Los enlaces llevan al archivo o prueba concreta.</a:t>
             </a:r>
           </a:p>
         </p:txBody>
@@ -7675,7 +8270,7 @@
         </p:nvSpPr>
         <p:spPr>
           <a:xfrm>
-            <a:off x="713232" y="4620767"/>
+            <a:off x="713232" y="3790187"/>
             <a:ext cx="420624" cy="420624"/>
           </a:xfrm>
           <a:prstGeom prst="roundRect">
@@ -7720,8 +8315,8 @@
         </p:nvSpPr>
         <p:spPr>
           <a:xfrm>
-            <a:off x="1389888" y="4602480"/>
-            <a:ext cx="9829800" cy="1624584"/>
+            <a:off x="1389888" y="3771900"/>
+            <a:ext cx="9829800" cy="1209294"/>
           </a:xfrm>
           <a:prstGeom prst="rect">
             <a:avLst/>
@@ -7743,7 +8338,88 @@
               </a:defRPr>
             </a:pPr>
             <a:r>
-              <a:t>no copies la misma reflexión en otro documento; el Site personal seleccionará evidencias al cerrar H1.</a:t>
+              <a:t>Diario y Sites no duplican la misma reflexión.</a:t>
+            </a:r>
+          </a:p>
+        </p:txBody>
+      </p:sp>
+      <p:sp>
+        <p:nvSpPr>
+          <p:cNvPr id="14" name="Rounded Rectangle 13"/>
+          <p:cNvSpPr/>
+          <p:nvPr/>
+        </p:nvSpPr>
+        <p:spPr>
+          <a:xfrm>
+            <a:off x="713232" y="5036057"/>
+            <a:ext cx="420624" cy="420624"/>
+          </a:xfrm>
+          <a:prstGeom prst="roundRect">
+            <a:avLst/>
+          </a:prstGeom>
+          <a:solidFill>
+            <a:srgbClr val="FFFFFF"/>
+          </a:solidFill>
+          <a:ln>
+            <a:solidFill>
+              <a:srgbClr val="2F5BA8"/>
+            </a:solidFill>
+          </a:ln>
+        </p:spPr>
+        <p:style>
+          <a:lnRef idx="1">
+            <a:schemeClr val="accent1"/>
+          </a:lnRef>
+          <a:fillRef idx="3">
+            <a:schemeClr val="accent1"/>
+          </a:fillRef>
+          <a:effectRef idx="2">
+            <a:schemeClr val="accent1"/>
+          </a:effectRef>
+          <a:fontRef idx="minor">
+            <a:schemeClr val="lt1"/>
+          </a:fontRef>
+        </p:style>
+        <p:txBody>
+          <a:bodyPr rtlCol="0" anchor="ctr"/>
+          <a:lstStyle/>
+          <a:p>
+            <a:pPr algn="ctr"/>
+          </a:p>
+        </p:txBody>
+      </p:sp>
+      <p:sp>
+        <p:nvSpPr>
+          <p:cNvPr id="15" name="TextBox 14"/>
+          <p:cNvSpPr txBox="1"/>
+          <p:nvPr/>
+        </p:nvSpPr>
+        <p:spPr>
+          <a:xfrm>
+            <a:off x="1389888" y="5017770"/>
+            <a:ext cx="9829800" cy="1209294"/>
+          </a:xfrm>
+          <a:prstGeom prst="rect">
+            <a:avLst/>
+          </a:prstGeom>
+          <a:noFill/>
+        </p:spPr>
+        <p:txBody>
+          <a:bodyPr wrap="square" lIns="45720" rIns="45720" tIns="36576" bIns="36576" anchor="t">
+            <a:spAutoFit/>
+          </a:bodyPr>
+          <a:lstStyle/>
+          <a:p>
+            <a:pPr algn="l">
+              <a:defRPr sz="1900" b="0">
+                <a:solidFill>
+                  <a:srgbClr val="1C2330"/>
+                </a:solidFill>
+                <a:latin typeface="Aptos"/>
+              </a:defRPr>
+            </a:pPr>
+            <a:r>
+              <a:t>No aparecen datos personales, contraseñas, claves o tokens.</a:t>
             </a:r>
           </a:p>
         </p:txBody>
@@ -7883,7 +8559,7 @@
               </a:defRPr>
             </a:pPr>
             <a:r>
-              <a:t>LÍMITES QUE PROTEGEN EL APRENDIZAJE</a:t>
+              <a:t>EXPLICAR Y DEFENDER</a:t>
             </a:r>
           </a:p>
         </p:txBody>
@@ -7919,7 +8595,7 @@
               </a:defRPr>
             </a:pPr>
             <a:r>
-              <a:t>Seguridad y uso responsable</a:t>
+              <a:t>Comprobación final</a:t>
             </a:r>
           </a:p>
         </p:txBody>
@@ -8012,17 +8688,17 @@
         <p:spPr>
           <a:xfrm>
             <a:off x="621792" y="1298448"/>
-            <a:ext cx="5230368" cy="4553712"/>
+            <a:ext cx="10927080" cy="1828800"/>
           </a:xfrm>
           <a:prstGeom prst="roundRect">
             <a:avLst/>
           </a:prstGeom>
           <a:solidFill>
-            <a:srgbClr val="FFFFFF"/>
+            <a:srgbClr val="2F5BA8"/>
           </a:solidFill>
           <a:ln>
             <a:solidFill>
-              <a:srgbClr val="E5E9EF"/>
+              <a:srgbClr val="2F5BA8"/>
             </a:solidFill>
           </a:ln>
         </p:spPr>
@@ -8050,57 +8726,14 @@
       </p:sp>
       <p:sp>
         <p:nvSpPr>
-          <p:cNvPr id="9" name="Rounded Rectangle 8"/>
-          <p:cNvSpPr/>
-          <p:nvPr/>
-        </p:nvSpPr>
-        <p:spPr>
-          <a:xfrm>
-            <a:off x="841248" y="1527048"/>
-            <a:ext cx="237744" cy="4096512"/>
-          </a:xfrm>
-          <a:prstGeom prst="roundRect">
-            <a:avLst/>
-          </a:prstGeom>
-          <a:solidFill>
-            <a:srgbClr val="247E5C"/>
-          </a:solidFill>
-          <a:ln>
-            <a:noFill/>
-          </a:ln>
-        </p:spPr>
-        <p:style>
-          <a:lnRef idx="1">
-            <a:schemeClr val="accent1"/>
-          </a:lnRef>
-          <a:fillRef idx="3">
-            <a:schemeClr val="accent1"/>
-          </a:fillRef>
-          <a:effectRef idx="2">
-            <a:schemeClr val="accent1"/>
-          </a:effectRef>
-          <a:fontRef idx="minor">
-            <a:schemeClr val="lt1"/>
-          </a:fontRef>
-        </p:style>
-        <p:txBody>
-          <a:bodyPr rtlCol="0" anchor="ctr"/>
-          <a:lstStyle/>
-          <a:p>
-            <a:pPr algn="ctr"/>
-          </a:p>
-        </p:txBody>
-      </p:sp>
-      <p:sp>
-        <p:nvSpPr>
-          <p:cNvPr id="10" name="TextBox 9"/>
+          <p:cNvPr id="9" name="TextBox 8"/>
           <p:cNvSpPr txBox="1"/>
           <p:nvPr/>
         </p:nvSpPr>
         <p:spPr>
           <a:xfrm>
-            <a:off x="1280160" y="1527048"/>
-            <a:ext cx="4224528" cy="4160520"/>
+            <a:off x="932688" y="1591056"/>
+            <a:ext cx="10241280" cy="256032"/>
           </a:xfrm>
           <a:prstGeom prst="rect">
             <a:avLst/>
@@ -8114,117 +8747,29 @@
           <a:lstStyle/>
           <a:p>
             <a:pPr algn="l">
-              <a:defRPr sz="1900" b="0">
+              <a:defRPr sz="1300" b="1">
                 <a:solidFill>
-                  <a:srgbClr val="1C2330"/>
+                  <a:srgbClr val="FFFFFF"/>
                 </a:solidFill>
                 <a:latin typeface="Aptos"/>
               </a:defRPr>
             </a:pPr>
             <a:r>
-              <a:t>Usa datos ficticios y no publiques credenciales ni información personal.</a:t>
-            </a:r>
-          </a:p>
-        </p:txBody>
-      </p:sp>
-      <p:sp>
-        <p:nvSpPr>
-          <p:cNvPr id="11" name="Rounded Rectangle 10"/>
-          <p:cNvSpPr/>
-          <p:nvPr/>
-        </p:nvSpPr>
-        <p:spPr>
-          <a:xfrm>
-            <a:off x="6126479" y="1298448"/>
-            <a:ext cx="5230368" cy="4553712"/>
-          </a:xfrm>
-          <a:prstGeom prst="roundRect">
-            <a:avLst/>
-          </a:prstGeom>
-          <a:solidFill>
-            <a:srgbClr val="FFFFFF"/>
-          </a:solidFill>
-          <a:ln>
-            <a:solidFill>
-              <a:srgbClr val="E5E9EF"/>
-            </a:solidFill>
-          </a:ln>
-        </p:spPr>
-        <p:style>
-          <a:lnRef idx="1">
-            <a:schemeClr val="accent1"/>
-          </a:lnRef>
-          <a:fillRef idx="3">
-            <a:schemeClr val="accent1"/>
-          </a:fillRef>
-          <a:effectRef idx="2">
-            <a:schemeClr val="accent1"/>
-          </a:effectRef>
-          <a:fontRef idx="minor">
-            <a:schemeClr val="lt1"/>
-          </a:fontRef>
-        </p:style>
-        <p:txBody>
-          <a:bodyPr rtlCol="0" anchor="ctr"/>
-          <a:lstStyle/>
-          <a:p>
-            <a:pPr algn="ctr"/>
-          </a:p>
-        </p:txBody>
-      </p:sp>
-      <p:sp>
-        <p:nvSpPr>
-          <p:cNvPr id="12" name="Rounded Rectangle 11"/>
-          <p:cNvSpPr/>
-          <p:nvPr/>
-        </p:nvSpPr>
-        <p:spPr>
-          <a:xfrm>
-            <a:off x="6345936" y="1527048"/>
-            <a:ext cx="237744" cy="4096512"/>
-          </a:xfrm>
-          <a:prstGeom prst="roundRect">
-            <a:avLst/>
-          </a:prstGeom>
-          <a:solidFill>
-            <a:srgbClr val="C07020"/>
-          </a:solidFill>
-          <a:ln>
-            <a:noFill/>
-          </a:ln>
-        </p:spPr>
-        <p:style>
-          <a:lnRef idx="1">
-            <a:schemeClr val="accent1"/>
-          </a:lnRef>
-          <a:fillRef idx="3">
-            <a:schemeClr val="accent1"/>
-          </a:fillRef>
-          <a:effectRef idx="2">
-            <a:schemeClr val="accent1"/>
-          </a:effectRef>
-          <a:fontRef idx="minor">
-            <a:schemeClr val="lt1"/>
-          </a:fontRef>
-        </p:style>
-        <p:txBody>
-          <a:bodyPr rtlCol="0" anchor="ctr"/>
-          <a:lstStyle/>
-          <a:p>
-            <a:pPr algn="ctr"/>
-          </a:p>
-        </p:txBody>
-      </p:sp>
-      <p:sp>
-        <p:nvSpPr>
-          <p:cNvPr id="13" name="TextBox 12"/>
+              <a:t>PREGUNTA O DECISIÓN DE SALIDA</a:t>
+            </a:r>
+          </a:p>
+        </p:txBody>
+      </p:sp>
+      <p:sp>
+        <p:nvSpPr>
+          <p:cNvPr id="10" name="TextBox 9"/>
           <p:cNvSpPr txBox="1"/>
           <p:nvPr/>
         </p:nvSpPr>
         <p:spPr>
           <a:xfrm>
-            <a:off x="6784847" y="1527048"/>
-            <a:ext cx="4224528" cy="4160520"/>
+            <a:off x="932688" y="1975104"/>
+            <a:ext cx="10058400" cy="822960"/>
           </a:xfrm>
           <a:prstGeom prst="rect">
             <a:avLst/>
@@ -8238,15 +8783,51 @@
           <a:lstStyle/>
           <a:p>
             <a:pPr algn="l">
-              <a:defRPr sz="1900" b="0">
+              <a:defRPr sz="2500" b="1">
                 <a:solidFill>
-                  <a:srgbClr val="1C2330"/>
+                  <a:srgbClr val="FFFFFF"/>
                 </a:solidFill>
                 <a:latin typeface="Aptos"/>
               </a:defRPr>
             </a:pPr>
             <a:r>
-              <a:t>Si utilizas IA de forma sustantiva, registra propósito, propuesta, cambios propios y validación en el registro de IA del hito.</a:t>
+              <a:t>¿Qué cambió después de que otra persona intentara seguir tu README sin ayuda?</a:t>
+            </a:r>
+          </a:p>
+        </p:txBody>
+      </p:sp>
+      <p:sp>
+        <p:nvSpPr>
+          <p:cNvPr id="11" name="TextBox 10"/>
+          <p:cNvSpPr txBox="1"/>
+          <p:nvPr/>
+        </p:nvSpPr>
+        <p:spPr>
+          <a:xfrm>
+            <a:off x="749808" y="3886200"/>
+            <a:ext cx="10607040" cy="1280160"/>
+          </a:xfrm>
+          <a:prstGeom prst="rect">
+            <a:avLst/>
+          </a:prstGeom>
+          <a:noFill/>
+        </p:spPr>
+        <p:txBody>
+          <a:bodyPr wrap="square" lIns="45720" rIns="45720" tIns="36576" bIns="36576" anchor="ctr">
+            <a:spAutoFit/>
+          </a:bodyPr>
+          <a:lstStyle/>
+          <a:p>
+            <a:pPr algn="ctr">
+              <a:defRPr sz="2300" b="1">
+                <a:solidFill>
+                  <a:srgbClr val="247E5C"/>
+                </a:solidFill>
+                <a:latin typeface="Aptos"/>
+              </a:defRPr>
+            </a:pPr>
+            <a:r>
+              <a:t>La sesión termina cuando la evidencia existe, está comprobada y puede defenderse.</a:t>
             </a:r>
           </a:p>
         </p:txBody>
@@ -8386,7 +8967,7 @@
               </a:defRPr>
             </a:pPr>
             <a:r>
-              <a:t>EXPLICAR Y DEFENDER</a:t>
+              <a:t>TRAZABILIDAD DEL CONTENIDO</a:t>
             </a:r>
           </a:p>
         </p:txBody>
@@ -8422,7 +9003,7 @@
               </a:defRPr>
             </a:pPr>
             <a:r>
-              <a:t>Cierre y defensa</a:t>
+              <a:t>Fuentes utilizadas</a:t>
             </a:r>
           </a:p>
         </p:txBody>
@@ -8508,59 +9089,14 @@
       </p:sp>
       <p:sp>
         <p:nvSpPr>
-          <p:cNvPr id="8" name="Rounded Rectangle 7"/>
-          <p:cNvSpPr/>
-          <p:nvPr/>
-        </p:nvSpPr>
-        <p:spPr>
-          <a:xfrm>
-            <a:off x="621792" y="1298448"/>
-            <a:ext cx="10927080" cy="1828800"/>
-          </a:xfrm>
-          <a:prstGeom prst="roundRect">
-            <a:avLst/>
-          </a:prstGeom>
-          <a:solidFill>
-            <a:srgbClr val="2F5BA8"/>
-          </a:solidFill>
-          <a:ln>
-            <a:solidFill>
-              <a:srgbClr val="2F5BA8"/>
-            </a:solidFill>
-          </a:ln>
-        </p:spPr>
-        <p:style>
-          <a:lnRef idx="1">
-            <a:schemeClr val="accent1"/>
-          </a:lnRef>
-          <a:fillRef idx="3">
-            <a:schemeClr val="accent1"/>
-          </a:fillRef>
-          <a:effectRef idx="2">
-            <a:schemeClr val="accent1"/>
-          </a:effectRef>
-          <a:fontRef idx="minor">
-            <a:schemeClr val="lt1"/>
-          </a:fontRef>
-        </p:style>
-        <p:txBody>
-          <a:bodyPr rtlCol="0" anchor="ctr"/>
-          <a:lstStyle/>
-          <a:p>
-            <a:pPr algn="ctr"/>
-          </a:p>
-        </p:txBody>
-      </p:sp>
-      <p:sp>
-        <p:nvSpPr>
-          <p:cNvPr id="9" name="TextBox 8"/>
+          <p:cNvPr id="8" name="TextBox 7"/>
           <p:cNvSpPr txBox="1"/>
           <p:nvPr/>
         </p:nvSpPr>
         <p:spPr>
           <a:xfrm>
-            <a:off x="932688" y="1591056"/>
-            <a:ext cx="10241280" cy="256032"/>
+            <a:off x="777240" y="1417320"/>
+            <a:ext cx="10515600" cy="658368"/>
           </a:xfrm>
           <a:prstGeom prst="rect">
             <a:avLst/>
@@ -8573,30 +9109,30 @@
           </a:bodyPr>
           <a:lstStyle/>
           <a:p>
-            <a:pPr algn="l">
-              <a:defRPr sz="1300" b="1">
+            <a:pPr algn="ctr">
+              <a:defRPr sz="2300" b="1">
                 <a:solidFill>
-                  <a:srgbClr val="FFFFFF"/>
+                  <a:srgbClr val="1C2330"/>
                 </a:solidFill>
                 <a:latin typeface="Aptos"/>
               </a:defRPr>
             </a:pPr>
             <a:r>
-              <a:t>PREGUNTA O DECISIÓN DE SALIDA</a:t>
-            </a:r>
-          </a:p>
-        </p:txBody>
-      </p:sp>
-      <p:sp>
-        <p:nvSpPr>
-          <p:cNvPr id="10" name="TextBox 9"/>
+              <a:t>Esta presentación selecciona y adapta contenido; no sustituye al libro ni copia el PDF completo.</a:t>
+            </a:r>
+          </a:p>
+        </p:txBody>
+      </p:sp>
+      <p:sp>
+        <p:nvSpPr>
+          <p:cNvPr id="9" name="TextBox 8"/>
           <p:cNvSpPr txBox="1"/>
           <p:nvPr/>
         </p:nvSpPr>
         <p:spPr>
           <a:xfrm>
-            <a:off x="932688" y="1975104"/>
-            <a:ext cx="10058400" cy="822960"/>
+            <a:off x="1005840" y="2468880"/>
+            <a:ext cx="10058400" cy="2331720"/>
           </a:xfrm>
           <a:prstGeom prst="rect">
             <a:avLst/>
@@ -8604,57 +9140,92 @@
           <a:noFill/>
         </p:spPr>
         <p:txBody>
-          <a:bodyPr wrap="square" lIns="45720" rIns="45720" tIns="36576" bIns="36576" anchor="t">
+          <a:bodyPr wrap="square" lIns="73152" rIns="45720" tIns="36576">
             <a:spAutoFit/>
           </a:bodyPr>
           <a:lstStyle/>
           <a:p>
-            <a:pPr algn="l">
-              <a:defRPr sz="2500" b="1">
+            <a:pPr>
+              <a:spcAft>
+                <a:spcPts val="900"/>
+              </a:spcAft>
+              <a:defRPr sz="2000">
                 <a:solidFill>
-                  <a:srgbClr val="FFFFFF"/>
+                  <a:srgbClr val="1C2330"/>
                 </a:solidFill>
                 <a:latin typeface="Aptos"/>
               </a:defRPr>
             </a:pPr>
             <a:r>
-              <a:t>¿Qué puedes señalar, explicar y probar al terminar este checkpoint?</a:t>
-            </a:r>
-          </a:p>
-        </p:txBody>
-      </p:sp>
-      <p:sp>
-        <p:nvSpPr>
-          <p:cNvPr id="11" name="TextBox 10"/>
-          <p:cNvSpPr txBox="1"/>
-          <p:nvPr/>
-        </p:nvSpPr>
-        <p:spPr>
-          <a:xfrm>
-            <a:off x="749808" y="3886200"/>
-            <a:ext cx="10607040" cy="1280160"/>
-          </a:xfrm>
-          <a:prstGeom prst="rect">
-            <a:avLst/>
-          </a:prstGeom>
-          <a:noFill/>
-        </p:spPr>
-        <p:txBody>
-          <a:bodyPr wrap="square" lIns="45720" rIns="45720" tIns="36576" bIns="36576" anchor="ctr">
-            <a:spAutoFit/>
-          </a:bodyPr>
-          <a:lstStyle/>
-          <a:p>
-            <a:pPr algn="ctr">
-              <a:defRPr sz="2300" b="1">
+              <a:t>•  Libro: capítulos 01-02 · Evidencias y README de H1</a:t>
+            </a:r>
+          </a:p>
+          <a:p>
+            <a:pPr>
+              <a:spcAft>
+                <a:spcPts val="900"/>
+              </a:spcAft>
+              <a:defRPr sz="2000">
                 <a:solidFill>
-                  <a:srgbClr val="247E5C"/>
+                  <a:srgbClr val="1C2330"/>
                 </a:solidFill>
                 <a:latin typeface="Aptos"/>
               </a:defRPr>
             </a:pPr>
             <a:r>
-              <a:t>La sesión termina cuando la evidencia existe, está comprobada y puede defenderse.</a:t>
+              <a:t>•  Fichas S206-S215 y píldoras H1</a:t>
+            </a:r>
+          </a:p>
+          <a:p>
+            <a:pPr>
+              <a:spcAft>
+                <a:spcPts val="900"/>
+              </a:spcAft>
+              <a:defRPr sz="2000">
+                <a:solidFill>
+                  <a:srgbClr val="1C2330"/>
+                </a:solidFill>
+                <a:latin typeface="Aptos"/>
+              </a:defRPr>
+            </a:pPr>
+            <a:r>
+              <a:t>•  Ejemplos revisados y adaptados a MiniJarvis; no se copian errores ni capturas antiguas del PDF.</a:t>
+            </a:r>
+          </a:p>
+        </p:txBody>
+      </p:sp>
+      <p:sp>
+        <p:nvSpPr>
+          <p:cNvPr id="10" name="TextBox 9"/>
+          <p:cNvSpPr txBox="1"/>
+          <p:nvPr/>
+        </p:nvSpPr>
+        <p:spPr>
+          <a:xfrm>
+            <a:off x="960120" y="5257800"/>
+            <a:ext cx="10241280" cy="411480"/>
+          </a:xfrm>
+          <a:prstGeom prst="rect">
+            <a:avLst/>
+          </a:prstGeom>
+          <a:noFill/>
+        </p:spPr>
+        <p:txBody>
+          <a:bodyPr wrap="square" lIns="45720" rIns="45720" tIns="36576" bIns="36576" anchor="t">
+            <a:spAutoFit/>
+          </a:bodyPr>
+          <a:lstStyle/>
+          <a:p>
+            <a:pPr algn="ctr">
+              <a:defRPr sz="1800" b="1">
+                <a:solidFill>
+                  <a:srgbClr val="2F5BA8"/>
+                </a:solidFill>
+                <a:latin typeface="Aptos"/>
+              </a:defRPr>
+            </a:pPr>
+            <a:r>
+              <a:t>Consulta el libro para ampliar, practicar y repasar errores frecuentes.</a:t>
             </a:r>
           </a:p>
         </p:txBody>

--- a/02-PROFESORADO/03-PRESENTACIONES/POR-SESION/h1/S214-readme-y-evidencia-de-ejecucion-presentacion.pptx
+++ b/02-PROFESORADO/03-PRESENTACIONES/POR-SESION/h1/S214-readme-y-evidencia-de-ejecucion-presentacion.pptx
@@ -510,12 +510,12 @@
           <a:lstStyle/>
           <a:p>
             <a:r>
-              <a:t>Objetivo docente: Documentar H1 y seleccionar evidencias verificables sin duplicar el diario.</a:t>
-            </a:r>
-          </a:p>
-          <a:p>
-            <a:r>
-              <a:t>Diapositiva 1 de 9: README, evidencia y Site</a:t>
+              <a:t>Objetivo docente: Al terminar, debes documentar H1 con un README reproducible, seleccionar evidencias verificables y comprobar permisos y enlaces profundos antes de preparar la entrega.</a:t>
+            </a:r>
+          </a:p>
+          <a:p>
+            <a:r>
+              <a:t>Diapositiva 1 de 9: Qué vas a aprender</a:t>
             </a:r>
           </a:p>
           <a:p>
@@ -525,7 +525,7 @@
           </a:p>
           <a:p>
             <a:r>
-              <a:t>Presenta el producto y anticipa la evidencia: Quede H1 listo para defensa.</a:t>
+              <a:t>Presenta el producto y anticipa la evidencia: README H1.</a:t>
             </a:r>
           </a:p>
           <a:p>
@@ -535,37 +535,7 @@
           </a:p>
           <a:p>
             <a:r>
-              <a:t>- 00:00–00:05 / D1: COMUNICAR: Plantea la prueba de usuario de la documentación.</a:t>
-            </a:r>
-          </a:p>
-          <a:p>
-            <a:r>
-              <a:t>- 00:05–00:11 / D2: PÍLDORA DOCENTE 1/3: Explica estructura mínima sin inventar secciones nuevas ajenas a las plantillas.</a:t>
-            </a:r>
-          </a:p>
-          <a:p>
-            <a:r>
-              <a:t>- 00:11–00:16 / D3: PÍLDORA DOCENTE 2/3: Explica trazabilidad y enlace profundo.</a:t>
-            </a:r>
-          </a:p>
-          <a:p>
-            <a:r>
-              <a:t>- 00:16–00:22 / D4: PÍLDORA DOCENTE 3/3: Explica funciones y privacidad. El Site no es copia del diario.</a:t>
-            </a:r>
-          </a:p>
-          <a:p>
-            <a:r>
-              <a:t>- 00:22–00:36 / D5: ACTIVIDAD: Circula por mesas y pide a una persona explicar un enlace concreto.</a:t>
-            </a:r>
-          </a:p>
-          <a:p>
-            <a:r>
-              <a:t>- 00:36–00:41 / D6: PRUEBA DE USUARIO: Organiza intercambio.</a:t>
-            </a:r>
-          </a:p>
-          <a:p>
-            <a:r>
-              <a:t>- 00:41–00:45 / D7: CIERRE: Cierra con privacidad y accesibilidad de enlaces.</a:t>
+              <a:t>- 45 minutos: Revisad el README, preparad una evidencia de ejecución con entrada, salida esperada y salida obtenida, y comprobad desde una cuenta no propietaria que los enlaces profundos abren el recurso correcto.</a:t>
             </a:r>
           </a:p>
           <a:p>
@@ -575,7 +545,67 @@
           </a:p>
           <a:p>
             <a:r>
-              <a:t>- PÍLDORA DOCENTE 1/3: Explica estructura mínima sin inventar secciones nuevas ajenas a las plantillas, PÍLDORA DOCENTE 2/3: Explica trazabilidad y enlace profundo, PÍLDORA DOCENTE 3/3: Explica funciones y privacidad. El Site no es copia del diario.</a:t>
+              <a:t>- Úsala antes de documentar y antes de preparar Moodle.</a:t>
+            </a:r>
+          </a:p>
+          <a:p>
+            <a:r>
+              <a:t>- Documentar no significa copiar la misma información en muchos sitios. Cada espacio responde a una pregunta: README explica cómo ejecutar; diario cuenta el proceso personal; Site personal selecciona aprendizaje; Site de equipo comunica el incremento; Moodle recoge enlaces oficiales.</a:t>
+            </a:r>
+          </a:p>
+          <a:p>
+            <a:r>
+              <a:t>- Ejemplo de evidencia verificable:</a:t>
+            </a:r>
+          </a:p>
+          <a:p>
+            <a:r>
+              <a:t>- Prueba: saludo con nombre ficticio.</a:t>
+            </a:r>
+          </a:p>
+          <a:p>
+            <a:r>
+              <a:t>- Entrada usada: Laura.</a:t>
+            </a:r>
+          </a:p>
+          <a:p>
+            <a:r>
+              <a:t>- Salida esperada: Encantado, Laura.</a:t>
+            </a:r>
+          </a:p>
+          <a:p>
+            <a:r>
+              <a:t>- Salida obtenida: Encantado, Laura.</a:t>
+            </a:r>
+          </a:p>
+          <a:p>
+            <a:r>
+              <a:t>- Demuestra: la entrada leída se guarda y se usa en la salida.</a:t>
+            </a:r>
+          </a:p>
+          <a:p>
+            <a:r>
+              <a:t>- Enlace: archivo o captura concreta, no carpeta general.</a:t>
+            </a:r>
+          </a:p>
+          <a:p>
+            <a:r>
+              <a:t>- Pregunta al alumnado:</a:t>
+            </a:r>
+          </a:p>
+          <a:p>
+            <a:r>
+              <a:t>- Qué demuestra esta evidencia, dónde debería estar enlazada y por qué no basta con escribir funciona.</a:t>
+            </a:r>
+          </a:p>
+          <a:p>
+            <a:r>
+              <a:t>- Error frecuente que debes cortar:</a:t>
+            </a:r>
+          </a:p>
+          <a:p>
+            <a:r>
+              <a:t>- No enlacéis carpetas generales. Enlazad la evidencia concreta.</a:t>
             </a:r>
           </a:p>
           <a:p>
@@ -650,7 +680,7 @@
           <a:lstStyle/>
           <a:p>
             <a:r>
-              <a:t>Objetivo docente: Documentar H1 y seleccionar evidencias verificables sin duplicar el diario.</a:t>
+              <a:t>Objetivo docente: Al terminar, debes documentar H1 con un README reproducible, seleccionar evidencias verificables y comprobar permisos y enlaces profundos antes de preparar la entrega.</a:t>
             </a:r>
           </a:p>
           <a:p>
@@ -665,12 +695,12 @@
           </a:p>
           <a:p>
             <a:r>
-              <a:t>- Objetivo: Documentar H1 y seleccionar evidencias verificables sin duplicar el diario.</a:t>
-            </a:r>
-          </a:p>
-          <a:p>
-            <a:r>
-              <a:t>- Comprobación: Quede H1 listo para defensa.</a:t>
+              <a:t>- Objetivo: Al terminar, debes documentar H1 con un README reproducible, seleccionar evidencias verificables y comprobar permisos y enlaces profundos antes de preparar la entrega.</a:t>
+            </a:r>
+          </a:p>
+          <a:p>
+            <a:r>
+              <a:t>- Comprobación: README H1.</a:t>
             </a:r>
           </a:p>
           <a:p>
@@ -745,7 +775,7 @@
           <a:lstStyle/>
           <a:p>
             <a:r>
-              <a:t>Objetivo docente: Documentar H1 y seleccionar evidencias verificables sin duplicar el diario.</a:t>
+              <a:t>Objetivo docente: Al terminar, debes documentar H1 con un README reproducible, seleccionar evidencias verificables y comprobar permisos y enlaces profundos antes de preparar la entrega.</a:t>
             </a:r>
           </a:p>
           <a:p>
@@ -776,12 +806,12 @@
           <a:p/>
           <a:p>
             <a:r>
-              <a:t>## Límites de H1</a:t>
-            </a:r>
-          </a:p>
-          <a:p>
-            <a:r>
-              <a:t>No incluye menú, memoria, ficheros ni IA real.</a:t>
+              <a:t>## Requisitos</a:t>
+            </a:r>
+          </a:p>
+          <a:p>
+            <a:r>
+              <a:t>JDK configurado y proyecto abierto.</a:t>
             </a:r>
           </a:p>
           <a:p/>
@@ -792,17 +822,18 @@
           </a:p>
           <a:p>
             <a:r>
-              <a:t>1. Abre el proyecto.</a:t>
-            </a:r>
-          </a:p>
-          <a:p>
-            <a:r>
-              <a:t>2. Ejecuta Main.</a:t>
-            </a:r>
-          </a:p>
-          <a:p>
-            <a:r>
-              <a:t>3. Introduce datos ficticios.</a:t>
+              <a:t>Ejecuta Main e introduce datos ficticios.</a:t>
+            </a:r>
+          </a:p>
+          <a:p/>
+          <a:p>
+            <a:r>
+              <a:t>## Límites</a:t>
+            </a:r>
+          </a:p>
+          <a:p>
+            <a:r>
+              <a:t>Sin menú, memoria, ficheros ni IA real.</a:t>
             </a:r>
           </a:p>
           <a:p>
@@ -887,7 +918,7 @@
           <a:lstStyle/>
           <a:p>
             <a:r>
-              <a:t>Objetivo docente: Documentar H1 y seleccionar evidencias verificables sin duplicar el diario.</a:t>
+              <a:t>Objetivo docente: Al terminar, debes documentar H1 con un README reproducible, seleccionar evidencias verificables y comprobar permisos y enlaces profundos antes de preparar la entrega.</a:t>
             </a:r>
           </a:p>
           <a:p>
@@ -997,7 +1028,7 @@
           <a:lstStyle/>
           <a:p>
             <a:r>
-              <a:t>Objetivo docente: Documentar H1 y seleccionar evidencias verificables sin duplicar el diario.</a:t>
+              <a:t>Objetivo docente: Al terminar, debes documentar H1 con un README reproducible, seleccionar evidencias verificables y comprobar permisos y enlaces profundos antes de preparar la entrega.</a:t>
             </a:r>
           </a:p>
           <a:p>
@@ -1107,7 +1138,7 @@
           <a:lstStyle/>
           <a:p>
             <a:r>
-              <a:t>Objetivo docente: Documentar H1 y seleccionar evidencias verificables sin duplicar el diario.</a:t>
+              <a:t>Objetivo docente: Al terminar, debes documentar H1 con un README reproducible, seleccionar evidencias verificables y comprobar permisos y enlaces profundos antes de preparar la entrega.</a:t>
             </a:r>
           </a:p>
           <a:p>
@@ -1217,7 +1248,7 @@
           <a:lstStyle/>
           <a:p>
             <a:r>
-              <a:t>Objetivo docente: Documentar H1 y seleccionar evidencias verificables sin duplicar el diario.</a:t>
+              <a:t>Objetivo docente: Al terminar, debes documentar H1 con un README reproducible, seleccionar evidencias verificables y comprobar permisos y enlaces profundos antes de preparar la entrega.</a:t>
             </a:r>
           </a:p>
           <a:p>
@@ -1232,7 +1263,7 @@
           </a:p>
           <a:p>
             <a:r>
-              <a:t>Comprueba la evidencia en su fuente canónica: Quede H1 listo para defensa.</a:t>
+              <a:t>Comprueba la evidencia en su fuente canónica: README H1.</a:t>
             </a:r>
           </a:p>
           <a:p>
@@ -1327,7 +1358,7 @@
           <a:lstStyle/>
           <a:p>
             <a:r>
-              <a:t>Objetivo docente: Documentar H1 y seleccionar evidencias verificables sin duplicar el diario.</a:t>
+              <a:t>Objetivo docente: Al terminar, debes documentar H1 con un README reproducible, seleccionar evidencias verificables y comprobar permisos y enlaces profundos antes de preparar la entrega.</a:t>
             </a:r>
           </a:p>
           <a:p>
@@ -1422,12 +1453,12 @@
           <a:lstStyle/>
           <a:p>
             <a:r>
-              <a:t>Objetivo docente: Documentar H1 y seleccionar evidencias verificables sin duplicar el diario.</a:t>
-            </a:r>
-          </a:p>
-          <a:p>
-            <a:r>
-              <a:t>Diapositiva 9 de 9: Fuentes utilizadas</a:t>
+              <a:t>Objetivo docente: Al terminar, debes documentar H1 con un README reproducible, seleccionar evidencias verificables y comprobar permisos y enlaces profundos antes de preparar la entrega.</a:t>
+            </a:r>
+          </a:p>
+          <a:p>
+            <a:r>
+              <a:t>Diapositiva 9 de 9: Fuentes diferenciadas</a:t>
             </a:r>
           </a:p>
           <a:p>
@@ -1442,17 +1473,17 @@
           </a:p>
           <a:p>
             <a:r>
-              <a:t>- Libro: capítulos 01-02 · Evidencias y README de H1</a:t>
-            </a:r>
-          </a:p>
-          <a:p>
-            <a:r>
-              <a:t>- Fichas S206-S215 y píldoras H1</a:t>
-            </a:r>
-          </a:p>
-          <a:p>
-            <a:r>
-              <a:t>- Ejemplos revisados y adaptados a MiniJarvis; no se copian errores ni capturas antiguas del PDF.</a:t>
+              <a:t>- Libro por hitos · Capítulos 00-02: README, portfolio y evidencias</a:t>
+            </a:r>
+          </a:p>
+          <a:p>
+            <a:r>
+              <a:t>- PDF Tema 1 · conceptos Java documentados; no trata Site ni entrega</a:t>
+            </a:r>
+          </a:p>
+          <a:p>
+            <a:r>
+              <a:t>- Proyecto MiniJarvis · fichas S206-S215, píldoras H1 y criterios de evidencia</a:t>
             </a:r>
           </a:p>
           <a:p>
@@ -4661,7 +4692,7 @@
               </a:defRPr>
             </a:pPr>
             <a:r>
-              <a:t>README, evidencia y Site</a:t>
+              <a:t>Qué vas a aprender</a:t>
             </a:r>
           </a:p>
         </p:txBody>
@@ -4697,7 +4728,7 @@
               </a:defRPr>
             </a:pPr>
             <a:r>
-              <a:t>H1 — Primer MiniJarvis</a:t>
+              <a:t>H1 — Primer asistente ejecutable</a:t>
             </a:r>
           </a:p>
         </p:txBody>
@@ -4741,42 +4772,6 @@
       <p:sp>
         <p:nvSpPr>
           <p:cNvPr id="9" name="TextBox 8"/>
-          <p:cNvSpPr txBox="1"/>
-          <p:nvPr/>
-        </p:nvSpPr>
-        <p:spPr>
-          <a:xfrm>
-            <a:off x="713232" y="4965192"/>
-            <a:ext cx="10241280" cy="594360"/>
-          </a:xfrm>
-          <a:prstGeom prst="rect">
-            <a:avLst/>
-          </a:prstGeom>
-          <a:noFill/>
-        </p:spPr>
-        <p:txBody>
-          <a:bodyPr wrap="square" lIns="45720" rIns="45720" tIns="36576" bIns="36576" anchor="t">
-            <a:spAutoFit/>
-          </a:bodyPr>
-          <a:lstStyle/>
-          <a:p>
-            <a:pPr algn="l">
-              <a:defRPr sz="1700" b="0">
-                <a:solidFill>
-                  <a:srgbClr val="D2D9E4"/>
-                </a:solidFill>
-                <a:latin typeface="Aptos"/>
-              </a:defRPr>
-            </a:pPr>
-            <a:r>
-              <a:t>Individual con contraste por parejas o equipo cuando la práctica lo requiera</a:t>
-            </a:r>
-          </a:p>
-        </p:txBody>
-      </p:sp>
-      <p:sp>
-        <p:nvSpPr>
-          <p:cNvPr id="10" name="TextBox 9"/>
           <p:cNvSpPr txBox="1"/>
           <p:nvPr/>
         </p:nvSpPr>
@@ -5060,7 +5055,7 @@
               </a:defRPr>
             </a:pPr>
             <a:r>
-              <a:t>MiniJarvis · 1.º DAW · Sesión 214 · H1 — Primer MiniJarvis</a:t>
+              <a:t>MiniJarvis · 1.º DAW · Sesión 214 · H1 — Primer asistente ejecutable</a:t>
             </a:r>
           </a:p>
         </p:txBody>
@@ -5141,7 +5136,7 @@
               </a:defRPr>
             </a:pPr>
             <a:r>
-              <a:t>Objetivo: Documentar H1 y seleccionar evidencias verificables sin duplicar el diario.</a:t>
+              <a:t>Objetivo: Al terminar, debes documentar H1 con un README reproducible, seleccionar evidencias verificables y comprobar permisos y enlaces profundos antes de preparar la entrega.</a:t>
             </a:r>
           </a:p>
         </p:txBody>
@@ -5222,7 +5217,7 @@
               </a:defRPr>
             </a:pPr>
             <a:r>
-              <a:t>Comprobación: Quede H1 listo para defensa.</a:t>
+              <a:t>Comprobación: README H1.</a:t>
             </a:r>
           </a:p>
         </p:txBody>
@@ -5477,7 +5472,7 @@
               </a:defRPr>
             </a:pPr>
             <a:r>
-              <a:t>MiniJarvis · 1.º DAW · Sesión 214 · H1 — Primer MiniJarvis</a:t>
+              <a:t>MiniJarvis · 1.º DAW · Sesión 214 · H1 — Primer asistente ejecutable</a:t>
             </a:r>
           </a:p>
         </p:txBody>
@@ -5553,7 +5548,7 @@
               <a:spcAft>
                 <a:spcPts val="0"/>
               </a:spcAft>
-              <a:defRPr sz="1600">
+              <a:defRPr sz="1400">
                 <a:solidFill>
                   <a:srgbClr val="FFFFFF"/>
                 </a:solidFill>
@@ -5570,11 +5565,11 @@
             <a:br/>
             <a:br/>
             <a:r>
-              <a:t>## Límites de H1</a:t>
+              <a:t>## Requisitos</a:t>
             </a:r>
             <a:br/>
             <a:r>
-              <a:t>No incluye menú, memoria, ficheros ni IA real.</a:t>
+              <a:t>JDK configurado y proyecto abierto.</a:t>
             </a:r>
             <a:br/>
             <a:br/>
@@ -5583,15 +5578,16 @@
             </a:r>
             <a:br/>
             <a:r>
-              <a:t>1. Abre el proyecto.</a:t>
+              <a:t>Ejecuta Main e introduce datos ficticios.</a:t>
             </a:r>
             <a:br/>
-            <a:r>
-              <a:t>2. Ejecuta Main.</a:t>
-            </a:r>
             <a:br/>
             <a:r>
-              <a:t>3. Introduce datos ficticios.</a:t>
+              <a:t>## Límites</a:t>
+            </a:r>
+            <a:br/>
+            <a:r>
+              <a:t>Sin menú, memoria, ficheros ni IA real.</a:t>
             </a:r>
           </a:p>
         </p:txBody>
@@ -5982,7 +5978,7 @@
               </a:defRPr>
             </a:pPr>
             <a:r>
-              <a:t>MiniJarvis · 1.º DAW · Sesión 214 · H1 — Primer MiniJarvis</a:t>
+              <a:t>MiniJarvis · 1.º DAW · Sesión 214 · H1 — Primer asistente ejecutable</a:t>
             </a:r>
           </a:p>
         </p:txBody>
@@ -6649,7 +6645,7 @@
               </a:defRPr>
             </a:pPr>
             <a:r>
-              <a:t>MiniJarvis · 1.º DAW · Sesión 214 · H1 — Primer MiniJarvis</a:t>
+              <a:t>MiniJarvis · 1.º DAW · Sesión 214 · H1 — Primer asistente ejecutable</a:t>
             </a:r>
           </a:p>
         </p:txBody>
@@ -7372,7 +7368,7 @@
               </a:defRPr>
             </a:pPr>
             <a:r>
-              <a:t>MiniJarvis · 1.º DAW · Sesión 214 · H1 — Primer MiniJarvis</a:t>
+              <a:t>MiniJarvis · 1.º DAW · Sesión 214 · H1 — Primer asistente ejecutable</a:t>
             </a:r>
           </a:p>
         </p:txBody>
@@ -8095,7 +8091,7 @@
               </a:defRPr>
             </a:pPr>
             <a:r>
-              <a:t>MiniJarvis · 1.º DAW · Sesión 214 · H1 — Primer MiniJarvis</a:t>
+              <a:t>MiniJarvis · 1.º DAW · Sesión 214 · H1 — Primer asistente ejecutable</a:t>
             </a:r>
           </a:p>
         </p:txBody>
@@ -8674,7 +8670,7 @@
               </a:defRPr>
             </a:pPr>
             <a:r>
-              <a:t>MiniJarvis · 1.º DAW · Sesión 214 · H1 — Primer MiniJarvis</a:t>
+              <a:t>MiniJarvis · 1.º DAW · Sesión 214 · H1 — Primer asistente ejecutable</a:t>
             </a:r>
           </a:p>
         </p:txBody>
@@ -9003,7 +8999,7 @@
               </a:defRPr>
             </a:pPr>
             <a:r>
-              <a:t>Fuentes utilizadas</a:t>
+              <a:t>Fuentes diferenciadas</a:t>
             </a:r>
           </a:p>
         </p:txBody>
@@ -9082,7 +9078,7 @@
               </a:defRPr>
             </a:pPr>
             <a:r>
-              <a:t>MiniJarvis · 1.º DAW · Sesión 214 · H1 — Primer MiniJarvis</a:t>
+              <a:t>MiniJarvis · 1.º DAW · Sesión 214 · H1 — Primer asistente ejecutable</a:t>
             </a:r>
           </a:p>
         </p:txBody>
@@ -9157,7 +9153,7 @@
               </a:defRPr>
             </a:pPr>
             <a:r>
-              <a:t>•  Libro: capítulos 01-02 · Evidencias y README de H1</a:t>
+              <a:t>•  Libro por hitos · Capítulos 00-02: README, portfolio y evidencias</a:t>
             </a:r>
           </a:p>
           <a:p>
@@ -9173,7 +9169,7 @@
               </a:defRPr>
             </a:pPr>
             <a:r>
-              <a:t>•  Fichas S206-S215 y píldoras H1</a:t>
+              <a:t>•  PDF Tema 1 · conceptos Java documentados; no trata Site ni entrega</a:t>
             </a:r>
           </a:p>
           <a:p>
@@ -9189,7 +9185,7 @@
               </a:defRPr>
             </a:pPr>
             <a:r>
-              <a:t>•  Ejemplos revisados y adaptados a MiniJarvis; no se copian errores ni capturas antiguas del PDF.</a:t>
+              <a:t>•  Proyecto MiniJarvis · fichas S206-S215, píldoras H1 y criterios de evidencia</a:t>
             </a:r>
           </a:p>
         </p:txBody>

--- a/02-PROFESORADO/03-PRESENTACIONES/POR-SESION/h1/S214-readme-y-evidencia-de-ejecucion-presentacion.pptx
+++ b/02-PROFESORADO/03-PRESENTACIONES/POR-SESION/h1/S214-readme-y-evidencia-de-ejecucion-presentacion.pptx
@@ -6081,7 +6081,7 @@
               </a:defRPr>
             </a:pPr>
             <a:r>
-              <a:t>He producido o actualizado: README H1 y documento/captura de ejecución.</a:t>
+              <a:t>Pueden explicar qué están intentando conseguir.</a:t>
             </a:r>
           </a:p>
         </p:txBody>
@@ -6162,7 +6162,7 @@
               </a:defRPr>
             </a:pPr>
             <a:r>
-              <a:t>Puedo señalar dónde está.</a:t>
+              <a:t>Registran una decisión, prueba o bloqueo; no muestran solo el resultado final.</a:t>
             </a:r>
           </a:p>
         </p:txBody>
@@ -6243,7 +6243,7 @@
               </a:defRPr>
             </a:pPr>
             <a:r>
-              <a:t>Puedo explicar una decisión tomada.</a:t>
+              <a:t>Todas las personas pueden describir su aportación.</a:t>
             </a:r>
           </a:p>
         </p:txBody>
@@ -6324,7 +6324,7 @@
               </a:defRPr>
             </a:pPr>
             <a:r>
-              <a:t>Puedo mostrar una prueba o comprobación.</a:t>
+              <a:t>Comprueban el producto con un criterio observable.</a:t>
             </a:r>
           </a:p>
         </p:txBody>
@@ -6405,7 +6405,7 @@
               </a:defRPr>
             </a:pPr>
             <a:r>
-              <a:t>He registrado mi aportación individual si el trabajo era de equipo.</a:t>
+              <a:t>No usan datos personales, credenciales ni respuestas de ejemplo antes del intento propio.</a:t>
             </a:r>
           </a:p>
         </p:txBody>

--- a/02-PROFESORADO/03-PRESENTACIONES/POR-SESION/h1/S214-readme-y-evidencia-de-ejecucion-presentacion.pptx
+++ b/02-PROFESORADO/03-PRESENTACIONES/POR-SESION/h1/S214-readme-y-evidencia-de-ejecucion-presentacion.pptx
@@ -3378,8 +3378,8 @@
         </p:nvSpPr>
         <p:spPr>
           <a:xfrm>
-            <a:off x="713232" y="6272784"/>
-            <a:ext cx="10607040" cy="201168"/>
+            <a:off x="713232" y="4965192"/>
+            <a:ext cx="10241280" cy="594360"/>
           </a:xfrm>
           <a:prstGeom prst="rect">
             <a:avLst/>
@@ -3393,6 +3393,42 @@
           <a:lstStyle/>
           <a:p>
             <a:pPr algn="l">
+              <a:defRPr sz="1700" b="0">
+                <a:solidFill>
+                  <a:srgbClr val="D2D9E4"/>
+                </a:solidFill>
+                <a:latin typeface="Aptos"/>
+              </a:defRPr>
+            </a:pPr>
+            <a:r>
+              <a:t>Equipo</a:t>
+            </a:r>
+          </a:p>
+        </p:txBody>
+      </p:sp>
+      <p:sp>
+        <p:nvSpPr>
+          <p:cNvPr id="10" name="TextBox 9"/>
+          <p:cNvSpPr txBox="1"/>
+          <p:nvPr/>
+        </p:nvSpPr>
+        <p:spPr>
+          <a:xfrm>
+            <a:off x="713232" y="6272784"/>
+            <a:ext cx="10607040" cy="201168"/>
+          </a:xfrm>
+          <a:prstGeom prst="rect">
+            <a:avLst/>
+          </a:prstGeom>
+          <a:noFill/>
+        </p:spPr>
+        <p:txBody>
+          <a:bodyPr wrap="square" lIns="45720" rIns="45720" tIns="36576" bIns="36576" anchor="t">
+            <a:spAutoFit/>
+          </a:bodyPr>
+          <a:lstStyle/>
+          <a:p>
+            <a:pPr algn="l">
               <a:defRPr sz="1000" b="1">
                 <a:solidFill>
                   <a:srgbClr val="A0AAB9"/>
@@ -3401,7 +3437,7 @@
               </a:defRPr>
             </a:pPr>
             <a:r>
-              <a:t>MINIJARVIS · PROGRAMACIÓN + ENTORNOS DE DESARROLLO</a:t>
+              <a:t>MINIJARVIS · PROGRAMACIÓN</a:t>
             </a:r>
           </a:p>
         </p:txBody>
@@ -3818,7 +3854,7 @@
               </a:defRPr>
             </a:pPr>
             <a:r>
-              <a:t>Evidencia: README H1 y documento/captura de ejecución.</a:t>
+              <a:t>Evidencia: README de H1 actualizado y versión h1-entrega comprobada en el repositorio.</a:t>
             </a:r>
           </a:p>
         </p:txBody>
@@ -5745,7 +5781,7 @@
               </a:defRPr>
             </a:pPr>
             <a:r>
-              <a:t>Comprueba y registra la evidencia: README H1 y documento/captura de ejecución.</a:t>
+              <a:t>Comprueba y registra la evidencia: README de H1 actualizado y versión h1-entrega comprobada en el repositorio.</a:t>
             </a:r>
           </a:p>
         </p:txBody>

--- a/02-PROFESORADO/03-PRESENTACIONES/POR-SESION/h1/S214-readme-y-evidencia-de-ejecucion-presentacion.pptx
+++ b/02-PROFESORADO/03-PRESENTACIONES/POR-SESION/h1/S214-readme-y-evidencia-de-ejecucion-presentacion.pptx
@@ -29,7 +29,6 @@
     <p:sldId id="277" r:id="rId29"/>
     <p:sldId id="278" r:id="rId30"/>
     <p:sldId id="279" r:id="rId31"/>
-    <p:sldId id="280" r:id="rId32"/>
   </p:sldIdLst>
   <p:sldSz cx="12191695" cy="6858000" type="screen4x3"/>
   <p:notesSz cx="6858000" cy="9144000"/>
@@ -2129,7 +2128,47 @@
             </a:r>
           </a:p>
           <a:p/>
+          <a:p>
+            <a:r>
+              <a:t>Detalle para la explicación oral · Arquitectura de evidencias y límite de S214</a:t>
+            </a:r>
+          </a:p>
+          <a:p>
+            <a:r>
+              <a:t>- **GitHub:** fuente canónica para código, README, evolución técnica, pruebas localizables y enlaces técnicos.</a:t>
+            </a:r>
+          </a:p>
+          <a:p>
+            <a:r>
+              <a:t>- **Scrum:** solo registra una tarea, decisión, cambio, bloqueo o planificación real; no se actualiza para demostrar que ocurrió S214.</a:t>
+            </a:r>
+          </a:p>
+          <a:p>
+            <a:r>
+              <a:t>- **Diario individual:** únicamente si surge un aprendizaje, dificultad o decisión personal significativa; no se exige fila S214 ni revisión administrativa.</a:t>
+            </a:r>
+          </a:p>
+          <a:p>
+            <a:r>
+              <a:t>- **Drive:** solo para una evidencia excepcional no-code sin una ubicación más natural; no duplica código, consola, capturas, pruebas técnicas o README.</a:t>
+            </a:r>
+          </a:p>
+          <a:p>
+            <a:r>
+              <a:t>- **Sites:** no se crean ni actualizan durante H1. Una evidencia significativa podrá seleccionarse posteriormente durante C1.</a:t>
+            </a:r>
+          </a:p>
+          <a:p>
+            <a:r>
+              <a:t>- **Moodle:** S214 prepara enlaces, permisos y documentación; S215 realiza la entrega oficial de H1.</a:t>
+            </a:r>
+          </a:p>
           <a:p/>
+          <a:p>
+            <a:r>
+              <a:t>No se crea una evidencia de ejecución separada cuando las pruebas y su explicación ya están localizadas desde GitHub o README.</a:t>
+            </a:r>
+          </a:p>
         </p:txBody>
       </p:sp>
       <p:sp>
@@ -2212,47 +2251,7 @@
             </a:r>
           </a:p>
           <a:p/>
-          <a:p>
-            <a:r>
-              <a:t>Detalle para la explicación oral · Arquitectura de evidencias y límite de S214</a:t>
-            </a:r>
-          </a:p>
-          <a:p>
-            <a:r>
-              <a:t>- **GitHub:** fuente canónica para código, README, evolución técnica, pruebas localizables y enlaces técnicos.</a:t>
-            </a:r>
-          </a:p>
-          <a:p>
-            <a:r>
-              <a:t>- **Scrum:** solo registra una tarea, decisión, cambio, bloqueo o planificación real; no se actualiza para demostrar que ocurrió S214.</a:t>
-            </a:r>
-          </a:p>
-          <a:p>
-            <a:r>
-              <a:t>- **Diario individual:** únicamente si surge un aprendizaje, dificultad o decisión personal significativa; no se exige fila S214 ni revisión administrativa.</a:t>
-            </a:r>
-          </a:p>
-          <a:p>
-            <a:r>
-              <a:t>- **Drive:** solo para una evidencia excepcional no-code sin una ubicación más natural; no duplica código, consola, capturas, pruebas técnicas o README.</a:t>
-            </a:r>
-          </a:p>
-          <a:p>
-            <a:r>
-              <a:t>- **Sites:** no se crean ni actualizan durante H1. Una evidencia significativa podrá seleccionarse posteriormente durante C1.</a:t>
-            </a:r>
-          </a:p>
-          <a:p>
-            <a:r>
-              <a:t>- **Moodle:** S214 prepara enlaces, permisos y documentación; S215 realiza la entrega oficial de H1.</a:t>
-            </a:r>
-          </a:p>
           <a:p/>
-          <a:p>
-            <a:r>
-              <a:t>No se crea una evidencia de ejecución separada cuando las pruebas y su explicación ya están localizadas desde GitHub o README.</a:t>
-            </a:r>
-          </a:p>
         </p:txBody>
       </p:sp>
       <p:sp>
@@ -2331,89 +2330,6 @@
           </a:p>
           <a:p>
             <a:r>
-              <a:t>Reloj fuente 30–38 min: duración compartida 480 segundos. Trabajo: Intercambiar por parejas y probar la documentación sin explicación oral previa. Función del soporte: apoyo al trabajo.</a:t>
-            </a:r>
-          </a:p>
-          <a:p/>
-          <a:p/>
-        </p:txBody>
-      </p:sp>
-      <p:sp>
-        <p:nvSpPr>
-          <p:cNvPr id="4" name="Slide Number Placeholder 3"/>
-          <p:cNvSpPr>
-            <a:spLocks noGrp="1"/>
-          </p:cNvSpPr>
-          <p:nvPr>
-            <p:ph type="sldNum" idx="5" sz="quarter"/>
-          </p:nvPr>
-        </p:nvSpPr>
-        <p:spPr/>
-      </p:sp>
-    </p:spTree>
-  </p:cSld>
-  <p:clrMapOvr>
-    <a:masterClrMapping/>
-  </p:clrMapOvr>
-</p:notes>
-</file>
-
-<file path=ppt/notesSlides/notesSlide25.xml><?xml version="1.0" encoding="utf-8"?>
-<p:notes xmlns:a="http://schemas.openxmlformats.org/drawingml/2006/main" xmlns:p="http://schemas.openxmlformats.org/presentationml/2006/main" xmlns:r="http://schemas.openxmlformats.org/officeDocument/2006/relationships">
-  <p:cSld>
-    <p:spTree>
-      <p:nvGrpSpPr>
-        <p:cNvPr id="1" name=""/>
-        <p:cNvGrpSpPr/>
-        <p:nvPr/>
-      </p:nvGrpSpPr>
-      <p:grpSpPr>
-        <a:xfrm>
-          <a:off x="0" y="0"/>
-          <a:ext cx="0" cy="0"/>
-          <a:chOff x="0" y="0"/>
-          <a:chExt cx="0" cy="0"/>
-        </a:xfrm>
-      </p:grpSpPr>
-      <p:sp>
-        <p:nvSpPr>
-          <p:cNvPr id="2" name="Slide Image Placeholder 1"/>
-          <p:cNvSpPr>
-            <a:spLocks noGrp="1"/>
-          </p:cNvSpPr>
-          <p:nvPr>
-            <p:ph type="sldImg" idx="2"/>
-          </p:nvPr>
-        </p:nvSpPr>
-        <p:spPr/>
-      </p:sp>
-      <p:sp>
-        <p:nvSpPr>
-          <p:cNvPr id="3" name="Notes Placeholder 2"/>
-          <p:cNvSpPr>
-            <a:spLocks noGrp="1"/>
-          </p:cNvSpPr>
-          <p:nvPr>
-            <p:ph type="body" idx="3" sz="quarter"/>
-          </p:nvPr>
-        </p:nvSpPr>
-        <p:spPr/>
-        <p:txBody>
-          <a:bodyPr/>
-          <a:lstStyle/>
-          <a:p>
-            <a:r>
-              <a:t>NOTAS DEL PRESENTADOR</a:t>
-            </a:r>
-          </a:p>
-          <a:p/>
-          <a:p>
-            <a:r>
-              <a:t>TIEMPO ORIENTATIVO (no proyectado)</a:t>
-            </a:r>
-          </a:p>
-          <a:p>
-            <a:r>
               <a:t>Reloj fuente 42–45 min: duración compartida 180 segundos. Trabajo: Comprobar el cierre y preparar la transición hacia la defensa. Función del soporte: cierre.</a:t>
             </a:r>
           </a:p>
@@ -3093,7 +3009,7 @@
           </a:p>
           <a:p>
             <a:r>
-              <a:t>Los casos del modelo muestran dos recorridos de una decisión y una entrada no convertible. Solo deben documentarse como pruebas del equipo si esos comportamientos existen realmente en su incremento y pueden reproducirse. S214 no vuelve a enseñar decisiones, `Scanner` o conversiones.</a:t>
+              <a:t>Los casos del modelo muestran dos resultados observables de una comparación, sin ramas, y una entrada no convertible. Solo deben documentarse como pruebas del equipo si esos comportamientos existen realmente en su incremento y pueden reproducirse. S214 no vuelve a enseñar comparación, `Scanner` o conversiones.</a:t>
             </a:r>
           </a:p>
         </p:txBody>
@@ -3185,7 +3101,7 @@
           </a:p>
           <a:p>
             <a:r>
-              <a:t>Los casos del modelo muestran dos recorridos de una decisión y una entrada no convertible. Solo deben documentarse como pruebas del equipo si esos comportamientos existen realmente en su incremento y pueden reproducirse. S214 no vuelve a enseñar decisiones, `Scanner` o conversiones.</a:t>
+              <a:t>Los casos del modelo muestran dos resultados observables de una comparación, sin ramas, y una entrada no convertible. Solo deben documentarse como pruebas del equipo si esos comportamientos existen realmente en su incremento y pueden reproducirse. S214 no vuelve a enseñar comparación, `Scanner` o conversiones.</a:t>
             </a:r>
           </a:p>
         </p:txBody>
@@ -3277,7 +3193,7 @@
           </a:p>
           <a:p>
             <a:r>
-              <a:t>Los casos del modelo muestran dos recorridos de una decisión y una entrada no convertible. Solo deben documentarse como pruebas del equipo si esos comportamientos existen realmente en su incremento y pueden reproducirse. S214 no vuelve a enseñar decisiones, `Scanner` o conversiones.</a:t>
+              <a:t>Los casos del modelo muestran dos resultados observables de una comparación, sin ramas, y una entrada no convertible. Solo deben documentarse como pruebas del equipo si esos comportamientos existen realmente en su incremento y pueden reproducirse. S214 no vuelve a enseñar comparación, `Scanner` o conversiones.</a:t>
             </a:r>
           </a:p>
         </p:txBody>
@@ -3369,7 +3285,7 @@
           </a:p>
           <a:p>
             <a:r>
-              <a:t>Los casos del modelo muestran dos recorridos de una decisión y una entrada no convertible. Solo deben documentarse como pruebas del equipo si esos comportamientos existen realmente en su incremento y pueden reproducirse. S214 no vuelve a enseñar decisiones, `Scanner` o conversiones.</a:t>
+              <a:t>Los casos del modelo muestran dos resultados observables de una comparación, sin ramas, y una entrada no convertible. Solo deben documentarse como pruebas del equipo si esos comportamientos existen realmente en su incremento y pueden reproducirse. S214 no vuelve a enseñar comparación, `Scanner` o conversiones.</a:t>
             </a:r>
           </a:p>
         </p:txBody>
@@ -6638,7 +6554,7 @@
               </a:defRPr>
             </a:pPr>
             <a:r>
-              <a:t>Modalidad publicada: Equipo</a:t>
+              <a:t>Modalidad publicada: Equipo → comprobación cruzada</a:t>
             </a:r>
           </a:p>
         </p:txBody>
@@ -6692,7 +6608,7 @@
   </p:clrMapOvr>
   <p:extLst>
     <p:ext uri="urn:minijarvis:semantic-render:v1">
-      <ns0:renderMetadata xmlns:ns0="urn:minijarvis:semantic-render:v1">{"session": "214", "source_files": {"teacher": "/mnt/compartido/Programación-26-27/Minijarvis/02-PROFESORADO/02-SESIONES/h1/S214-readme-y-evidencia-de-ejecucion-docente.md", "student_fallback": "/mnt/compartido/Programación-26-27/Minijarvis/01-ALUMNADO/03-SESIONES/h1/S214-readme-y-evidencia-de-ejecucion-alumnado.md"}, "layout": "title", "plan_index": 0, "recognition": false, "unit_ids": ["unit-0", "unit-1", "unit-2", "unit-16", "unit-21", "unit-22", "unit-23", "unit-24", "unit-25", "unit-26", "unit-27"], "roles": {"unit-0": "core", "unit-1": "core", "unit-2": "core", "unit-16": "core", "unit-21": "core", "unit-22": "core", "unit-23": "core", "unit-24": "core", "unit-25": "core", "unit-26": "core", "unit-27": "core"}, "source_refs": [{"source": "teacher", "heading": "Finalidad de la sesión", "block_index": 0, "fragment": 0}, {"source": "teacher", "heading": "Antes de entrar en clase", "block_index": 1, "fragment": 0}, {"source": "teacher", "heading": "Apertura docente", "block_index": 2, "fragment": 0}, {"source": "teacher", "heading": "Observación docente", "block_index": 16, "fragment": 0}, {"source": "teacher", "heading": "Temporalización orientativa", "block_index": 18, "fragment": 0}, {"source": "teacher", "heading": "Temporalización orientativa", "block_index": 18, "fragment": 0}, {"source": "teacher", "heading": "Temporalización orientativa", "block_index": 18, "fragment": 0}, {"source": "teacher", "heading": "Temporalización orientativa", "block_index": 18, "fragment": 0}, {"source": "teacher", "heading": "Temporalización orientativa", "block_index": 18, "fragment": 0}, {"source": "teacher", "heading": "Temporalización orientativa", "block_index": 18, "fragment": 0}, {"source": "teacher", "heading": "Temporalización orientativa", "block_index": 18, "fragment": 0}], "visible_sources": [], "notes_sources": [{"function": "preparation", "heading": "Antes de entrar en clase", "sha256": "672142f6536104e432a8eeb04ca9666956d6fc26ba5009b623635e4c92023016"}, {"function": "explanations", "heading": "Apertura docente", "sha256": "4aabf171aaebb333c04dbd65f8e4c0f3ceec1f42ca5e3eb181a6dad00399d475"}, {"function": "explanations", "heading": "Apertura docente", "sha256": "4bab25506677e86bddf9ad160246bc40b122a325216701d35cb50c474136c84c"}, {"function": "explanations", "heading": "Apertura docente", "sha256": "4147cb5e735d174814d20206040b7d6b9ef4c4461d05b349582db92f73d981b8"}, {"function": "explanations", "heading": "Apertura docente", "sha256": "b5f1211e4f836a12b7f1e5539ab90031ebb2734c1434e62152d280a020645128"}, {"function": "explanations", "heading": "Apertura docente", "sha256": "df9acf2e0cc9e2f7147f4ae4b90b1e1f9eeda1377e5dbfd9739ecfa79384031d"}, {"function": "explanations", "heading": "Apertura docente", "sha256": "0f9e7483f2d401b0099f29f5170dfecedf0c60e8dd4cf20001a4b89f7dd36ce4"}, {"function": "explanations", "heading": "Apertura docente", "sha256": "961a36ac1093894fee007ef1fca1e4742fada4cd15b2c78a5cc5f7df8caa61e0"}, {"function": "observation", "heading": "Observación docente", "sha256": "702e542d8c7901d3c49ae5b49a35dde7c118ade7c15860965b391370d50b2825"}, {"function": "observation", "heading": "Observación docente", "sha256": "ef9a6b24ae8072a9ebe4f78d6315ab3feb947a3b9d801006a8fb3a63098c897f"}, {"function": "timeline", "heading": "Temporalización orientativa", "sha256": "af3853f24d20cb0ae7b9991cee848636ac8e766d6c6fba9eb8fcf0ef98ffc1b8"}, {"function": "timeline", "heading": "Temporalización orientativa", "sha256": "0e4a942f2cd9ec380385d8a16f5a6b4010e6867a528c61ff8c7003dc594d82ab"}, {"function": "timeline", "heading": "Temporalización orientativa", "sha256": "3c8610261f8510a26bd808912d2d30414382839511b91982dd906e27b98108c1"}, {"function": "timeline", "heading": "Temporalización orientativa", "sha256": "806f9c55558fe3f822cc88f6d2223bbaeaac2d0ac45c379705eafe62adb910f2"}, {"function": "timeline", "heading": "Temporalización orientativa", "sha256": "39dff45d2f47e77fd289688c9064f1ebaa2508901b798a288b4131aeff7dfb37"}, {"function": "timeline", "heading": "Temporalización orientativa", "sha256": "0630f041ca7dc3f1cd533a7085e6aa2222c93d55592e3d8b25e4ab0f2bcbc5bc"}, {"function": "timeline", "heading": "Temporalización orientativa", "sha256": "6ee85d6192d3dba0589d42b395b9d486059d7a528de7579777a007b23540df0c"}, {"function": "facilitation", "heading": "Finalidad de la sesión", "sha256": "6d8b05e3ef3caa37028ee6e976c55d34f581494535092850227aa14e88dbb12f"}], "relations": {"source_supports_enriched": true}, "timeline_refs": [0], "composition": {"origin_slides": [1]}, "timing": {"seconds": 0, "allocations": [{"source_index": 0, "seconds": 0, "decision": "Intervalo compartido íntegro; propietario contable seleccionado por función de actividad y referencia timeline de unidad (identidad semántica en empates). Soporte, sin duplicación contable. Portada limitada a la apertura inicial: las referencias timeline presenter-only no convierten la portada en soporte de todos los tramos.", "source_time": "0–5 min", "source_seconds": 300, "is_owner": false, "function": "explanations"}], "clock_intervals": [0], "presenter_notes": "Reloj fuente 0–5 min: duración compartida 300 segundos. Trabajo: Presentar el criterio de documentación reproducible y localizar individualmente las evidencias. Función del soporte: apoyo al trabajo.", "shared_intervals": [{"source_index": 0, "source_time": "0–5 min", "seconds": 300, "is_owner": false, "function": "explanations", "action": "Presentar el criterio de documentación reproducible y localizar individualmente las evidencias.", "concurrent": false, "parallel_work": ""}]}, "code_blocks": [], "representation_needs": []}</ns0:renderMetadata>
+      <ns0:renderMetadata xmlns:ns0="urn:minijarvis:semantic-render:v1">{"session": "214", "source_files": {"teacher": "/mnt/compartido/Programación-26-27/Minijarvis/02-PROFESORADO/02-SESIONES/h1/S214-readme-y-evidencia-de-ejecucion-docente.md", "student_fallback": "/mnt/compartido/Programación-26-27/Minijarvis/01-ALUMNADO/03-SESIONES/h1/S214-readme-y-evidencia-de-ejecucion-alumnado.md"}, "layout": "title", "plan_index": 0, "recognition": false, "unit_ids": ["unit-0", "unit-1", "unit-2", "unit-16", "unit-20", "unit-21", "unit-22", "unit-23", "unit-24", "unit-25", "unit-26"], "roles": {"unit-0": "core", "unit-1": "core", "unit-2": "core", "unit-16": "core", "unit-20": "core", "unit-21": "core", "unit-22": "core", "unit-23": "core", "unit-24": "core", "unit-25": "core", "unit-26": "core"}, "source_refs": [{"source": "teacher", "heading": "Finalidad de la sesión", "block_index": 0, "fragment": 0}, {"source": "teacher", "heading": "Antes de entrar en clase", "block_index": 1, "fragment": 0}, {"source": "teacher", "heading": "Apertura docente", "block_index": 2, "fragment": 0}, {"source": "teacher", "heading": "Observación docente", "block_index": 16, "fragment": 0}, {"source": "teacher", "heading": "Temporalización orientativa", "block_index": 18, "fragment": 0}, {"source": "teacher", "heading": "Temporalización orientativa", "block_index": 18, "fragment": 0}, {"source": "teacher", "heading": "Temporalización orientativa", "block_index": 18, "fragment": 0}, {"source": "teacher", "heading": "Temporalización orientativa", "block_index": 18, "fragment": 0}, {"source": "teacher", "heading": "Temporalización orientativa", "block_index": 18, "fragment": 0}, {"source": "teacher", "heading": "Temporalización orientativa", "block_index": 18, "fragment": 0}, {"source": "teacher", "heading": "Temporalización orientativa", "block_index": 18, "fragment": 0}], "visible_sources": [], "notes_sources": [{"function": "preparation", "heading": "Antes de entrar en clase", "sha256": "672142f6536104e432a8eeb04ca9666956d6fc26ba5009b623635e4c92023016"}, {"function": "explanations", "heading": "Apertura docente", "sha256": "4aabf171aaebb333c04dbd65f8e4c0f3ceec1f42ca5e3eb181a6dad00399d475"}, {"function": "explanations", "heading": "Apertura docente", "sha256": "4bab25506677e86bddf9ad160246bc40b122a325216701d35cb50c474136c84c"}, {"function": "explanations", "heading": "Apertura docente", "sha256": "4147cb5e735d174814d20206040b7d6b9ef4c4461d05b349582db92f73d981b8"}, {"function": "explanations", "heading": "Apertura docente", "sha256": "b5f1211e4f836a12b7f1e5539ab90031ebb2734c1434e62152d280a020645128"}, {"function": "explanations", "heading": "Apertura docente", "sha256": "df9acf2e0cc9e2f7147f4ae4b90b1e1f9eeda1377e5dbfd9739ecfa79384031d"}, {"function": "explanations", "heading": "Apertura docente", "sha256": "0f9e7483f2d401b0099f29f5170dfecedf0c60e8dd4cf20001a4b89f7dd36ce4"}, {"function": "explanations", "heading": "Apertura docente", "sha256": "961a36ac1093894fee007ef1fca1e4742fada4cd15b2c78a5cc5f7df8caa61e0"}, {"function": "observation", "heading": "Observación docente", "sha256": "702e542d8c7901d3c49ae5b49a35dde7c118ade7c15860965b391370d50b2825"}, {"function": "observation", "heading": "Observación docente", "sha256": "ef9a6b24ae8072a9ebe4f78d6315ab3feb947a3b9d801006a8fb3a63098c897f"}, {"function": "timeline", "heading": "Temporalización orientativa", "sha256": "af3853f24d20cb0ae7b9991cee848636ac8e766d6c6fba9eb8fcf0ef98ffc1b8"}, {"function": "timeline", "heading": "Temporalización orientativa", "sha256": "0e4a942f2cd9ec380385d8a16f5a6b4010e6867a528c61ff8c7003dc594d82ab"}, {"function": "timeline", "heading": "Temporalización orientativa", "sha256": "3c8610261f8510a26bd808912d2d30414382839511b91982dd906e27b98108c1"}, {"function": "timeline", "heading": "Temporalización orientativa", "sha256": "806f9c55558fe3f822cc88f6d2223bbaeaac2d0ac45c379705eafe62adb910f2"}, {"function": "timeline", "heading": "Temporalización orientativa", "sha256": "39dff45d2f47e77fd289688c9064f1ebaa2508901b798a288b4131aeff7dfb37"}, {"function": "timeline", "heading": "Temporalización orientativa", "sha256": "0630f041ca7dc3f1cd533a7085e6aa2222c93d55592e3d8b25e4ab0f2bcbc5bc"}, {"function": "timeline", "heading": "Temporalización orientativa", "sha256": "6ee85d6192d3dba0589d42b395b9d486059d7a528de7579777a007b23540df0c"}, {"function": "facilitation", "heading": "Finalidad de la sesión", "sha256": "6d8b05e3ef3caa37028ee6e976c55d34f581494535092850227aa14e88dbb12f"}], "relations": {"source_supports_enriched": true}, "timeline_refs": [0], "composition": {"origin_slides": [1]}, "timing": {"seconds": 0, "allocations": [{"source_index": 0, "seconds": 0, "decision": "Intervalo compartido íntegro; propietario contable seleccionado por función de actividad y referencia timeline de unidad (identidad semántica en empates). Soporte, sin duplicación contable. Portada limitada a la apertura inicial: las referencias timeline presenter-only no convierten la portada en soporte de todos los tramos.", "source_time": "0–5 min", "source_seconds": 300, "is_owner": false, "function": "explanations"}], "clock_intervals": [0], "presenter_notes": "Reloj fuente 0–5 min: duración compartida 300 segundos. Trabajo: Presentar el criterio de documentación reproducible y localizar individualmente las evidencias. Función del soporte: apoyo al trabajo.", "shared_intervals": [{"source_index": 0, "source_time": "0–5 min", "seconds": 300, "is_owner": false, "function": "explanations", "action": "Presentar el criterio de documentación reproducible y localizar individualmente las evidencias.", "concurrent": false, "parallel_work": ""}]}, "code_blocks": [], "representation_needs": []}</ns0:renderMetadata>
     </p:ext>
   </p:extLst>
 </p:sld>
@@ -11062,7 +10978,7 @@
               </a:defRPr>
             </a:pPr>
             <a:r>
-              <a:t>Seguridad y uso de IA</a:t>
+              <a:t>Arquitectura de evidencias y límite de S214</a:t>
             </a:r>
           </a:p>
         </p:txBody>
@@ -11111,56 +11027,14 @@
       </p:sp>
       <p:sp>
         <p:nvSpPr>
-          <p:cNvPr id="5" name="Acción" descr="Acción"/>
-          <p:cNvSpPr txBox="1"/>
-          <p:nvPr/>
-        </p:nvSpPr>
-        <p:spPr>
-          <a:xfrm>
-            <a:off x="640080" y="1406652"/>
-            <a:ext cx="10881360" cy="443992"/>
-          </a:xfrm>
-          <a:prstGeom prst="rect">
-            <a:avLst/>
-          </a:prstGeom>
-          <a:noFill/>
-        </p:spPr>
-        <p:txBody>
-          <a:bodyPr wrap="square" lIns="109728" rIns="109728" tIns="73152" bIns="73152">
-            <a:noAutofit/>
-          </a:bodyPr>
-          <a:lstStyle/>
-          <a:p>
-            <a:pPr>
-              <a:lnSpc>
-                <a:spcPts val="2200"/>
-              </a:lnSpc>
-              <a:spcAft>
-                <a:spcPts val="0"/>
-              </a:spcAft>
-              <a:defRPr sz="2000" b="1">
-                <a:solidFill>
-                  <a:srgbClr val="2F5BA8"/>
-                </a:solidFill>
-                <a:latin typeface="Liberation Sans"/>
-              </a:defRPr>
-            </a:pPr>
-            <a:r>
-              <a:t>QUÉ HACER</a:t>
-            </a:r>
-          </a:p>
-        </p:txBody>
-      </p:sp>
-      <p:sp>
-        <p:nvSpPr>
-          <p:cNvPr id="6" name="Acción o criterio 0" descr="Acción o criterio 0"/>
-          <p:cNvSpPr txBox="1"/>
-          <p:nvPr/>
-        </p:nvSpPr>
-        <p:spPr>
-          <a:xfrm>
-            <a:off x="640080" y="1987804"/>
-            <a:ext cx="5257800" cy="1170432"/>
+          <p:cNvPr id="5" name="Acción o criterio 0" descr="Acción o criterio 0"/>
+          <p:cNvSpPr txBox="1"/>
+          <p:nvPr/>
+        </p:nvSpPr>
+        <p:spPr>
+          <a:xfrm>
+            <a:off x="640080" y="1417320"/>
+            <a:ext cx="3444240" cy="3852672"/>
           </a:xfrm>
           <a:prstGeom prst="rect">
             <a:avLst/>
@@ -11195,21 +11069,21 @@
               </a:defRPr>
             </a:pPr>
             <a:r>
-              <a:t>Trabaja únicamente con datos ficticios.</a:t>
-            </a:r>
-          </a:p>
-        </p:txBody>
-      </p:sp>
-      <p:sp>
-        <p:nvSpPr>
-          <p:cNvPr id="7" name="Acción o criterio 1" descr="Acción o criterio 1"/>
-          <p:cNvSpPr txBox="1"/>
-          <p:nvPr/>
-        </p:nvSpPr>
-        <p:spPr>
-          <a:xfrm>
-            <a:off x="6080760" y="1987804"/>
-            <a:ext cx="5257800" cy="1170432"/>
+              <a:t>GitHub: fuente canónica para código, README, evolución técnica, pruebas localizables y enlaces técnicos.</a:t>
+            </a:r>
+          </a:p>
+        </p:txBody>
+      </p:sp>
+      <p:sp>
+        <p:nvSpPr>
+          <p:cNvPr id="6" name="Acción o criterio 1" descr="Acción o criterio 1"/>
+          <p:cNvSpPr txBox="1"/>
+          <p:nvPr/>
+        </p:nvSpPr>
+        <p:spPr>
+          <a:xfrm>
+            <a:off x="4267200" y="1417320"/>
+            <a:ext cx="3444240" cy="3852672"/>
           </a:xfrm>
           <a:prstGeom prst="rect">
             <a:avLst/>
@@ -11244,21 +11118,21 @@
               </a:defRPr>
             </a:pPr>
             <a:r>
-              <a:t>No escribas contraseñas, tokens, claves API ni datos personales.</a:t>
-            </a:r>
-          </a:p>
-        </p:txBody>
-      </p:sp>
-      <p:sp>
-        <p:nvSpPr>
-          <p:cNvPr id="8" name="Acción o criterio 2" descr="Acción o criterio 2"/>
-          <p:cNvSpPr txBox="1"/>
-          <p:nvPr/>
-        </p:nvSpPr>
-        <p:spPr>
-          <a:xfrm>
-            <a:off x="640080" y="3249676"/>
-            <a:ext cx="5257800" cy="1840991"/>
+              <a:t>Scrum: solo registra una tarea, decisión, cambio, bloqueo o planificación real; no se actualiza para demostrar que ocurrió S214.</a:t>
+            </a:r>
+          </a:p>
+        </p:txBody>
+      </p:sp>
+      <p:sp>
+        <p:nvSpPr>
+          <p:cNvPr id="7" name="Acción o criterio 2" descr="Acción o criterio 2"/>
+          <p:cNvSpPr txBox="1"/>
+          <p:nvPr/>
+        </p:nvSpPr>
+        <p:spPr>
+          <a:xfrm>
+            <a:off x="7894320" y="1417320"/>
+            <a:ext cx="3444240" cy="3852672"/>
           </a:xfrm>
           <a:prstGeom prst="rect">
             <a:avLst/>
@@ -11293,56 +11167,7 @@
               </a:defRPr>
             </a:pPr>
             <a:r>
-              <a:t>Si utilizas IA en un uso permitido, registra qué pediste, qué recibiste, qué cambiaste y cómo lo comprobaste.</a:t>
-            </a:r>
-          </a:p>
-        </p:txBody>
-      </p:sp>
-      <p:sp>
-        <p:nvSpPr>
-          <p:cNvPr id="9" name="Acción o criterio 3" descr="Acción o criterio 3"/>
-          <p:cNvSpPr txBox="1"/>
-          <p:nvPr/>
-        </p:nvSpPr>
-        <p:spPr>
-          <a:xfrm>
-            <a:off x="6080760" y="3249676"/>
-            <a:ext cx="5257800" cy="1840991"/>
-          </a:xfrm>
-          <a:prstGeom prst="rect">
-            <a:avLst/>
-          </a:prstGeom>
-          <a:solidFill>
-            <a:srgbClr val="FFFFFF"/>
-          </a:solidFill>
-          <a:ln>
-            <a:solidFill>
-              <a:srgbClr val="2F5BA8"/>
-            </a:solidFill>
-          </a:ln>
-        </p:spPr>
-        <p:txBody>
-          <a:bodyPr wrap="square" lIns="109728" rIns="109728" tIns="73152" bIns="73152">
-            <a:noAutofit/>
-          </a:bodyPr>
-          <a:lstStyle/>
-          <a:p>
-            <a:pPr>
-              <a:lnSpc>
-                <a:spcPts val="2640"/>
-              </a:lnSpc>
-              <a:spcAft>
-                <a:spcPts val="0"/>
-              </a:spcAft>
-              <a:defRPr sz="2400" b="0">
-                <a:solidFill>
-                  <a:srgbClr val="1C2330"/>
-                </a:solidFill>
-                <a:latin typeface="Liberation Sans"/>
-              </a:defRPr>
-            </a:pPr>
-            <a:r>
-              <a:t>Los ejemplos de Laura solo se consultan después del intento propio.</a:t>
+              <a:t>Diario individual: únicamente si surge un aprendizaje, dificultad o decisión personal significativa; no se exige fila S214 ni revisión administrativa.</a:t>
             </a:r>
           </a:p>
         </p:txBody>
@@ -11354,7 +11179,7 @@
   </p:clrMapOvr>
   <p:extLst>
     <p:ext uri="urn:minijarvis:semantic-render:v1">
-      <ns0:renderMetadata xmlns:ns0="urn:minijarvis:semantic-render:v1">{"session": "214", "source_files": {"teacher": "/mnt/compartido/Programación-26-27/Minijarvis/02-PROFESORADO/02-SESIONES/h1/S214-readme-y-evidencia-de-ejecucion-docente.md", "student_fallback": "/mnt/compartido/Programación-26-27/Minijarvis/01-ALUMNADO/03-SESIONES/h1/S214-readme-y-evidencia-de-ejecucion-alumnado.md"}, "layout": "activity", "plan_index": 7, "recognition": false, "unit_ids": ["unit-20"], "roles": {"unit-20": "core"}, "source_refs": [{"source": "student_fallback", "heading": "Seguridad y uso de IA", "block_index": null, "fragment": 0}], "visible_sources": [{"index": 5, "sha256": "61337aa7d62b810fc872b64ccf50a7b9620d423d2be91b3dfff6d304f2bec734"}], "notes_sources": [], "relations": {"unit_relations": {"unit-20": {}}, "schedule": null, "source_supports_enriched": true}, "timeline_refs": [4], "composition": {"origin_slides": [22]}, "timing": {"seconds": 0, "allocations": [{"source_index": 4, "seconds": 0, "decision": "Intervalo compartido íntegro; propietario contable seleccionado por función de actividad y referencia timeline de unidad (identidad semántica en empates). Soporte, sin duplicación contable. ", "source_time": "30–38 min", "source_seconds": 480, "is_owner": false, "function": "security"}], "clock_intervals": [4], "presenter_notes": "Reloj fuente 30–38 min: duración compartida 480 segundos. Trabajo: Intercambiar por parejas y probar la documentación sin explicación oral previa. Función del soporte: apoyo al trabajo.", "shared_intervals": [{"source_index": 4, "source_time": "30–38 min", "seconds": 480, "is_owner": false, "function": "security", "action": "Intercambiar por parejas y probar la documentación sin explicación oral previa.", "concurrent": false, "parallel_work": ""}]}, "code_blocks": [], "representation_needs": []}</ns0:renderMetadata>
+      <ns0:renderMetadata xmlns:ns0="urn:minijarvis:semantic-render:v1">{"session": "214", "source_files": {"teacher": "/mnt/compartido/Programación-26-27/Minijarvis/02-PROFESORADO/02-SESIONES/h1/S214-readme-y-evidencia-de-ejecucion-docente.md", "student_fallback": "/mnt/compartido/Programación-26-27/Minijarvis/01-ALUMNADO/03-SESIONES/h1/S214-readme-y-evidencia-de-ejecucion-alumnado.md"}, "layout": "concept", "plan_index": 8, "recognition": false, "unit_ids": ["unit-15"], "roles": {"unit-15": "core"}, "source_refs": [{"source": "teacher", "heading": "Arquitectura de evidencias y límite de S214", "block_index": 15, "fragment": 0}], "visible_sources": [{"index": 0, "sha256": "f2d96a56d22ec5d770cabb7e3569ec57a6522b53af5020de245b20854d3461b1"}], "notes_sources": [], "relations": {"unit_relations": {"unit-15": {}}, "schedule": null, "source_supports_enriched": true}, "timeline_refs": [], "composition": {"origin_slides": [22, 23, 24]}, "timing": {"seconds": 0, "allocations": [{"source_index": 4, "seconds": 0, "decision": "Intervalo compartido íntegro; propietario contable seleccionado por función de actividad y referencia timeline de unidad (identidad semántica en empates). Soporte, sin duplicación contable. Diapositiva sin ancla: comparte el intervalo de la diapositiva anclada más cercana (desempate por orden); sin anclas, apertura fuente.", "source_time": "30–38 min", "source_seconds": 480, "is_owner": false, "function": "explanations"}], "clock_intervals": [4], "presenter_notes": "Reloj fuente 30–38 min: duración compartida 480 segundos. Trabajo: Intercambiar por parejas y probar la documentación sin explicación oral previa. Función del soporte: apoyo al trabajo.", "shared_intervals": [{"source_index": 4, "source_time": "30–38 min", "seconds": 480, "is_owner": false, "function": "explanations", "action": "Intercambiar por parejas y probar la documentación sin explicación oral previa.", "concurrent": false, "parallel_work": ""}]}, "code_blocks": [], "representation_needs": []}</ns0:renderMetadata>
     </p:ext>
   </p:extLst>
 </p:sld>
@@ -11503,14 +11328,56 @@
       </p:sp>
       <p:sp>
         <p:nvSpPr>
-          <p:cNvPr id="5" name="Acción o criterio 0" descr="Acción o criterio 0"/>
+          <p:cNvPr id="5" name="Soporte fuente" descr="Soporte fuente"/>
           <p:cNvSpPr txBox="1"/>
           <p:nvPr/>
         </p:nvSpPr>
         <p:spPr>
           <a:xfrm>
             <a:off x="640080" y="1417320"/>
-            <a:ext cx="3444240" cy="3852672"/>
+            <a:ext cx="10881360" cy="835152"/>
+          </a:xfrm>
+          <a:prstGeom prst="rect">
+            <a:avLst/>
+          </a:prstGeom>
+          <a:noFill/>
+        </p:spPr>
+        <p:txBody>
+          <a:bodyPr wrap="square" lIns="109728" rIns="109728" tIns="73152" bIns="73152">
+            <a:noAutofit/>
+          </a:bodyPr>
+          <a:lstStyle/>
+          <a:p>
+            <a:pPr>
+              <a:lnSpc>
+                <a:spcPts val="2640"/>
+              </a:lnSpc>
+              <a:spcAft>
+                <a:spcPts val="0"/>
+              </a:spcAft>
+              <a:defRPr sz="2400" b="1">
+                <a:solidFill>
+                  <a:srgbClr val="2F5BA8"/>
+                </a:solidFill>
+                <a:latin typeface="Liberation Sans"/>
+              </a:defRPr>
+            </a:pPr>
+            <a:r>
+              <a:t>Moodle: S214 prepara enlaces, permisos y documentación; S215 realiza la entrega oficial de H1.</a:t>
+            </a:r>
+          </a:p>
+        </p:txBody>
+      </p:sp>
+      <p:sp>
+        <p:nvSpPr>
+          <p:cNvPr id="6" name="Acción o criterio 0" descr="Acción o criterio 0"/>
+          <p:cNvSpPr txBox="1"/>
+          <p:nvPr/>
+        </p:nvSpPr>
+        <p:spPr>
+          <a:xfrm>
+            <a:off x="640080" y="2343912"/>
+            <a:ext cx="5257800" cy="2176272"/>
           </a:xfrm>
           <a:prstGeom prst="rect">
             <a:avLst/>
@@ -11545,21 +11412,21 @@
               </a:defRPr>
             </a:pPr>
             <a:r>
-              <a:t>GitHub: fuente canónica para código, README, evolución técnica, pruebas localizables y enlaces técnicos.</a:t>
-            </a:r>
-          </a:p>
-        </p:txBody>
-      </p:sp>
-      <p:sp>
-        <p:nvSpPr>
-          <p:cNvPr id="6" name="Acción o criterio 1" descr="Acción o criterio 1"/>
-          <p:cNvSpPr txBox="1"/>
-          <p:nvPr/>
-        </p:nvSpPr>
-        <p:spPr>
-          <a:xfrm>
-            <a:off x="4267200" y="1417320"/>
-            <a:ext cx="3444240" cy="3852672"/>
+              <a:t>Drive: solo para una evidencia excepcional no-code sin una ubicación más natural; no duplica código, consola, capturas, pruebas técnicas o README.</a:t>
+            </a:r>
+          </a:p>
+        </p:txBody>
+      </p:sp>
+      <p:sp>
+        <p:nvSpPr>
+          <p:cNvPr id="7" name="Acción o criterio 1" descr="Acción o criterio 1"/>
+          <p:cNvSpPr txBox="1"/>
+          <p:nvPr/>
+        </p:nvSpPr>
+        <p:spPr>
+          <a:xfrm>
+            <a:off x="6080760" y="2343912"/>
+            <a:ext cx="5257800" cy="2176272"/>
           </a:xfrm>
           <a:prstGeom prst="rect">
             <a:avLst/>
@@ -11594,56 +11461,7 @@
               </a:defRPr>
             </a:pPr>
             <a:r>
-              <a:t>Scrum: solo registra una tarea, decisión, cambio, bloqueo o planificación real; no se actualiza para demostrar que ocurrió S214.</a:t>
-            </a:r>
-          </a:p>
-        </p:txBody>
-      </p:sp>
-      <p:sp>
-        <p:nvSpPr>
-          <p:cNvPr id="7" name="Acción o criterio 2" descr="Acción o criterio 2"/>
-          <p:cNvSpPr txBox="1"/>
-          <p:nvPr/>
-        </p:nvSpPr>
-        <p:spPr>
-          <a:xfrm>
-            <a:off x="7894320" y="1417320"/>
-            <a:ext cx="3444240" cy="3852672"/>
-          </a:xfrm>
-          <a:prstGeom prst="rect">
-            <a:avLst/>
-          </a:prstGeom>
-          <a:solidFill>
-            <a:srgbClr val="FFFFFF"/>
-          </a:solidFill>
-          <a:ln>
-            <a:solidFill>
-              <a:srgbClr val="2F5BA8"/>
-            </a:solidFill>
-          </a:ln>
-        </p:spPr>
-        <p:txBody>
-          <a:bodyPr wrap="square" lIns="109728" rIns="109728" tIns="73152" bIns="73152">
-            <a:noAutofit/>
-          </a:bodyPr>
-          <a:lstStyle/>
-          <a:p>
-            <a:pPr>
-              <a:lnSpc>
-                <a:spcPts val="2640"/>
-              </a:lnSpc>
-              <a:spcAft>
-                <a:spcPts val="0"/>
-              </a:spcAft>
-              <a:defRPr sz="2400" b="0">
-                <a:solidFill>
-                  <a:srgbClr val="1C2330"/>
-                </a:solidFill>
-                <a:latin typeface="Liberation Sans"/>
-              </a:defRPr>
-            </a:pPr>
-            <a:r>
-              <a:t>Diario individual: únicamente si surge un aprendizaje, dificultad o decisión personal significativa; no se exige fila S214 ni revisión administrativa.</a:t>
+              <a:t>Sites: no se crean ni actualizan durante H1. Una evidencia significativa podrá seleccionarse posteriormente durante C1.</a:t>
             </a:r>
           </a:p>
         </p:txBody>
@@ -11655,7 +11473,7 @@
   </p:clrMapOvr>
   <p:extLst>
     <p:ext uri="urn:minijarvis:semantic-render:v1">
-      <ns0:renderMetadata xmlns:ns0="urn:minijarvis:semantic-render:v1">{"session": "214", "source_files": {"teacher": "/mnt/compartido/Programación-26-27/Minijarvis/02-PROFESORADO/02-SESIONES/h1/S214-readme-y-evidencia-de-ejecucion-docente.md", "student_fallback": "/mnt/compartido/Programación-26-27/Minijarvis/01-ALUMNADO/03-SESIONES/h1/S214-readme-y-evidencia-de-ejecucion-alumnado.md"}, "layout": "concept", "plan_index": 8, "recognition": false, "unit_ids": ["unit-15"], "roles": {"unit-15": "core"}, "source_refs": [{"source": "teacher", "heading": "Arquitectura de evidencias y límite de S214", "block_index": 15, "fragment": 0}], "visible_sources": [{"index": 0, "sha256": "f2d96a56d22ec5d770cabb7e3569ec57a6522b53af5020de245b20854d3461b1"}], "notes_sources": [], "relations": {"unit_relations": {"unit-15": {}}, "schedule": null, "source_supports_enriched": true}, "timeline_refs": [], "composition": {"origin_slides": [23, 24, 25]}, "timing": {"seconds": 0, "allocations": [{"source_index": 4, "seconds": 0, "decision": "Intervalo compartido íntegro; propietario contable seleccionado por función de actividad y referencia timeline de unidad (identidad semántica en empates). Soporte, sin duplicación contable. Diapositiva sin ancla: comparte el intervalo de la diapositiva anclada más cercana (desempate por orden); sin anclas, apertura fuente.", "source_time": "30–38 min", "source_seconds": 480, "is_owner": false, "function": "explanations"}], "clock_intervals": [4], "presenter_notes": "Reloj fuente 30–38 min: duración compartida 480 segundos. Trabajo: Intercambiar por parejas y probar la documentación sin explicación oral previa. Función del soporte: apoyo al trabajo.", "shared_intervals": [{"source_index": 4, "source_time": "30–38 min", "seconds": 480, "is_owner": false, "function": "explanations", "action": "Intercambiar por parejas y probar la documentación sin explicación oral previa.", "concurrent": false, "parallel_work": ""}]}, "code_blocks": [], "representation_needs": []}</ns0:renderMetadata>
+      <ns0:renderMetadata xmlns:ns0="urn:minijarvis:semantic-render:v1">{"session": "214", "source_files": {"teacher": "/mnt/compartido/Programación-26-27/Minijarvis/02-PROFESORADO/02-SESIONES/h1/S214-readme-y-evidencia-de-ejecucion-docente.md", "student_fallback": "/mnt/compartido/Programación-26-27/Minijarvis/01-ALUMNADO/03-SESIONES/h1/S214-readme-y-evidencia-de-ejecucion-alumnado.md"}, "layout": "source_support", "plan_index": 8, "recognition": false, "unit_ids": ["unit-15"], "roles": {"unit-15": "core"}, "source_refs": [{"source": "teacher", "heading": "Arquitectura de evidencias y límite de S214", "block_index": 15, "fragment": 0}], "visible_sources": [{"index": 0, "sha256": "f2d96a56d22ec5d770cabb7e3569ec57a6522b53af5020de245b20854d3461b1"}], "notes_sources": [{"function": "visible_detail", "heading": "Arquitectura de evidencias y límite de S214", "sha256": "f2d96a56d22ec5d770cabb7e3569ec57a6522b53af5020de245b20854d3461b1"}, {"function": "visible_detail", "heading": "Arquitectura de evidencias y límite de S214", "sha256": "8b3263a9832b195f03aa0f5051d5e89b6f403645b7ec1259824f520953201c24"}], "relations": {"unit_relations": {"unit-15": {}}, "schedule": null, "source_supports_enriched": true}, "timeline_refs": [], "composition": {"origin_slides": [22, 23, 24]}, "timing": {"seconds": 0, "allocations": [{"source_index": 4, "seconds": 0, "decision": "Intervalo compartido íntegro; propietario contable seleccionado por función de actividad y referencia timeline de unidad (identidad semántica en empates). Soporte, sin duplicación contable. Diapositiva sin ancla: comparte el intervalo de la diapositiva anclada más cercana (desempate por orden); sin anclas, apertura fuente.", "source_time": "30–38 min", "source_seconds": 480, "is_owner": false, "function": "explanations"}], "clock_intervals": [4], "presenter_notes": "Reloj fuente 30–38 min: duración compartida 480 segundos. Trabajo: Intercambiar por parejas y probar la documentación sin explicación oral previa. Función del soporte: apoyo al trabajo.", "shared_intervals": [{"source_index": 4, "source_time": "30–38 min", "seconds": 480, "is_owner": false, "function": "explanations", "action": "Intercambiar por parejas y probar la documentación sin explicación oral previa.", "concurrent": false, "parallel_work": ""}]}, "code_blocks": [], "representation_needs": []}</ns0:renderMetadata>
     </p:ext>
   </p:extLst>
 </p:sld>
@@ -11804,19 +11622,21 @@
       </p:sp>
       <p:sp>
         <p:nvSpPr>
-          <p:cNvPr id="5" name="Soporte fuente" descr="Soporte fuente"/>
+          <p:cNvPr id="5" name="Contenido" descr="Contenido"/>
           <p:cNvSpPr txBox="1"/>
           <p:nvPr/>
         </p:nvSpPr>
         <p:spPr>
           <a:xfrm>
             <a:off x="640080" y="1417320"/>
-            <a:ext cx="10881360" cy="835152"/>
-          </a:xfrm>
-          <a:prstGeom prst="rect">
-            <a:avLst/>
-          </a:prstGeom>
-          <a:noFill/>
+            <a:ext cx="10881360" cy="1338072"/>
+          </a:xfrm>
+          <a:prstGeom prst="rect">
+            <a:avLst/>
+          </a:prstGeom>
+          <a:solidFill>
+            <a:srgbClr val="2F5BA8"/>
+          </a:solidFill>
         </p:spPr>
         <p:txBody>
           <a:bodyPr wrap="square" lIns="109728" rIns="109728" tIns="73152" bIns="73152">
@@ -11826,118 +11646,20 @@
           <a:p>
             <a:pPr>
               <a:lnSpc>
-                <a:spcPts val="2640"/>
-              </a:lnSpc>
-              <a:spcAft>
-                <a:spcPts val="0"/>
-              </a:spcAft>
-              <a:defRPr sz="2400" b="1">
-                <a:solidFill>
-                  <a:srgbClr val="2F5BA8"/>
+                <a:spcPts val="3080"/>
+              </a:lnSpc>
+              <a:spcAft>
+                <a:spcPts val="0"/>
+              </a:spcAft>
+              <a:defRPr sz="2800" b="1">
+                <a:solidFill>
+                  <a:srgbClr val="FFFFFF"/>
                 </a:solidFill>
                 <a:latin typeface="Liberation Sans"/>
               </a:defRPr>
             </a:pPr>
             <a:r>
-              <a:t>Moodle: S214 prepara enlaces, permisos y documentación; S215 realiza la entrega oficial de H1.</a:t>
-            </a:r>
-          </a:p>
-        </p:txBody>
-      </p:sp>
-      <p:sp>
-        <p:nvSpPr>
-          <p:cNvPr id="6" name="Acción o criterio 0" descr="Acción o criterio 0"/>
-          <p:cNvSpPr txBox="1"/>
-          <p:nvPr/>
-        </p:nvSpPr>
-        <p:spPr>
-          <a:xfrm>
-            <a:off x="640080" y="2343912"/>
-            <a:ext cx="5257800" cy="2176272"/>
-          </a:xfrm>
-          <a:prstGeom prst="rect">
-            <a:avLst/>
-          </a:prstGeom>
-          <a:solidFill>
-            <a:srgbClr val="FFFFFF"/>
-          </a:solidFill>
-          <a:ln>
-            <a:solidFill>
-              <a:srgbClr val="2F5BA8"/>
-            </a:solidFill>
-          </a:ln>
-        </p:spPr>
-        <p:txBody>
-          <a:bodyPr wrap="square" lIns="109728" rIns="109728" tIns="73152" bIns="73152">
-            <a:noAutofit/>
-          </a:bodyPr>
-          <a:lstStyle/>
-          <a:p>
-            <a:pPr>
-              <a:lnSpc>
-                <a:spcPts val="2640"/>
-              </a:lnSpc>
-              <a:spcAft>
-                <a:spcPts val="0"/>
-              </a:spcAft>
-              <a:defRPr sz="2400" b="0">
-                <a:solidFill>
-                  <a:srgbClr val="1C2330"/>
-                </a:solidFill>
-                <a:latin typeface="Liberation Sans"/>
-              </a:defRPr>
-            </a:pPr>
-            <a:r>
-              <a:t>Drive: solo para una evidencia excepcional no-code sin una ubicación más natural; no duplica código, consola, capturas, pruebas técnicas o README.</a:t>
-            </a:r>
-          </a:p>
-        </p:txBody>
-      </p:sp>
-      <p:sp>
-        <p:nvSpPr>
-          <p:cNvPr id="7" name="Acción o criterio 1" descr="Acción o criterio 1"/>
-          <p:cNvSpPr txBox="1"/>
-          <p:nvPr/>
-        </p:nvSpPr>
-        <p:spPr>
-          <a:xfrm>
-            <a:off x="6080760" y="2343912"/>
-            <a:ext cx="5257800" cy="2176272"/>
-          </a:xfrm>
-          <a:prstGeom prst="rect">
-            <a:avLst/>
-          </a:prstGeom>
-          <a:solidFill>
-            <a:srgbClr val="FFFFFF"/>
-          </a:solidFill>
-          <a:ln>
-            <a:solidFill>
-              <a:srgbClr val="2F5BA8"/>
-            </a:solidFill>
-          </a:ln>
-        </p:spPr>
-        <p:txBody>
-          <a:bodyPr wrap="square" lIns="109728" rIns="109728" tIns="73152" bIns="73152">
-            <a:noAutofit/>
-          </a:bodyPr>
-          <a:lstStyle/>
-          <a:p>
-            <a:pPr>
-              <a:lnSpc>
-                <a:spcPts val="2640"/>
-              </a:lnSpc>
-              <a:spcAft>
-                <a:spcPts val="0"/>
-              </a:spcAft>
-              <a:defRPr sz="2400" b="0">
-                <a:solidFill>
-                  <a:srgbClr val="1C2330"/>
-                </a:solidFill>
-                <a:latin typeface="Liberation Sans"/>
-              </a:defRPr>
-            </a:pPr>
-            <a:r>
-              <a:t>Sites: no se crean ni actualizan durante H1. Una evidencia significativa podrá seleccionarse posteriormente durante C1.</a:t>
+              <a:t>No se crea una evidencia de ejecución separada cuando las pruebas y su explicación ya están localizadas desde GitHub o README.</a:t>
             </a:r>
           </a:p>
         </p:txBody>
@@ -11949,7 +11671,7 @@
   </p:clrMapOvr>
   <p:extLst>
     <p:ext uri="urn:minijarvis:semantic-render:v1">
-      <ns0:renderMetadata xmlns:ns0="urn:minijarvis:semantic-render:v1">{"session": "214", "source_files": {"teacher": "/mnt/compartido/Programación-26-27/Minijarvis/02-PROFESORADO/02-SESIONES/h1/S214-readme-y-evidencia-de-ejecucion-docente.md", "student_fallback": "/mnt/compartido/Programación-26-27/Minijarvis/01-ALUMNADO/03-SESIONES/h1/S214-readme-y-evidencia-de-ejecucion-alumnado.md"}, "layout": "source_support", "plan_index": 8, "recognition": false, "unit_ids": ["unit-15"], "roles": {"unit-15": "core"}, "source_refs": [{"source": "teacher", "heading": "Arquitectura de evidencias y límite de S214", "block_index": 15, "fragment": 0}], "visible_sources": [{"index": 0, "sha256": "f2d96a56d22ec5d770cabb7e3569ec57a6522b53af5020de245b20854d3461b1"}], "notes_sources": [{"function": "visible_detail", "heading": "Arquitectura de evidencias y límite de S214", "sha256": "f2d96a56d22ec5d770cabb7e3569ec57a6522b53af5020de245b20854d3461b1"}, {"function": "visible_detail", "heading": "Arquitectura de evidencias y límite de S214", "sha256": "8b3263a9832b195f03aa0f5051d5e89b6f403645b7ec1259824f520953201c24"}], "relations": {"unit_relations": {"unit-15": {}}, "schedule": null, "source_supports_enriched": true}, "timeline_refs": [], "composition": {"origin_slides": [23, 24, 25]}, "timing": {"seconds": 0, "allocations": [{"source_index": 4, "seconds": 0, "decision": "Intervalo compartido íntegro; propietario contable seleccionado por función de actividad y referencia timeline de unidad (identidad semántica en empates). Soporte, sin duplicación contable. Diapositiva sin ancla: comparte el intervalo de la diapositiva anclada más cercana (desempate por orden); sin anclas, apertura fuente.", "source_time": "30–38 min", "source_seconds": 480, "is_owner": false, "function": "explanations"}], "clock_intervals": [4], "presenter_notes": "Reloj fuente 30–38 min: duración compartida 480 segundos. Trabajo: Intercambiar por parejas y probar la documentación sin explicación oral previa. Función del soporte: apoyo al trabajo.", "shared_intervals": [{"source_index": 4, "source_time": "30–38 min", "seconds": 480, "is_owner": false, "function": "explanations", "action": "Intercambiar por parejas y probar la documentación sin explicación oral previa.", "concurrent": false, "parallel_work": ""}]}, "code_blocks": [], "representation_needs": []}</ns0:renderMetadata>
+      <ns0:renderMetadata xmlns:ns0="urn:minijarvis:semantic-render:v1">{"session": "214", "source_files": {"teacher": "/mnt/compartido/Programación-26-27/Minijarvis/02-PROFESORADO/02-SESIONES/h1/S214-readme-y-evidencia-de-ejecucion-docente.md", "student_fallback": "/mnt/compartido/Programación-26-27/Minijarvis/01-ALUMNADO/03-SESIONES/h1/S214-readme-y-evidencia-de-ejecucion-alumnado.md"}, "layout": "concept", "plan_index": 8, "recognition": false, "unit_ids": ["unit-15"], "roles": {"unit-15": "core"}, "source_refs": [{"source": "teacher", "heading": "Arquitectura de evidencias y límite de S214", "block_index": 15, "fragment": 0}], "visible_sources": [{"index": 1, "sha256": "8b3263a9832b195f03aa0f5051d5e89b6f403645b7ec1259824f520953201c24"}], "notes_sources": [], "relations": {"unit_relations": {"unit-15": {}}, "schedule": null, "source_supports_enriched": true}, "timeline_refs": [], "composition": {"origin_slides": [22, 23, 24]}, "timing": {"seconds": 0, "allocations": [{"source_index": 4, "seconds": 0, "decision": "Intervalo compartido íntegro; propietario contable seleccionado por función de actividad y referencia timeline de unidad (identidad semántica en empates). Soporte, sin duplicación contable. Diapositiva sin ancla: comparte el intervalo de la diapositiva anclada más cercana (desempate por orden); sin anclas, apertura fuente.", "source_time": "30–38 min", "source_seconds": 480, "is_owner": false, "function": "explanations"}], "clock_intervals": [4], "presenter_notes": "Reloj fuente 30–38 min: duración compartida 480 segundos. Trabajo: Intercambiar por parejas y probar la documentación sin explicación oral previa. Función del soporte: apoyo al trabajo.", "shared_intervals": [{"source_index": 4, "source_time": "30–38 min", "seconds": 480, "is_owner": false, "function": "explanations", "action": "Intercambiar por parejas y probar la documentación sin explicación oral previa.", "concurrent": false, "parallel_work": ""}]}, "code_blocks": [], "representation_needs": []}</ns0:renderMetadata>
     </p:ext>
   </p:extLst>
 </p:sld>
@@ -12049,7 +11771,7 @@
               </a:defRPr>
             </a:pPr>
             <a:r>
-              <a:t>Arquitectura de evidencias y límite de S214</a:t>
+              <a:t>Transición a S215</a:t>
             </a:r>
           </a:p>
         </p:txBody>
@@ -12105,6 +11827,136 @@
         <p:spPr>
           <a:xfrm>
             <a:off x="640080" y="1417320"/>
+            <a:ext cx="10881360" cy="555752"/>
+          </a:xfrm>
+          <a:prstGeom prst="rect">
+            <a:avLst/>
+          </a:prstGeom>
+          <a:noFill/>
+        </p:spPr>
+        <p:txBody>
+          <a:bodyPr wrap="square" lIns="109728" rIns="109728" tIns="73152" bIns="73152">
+            <a:noAutofit/>
+          </a:bodyPr>
+          <a:lstStyle/>
+          <a:p>
+            <a:pPr>
+              <a:lnSpc>
+                <a:spcPts val="3080"/>
+              </a:lnSpc>
+              <a:spcAft>
+                <a:spcPts val="0"/>
+              </a:spcAft>
+              <a:defRPr sz="2800" b="0">
+                <a:solidFill>
+                  <a:srgbClr val="1C2330"/>
+                </a:solidFill>
+                <a:latin typeface="Liberation Sans"/>
+              </a:defRPr>
+            </a:pPr>
+            <a:r>
+              <a:t>Documentar no sustituye defender.</a:t>
+            </a:r>
+          </a:p>
+        </p:txBody>
+      </p:sp>
+      <p:sp>
+        <p:nvSpPr>
+          <p:cNvPr id="6" name="Código editable" descr="Código editable"/>
+          <p:cNvSpPr txBox="1"/>
+          <p:nvPr/>
+        </p:nvSpPr>
+        <p:spPr>
+          <a:xfrm>
+            <a:off x="640080" y="2064512"/>
+            <a:ext cx="10881360" cy="457962"/>
+          </a:xfrm>
+          <a:prstGeom prst="rect">
+            <a:avLst/>
+          </a:prstGeom>
+          <a:solidFill>
+            <a:srgbClr val="FFFFFF"/>
+          </a:solidFill>
+        </p:spPr>
+        <p:txBody>
+          <a:bodyPr wrap="square" lIns="109728" rIns="109728" tIns="73152" bIns="73152">
+            <a:noAutofit/>
+          </a:bodyPr>
+          <a:lstStyle/>
+          <a:p>
+            <a:pPr marL="335280" indent="-335280">
+              <a:lnSpc>
+                <a:spcPts val="2310"/>
+              </a:lnSpc>
+              <a:spcAft>
+                <a:spcPts val="0"/>
+              </a:spcAft>
+              <a:defRPr sz="2200" b="0">
+                <a:solidFill>
+                  <a:srgbClr val="1C2330"/>
+                </a:solidFill>
+                <a:latin typeface="Liberation Mono"/>
+              </a:defRPr>
+            </a:pPr>
+            <a:r>
+              <a:t>señalar → explicar → ejecutar → comprobar</a:t>
+            </a:r>
+          </a:p>
+        </p:txBody>
+      </p:sp>
+      <p:sp>
+        <p:nvSpPr>
+          <p:cNvPr id="7" name="Código editable" descr="Código editable"/>
+          <p:cNvSpPr txBox="1"/>
+          <p:nvPr/>
+        </p:nvSpPr>
+        <p:spPr>
+          <a:xfrm>
+            <a:off x="640080" y="2613914"/>
+            <a:ext cx="10881360" cy="457962"/>
+          </a:xfrm>
+          <a:prstGeom prst="rect">
+            <a:avLst/>
+          </a:prstGeom>
+          <a:solidFill>
+            <a:srgbClr val="FFFFFF"/>
+          </a:solidFill>
+        </p:spPr>
+        <p:txBody>
+          <a:bodyPr wrap="square" lIns="109728" rIns="109728" tIns="73152" bIns="73152">
+            <a:noAutofit/>
+          </a:bodyPr>
+          <a:lstStyle/>
+          <a:p>
+            <a:pPr marL="335280" indent="-335280">
+              <a:lnSpc>
+                <a:spcPts val="2310"/>
+              </a:lnSpc>
+              <a:spcAft>
+                <a:spcPts val="0"/>
+              </a:spcAft>
+              <a:defRPr sz="2200" b="0">
+                <a:solidFill>
+                  <a:srgbClr val="1C2330"/>
+                </a:solidFill>
+                <a:latin typeface="Liberation Mono"/>
+              </a:defRPr>
+            </a:pPr>
+            <a:r>
+              <a:t>predecir → modificar → ejecutar → comprobar</a:t>
+            </a:r>
+          </a:p>
+        </p:txBody>
+      </p:sp>
+      <p:sp>
+        <p:nvSpPr>
+          <p:cNvPr id="8" name="Contenido" descr="Contenido"/>
+          <p:cNvSpPr txBox="1"/>
+          <p:nvPr/>
+        </p:nvSpPr>
+        <p:spPr>
+          <a:xfrm>
+            <a:off x="640080" y="3163316"/>
             <a:ext cx="10881360" cy="1338072"/>
           </a:xfrm>
           <a:prstGeom prst="rect">
@@ -12135,7 +11987,61 @@
               </a:defRPr>
             </a:pPr>
             <a:r>
-              <a:t>No se crea una evidencia de ejecución separada cuando las pruebas y su explicación ya están localizadas desde GitHub o README.</a:t>
+              <a:rPr>
+                <a:solidFill>
+                  <a:srgbClr val="FFFFFF"/>
+                </a:solidFill>
+              </a:rPr>
+              <a:t>Si en la defensa te pido que señales una prueba, ejecutes, predigas una salida o modifiques una parte pequeña, ¿sabes dónde está y qué demuestra?</a:t>
+            </a:r>
+          </a:p>
+        </p:txBody>
+      </p:sp>
+      <p:sp>
+        <p:nvSpPr>
+          <p:cNvPr id="9" name="Contenido" descr="Contenido"/>
+          <p:cNvSpPr txBox="1"/>
+          <p:nvPr/>
+        </p:nvSpPr>
+        <p:spPr>
+          <a:xfrm>
+            <a:off x="640080" y="4592828"/>
+            <a:ext cx="10881360" cy="1338072"/>
+          </a:xfrm>
+          <a:prstGeom prst="rect">
+            <a:avLst/>
+          </a:prstGeom>
+          <a:solidFill>
+            <a:srgbClr val="2F5BA8"/>
+          </a:solidFill>
+        </p:spPr>
+        <p:txBody>
+          <a:bodyPr wrap="square" lIns="109728" rIns="109728" tIns="73152" bIns="73152">
+            <a:noAutofit/>
+          </a:bodyPr>
+          <a:lstStyle/>
+          <a:p>
+            <a:pPr>
+              <a:lnSpc>
+                <a:spcPts val="3080"/>
+              </a:lnSpc>
+              <a:spcAft>
+                <a:spcPts val="0"/>
+              </a:spcAft>
+              <a:defRPr sz="2800" b="1">
+                <a:solidFill>
+                  <a:srgbClr val="FFFFFF"/>
+                </a:solidFill>
+                <a:latin typeface="Liberation Sans"/>
+              </a:defRPr>
+            </a:pPr>
+            <a:r>
+              <a:rPr>
+                <a:solidFill>
+                  <a:srgbClr val="FFFFFF"/>
+                </a:solidFill>
+              </a:rPr>
+              <a:t>¿Qué evidencia de H1 podría ser suficientemente significativa como para seleccionarla posteriormente durante C1?</a:t>
             </a:r>
           </a:p>
         </p:txBody>
@@ -12147,389 +12053,7 @@
   </p:clrMapOvr>
   <p:extLst>
     <p:ext uri="urn:minijarvis:semantic-render:v1">
-      <ns0:renderMetadata xmlns:ns0="urn:minijarvis:semantic-render:v1">{"session": "214", "source_files": {"teacher": "/mnt/compartido/Programación-26-27/Minijarvis/02-PROFESORADO/02-SESIONES/h1/S214-readme-y-evidencia-de-ejecucion-docente.md", "student_fallback": "/mnt/compartido/Programación-26-27/Minijarvis/01-ALUMNADO/03-SESIONES/h1/S214-readme-y-evidencia-de-ejecucion-alumnado.md"}, "layout": "concept", "plan_index": 8, "recognition": false, "unit_ids": ["unit-15"], "roles": {"unit-15": "core"}, "source_refs": [{"source": "teacher", "heading": "Arquitectura de evidencias y límite de S214", "block_index": 15, "fragment": 0}], "visible_sources": [{"index": 1, "sha256": "8b3263a9832b195f03aa0f5051d5e89b6f403645b7ec1259824f520953201c24"}], "notes_sources": [], "relations": {"unit_relations": {"unit-15": {}}, "schedule": null, "source_supports_enriched": true}, "timeline_refs": [], "composition": {"origin_slides": [23, 24, 25]}, "timing": {"seconds": 0, "allocations": [{"source_index": 4, "seconds": 0, "decision": "Intervalo compartido íntegro; propietario contable seleccionado por función de actividad y referencia timeline de unidad (identidad semántica en empates). Soporte, sin duplicación contable. Diapositiva sin ancla: comparte el intervalo de la diapositiva anclada más cercana (desempate por orden); sin anclas, apertura fuente.", "source_time": "30–38 min", "source_seconds": 480, "is_owner": false, "function": "explanations"}], "clock_intervals": [4], "presenter_notes": "Reloj fuente 30–38 min: duración compartida 480 segundos. Trabajo: Intercambiar por parejas y probar la documentación sin explicación oral previa. Función del soporte: apoyo al trabajo.", "shared_intervals": [{"source_index": 4, "source_time": "30–38 min", "seconds": 480, "is_owner": false, "function": "explanations", "action": "Intercambiar por parejas y probar la documentación sin explicación oral previa.", "concurrent": false, "parallel_work": ""}]}, "code_blocks": [], "representation_needs": []}</ns0:renderMetadata>
-    </p:ext>
-  </p:extLst>
-</p:sld>
-</file>
-
-<file path=ppt/slides/slide25.xml><?xml version="1.0" encoding="utf-8"?>
-<p:sld xmlns:a="http://schemas.openxmlformats.org/drawingml/2006/main" xmlns:p="http://schemas.openxmlformats.org/presentationml/2006/main" xmlns:r="http://schemas.openxmlformats.org/officeDocument/2006/relationships">
-  <p:cSld>
-    <p:bg>
-      <p:bgPr>
-        <a:solidFill>
-          <a:srgbClr val="F9F7F2"/>
-        </a:solidFill>
-        <a:effectLst/>
-      </p:bgPr>
-    </p:bg>
-    <p:spTree>
-      <p:nvGrpSpPr>
-        <p:cNvPr id="1" name=""/>
-        <p:cNvGrpSpPr/>
-        <p:nvPr/>
-      </p:nvGrpSpPr>
-      <p:grpSpPr/>
-      <p:sp>
-        <p:nvSpPr>
-          <p:cNvPr id="2" name="Contexto" descr="Contexto"/>
-          <p:cNvSpPr txBox="1"/>
-          <p:nvPr/>
-        </p:nvSpPr>
-        <p:spPr>
-          <a:xfrm>
-            <a:off x="640080" y="256032"/>
-            <a:ext cx="10881360" cy="443992"/>
-          </a:xfrm>
-          <a:prstGeom prst="rect">
-            <a:avLst/>
-          </a:prstGeom>
-          <a:noFill/>
-        </p:spPr>
-        <p:txBody>
-          <a:bodyPr wrap="square" lIns="109728" rIns="109728" tIns="73152" bIns="73152">
-            <a:noAutofit/>
-          </a:bodyPr>
-          <a:lstStyle/>
-          <a:p>
-            <a:pPr>
-              <a:lnSpc>
-                <a:spcPts val="2200"/>
-              </a:lnSpc>
-              <a:spcAft>
-                <a:spcPts val="0"/>
-              </a:spcAft>
-              <a:defRPr sz="2000" b="1">
-                <a:solidFill>
-                  <a:srgbClr val="2F5BA8"/>
-                </a:solidFill>
-                <a:latin typeface="Liberation Sans"/>
-              </a:defRPr>
-            </a:pPr>
-          </a:p>
-        </p:txBody>
-      </p:sp>
-      <p:sp>
-        <p:nvSpPr>
-          <p:cNvPr id="3" name="Idea principal" descr="Idea principal"/>
-          <p:cNvSpPr txBox="1"/>
-          <p:nvPr/>
-        </p:nvSpPr>
-        <p:spPr>
-          <a:xfrm>
-            <a:off x="640080" y="694944"/>
-            <a:ext cx="10881360" cy="594360"/>
-          </a:xfrm>
-          <a:prstGeom prst="rect">
-            <a:avLst/>
-          </a:prstGeom>
-          <a:noFill/>
-        </p:spPr>
-        <p:txBody>
-          <a:bodyPr wrap="square" lIns="109728" rIns="109728" tIns="73152" bIns="73152">
-            <a:noAutofit/>
-          </a:bodyPr>
-          <a:lstStyle/>
-          <a:p>
-            <a:pPr>
-              <a:lnSpc>
-                <a:spcPts val="3300"/>
-              </a:lnSpc>
-              <a:spcAft>
-                <a:spcPts val="0"/>
-              </a:spcAft>
-              <a:defRPr sz="3000" b="1">
-                <a:solidFill>
-                  <a:srgbClr val="1C2330"/>
-                </a:solidFill>
-                <a:latin typeface="Liberation Sans"/>
-              </a:defRPr>
-            </a:pPr>
-            <a:r>
-              <a:t>Transición a S215</a:t>
-            </a:r>
-          </a:p>
-        </p:txBody>
-      </p:sp>
-      <p:sp>
-        <p:nvSpPr>
-          <p:cNvPr id="4" name="Sesión y procedencia" descr="Sesión y procedencia"/>
-          <p:cNvSpPr txBox="1"/>
-          <p:nvPr/>
-        </p:nvSpPr>
-        <p:spPr>
-          <a:xfrm>
-            <a:off x="640080" y="6428232"/>
-            <a:ext cx="10881360" cy="388112"/>
-          </a:xfrm>
-          <a:prstGeom prst="rect">
-            <a:avLst/>
-          </a:prstGeom>
-          <a:noFill/>
-        </p:spPr>
-        <p:txBody>
-          <a:bodyPr wrap="square" lIns="109728" rIns="109728" tIns="73152" bIns="73152">
-            <a:noAutofit/>
-          </a:bodyPr>
-          <a:lstStyle/>
-          <a:p>
-            <a:pPr>
-              <a:lnSpc>
-                <a:spcPts val="1760"/>
-              </a:lnSpc>
-              <a:spcAft>
-                <a:spcPts val="0"/>
-              </a:spcAft>
-              <a:defRPr sz="1600" b="0">
-                <a:solidFill>
-                  <a:srgbClr val="1C2330"/>
-                </a:solidFill>
-                <a:latin typeface="Liberation Sans"/>
-              </a:defRPr>
-            </a:pPr>
-            <a:r>
-              <a:t>S214 · H1 — Primer asistente ejecutable</a:t>
-            </a:r>
-          </a:p>
-        </p:txBody>
-      </p:sp>
-      <p:sp>
-        <p:nvSpPr>
-          <p:cNvPr id="5" name="Contenido" descr="Contenido"/>
-          <p:cNvSpPr txBox="1"/>
-          <p:nvPr/>
-        </p:nvSpPr>
-        <p:spPr>
-          <a:xfrm>
-            <a:off x="640080" y="1417320"/>
-            <a:ext cx="10881360" cy="555752"/>
-          </a:xfrm>
-          <a:prstGeom prst="rect">
-            <a:avLst/>
-          </a:prstGeom>
-          <a:noFill/>
-        </p:spPr>
-        <p:txBody>
-          <a:bodyPr wrap="square" lIns="109728" rIns="109728" tIns="73152" bIns="73152">
-            <a:noAutofit/>
-          </a:bodyPr>
-          <a:lstStyle/>
-          <a:p>
-            <a:pPr>
-              <a:lnSpc>
-                <a:spcPts val="3080"/>
-              </a:lnSpc>
-              <a:spcAft>
-                <a:spcPts val="0"/>
-              </a:spcAft>
-              <a:defRPr sz="2800" b="0">
-                <a:solidFill>
-                  <a:srgbClr val="1C2330"/>
-                </a:solidFill>
-                <a:latin typeface="Liberation Sans"/>
-              </a:defRPr>
-            </a:pPr>
-            <a:r>
-              <a:t>Documentar no sustituye defender.</a:t>
-            </a:r>
-          </a:p>
-        </p:txBody>
-      </p:sp>
-      <p:sp>
-        <p:nvSpPr>
-          <p:cNvPr id="6" name="Código editable" descr="Código editable"/>
-          <p:cNvSpPr txBox="1"/>
-          <p:nvPr/>
-        </p:nvSpPr>
-        <p:spPr>
-          <a:xfrm>
-            <a:off x="640080" y="2064512"/>
-            <a:ext cx="10881360" cy="457962"/>
-          </a:xfrm>
-          <a:prstGeom prst="rect">
-            <a:avLst/>
-          </a:prstGeom>
-          <a:solidFill>
-            <a:srgbClr val="FFFFFF"/>
-          </a:solidFill>
-        </p:spPr>
-        <p:txBody>
-          <a:bodyPr wrap="square" lIns="109728" rIns="109728" tIns="73152" bIns="73152">
-            <a:noAutofit/>
-          </a:bodyPr>
-          <a:lstStyle/>
-          <a:p>
-            <a:pPr marL="335280" indent="-335280">
-              <a:lnSpc>
-                <a:spcPts val="2310"/>
-              </a:lnSpc>
-              <a:spcAft>
-                <a:spcPts val="0"/>
-              </a:spcAft>
-              <a:defRPr sz="2200" b="0">
-                <a:solidFill>
-                  <a:srgbClr val="1C2330"/>
-                </a:solidFill>
-                <a:latin typeface="Liberation Mono"/>
-              </a:defRPr>
-            </a:pPr>
-            <a:r>
-              <a:t>señalar → explicar → ejecutar → comprobar</a:t>
-            </a:r>
-          </a:p>
-        </p:txBody>
-      </p:sp>
-      <p:sp>
-        <p:nvSpPr>
-          <p:cNvPr id="7" name="Código editable" descr="Código editable"/>
-          <p:cNvSpPr txBox="1"/>
-          <p:nvPr/>
-        </p:nvSpPr>
-        <p:spPr>
-          <a:xfrm>
-            <a:off x="640080" y="2613914"/>
-            <a:ext cx="10881360" cy="457962"/>
-          </a:xfrm>
-          <a:prstGeom prst="rect">
-            <a:avLst/>
-          </a:prstGeom>
-          <a:solidFill>
-            <a:srgbClr val="FFFFFF"/>
-          </a:solidFill>
-        </p:spPr>
-        <p:txBody>
-          <a:bodyPr wrap="square" lIns="109728" rIns="109728" tIns="73152" bIns="73152">
-            <a:noAutofit/>
-          </a:bodyPr>
-          <a:lstStyle/>
-          <a:p>
-            <a:pPr marL="335280" indent="-335280">
-              <a:lnSpc>
-                <a:spcPts val="2310"/>
-              </a:lnSpc>
-              <a:spcAft>
-                <a:spcPts val="0"/>
-              </a:spcAft>
-              <a:defRPr sz="2200" b="0">
-                <a:solidFill>
-                  <a:srgbClr val="1C2330"/>
-                </a:solidFill>
-                <a:latin typeface="Liberation Mono"/>
-              </a:defRPr>
-            </a:pPr>
-            <a:r>
-              <a:t>predecir → modificar → ejecutar → comprobar</a:t>
-            </a:r>
-          </a:p>
-        </p:txBody>
-      </p:sp>
-      <p:sp>
-        <p:nvSpPr>
-          <p:cNvPr id="8" name="Contenido" descr="Contenido"/>
-          <p:cNvSpPr txBox="1"/>
-          <p:nvPr/>
-        </p:nvSpPr>
-        <p:spPr>
-          <a:xfrm>
-            <a:off x="640080" y="3163316"/>
-            <a:ext cx="10881360" cy="1338072"/>
-          </a:xfrm>
-          <a:prstGeom prst="rect">
-            <a:avLst/>
-          </a:prstGeom>
-          <a:solidFill>
-            <a:srgbClr val="2F5BA8"/>
-          </a:solidFill>
-        </p:spPr>
-        <p:txBody>
-          <a:bodyPr wrap="square" lIns="109728" rIns="109728" tIns="73152" bIns="73152">
-            <a:noAutofit/>
-          </a:bodyPr>
-          <a:lstStyle/>
-          <a:p>
-            <a:pPr>
-              <a:lnSpc>
-                <a:spcPts val="3080"/>
-              </a:lnSpc>
-              <a:spcAft>
-                <a:spcPts val="0"/>
-              </a:spcAft>
-              <a:defRPr sz="2800" b="1">
-                <a:solidFill>
-                  <a:srgbClr val="FFFFFF"/>
-                </a:solidFill>
-                <a:latin typeface="Liberation Sans"/>
-              </a:defRPr>
-            </a:pPr>
-            <a:r>
-              <a:rPr>
-                <a:solidFill>
-                  <a:srgbClr val="FFFFFF"/>
-                </a:solidFill>
-              </a:rPr>
-              <a:t>Si en la defensa te pido que señales una prueba, ejecutes, predigas una salida o modifiques una parte pequeña, ¿sabes dónde está y qué demuestra?</a:t>
-            </a:r>
-          </a:p>
-        </p:txBody>
-      </p:sp>
-      <p:sp>
-        <p:nvSpPr>
-          <p:cNvPr id="9" name="Contenido" descr="Contenido"/>
-          <p:cNvSpPr txBox="1"/>
-          <p:nvPr/>
-        </p:nvSpPr>
-        <p:spPr>
-          <a:xfrm>
-            <a:off x="640080" y="4592828"/>
-            <a:ext cx="10881360" cy="1338072"/>
-          </a:xfrm>
-          <a:prstGeom prst="rect">
-            <a:avLst/>
-          </a:prstGeom>
-          <a:solidFill>
-            <a:srgbClr val="2F5BA8"/>
-          </a:solidFill>
-        </p:spPr>
-        <p:txBody>
-          <a:bodyPr wrap="square" lIns="109728" rIns="109728" tIns="73152" bIns="73152">
-            <a:noAutofit/>
-          </a:bodyPr>
-          <a:lstStyle/>
-          <a:p>
-            <a:pPr>
-              <a:lnSpc>
-                <a:spcPts val="3080"/>
-              </a:lnSpc>
-              <a:spcAft>
-                <a:spcPts val="0"/>
-              </a:spcAft>
-              <a:defRPr sz="2800" b="1">
-                <a:solidFill>
-                  <a:srgbClr val="FFFFFF"/>
-                </a:solidFill>
-                <a:latin typeface="Liberation Sans"/>
-              </a:defRPr>
-            </a:pPr>
-            <a:r>
-              <a:rPr>
-                <a:solidFill>
-                  <a:srgbClr val="FFFFFF"/>
-                </a:solidFill>
-              </a:rPr>
-              <a:t>¿Qué evidencia de H1 podría ser suficientemente significativa como para seleccionarla posteriormente durante C1?</a:t>
-            </a:r>
-          </a:p>
-        </p:txBody>
-      </p:sp>
-    </p:spTree>
-  </p:cSld>
-  <p:clrMapOvr>
-    <a:masterClrMapping/>
-  </p:clrMapOvr>
-  <p:extLst>
-    <p:ext uri="urn:minijarvis:semantic-render:v1">
-      <ns0:renderMetadata xmlns:ns0="urn:minijarvis:semantic-render:v1">{"session": "214", "source_files": {"teacher": "/mnt/compartido/Programación-26-27/Minijarvis/02-PROFESORADO/02-SESIONES/h1/S214-readme-y-evidencia-de-ejecucion-docente.md", "student_fallback": "/mnt/compartido/Programación-26-27/Minijarvis/01-ALUMNADO/03-SESIONES/h1/S214-readme-y-evidencia-de-ejecucion-alumnado.md"}, "layout": "closure", "plan_index": 9, "recognition": false, "unit_ids": ["unit-18", "unit-19"], "roles": {"unit-18": "core", "unit-19": "core"}, "source_refs": [{"source": "teacher", "heading": "Transición a S215", "block_index": 19, "fragment": 0}, {"source": "teacher", "heading": "Al terminar", "block_index": 20, "fragment": 0}], "visible_sources": [{"index": 0, "sha256": "169cc81d19fe6302ca171805132a43b119c8846f140a9ac45d1d18817036bccc"}, {"index": 2, "sha256": "1f1aef340edd632aa939a057d0989d338637fd7a8c0ebefbd7f7db45cb9b8adb"}, {"index": 4, "sha256": "174e1ebfc5194d5f15730904f81b780c54671929b6497f129f645319397f284f"}, {"index": 5, "sha256": "110b356fbdec8d813a7d98e85fae4eb76301bb9f096555b57a3c30eafa156309"}, {"index": 7, "sha256": "5ae258514ab32957635ebf2e9c8711581e2dab399de53226ddd2c9381ee87449"}], "notes_sources": [{"function": "closure", "heading": "Transición a S215", "sha256": "fb67f22ec5bf6da4636e91272725e469b7403d037f8900d49f6e438260d9fd93"}, {"function": "continuity", "heading": "Al terminar", "sha256": "6b176a8d492a353b7c56a01df50e3449ce407ee5e30092cab64519f2b2030854"}, {"function": "visible_detail", "heading": "Transición a S215", "sha256": "169cc81d19fe6302ca171805132a43b119c8846f140a9ac45d1d18817036bccc"}, {"function": "facilitation", "heading": "Transición a S215", "sha256": "aff6c29b3a9e2a409b50db5a5c55e161b8cac65163c139cb07c35804a8bd6c49"}, {"function": "facilitation", "heading": "Transición a S215", "sha256": "ef1dd268224b230858e7bcc8405490132ce5b33875eda8f7665cf57991c5e047"}, {"function": "facilitation", "heading": "Transición a S215", "sha256": "766b2320f087908f1da6bae8ad4e2bbc90b01e0fa05cf13d6d89f29d4990c5c1"}, {"function": "closure", "heading": "Transición a S215", "sha256": "110b356fbdec8d813a7d98e85fae4eb76301bb9f096555b57a3c30eafa156309"}, {"function": "closure", "heading": "Transición a S215", "sha256": "5ae258514ab32957635ebf2e9c8711581e2dab399de53226ddd2c9381ee87449"}, {"function": "closure", "heading": "Transición a S215", "sha256": "110b356fbdec8d813a7d98e85fae4eb76301bb9f096555b57a3c30eafa156309"}, {"function": "closure", "heading": "Transición a S215", "sha256": "5ae258514ab32957635ebf2e9c8711581e2dab399de53226ddd2c9381ee87449"}], "relations": {"unit_relations": {"unit-18": {"question_context": ["context", "question"]}}, "schedule": null, "source_supports_enriched": true}, "timeline_refs": [6], "composition": {"origin_slides": [26, 27]}, "timing": {"seconds": 180, "allocations": [{"source_index": 6, "seconds": 180, "decision": "Intervalo compartido íntegro; propietario contable seleccionado por función de actividad y referencia timeline de unidad (identidad semántica en empates). Propietario. ", "source_time": "42–45 min", "source_seconds": 180, "is_owner": true, "function": "closure"}], "clock_intervals": [6], "presenter_notes": "Reloj fuente 42–45 min: duración compartida 180 segundos. Trabajo: Comprobar el cierre y preparar la transición hacia la defensa. Función del soporte: cierre.", "shared_intervals": [{"source_index": 6, "source_time": "42–45 min", "seconds": 180, "is_owner": true, "function": "closure", "action": "Comprobar el cierre y preparar la transición hacia la defensa.", "concurrent": false, "parallel_work": ""}]}, "code_blocks": [], "representation_needs": []}</ns0:renderMetadata>
+      <ns0:renderMetadata xmlns:ns0="urn:minijarvis:semantic-render:v1">{"session": "214", "source_files": {"teacher": "/mnt/compartido/Programación-26-27/Minijarvis/02-PROFESORADO/02-SESIONES/h1/S214-readme-y-evidencia-de-ejecucion-docente.md", "student_fallback": "/mnt/compartido/Programación-26-27/Minijarvis/01-ALUMNADO/03-SESIONES/h1/S214-readme-y-evidencia-de-ejecucion-alumnado.md"}, "layout": "closure", "plan_index": 9, "recognition": false, "unit_ids": ["unit-18", "unit-19"], "roles": {"unit-18": "core", "unit-19": "core"}, "source_refs": [{"source": "teacher", "heading": "Transición a S215", "block_index": 19, "fragment": 0}, {"source": "teacher", "heading": "Al terminar", "block_index": 20, "fragment": 0}], "visible_sources": [{"index": 0, "sha256": "169cc81d19fe6302ca171805132a43b119c8846f140a9ac45d1d18817036bccc"}, {"index": 2, "sha256": "1f1aef340edd632aa939a057d0989d338637fd7a8c0ebefbd7f7db45cb9b8adb"}, {"index": 4, "sha256": "174e1ebfc5194d5f15730904f81b780c54671929b6497f129f645319397f284f"}, {"index": 5, "sha256": "110b356fbdec8d813a7d98e85fae4eb76301bb9f096555b57a3c30eafa156309"}, {"index": 7, "sha256": "5ae258514ab32957635ebf2e9c8711581e2dab399de53226ddd2c9381ee87449"}], "notes_sources": [{"function": "closure", "heading": "Transición a S215", "sha256": "fb67f22ec5bf6da4636e91272725e469b7403d037f8900d49f6e438260d9fd93"}, {"function": "continuity", "heading": "Al terminar", "sha256": "6b176a8d492a353b7c56a01df50e3449ce407ee5e30092cab64519f2b2030854"}, {"function": "visible_detail", "heading": "Transición a S215", "sha256": "169cc81d19fe6302ca171805132a43b119c8846f140a9ac45d1d18817036bccc"}, {"function": "facilitation", "heading": "Transición a S215", "sha256": "aff6c29b3a9e2a409b50db5a5c55e161b8cac65163c139cb07c35804a8bd6c49"}, {"function": "facilitation", "heading": "Transición a S215", "sha256": "ef1dd268224b230858e7bcc8405490132ce5b33875eda8f7665cf57991c5e047"}, {"function": "facilitation", "heading": "Transición a S215", "sha256": "766b2320f087908f1da6bae8ad4e2bbc90b01e0fa05cf13d6d89f29d4990c5c1"}, {"function": "closure", "heading": "Transición a S215", "sha256": "110b356fbdec8d813a7d98e85fae4eb76301bb9f096555b57a3c30eafa156309"}, {"function": "closure", "heading": "Transición a S215", "sha256": "5ae258514ab32957635ebf2e9c8711581e2dab399de53226ddd2c9381ee87449"}, {"function": "closure", "heading": "Transición a S215", "sha256": "110b356fbdec8d813a7d98e85fae4eb76301bb9f096555b57a3c30eafa156309"}, {"function": "closure", "heading": "Transición a S215", "sha256": "5ae258514ab32957635ebf2e9c8711581e2dab399de53226ddd2c9381ee87449"}], "relations": {"unit_relations": {"unit-18": {"question_context": ["context", "question"]}}, "schedule": null, "source_supports_enriched": true}, "timeline_refs": [6], "composition": {"origin_slides": [25, 26]}, "timing": {"seconds": 180, "allocations": [{"source_index": 6, "seconds": 180, "decision": "Intervalo compartido íntegro; propietario contable seleccionado por función de actividad y referencia timeline de unidad (identidad semántica en empates). Propietario. ", "source_time": "42–45 min", "source_seconds": 180, "is_owner": true, "function": "closure"}], "clock_intervals": [6], "presenter_notes": "Reloj fuente 42–45 min: duración compartida 180 segundos. Trabajo: Comprobar el cierre y preparar la transición hacia la defensa. Función del soporte: cierre.", "shared_intervals": [{"source_index": 6, "source_time": "42–45 min", "seconds": 180, "is_owner": true, "function": "closure", "action": "Comprobar el cierre y preparar la transición hacia la defensa.", "concurrent": false, "parallel_work": ""}]}, "code_blocks": [], "representation_needs": []}</ns0:renderMetadata>
     </p:ext>
   </p:extLst>
 </p:sld>
@@ -13205,7 +12729,7 @@
         <p:spPr>
           <a:xfrm>
             <a:off x="640080" y="1966722"/>
-            <a:ext cx="10881360" cy="1044701"/>
+            <a:ext cx="10881360" cy="1338072"/>
           </a:xfrm>
           <a:prstGeom prst="rect">
             <a:avLst/>
@@ -13254,7 +12778,7 @@
               </a:defRPr>
             </a:pPr>
             <a:r>
-              <a:t>MiniJarvis saluda, pide un nombre ficticio, calcula minutos a partir de horas y muestra si se alcanza un objetivo.</a:t>
+              <a:t>MiniJarvis saluda, pide un nombre ficticio, calcula minutos a partir de horas y muestra el resultado booleano de comparar las horas con una referencia.</a:t>
             </a:r>
           </a:p>
         </p:txBody>
@@ -13267,8 +12791,8 @@
         </p:nvSpPr>
         <p:spPr>
           <a:xfrm>
-            <a:off x="640080" y="3102864"/>
-            <a:ext cx="10881360" cy="751332"/>
+            <a:off x="640080" y="3396234"/>
+            <a:ext cx="10881360" cy="1044701"/>
           </a:xfrm>
           <a:prstGeom prst="rect">
             <a:avLst/>
@@ -13317,7 +12841,7 @@
               </a:defRPr>
             </a:pPr>
             <a:r>
-              <a:t>No incluye menú, memoria, ficheros ni IA real.</a:t>
+              <a:t>No incluye `if/else`, bifurcaciones, menú, memoria, ficheros ni IA real.</a:t>
             </a:r>
           </a:p>
         </p:txBody>
@@ -13330,7 +12854,7 @@
         </p:nvSpPr>
         <p:spPr>
           <a:xfrm>
-            <a:off x="640080" y="3945636"/>
+            <a:off x="640080" y="4532376"/>
             <a:ext cx="10881360" cy="1338072"/>
           </a:xfrm>
           <a:prstGeom prst="rect">
@@ -13430,7 +12954,7 @@
   </p:clrMapOvr>
   <p:extLst>
     <p:ext uri="urn:minijarvis:semantic-render:v1">
-      <ns0:renderMetadata xmlns:ns0="urn:minijarvis:semantic-render:v1">{"session": "214", "source_files": {"teacher": "/mnt/compartido/Programación-26-27/Minijarvis/02-PROFESORADO/02-SESIONES/h1/S214-readme-y-evidencia-de-ejecucion-docente.md", "student_fallback": "/mnt/compartido/Programación-26-27/Minijarvis/01-ALUMNADO/03-SESIONES/h1/S214-readme-y-evidencia-de-ejecucion-alumnado.md"}, "layout": "code", "plan_index": 2, "recognition": false, "unit_ids": ["unit-8"], "roles": {"unit-8": "core"}, "source_refs": [{"source": "teacher", "heading": "Modelo pedagógico de README", "block_index": 8, "fragment": 0}], "visible_sources": [{"index": 1, "sha256": "c5f4e0df27177184d3c7b81810b757a416b1aaa0a61cb3b2569dffdf2a15f7cb"}], "notes_sources": [{"function": "facilitation", "heading": "Modelo pedagógico de README", "sha256": "0f617fce6ae7f042fdf05d8ffb789056c9454e4c336f298b587264521b3302d7"}, {"function": "facilitation", "heading": "Modelo pedagógico de README", "sha256": "38a11781de5c7173d9329c1ea04f110cb8b137ec29a8b6fad699c57d8a58ca73"}, {"function": "visible_detail", "heading": "Modelo pedagógico de README", "sha256": "546600326619722dff044d0e1f6f9eb3cbe9e0960a2e0be4b4591eb920ec5461"}], "relations": {"unit_relations": {"unit-8": {"question_context": ["context", "question"]}}, "schedule": null, "source_supports_enriched": true}, "timeline_refs": [1], "composition": {"origin_slides": [8, 9, 10]}, "timing": {"seconds": 0, "allocations": [{"source_index": 1, "seconds": 0, "decision": "Intervalo compartido íntegro; propietario contable seleccionado por función de actividad y referencia timeline de unidad (identidad semántica en empates). Soporte, sin duplicación contable. ", "source_time": "5–10 min", "source_seconds": 300, "is_owner": false, "function": "examples"}], "clock_intervals": [1], "presenter_notes": "Reloj fuente 5–10 min: duración compartida 300 segundos. Trabajo: Analizar el modelo de README y la diferencia entre “funciona” y una prueba explicada. Función del soporte: apoyo al trabajo.", "shared_intervals": [{"source_index": 1, "source_time": "5–10 min", "seconds": 300, "is_owner": false, "function": "examples", "action": "Analizar el modelo de README y la diferencia entre “funciona” y una prueba explicada.", "concurrent": false, "parallel_work": ""}]}, "code_blocks": [], "representation_needs": []}</ns0:renderMetadata>
+      <ns0:renderMetadata xmlns:ns0="urn:minijarvis:semantic-render:v1">{"session": "214", "source_files": {"teacher": "/mnt/compartido/Programación-26-27/Minijarvis/02-PROFESORADO/02-SESIONES/h1/S214-readme-y-evidencia-de-ejecucion-docente.md", "student_fallback": "/mnt/compartido/Programación-26-27/Minijarvis/01-ALUMNADO/03-SESIONES/h1/S214-readme-y-evidencia-de-ejecucion-alumnado.md"}, "layout": "code", "plan_index": 2, "recognition": false, "unit_ids": ["unit-8"], "roles": {"unit-8": "core"}, "source_refs": [{"source": "teacher", "heading": "Modelo pedagógico de README", "block_index": 8, "fragment": 0}], "visible_sources": [{"index": 1, "sha256": "22544609bd25e4f311b9c5763d36d672e7c94254519c3ba5b41b78e67a46794f"}], "notes_sources": [{"function": "facilitation", "heading": "Modelo pedagógico de README", "sha256": "0f617fce6ae7f042fdf05d8ffb789056c9454e4c336f298b587264521b3302d7"}, {"function": "facilitation", "heading": "Modelo pedagógico de README", "sha256": "38a11781de5c7173d9329c1ea04f110cb8b137ec29a8b6fad699c57d8a58ca73"}, {"function": "visible_detail", "heading": "Modelo pedagógico de README", "sha256": "55026d7f8a76fce4aceb8a66a201ae2d01dabe9510055f391da8cda41e604e80"}], "relations": {"unit_relations": {"unit-8": {"question_context": ["context", "question"]}}, "schedule": null, "source_supports_enriched": true}, "timeline_refs": [1], "composition": {"origin_slides": [8, 9, 10]}, "timing": {"seconds": 0, "allocations": [{"source_index": 1, "seconds": 0, "decision": "Intervalo compartido íntegro; propietario contable seleccionado por función de actividad y referencia timeline de unidad (identidad semántica en empates). Soporte, sin duplicación contable. ", "source_time": "5–10 min", "source_seconds": 300, "is_owner": false, "function": "examples"}], "clock_intervals": [1], "presenter_notes": "Reloj fuente 5–10 min: duración compartida 300 segundos. Trabajo: Analizar el modelo de README y la diferencia entre “funciona” y una prueba explicada. Función del soporte: apoyo al trabajo.", "shared_intervals": [{"source_index": 1, "source_time": "5–10 min", "seconds": 300, "is_owner": false, "function": "examples", "action": "Analizar el modelo de README y la diferencia entre “funciona” y una prueba explicada.", "concurrent": false, "parallel_work": ""}]}, "code_blocks": [], "representation_needs": []}</ns0:renderMetadata>
     </p:ext>
   </p:extLst>
 </p:sld>
@@ -13628,7 +13152,7 @@
         <p:spPr>
           <a:xfrm>
             <a:off x="640080" y="2846832"/>
-            <a:ext cx="10881360" cy="1631442"/>
+            <a:ext cx="10881360" cy="2218182"/>
           </a:xfrm>
           <a:prstGeom prst="rect">
             <a:avLst/>
@@ -13677,7 +13201,7 @@
               </a:defRPr>
             </a:pPr>
             <a:r>
-              <a:t>Caso A: horas = 5 → Objetivo alcanzado.</a:t>
+              <a:t>Caso A: horas = 5 → minutos = 300; comparación `horas &gt;= 4` = true.</a:t>
             </a:r>
           </a:p>
           <a:p>
@@ -13696,7 +13220,7 @@
               </a:defRPr>
             </a:pPr>
             <a:r>
-              <a:t>Caso B: horas = 2 → Objetivo pendiente.</a:t>
+              <a:t>Caso B: horas = 2 → minutos = 120; comparación `horas &gt;= 4` = false.</a:t>
             </a:r>
           </a:p>
           <a:p>
@@ -13727,7 +13251,7 @@
   </p:clrMapOvr>
   <p:extLst>
     <p:ext uri="urn:minijarvis:semantic-render:v1">
-      <ns0:renderMetadata xmlns:ns0="urn:minijarvis:semantic-render:v1">{"session": "214", "source_files": {"teacher": "/mnt/compartido/Programación-26-27/Minijarvis/02-PROFESORADO/02-SESIONES/h1/S214-readme-y-evidencia-de-ejecucion-docente.md", "student_fallback": "/mnt/compartido/Programación-26-27/Minijarvis/01-ALUMNADO/03-SESIONES/h1/S214-readme-y-evidencia-de-ejecucion-alumnado.md"}, "layout": "code", "plan_index": 2, "recognition": false, "unit_ids": ["unit-8"], "roles": {"unit-8": "core"}, "source_refs": [{"source": "teacher", "heading": "Modelo pedagógico de README", "block_index": 8, "fragment": 0}], "visible_sources": [{"index": 1, "sha256": "c5f4e0df27177184d3c7b81810b757a416b1aaa0a61cb3b2569dffdf2a15f7cb"}], "notes_sources": [{"function": "facilitation", "heading": "Modelo pedagógico de README", "sha256": "0f617fce6ae7f042fdf05d8ffb789056c9454e4c336f298b587264521b3302d7"}, {"function": "facilitation", "heading": "Modelo pedagógico de README", "sha256": "38a11781de5c7173d9329c1ea04f110cb8b137ec29a8b6fad699c57d8a58ca73"}, {"function": "visible_detail", "heading": "Modelo pedagógico de README", "sha256": "546600326619722dff044d0e1f6f9eb3cbe9e0960a2e0be4b4591eb920ec5461"}], "relations": {"unit_relations": {"unit-8": {"question_context": ["context", "question"]}}, "schedule": null, "presentation_normalizations": {"## Pruebas\nCaso A: horas = 5 -&gt; Objetivo alcanzado.\nCaso B: horas = 2 -&gt; Objetivo pendiente.\nEntrada no convertible: \"hola\" falla durante la ejecución con parseInt.": "## Pruebas\nCaso A: horas = 5 → Objetivo alcanzado.\nCaso B: horas = 2 → Objetivo pendiente.\nEntrada no convertible: \"hola\" falla durante la ejecución con parseInt."}, "source_supports_enriched": true}, "timeline_refs": [1], "composition": {"origin_slides": [8, 9, 10]}, "timing": {"seconds": 0, "allocations": [{"source_index": 1, "seconds": 0, "decision": "Intervalo compartido íntegro; propietario contable seleccionado por función de actividad y referencia timeline de unidad (identidad semántica en empates). Soporte, sin duplicación contable. ", "source_time": "5–10 min", "source_seconds": 300, "is_owner": false, "function": "examples"}], "clock_intervals": [1], "presenter_notes": "Reloj fuente 5–10 min: duración compartida 300 segundos. Trabajo: Analizar el modelo de README y la diferencia entre “funciona” y una prueba explicada. Función del soporte: apoyo al trabajo.", "shared_intervals": [{"source_index": 1, "source_time": "5–10 min", "seconds": 300, "is_owner": false, "function": "examples", "action": "Analizar el modelo de README y la diferencia entre “funciona” y una prueba explicada.", "concurrent": false, "parallel_work": ""}]}, "code_blocks": [], "representation_needs": []}</ns0:renderMetadata>
+      <ns0:renderMetadata xmlns:ns0="urn:minijarvis:semantic-render:v1">{"session": "214", "source_files": {"teacher": "/mnt/compartido/Programación-26-27/Minijarvis/02-PROFESORADO/02-SESIONES/h1/S214-readme-y-evidencia-de-ejecucion-docente.md", "student_fallback": "/mnt/compartido/Programación-26-27/Minijarvis/01-ALUMNADO/03-SESIONES/h1/S214-readme-y-evidencia-de-ejecucion-alumnado.md"}, "layout": "code", "plan_index": 2, "recognition": false, "unit_ids": ["unit-8"], "roles": {"unit-8": "core"}, "source_refs": [{"source": "teacher", "heading": "Modelo pedagógico de README", "block_index": 8, "fragment": 0}], "visible_sources": [{"index": 1, "sha256": "22544609bd25e4f311b9c5763d36d672e7c94254519c3ba5b41b78e67a46794f"}], "notes_sources": [{"function": "facilitation", "heading": "Modelo pedagógico de README", "sha256": "0f617fce6ae7f042fdf05d8ffb789056c9454e4c336f298b587264521b3302d7"}, {"function": "facilitation", "heading": "Modelo pedagógico de README", "sha256": "38a11781de5c7173d9329c1ea04f110cb8b137ec29a8b6fad699c57d8a58ca73"}, {"function": "visible_detail", "heading": "Modelo pedagógico de README", "sha256": "55026d7f8a76fce4aceb8a66a201ae2d01dabe9510055f391da8cda41e604e80"}], "relations": {"unit_relations": {"unit-8": {"question_context": ["context", "question"]}}, "schedule": null, "presentation_normalizations": {"## Pruebas\nCaso A: horas = 5 -&gt; minutos = 300; comparación `horas &gt;= 4` = true.\nCaso B: horas = 2 -&gt; minutos = 120; comparación `horas &gt;= 4` = false.\nEntrada no convertible: \"hola\" falla durante la ejecución con parseInt.": "## Pruebas\nCaso A: horas = 5 → minutos = 300; comparación `horas &gt;= 4` = true.\nCaso B: horas = 2 → minutos = 120; comparación `horas &gt;= 4` = false.\nEntrada no convertible: \"hola\" falla durante la ejecución con parseInt."}, "source_supports_enriched": true}, "timeline_refs": [1], "composition": {"origin_slides": [8, 9, 10]}, "timing": {"seconds": 0, "allocations": [{"source_index": 1, "seconds": 0, "decision": "Intervalo compartido íntegro; propietario contable seleccionado por función de actividad y referencia timeline de unidad (identidad semántica en empates). Soporte, sin duplicación contable. ", "source_time": "5–10 min", "source_seconds": 300, "is_owner": false, "function": "examples"}], "clock_intervals": [1], "presenter_notes": "Reloj fuente 5–10 min: duración compartida 300 segundos. Trabajo: Analizar el modelo de README y la diferencia entre “funciona” y una prueba explicada. Función del soporte: apoyo al trabajo.", "shared_intervals": [{"source_index": 1, "source_time": "5–10 min", "seconds": 300, "is_owner": false, "function": "examples", "action": "Analizar el modelo de README y la diferencia entre “funciona” y una prueba explicada.", "concurrent": false, "parallel_work": ""}]}, "code_blocks": [], "representation_needs": []}</ns0:renderMetadata>
     </p:ext>
   </p:extLst>
 </p:sld>
@@ -14077,7 +13601,7 @@
   </p:clrMapOvr>
   <p:extLst>
     <p:ext uri="urn:minijarvis:semantic-render:v1">
-      <ns0:renderMetadata xmlns:ns0="urn:minijarvis:semantic-render:v1">{"session": "214", "source_files": {"teacher": "/mnt/compartido/Programación-26-27/Minijarvis/02-PROFESORADO/02-SESIONES/h1/S214-readme-y-evidencia-de-ejecucion-docente.md", "student_fallback": "/mnt/compartido/Programación-26-27/Minijarvis/01-ALUMNADO/03-SESIONES/h1/S214-readme-y-evidencia-de-ejecucion-alumnado.md"}, "layout": "code", "plan_index": 2, "recognition": false, "unit_ids": ["unit-8"], "roles": {"unit-8": "core"}, "source_refs": [{"source": "teacher", "heading": "Modelo pedagógico de README", "block_index": 8, "fragment": 0}], "visible_sources": [{"index": 3, "sha256": "15273083b91aa4bf06b8b8b1a6be690cdfba1ce61196f2cc9557f9d33d6dd180"}], "notes_sources": [{"function": "facilitation", "heading": "Modelo pedagógico de README", "sha256": "0f617fce6ae7f042fdf05d8ffb789056c9454e4c336f298b587264521b3302d7"}, {"function": "facilitation", "heading": "Modelo pedagógico de README", "sha256": "38a11781de5c7173d9329c1ea04f110cb8b137ec29a8b6fad699c57d8a58ca73"}, {"function": "visible_detail", "heading": "Modelo pedagógico de README", "sha256": "546600326619722dff044d0e1f6f9eb3cbe9e0960a2e0be4b4591eb920ec5461"}], "relations": {"unit_relations": {"unit-8": {"question_context": ["context", "question"]}}, "schedule": null, "presentation_normalizations": {"## Pruebas\nCaso A: horas = 5 -&gt; Objetivo alcanzado.\nCaso B: horas = 2 -&gt; Objetivo pendiente.\nEntrada no convertible: \"hola\" falla durante la ejecución con parseInt.": "## Pruebas\nCaso A: horas = 5 → Objetivo alcanzado.\nCaso B: horas = 2 → Objetivo pendiente.\nEntrada no convertible: \"hola\" falla durante la ejecución con parseInt."}, "source_supports_enriched": true}, "timeline_refs": [1], "composition": {"origin_slides": [8, 9, 10]}, "timing": {"seconds": 0, "allocations": [{"source_index": 1, "seconds": 0, "decision": "Intervalo compartido íntegro; propietario contable seleccionado por función de actividad y referencia timeline de unidad (identidad semántica en empates). Soporte, sin duplicación contable. ", "source_time": "5–10 min", "source_seconds": 300, "is_owner": false, "function": "examples"}], "clock_intervals": [1], "presenter_notes": "Reloj fuente 5–10 min: duración compartida 300 segundos. Trabajo: Analizar el modelo de README y la diferencia entre “funciona” y una prueba explicada. Función del soporte: apoyo al trabajo.", "shared_intervals": [{"source_index": 1, "source_time": "5–10 min", "seconds": 300, "is_owner": false, "function": "examples", "action": "Analizar el modelo de README y la diferencia entre “funciona” y una prueba explicada.", "concurrent": false, "parallel_work": ""}]}, "code_blocks": [], "representation_needs": []}</ns0:renderMetadata>
+      <ns0:renderMetadata xmlns:ns0="urn:minijarvis:semantic-render:v1">{"session": "214", "source_files": {"teacher": "/mnt/compartido/Programación-26-27/Minijarvis/02-PROFESORADO/02-SESIONES/h1/S214-readme-y-evidencia-de-ejecucion-docente.md", "student_fallback": "/mnt/compartido/Programación-26-27/Minijarvis/01-ALUMNADO/03-SESIONES/h1/S214-readme-y-evidencia-de-ejecucion-alumnado.md"}, "layout": "code", "plan_index": 2, "recognition": false, "unit_ids": ["unit-8"], "roles": {"unit-8": "core"}, "source_refs": [{"source": "teacher", "heading": "Modelo pedagógico de README", "block_index": 8, "fragment": 0}], "visible_sources": [{"index": 3, "sha256": "15273083b91aa4bf06b8b8b1a6be690cdfba1ce61196f2cc9557f9d33d6dd180"}], "notes_sources": [{"function": "facilitation", "heading": "Modelo pedagógico de README", "sha256": "0f617fce6ae7f042fdf05d8ffb789056c9454e4c336f298b587264521b3302d7"}, {"function": "facilitation", "heading": "Modelo pedagógico de README", "sha256": "38a11781de5c7173d9329c1ea04f110cb8b137ec29a8b6fad699c57d8a58ca73"}, {"function": "visible_detail", "heading": "Modelo pedagógico de README", "sha256": "55026d7f8a76fce4aceb8a66a201ae2d01dabe9510055f391da8cda41e604e80"}], "relations": {"unit_relations": {"unit-8": {"question_context": ["context", "question"]}}, "schedule": null, "presentation_normalizations": {"## Pruebas\nCaso A: horas = 5 -&gt; minutos = 300; comparación `horas &gt;= 4` = true.\nCaso B: horas = 2 -&gt; minutos = 120; comparación `horas &gt;= 4` = false.\nEntrada no convertible: \"hola\" falla durante la ejecución con parseInt.": "## Pruebas\nCaso A: horas = 5 → minutos = 300; comparación `horas &gt;= 4` = true.\nCaso B: horas = 2 → minutos = 120; comparación `horas &gt;= 4` = false.\nEntrada no convertible: \"hola\" falla durante la ejecución con parseInt."}, "source_supports_enriched": true}, "timeline_refs": [1], "composition": {"origin_slides": [8, 9, 10]}, "timing": {"seconds": 0, "allocations": [{"source_index": 1, "seconds": 0, "decision": "Intervalo compartido íntegro; propietario contable seleccionado por función de actividad y referencia timeline de unidad (identidad semántica en empates). Soporte, sin duplicación contable. ", "source_time": "5–10 min", "source_seconds": 300, "is_owner": false, "function": "examples"}], "clock_intervals": [1], "presenter_notes": "Reloj fuente 5–10 min: duración compartida 300 segundos. Trabajo: Analizar el modelo de README y la diferencia entre “funciona” y una prueba explicada. Función del soporte: apoyo al trabajo.", "shared_intervals": [{"source_index": 1, "source_time": "5–10 min", "seconds": 300, "is_owner": false, "function": "examples", "action": "Analizar el modelo de README y la diferencia entre “funciona” y una prueba explicada.", "concurrent": false, "parallel_work": ""}]}, "code_blocks": [], "representation_needs": []}</ns0:renderMetadata>
     </p:ext>
   </p:extLst>
 </p:sld>
@@ -14233,7 +13757,7 @@
         <p:spPr>
           <a:xfrm>
             <a:off x="640080" y="1417320"/>
-            <a:ext cx="10881360" cy="946912"/>
+            <a:ext cx="10881360" cy="1338072"/>
           </a:xfrm>
           <a:prstGeom prst="rect">
             <a:avLst/>
@@ -14261,7 +13785,7 @@
               </a:defRPr>
             </a:pPr>
             <a:r>
-              <a:t>Los casos del modelo muestran dos recorridos de una decisión y una entrada no convertible.</a:t>
+              <a:t>Los casos del modelo muestran dos resultados observables de una comparación, sin ramas, y una entrada no convertible.</a:t>
             </a:r>
           </a:p>
         </p:txBody>
@@ -14273,7 +13797,7 @@
   </p:clrMapOvr>
   <p:extLst>
     <p:ext uri="urn:minijarvis:semantic-render:v1">
-      <ns0:renderMetadata xmlns:ns0="urn:minijarvis:semantic-render:v1">{"session": "214", "source_files": {"teacher": "/mnt/compartido/Programación-26-27/Minijarvis/02-PROFESORADO/02-SESIONES/h1/S214-readme-y-evidencia-de-ejecucion-docente.md", "student_fallback": "/mnt/compartido/Programación-26-27/Minijarvis/01-ALUMNADO/03-SESIONES/h1/S214-readme-y-evidencia-de-ejecucion-alumnado.md"}, "layout": "code", "plan_index": 2, "recognition": false, "unit_ids": ["unit-8"], "roles": {"unit-8": "core"}, "source_refs": [{"source": "teacher", "heading": "Modelo pedagógico de README", "block_index": 8, "fragment": 0}], "visible_sources": [{"index": 4, "sha256": "546600326619722dff044d0e1f6f9eb3cbe9e0960a2e0be4b4591eb920ec5461"}], "notes_sources": [{"function": "facilitation", "heading": "Modelo pedagógico de README", "sha256": "0f617fce6ae7f042fdf05d8ffb789056c9454e4c336f298b587264521b3302d7"}, {"function": "facilitation", "heading": "Modelo pedagógico de README", "sha256": "38a11781de5c7173d9329c1ea04f110cb8b137ec29a8b6fad699c57d8a58ca73"}, {"function": "visible_detail", "heading": "Modelo pedagógico de README", "sha256": "546600326619722dff044d0e1f6f9eb3cbe9e0960a2e0be4b4591eb920ec5461"}], "relations": {"unit_relations": {"unit-8": {"question_context": ["context", "question"]}}, "schedule": null, "source_supports_enriched": true}, "timeline_refs": [1], "composition": {"origin_slides": [8, 9, 10]}, "timing": {"seconds": 0, "allocations": [{"source_index": 1, "seconds": 0, "decision": "Intervalo compartido íntegro; propietario contable seleccionado por función de actividad y referencia timeline de unidad (identidad semántica en empates). Soporte, sin duplicación contable. ", "source_time": "5–10 min", "source_seconds": 300, "is_owner": false, "function": "examples"}], "clock_intervals": [1], "presenter_notes": "Reloj fuente 5–10 min: duración compartida 300 segundos. Trabajo: Analizar el modelo de README y la diferencia entre “funciona” y una prueba explicada. Función del soporte: apoyo al trabajo.", "shared_intervals": [{"source_index": 1, "source_time": "5–10 min", "seconds": 300, "is_owner": false, "function": "examples", "action": "Analizar el modelo de README y la diferencia entre “funciona” y una prueba explicada.", "concurrent": false, "parallel_work": ""}]}, "code_blocks": [], "representation_needs": []}</ns0:renderMetadata>
+      <ns0:renderMetadata xmlns:ns0="urn:minijarvis:semantic-render:v1">{"session": "214", "source_files": {"teacher": "/mnt/compartido/Programación-26-27/Minijarvis/02-PROFESORADO/02-SESIONES/h1/S214-readme-y-evidencia-de-ejecucion-docente.md", "student_fallback": "/mnt/compartido/Programación-26-27/Minijarvis/01-ALUMNADO/03-SESIONES/h1/S214-readme-y-evidencia-de-ejecucion-alumnado.md"}, "layout": "code", "plan_index": 2, "recognition": false, "unit_ids": ["unit-8"], "roles": {"unit-8": "core"}, "source_refs": [{"source": "teacher", "heading": "Modelo pedagógico de README", "block_index": 8, "fragment": 0}], "visible_sources": [{"index": 4, "sha256": "55026d7f8a76fce4aceb8a66a201ae2d01dabe9510055f391da8cda41e604e80"}], "notes_sources": [{"function": "facilitation", "heading": "Modelo pedagógico de README", "sha256": "0f617fce6ae7f042fdf05d8ffb789056c9454e4c336f298b587264521b3302d7"}, {"function": "facilitation", "heading": "Modelo pedagógico de README", "sha256": "38a11781de5c7173d9329c1ea04f110cb8b137ec29a8b6fad699c57d8a58ca73"}, {"function": "visible_detail", "heading": "Modelo pedagógico de README", "sha256": "55026d7f8a76fce4aceb8a66a201ae2d01dabe9510055f391da8cda41e604e80"}], "relations": {"unit_relations": {"unit-8": {"question_context": ["context", "question"]}}, "schedule": null, "source_supports_enriched": true}, "timeline_refs": [1], "composition": {"origin_slides": [8, 9, 10]}, "timing": {"seconds": 0, "allocations": [{"source_index": 1, "seconds": 0, "decision": "Intervalo compartido íntegro; propietario contable seleccionado por función de actividad y referencia timeline de unidad (identidad semántica en empates). Soporte, sin duplicación contable. ", "source_time": "5–10 min", "source_seconds": 300, "is_owner": false, "function": "examples"}], "clock_intervals": [1], "presenter_notes": "Reloj fuente 5–10 min: duración compartida 300 segundos. Trabajo: Analizar el modelo de README y la diferencia entre “funciona” y una prueba explicada. Función del soporte: apoyo al trabajo.", "shared_intervals": [{"source_index": 1, "source_time": "5–10 min", "seconds": 300, "is_owner": false, "function": "examples", "action": "Analizar el modelo de README y la diferencia entre “funciona” y una prueba explicada.", "concurrent": false, "parallel_work": ""}]}, "code_blocks": [], "representation_needs": []}</ns0:renderMetadata>
     </p:ext>
   </p:extLst>
 </p:sld>

--- a/02-PROFESORADO/03-PRESENTACIONES/POR-SESION/h1/S214-readme-y-evidencia-de-ejecucion-presentacion.pptx
+++ b/02-PROFESORADO/03-PRESENTACIONES/POR-SESION/h1/S214-readme-y-evidencia-de-ejecucion-presentacion.pptx
@@ -6428,7 +6428,7 @@
               </a:defRPr>
             </a:pPr>
             <a:r>
-              <a:t>S214 · H1 — Primer asistente ejecutable</a:t>
+              <a:t>H1.9 · H1 — Primer asistente ejecutable</a:t>
             </a:r>
           </a:p>
         </p:txBody>
@@ -6750,7 +6750,7 @@
               </a:defRPr>
             </a:pPr>
             <a:r>
-              <a:t>S214 · H1 — Primer asistente ejecutable</a:t>
+              <a:t>H1.9 · H1 — Primer asistente ejecutable</a:t>
             </a:r>
           </a:p>
         </p:txBody>
@@ -7125,7 +7125,7 @@
               </a:defRPr>
             </a:pPr>
             <a:r>
-              <a:t>S214 · H1 — Primer asistente ejecutable</a:t>
+              <a:t>H1.9 · H1 — Primer asistente ejecutable</a:t>
             </a:r>
           </a:p>
         </p:txBody>
@@ -7468,7 +7468,7 @@
               </a:defRPr>
             </a:pPr>
             <a:r>
-              <a:t>S214 · H1 — Primer asistente ejecutable</a:t>
+              <a:t>H1.9 · H1 — Primer asistente ejecutable</a:t>
             </a:r>
           </a:p>
         </p:txBody>
@@ -7709,7 +7709,7 @@
               </a:defRPr>
             </a:pPr>
             <a:r>
-              <a:t>S214 · H1 — Primer asistente ejecutable</a:t>
+              <a:t>H1.9 · H1 — Primer asistente ejecutable</a:t>
             </a:r>
           </a:p>
         </p:txBody>
@@ -8290,7 +8290,7 @@
               </a:defRPr>
             </a:pPr>
             <a:r>
-              <a:t>S214 · H1 — Primer asistente ejecutable</a:t>
+              <a:t>H1.9 · H1 — Primer asistente ejecutable</a:t>
             </a:r>
           </a:p>
         </p:txBody>
@@ -8684,7 +8684,7 @@
               </a:defRPr>
             </a:pPr>
             <a:r>
-              <a:t>S214 · H1 — Primer asistente ejecutable</a:t>
+              <a:t>H1.9 · H1 — Primer asistente ejecutable</a:t>
             </a:r>
           </a:p>
         </p:txBody>
@@ -8927,7 +8927,7 @@
               </a:defRPr>
             </a:pPr>
             <a:r>
-              <a:t>S214 · H1 — Primer asistente ejecutable</a:t>
+              <a:t>H1.9 · H1 — Primer asistente ejecutable</a:t>
             </a:r>
           </a:p>
         </p:txBody>
@@ -9364,7 +9364,7 @@
               </a:defRPr>
             </a:pPr>
             <a:r>
-              <a:t>S214 · H1 — Primer asistente ejecutable</a:t>
+              <a:t>H1.9 · H1 — Primer asistente ejecutable</a:t>
             </a:r>
           </a:p>
         </p:txBody>
@@ -9759,7 +9759,7 @@
               </a:defRPr>
             </a:pPr>
             <a:r>
-              <a:t>S214 · H1 — Primer asistente ejecutable</a:t>
+              <a:t>H1.9 · H1 — Primer asistente ejecutable</a:t>
             </a:r>
           </a:p>
         </p:txBody>
@@ -10000,7 +10000,7 @@
               </a:defRPr>
             </a:pPr>
             <a:r>
-              <a:t>S214 · H1 — Primer asistente ejecutable</a:t>
+              <a:t>H1.9 · H1 — Primer asistente ejecutable</a:t>
             </a:r>
           </a:p>
         </p:txBody>
@@ -10497,7 +10497,7 @@
               </a:defRPr>
             </a:pPr>
             <a:r>
-              <a:t>S214 · H1 — Primer asistente ejecutable</a:t>
+              <a:t>H1.9 · H1 — Primer asistente ejecutable</a:t>
             </a:r>
           </a:p>
         </p:txBody>
@@ -10583,7 +10583,7 @@
               </a:defRPr>
             </a:pPr>
             <a:r>
-              <a:t>S214 prepara el cierre mediante documentación y pruebas accesibles.</a:t>
+              <a:t>H1.9 prepara el cierre mediante documentación y pruebas accesibles.</a:t>
             </a:r>
           </a:p>
         </p:txBody>
@@ -10740,7 +10740,7 @@
               </a:defRPr>
             </a:pPr>
             <a:r>
-              <a:t>S214 · H1 — Primer asistente ejecutable</a:t>
+              <a:t>H1.9 · H1 — Primer asistente ejecutable</a:t>
             </a:r>
           </a:p>
         </p:txBody>
@@ -10978,7 +10978,7 @@
               </a:defRPr>
             </a:pPr>
             <a:r>
-              <a:t>Arquitectura de evidencias y límite de S214</a:t>
+              <a:t>Arquitectura de evidencias y límite de H1.9</a:t>
             </a:r>
           </a:p>
         </p:txBody>
@@ -11020,7 +11020,7 @@
               </a:defRPr>
             </a:pPr>
             <a:r>
-              <a:t>S214 · H1 — Primer asistente ejecutable</a:t>
+              <a:t>H1.9 · H1 — Primer asistente ejecutable</a:t>
             </a:r>
           </a:p>
         </p:txBody>
@@ -11118,7 +11118,7 @@
               </a:defRPr>
             </a:pPr>
             <a:r>
-              <a:t>Scrum: solo registra una tarea, decisión, cambio, bloqueo o planificación real; no se actualiza para demostrar que ocurrió S214.</a:t>
+              <a:t>Scrum: solo registra una tarea, decisión, cambio, bloqueo o planificación real; no se actualiza para demostrar que ocurrió H1.9.</a:t>
             </a:r>
           </a:p>
         </p:txBody>
@@ -11167,7 +11167,7 @@
               </a:defRPr>
             </a:pPr>
             <a:r>
-              <a:t>Diario individual: únicamente si surge un aprendizaje, dificultad o decisión personal significativa; no se exige fila S214 ni revisión administrativa.</a:t>
+              <a:t>Diario individual: únicamente si surge un aprendizaje, dificultad o decisión personal significativa; no se exige fila H1.9 ni revisión administrativa.</a:t>
             </a:r>
           </a:p>
         </p:txBody>
@@ -11279,7 +11279,7 @@
               </a:defRPr>
             </a:pPr>
             <a:r>
-              <a:t>Arquitectura de evidencias y límite de S214</a:t>
+              <a:t>Arquitectura de evidencias y límite de H1.9</a:t>
             </a:r>
           </a:p>
         </p:txBody>
@@ -11321,7 +11321,7 @@
               </a:defRPr>
             </a:pPr>
             <a:r>
-              <a:t>S214 · H1 — Primer asistente ejecutable</a:t>
+              <a:t>H1.9 · H1 — Primer asistente ejecutable</a:t>
             </a:r>
           </a:p>
         </p:txBody>
@@ -11363,7 +11363,7 @@
               </a:defRPr>
             </a:pPr>
             <a:r>
-              <a:t>Moodle: S214 prepara enlaces, permisos y documentación; S215 realiza la entrega oficial de H1.</a:t>
+              <a:t>Moodle: H1.9 prepara enlaces, permisos y documentación; H1.10 realiza la entrega oficial de H1.</a:t>
             </a:r>
           </a:p>
         </p:txBody>
@@ -11573,7 +11573,7 @@
               </a:defRPr>
             </a:pPr>
             <a:r>
-              <a:t>Arquitectura de evidencias y límite de S214</a:t>
+              <a:t>Arquitectura de evidencias y límite de H1.9</a:t>
             </a:r>
           </a:p>
         </p:txBody>
@@ -11615,7 +11615,7 @@
               </a:defRPr>
             </a:pPr>
             <a:r>
-              <a:t>S214 · H1 — Primer asistente ejecutable</a:t>
+              <a:t>H1.9 · H1 — Primer asistente ejecutable</a:t>
             </a:r>
           </a:p>
         </p:txBody>
@@ -11771,7 +11771,7 @@
               </a:defRPr>
             </a:pPr>
             <a:r>
-              <a:t>Transición a S215</a:t>
+              <a:t>Transición a H1.10</a:t>
             </a:r>
           </a:p>
         </p:txBody>
@@ -11813,7 +11813,7 @@
               </a:defRPr>
             </a:pPr>
             <a:r>
-              <a:t>S214 · H1 — Primer asistente ejecutable</a:t>
+              <a:t>H1.9 · H1 — Primer asistente ejecutable</a:t>
             </a:r>
           </a:p>
         </p:txBody>
@@ -12195,7 +12195,7 @@
               </a:defRPr>
             </a:pPr>
             <a:r>
-              <a:t>S214 · H1 — Primer asistente ejecutable</a:t>
+              <a:t>H1.9 · H1 — Primer asistente ejecutable</a:t>
             </a:r>
           </a:p>
         </p:txBody>
@@ -12475,7 +12475,7 @@
               </a:defRPr>
             </a:pPr>
             <a:r>
-              <a:t>S214 · H1 — Primer asistente ejecutable</a:t>
+              <a:t>H1.9 · H1 — Primer asistente ejecutable</a:t>
             </a:r>
           </a:p>
         </p:txBody>
@@ -12671,7 +12671,7 @@
               </a:defRPr>
             </a:pPr>
             <a:r>
-              <a:t>S214 · H1 — Primer asistente ejecutable</a:t>
+              <a:t>H1.9 · H1 — Primer asistente ejecutable</a:t>
             </a:r>
           </a:p>
         </p:txBody>
@@ -13096,7 +13096,7 @@
               </a:defRPr>
             </a:pPr>
             <a:r>
-              <a:t>S214 · H1 — Primer asistente ejecutable</a:t>
+              <a:t>H1.9 · H1 — Primer asistente ejecutable</a:t>
             </a:r>
           </a:p>
         </p:txBody>
@@ -13393,7 +13393,7 @@
               </a:defRPr>
             </a:pPr>
             <a:r>
-              <a:t>S214 · H1 — Primer asistente ejecutable</a:t>
+              <a:t>H1.9 · H1 — Primer asistente ejecutable</a:t>
             </a:r>
           </a:p>
         </p:txBody>
@@ -13743,7 +13743,7 @@
               </a:defRPr>
             </a:pPr>
             <a:r>
-              <a:t>S214 · H1 — Primer asistente ejecutable</a:t>
+              <a:t>H1.9 · H1 — Primer asistente ejecutable</a:t>
             </a:r>
           </a:p>
         </p:txBody>
@@ -13939,7 +13939,7 @@
               </a:defRPr>
             </a:pPr>
             <a:r>
-              <a:t>S214 · H1 — Primer asistente ejecutable</a:t>
+              <a:t>H1.9 · H1 — Primer asistente ejecutable</a:t>
             </a:r>
           </a:p>
         </p:txBody>
